--- a/presentation_new.pptx
+++ b/presentation_new.pptx
@@ -25489,8 +25489,8 @@
         </p:nvSpPr>
         <p:spPr>
           <a:xfrm>
-            <a:off x="946320" y="1844824"/>
-            <a:ext cx="4320480" cy="2585323"/>
+            <a:off x="551384" y="1844824"/>
+            <a:ext cx="4715416" cy="2308324"/>
           </a:xfrm>
           <a:prstGeom prst="rect">
             <a:avLst/>
@@ -25510,10 +25510,7 @@
             </a:r>
           </a:p>
           <a:p>
-            <a:pPr algn="l">
-              <a:buFont typeface="Arial" panose="020B0604020202020204" pitchFamily="34" charset="0"/>
-              <a:buChar char="•"/>
-            </a:pPr>
+            <a:pPr algn="l"/>
             <a:r>
               <a:rPr lang="en-CZ" dirty="0"/>
               <a:t>❌ </a:t>
@@ -25524,10 +25521,7 @@
             </a:r>
           </a:p>
           <a:p>
-            <a:pPr algn="l">
-              <a:buFont typeface="Arial" panose="020B0604020202020204" pitchFamily="34" charset="0"/>
-              <a:buChar char="•"/>
-            </a:pPr>
+            <a:pPr algn="l"/>
             <a:r>
               <a:rPr lang="en-CZ" dirty="0"/>
               <a:t>✅ </a:t>
@@ -25538,10 +25532,7 @@
             </a:r>
           </a:p>
           <a:p>
-            <a:pPr algn="l">
-              <a:buFont typeface="Arial" panose="020B0604020202020204" pitchFamily="34" charset="0"/>
-              <a:buChar char="•"/>
-            </a:pPr>
+            <a:pPr algn="l"/>
             <a:r>
               <a:rPr lang="en-CZ" dirty="0"/>
               <a:t>✅ </a:t>
@@ -26459,7 +26450,7 @@
           <p:nvPr>
             <p:extLst>
               <p:ext uri="{D42A27DB-BD31-4B8C-83A1-F6EECF244321}">
-                <p14:modId xmlns:p14="http://schemas.microsoft.com/office/powerpoint/2010/main" val="3374860413"/>
+                <p14:modId xmlns:p14="http://schemas.microsoft.com/office/powerpoint/2010/main" val="2743627651"/>
               </p:ext>
             </p:extLst>
           </p:nvPr>
@@ -26583,7 +26574,7 @@
                     <a:lstStyle/>
                     <a:p>
                       <a:r>
-                        <a:rPr lang="en-GB" sz="1800"/>
+                        <a:rPr lang="en-GB" sz="1800" dirty="0"/>
                         <a:t>-2 pp</a:t>
                       </a:r>
                     </a:p>
@@ -26617,68 +26608,7 @@
                     <a:lstStyle/>
                     <a:p>
                       <a:r>
-                        <a:rPr lang="en-GB" sz="1800"/>
-                        <a:t>Logistic AME</a:t>
-                      </a:r>
-                    </a:p>
-                  </a:txBody>
-                  <a:tcPr anchor="ctr">
-                    <a:lnL>
-                      <a:noFill/>
-                    </a:lnL>
-                    <a:lnR>
-                      <a:noFill/>
-                    </a:lnR>
-                    <a:lnT>
-                      <a:noFill/>
-                    </a:lnT>
-                    <a:lnB>
-                      <a:noFill/>
-                    </a:lnB>
-                    <a:noFill/>
-                  </a:tcPr>
-                </a:tc>
-                <a:tc>
-                  <a:txBody>
-                    <a:bodyPr/>
-                    <a:lstStyle/>
-                    <a:p>
-                      <a:r>
-                        <a:rPr lang="en-GB" sz="1800"/>
-                        <a:t>-1.0 pp</a:t>
-                      </a:r>
-                    </a:p>
-                  </a:txBody>
-                  <a:tcPr anchor="ctr">
-                    <a:lnL>
-                      <a:noFill/>
-                    </a:lnL>
-                    <a:lnR>
-                      <a:noFill/>
-                    </a:lnR>
-                    <a:lnT>
-                      <a:noFill/>
-                    </a:lnT>
-                    <a:lnB>
-                      <a:noFill/>
-                    </a:lnB>
-                    <a:noFill/>
-                  </a:tcPr>
-                </a:tc>
-                <a:extLst>
-                  <a:ext uri="{0D108BD9-81ED-4DB2-BD59-A6C34878D82A}">
-                    <a16:rowId xmlns:a16="http://schemas.microsoft.com/office/drawing/2014/main" val="2249185178"/>
-                  </a:ext>
-                </a:extLst>
-              </a:tr>
-              <a:tr h="365760">
-                <a:tc>
-                  <a:txBody>
-                    <a:bodyPr/>
-                    <a:lstStyle/>
-                    <a:p>
-                      <a:r>
-                        <a:rPr lang="en-GB" sz="1800"/>
+                        <a:rPr lang="en-GB" sz="1800" dirty="0"/>
                         <a:t>Digital Twins (PSM)</a:t>
                       </a:r>
                     </a:p>
@@ -26728,7 +26658,68 @@
                 </a:tc>
                 <a:extLst>
                   <a:ext uri="{0D108BD9-81ED-4DB2-BD59-A6C34878D82A}">
-                    <a16:rowId xmlns:a16="http://schemas.microsoft.com/office/drawing/2014/main" val="493007808"/>
+                    <a16:rowId xmlns:a16="http://schemas.microsoft.com/office/drawing/2014/main" val="1027641952"/>
+                  </a:ext>
+                </a:extLst>
+              </a:tr>
+              <a:tr h="365760">
+                <a:tc>
+                  <a:txBody>
+                    <a:bodyPr/>
+                    <a:lstStyle/>
+                    <a:p>
+                      <a:r>
+                        <a:rPr lang="en-GB" sz="1800" dirty="0"/>
+                        <a:t>Logistic AME</a:t>
+                      </a:r>
+                    </a:p>
+                  </a:txBody>
+                  <a:tcPr anchor="ctr">
+                    <a:lnL>
+                      <a:noFill/>
+                    </a:lnL>
+                    <a:lnR>
+                      <a:noFill/>
+                    </a:lnR>
+                    <a:lnT>
+                      <a:noFill/>
+                    </a:lnT>
+                    <a:lnB>
+                      <a:noFill/>
+                    </a:lnB>
+                    <a:noFill/>
+                  </a:tcPr>
+                </a:tc>
+                <a:tc>
+                  <a:txBody>
+                    <a:bodyPr/>
+                    <a:lstStyle/>
+                    <a:p>
+                      <a:r>
+                        <a:rPr lang="en-GB" sz="1800" dirty="0"/>
+                        <a:t>-1.0 pp</a:t>
+                      </a:r>
+                    </a:p>
+                  </a:txBody>
+                  <a:tcPr anchor="ctr">
+                    <a:lnL>
+                      <a:noFill/>
+                    </a:lnL>
+                    <a:lnR>
+                      <a:noFill/>
+                    </a:lnR>
+                    <a:lnT>
+                      <a:noFill/>
+                    </a:lnT>
+                    <a:lnB>
+                      <a:noFill/>
+                    </a:lnB>
+                    <a:noFill/>
+                  </a:tcPr>
+                </a:tc>
+                <a:extLst>
+                  <a:ext uri="{0D108BD9-81ED-4DB2-BD59-A6C34878D82A}">
+                    <a16:rowId xmlns:a16="http://schemas.microsoft.com/office/drawing/2014/main" val="2249185178"/>
                   </a:ext>
                 </a:extLst>
               </a:tr>
@@ -26959,7 +26950,7 @@
           <p:nvPr>
             <p:extLst>
               <p:ext uri="{D42A27DB-BD31-4B8C-83A1-F6EECF244321}">
-                <p14:modId xmlns:p14="http://schemas.microsoft.com/office/powerpoint/2010/main" val="1688618737"/>
+                <p14:modId xmlns:p14="http://schemas.microsoft.com/office/powerpoint/2010/main" val="953099493"/>
               </p:ext>
             </p:extLst>
           </p:nvPr>
@@ -27758,10 +27749,10 @@
       </p:sp>
       <p:pic>
         <p:nvPicPr>
-          <p:cNvPr id="6" name="Picture 5">
-            <a:extLst>
-              <a:ext uri="{FF2B5EF4-FFF2-40B4-BE49-F238E27FC236}">
-                <a16:creationId xmlns:a16="http://schemas.microsoft.com/office/drawing/2014/main" id="{0832893E-BAA5-0395-CA96-1D989EA22AF2}"/>
+          <p:cNvPr id="11" name="Picture 10">
+            <a:extLst>
+              <a:ext uri="{FF2B5EF4-FFF2-40B4-BE49-F238E27FC236}">
+                <a16:creationId xmlns:a16="http://schemas.microsoft.com/office/drawing/2014/main" id="{8D3CC2A9-5CE5-7AD6-3489-531FC80A7109}"/>
               </a:ext>
             </a:extLst>
           </p:cNvPr>
@@ -27770,16 +27761,15 @@
           </p:cNvPicPr>
           <p:nvPr/>
         </p:nvPicPr>
-        <p:blipFill>
+        <p:blipFill rotWithShape="1">
           <a:blip r:embed="rId2"/>
-          <a:stretch>
-            <a:fillRect/>
-          </a:stretch>
+          <a:srcRect t="6379"/>
+          <a:stretch/>
         </p:blipFill>
         <p:spPr>
           <a:xfrm>
-            <a:off x="658666" y="1876876"/>
-            <a:ext cx="10550762" cy="3682033"/>
+            <a:off x="922911" y="1916832"/>
+            <a:ext cx="10346178" cy="3865476"/>
           </a:xfrm>
           <a:prstGeom prst="rect">
             <a:avLst/>

--- a/presentation_new.pptx
+++ b/presentation_new.pptx
@@ -5,7 +5,7 @@
     <p:sldMasterId id="2147483860" r:id="rId4"/>
   </p:sldMasterIdLst>
   <p:notesMasterIdLst>
-    <p:notesMasterId r:id="rId13"/>
+    <p:notesMasterId r:id="rId21"/>
   </p:notesMasterIdLst>
   <p:sldIdLst>
     <p:sldId id="256" r:id="rId5"/>
@@ -15,12 +15,20 @@
     <p:sldId id="2147474649" r:id="rId9"/>
     <p:sldId id="2147474650" r:id="rId10"/>
     <p:sldId id="2147474651" r:id="rId11"/>
-    <p:sldId id="2147474626" r:id="rId12"/>
+    <p:sldId id="2147474629" r:id="rId12"/>
+    <p:sldId id="2147474652" r:id="rId13"/>
+    <p:sldId id="2147474653" r:id="rId14"/>
+    <p:sldId id="2147474654" r:id="rId15"/>
+    <p:sldId id="2147474655" r:id="rId16"/>
+    <p:sldId id="2147474656" r:id="rId17"/>
+    <p:sldId id="2147474657" r:id="rId18"/>
+    <p:sldId id="2147474658" r:id="rId19"/>
+    <p:sldId id="2147474626" r:id="rId20"/>
   </p:sldIdLst>
   <p:sldSz cx="12192000" cy="6858000"/>
   <p:notesSz cx="6858000" cy="9144000"/>
   <p:custDataLst>
-    <p:tags r:id="rId14"/>
+    <p:tags r:id="rId22"/>
   </p:custDataLst>
   <p:defaultTextStyle>
     <a:defPPr>
@@ -25335,6 +25343,1673 @@
 </p:sld>
 </file>
 
+<file path=ppt/slides/slide10.xml><?xml version="1.0" encoding="utf-8"?>
+<p:sld xmlns:a="http://schemas.openxmlformats.org/drawingml/2006/main" xmlns:r="http://schemas.openxmlformats.org/officeDocument/2006/relationships" xmlns:p="http://schemas.openxmlformats.org/presentationml/2006/main">
+  <p:cSld>
+    <p:spTree>
+      <p:nvGrpSpPr>
+        <p:cNvPr id="1" name="">
+          <a:extLst>
+            <a:ext uri="{FF2B5EF4-FFF2-40B4-BE49-F238E27FC236}">
+              <a16:creationId xmlns:a16="http://schemas.microsoft.com/office/drawing/2014/main" id="{AD395A7B-B086-D59F-9D30-415FA97723C9}"/>
+            </a:ext>
+          </a:extLst>
+        </p:cNvPr>
+        <p:cNvGrpSpPr/>
+        <p:nvPr/>
+      </p:nvGrpSpPr>
+      <p:grpSpPr>
+        <a:xfrm>
+          <a:off x="0" y="0"/>
+          <a:ext cx="0" cy="0"/>
+          <a:chOff x="0" y="0"/>
+          <a:chExt cx="0" cy="0"/>
+        </a:xfrm>
+      </p:grpSpPr>
+      <p:sp>
+        <p:nvSpPr>
+          <p:cNvPr id="2" name="Title 1">
+            <a:extLst>
+              <a:ext uri="{FF2B5EF4-FFF2-40B4-BE49-F238E27FC236}">
+                <a16:creationId xmlns:a16="http://schemas.microsoft.com/office/drawing/2014/main" id="{795AE5F5-BB6B-AEAC-6A33-A1A3B98BA9E3}"/>
+              </a:ext>
+            </a:extLst>
+          </p:cNvPr>
+          <p:cNvSpPr>
+            <a:spLocks noGrp="1"/>
+          </p:cNvSpPr>
+          <p:nvPr>
+            <p:ph type="title"/>
+          </p:nvPr>
+        </p:nvSpPr>
+        <p:spPr/>
+        <p:txBody>
+          <a:bodyPr/>
+          <a:lstStyle/>
+          <a:p>
+            <a:r>
+              <a:rPr lang="en-GB" sz="800" b="1" dirty="0">
+                <a:solidFill>
+                  <a:srgbClr val="800000"/>
+                </a:solidFill>
+                <a:effectLst/>
+                <a:highlight>
+                  <a:srgbClr val="FFFFFF"/>
+                </a:highlight>
+                <a:latin typeface="Menlo" panose="020B0609030804020204" pitchFamily="49" charset="0"/>
+              </a:rPr>
+              <a:t>Tenure Distributions: Booster vs No-Booster (Boxplot)</a:t>
+            </a:r>
+            <a:endParaRPr lang="en-GB" sz="800" b="0" dirty="0">
+              <a:solidFill>
+                <a:srgbClr val="3B3B3B"/>
+              </a:solidFill>
+              <a:effectLst/>
+              <a:highlight>
+                <a:srgbClr val="FFFFFF"/>
+              </a:highlight>
+              <a:latin typeface="Menlo" panose="020B0609030804020204" pitchFamily="49" charset="0"/>
+            </a:endParaRPr>
+          </a:p>
+        </p:txBody>
+      </p:sp>
+      <p:sp>
+        <p:nvSpPr>
+          <p:cNvPr id="3" name="Date Placeholder 2">
+            <a:extLst>
+              <a:ext uri="{FF2B5EF4-FFF2-40B4-BE49-F238E27FC236}">
+                <a16:creationId xmlns:a16="http://schemas.microsoft.com/office/drawing/2014/main" id="{A2042937-44E0-644D-8B5F-55D850860276}"/>
+              </a:ext>
+            </a:extLst>
+          </p:cNvPr>
+          <p:cNvSpPr>
+            <a:spLocks noGrp="1"/>
+          </p:cNvSpPr>
+          <p:nvPr>
+            <p:ph type="dt" sz="half" idx="2"/>
+          </p:nvPr>
+        </p:nvSpPr>
+        <p:spPr/>
+        <p:txBody>
+          <a:bodyPr/>
+          <a:lstStyle/>
+          <a:p>
+            <a:fld id="{822B4C34-8539-4A47-8763-AA072889AAA3}" type="datetime1">
+              <a:rPr lang="en-GB" smtClean="0"/>
+              <a:t>18/06/2026</a:t>
+            </a:fld>
+            <a:endParaRPr lang="en-GB" dirty="0"/>
+          </a:p>
+        </p:txBody>
+      </p:sp>
+      <p:sp>
+        <p:nvSpPr>
+          <p:cNvPr id="4" name="Footer Placeholder 3">
+            <a:extLst>
+              <a:ext uri="{FF2B5EF4-FFF2-40B4-BE49-F238E27FC236}">
+                <a16:creationId xmlns:a16="http://schemas.microsoft.com/office/drawing/2014/main" id="{CFAF35E1-19B8-70B1-EC68-E81F349E5276}"/>
+              </a:ext>
+            </a:extLst>
+          </p:cNvPr>
+          <p:cNvSpPr>
+            <a:spLocks noGrp="1"/>
+          </p:cNvSpPr>
+          <p:nvPr>
+            <p:ph type="ftr" sz="quarter" idx="3"/>
+          </p:nvPr>
+        </p:nvSpPr>
+        <p:spPr/>
+        <p:txBody>
+          <a:bodyPr/>
+          <a:lstStyle/>
+          <a:p>
+            <a:r>
+              <a:rPr lang="en-GB"/>
+              <a:t>Presentation description - CONFIDENTIALTY NOTE</a:t>
+            </a:r>
+            <a:endParaRPr lang="en-GB" dirty="0"/>
+          </a:p>
+        </p:txBody>
+      </p:sp>
+      <p:sp>
+        <p:nvSpPr>
+          <p:cNvPr id="5" name="Slide Number Placeholder 4">
+            <a:extLst>
+              <a:ext uri="{FF2B5EF4-FFF2-40B4-BE49-F238E27FC236}">
+                <a16:creationId xmlns:a16="http://schemas.microsoft.com/office/drawing/2014/main" id="{89ED7DAD-60D2-3332-B2BC-E7B53785DE0D}"/>
+              </a:ext>
+            </a:extLst>
+          </p:cNvPr>
+          <p:cNvSpPr>
+            <a:spLocks noGrp="1"/>
+          </p:cNvSpPr>
+          <p:nvPr>
+            <p:ph type="sldNum" sz="quarter" idx="4"/>
+          </p:nvPr>
+        </p:nvSpPr>
+        <p:spPr/>
+        <p:txBody>
+          <a:bodyPr/>
+          <a:lstStyle/>
+          <a:p>
+            <a:fld id="{D622C71B-F0A5-40B6-B6DA-5780E9494F8A}" type="slidenum">
+              <a:rPr lang="en-GB" smtClean="0"/>
+              <a:pPr/>
+              <a:t>10</a:t>
+            </a:fld>
+            <a:endParaRPr lang="en-GB" dirty="0"/>
+          </a:p>
+        </p:txBody>
+      </p:sp>
+      <p:pic>
+        <p:nvPicPr>
+          <p:cNvPr id="6" name="Picture 5">
+            <a:extLst>
+              <a:ext uri="{FF2B5EF4-FFF2-40B4-BE49-F238E27FC236}">
+                <a16:creationId xmlns:a16="http://schemas.microsoft.com/office/drawing/2014/main" id="{AB968D5D-38BA-BAF8-BD95-34618C9ED649}"/>
+              </a:ext>
+            </a:extLst>
+          </p:cNvPr>
+          <p:cNvPicPr>
+            <a:picLocks noChangeAspect="1"/>
+          </p:cNvPicPr>
+          <p:nvPr/>
+        </p:nvPicPr>
+        <p:blipFill>
+          <a:blip r:embed="rId2"/>
+          <a:stretch>
+            <a:fillRect/>
+          </a:stretch>
+        </p:blipFill>
+        <p:spPr>
+          <a:xfrm>
+            <a:off x="551384" y="1697774"/>
+            <a:ext cx="7561021" cy="4122638"/>
+          </a:xfrm>
+          <a:prstGeom prst="rect">
+            <a:avLst/>
+          </a:prstGeom>
+        </p:spPr>
+      </p:pic>
+      <p:sp>
+        <p:nvSpPr>
+          <p:cNvPr id="8" name="TextBox 7">
+            <a:extLst>
+              <a:ext uri="{FF2B5EF4-FFF2-40B4-BE49-F238E27FC236}">
+                <a16:creationId xmlns:a16="http://schemas.microsoft.com/office/drawing/2014/main" id="{A2AEFE49-00FC-E45E-F392-7EE00849D551}"/>
+              </a:ext>
+            </a:extLst>
+          </p:cNvPr>
+          <p:cNvSpPr txBox="1"/>
+          <p:nvPr/>
+        </p:nvSpPr>
+        <p:spPr>
+          <a:xfrm>
+            <a:off x="8514517" y="2492896"/>
+            <a:ext cx="2903984" cy="923330"/>
+          </a:xfrm>
+          <a:prstGeom prst="rect">
+            <a:avLst/>
+          </a:prstGeom>
+          <a:noFill/>
+        </p:spPr>
+        <p:txBody>
+          <a:bodyPr wrap="square">
+            <a:spAutoFit/>
+          </a:bodyPr>
+          <a:lstStyle/>
+          <a:p>
+            <a:r>
+              <a:rPr lang="en-GB" b="0" dirty="0">
+                <a:solidFill>
+                  <a:srgbClr val="3B3B3B"/>
+                </a:solidFill>
+                <a:effectLst/>
+                <a:highlight>
+                  <a:srgbClr val="FFFFFF"/>
+                </a:highlight>
+                <a:latin typeface="Menlo" panose="020B0609030804020204" pitchFamily="49" charset="0"/>
+              </a:rPr>
+              <a:t>Tenure boxplot → Booster adopters have similar tenure</a:t>
+            </a:r>
+          </a:p>
+        </p:txBody>
+      </p:sp>
+    </p:spTree>
+    <p:extLst>
+      <p:ext uri="{BB962C8B-B14F-4D97-AF65-F5344CB8AC3E}">
+        <p14:creationId xmlns:p14="http://schemas.microsoft.com/office/powerpoint/2010/main" val="2425155073"/>
+      </p:ext>
+    </p:extLst>
+  </p:cSld>
+  <p:clrMapOvr>
+    <a:masterClrMapping/>
+  </p:clrMapOvr>
+</p:sld>
+</file>
+
+<file path=ppt/slides/slide11.xml><?xml version="1.0" encoding="utf-8"?>
+<p:sld xmlns:a="http://schemas.openxmlformats.org/drawingml/2006/main" xmlns:r="http://schemas.openxmlformats.org/officeDocument/2006/relationships" xmlns:p="http://schemas.openxmlformats.org/presentationml/2006/main">
+  <p:cSld>
+    <p:spTree>
+      <p:nvGrpSpPr>
+        <p:cNvPr id="1" name="">
+          <a:extLst>
+            <a:ext uri="{FF2B5EF4-FFF2-40B4-BE49-F238E27FC236}">
+              <a16:creationId xmlns:a16="http://schemas.microsoft.com/office/drawing/2014/main" id="{CBF3A2A2-5181-2D4A-63E4-18F8EBE69E85}"/>
+            </a:ext>
+          </a:extLst>
+        </p:cNvPr>
+        <p:cNvGrpSpPr/>
+        <p:nvPr/>
+      </p:nvGrpSpPr>
+      <p:grpSpPr>
+        <a:xfrm>
+          <a:off x="0" y="0"/>
+          <a:ext cx="0" cy="0"/>
+          <a:chOff x="0" y="0"/>
+          <a:chExt cx="0" cy="0"/>
+        </a:xfrm>
+      </p:grpSpPr>
+      <p:sp>
+        <p:nvSpPr>
+          <p:cNvPr id="2" name="Title 1">
+            <a:extLst>
+              <a:ext uri="{FF2B5EF4-FFF2-40B4-BE49-F238E27FC236}">
+                <a16:creationId xmlns:a16="http://schemas.microsoft.com/office/drawing/2014/main" id="{E7BACC84-B316-940F-4362-979606A00F1D}"/>
+              </a:ext>
+            </a:extLst>
+          </p:cNvPr>
+          <p:cNvSpPr>
+            <a:spLocks noGrp="1"/>
+          </p:cNvSpPr>
+          <p:nvPr>
+            <p:ph type="title"/>
+          </p:nvPr>
+        </p:nvSpPr>
+        <p:spPr/>
+        <p:txBody>
+          <a:bodyPr/>
+          <a:lstStyle/>
+          <a:p>
+            <a:r>
+              <a:rPr lang="en-GB" sz="800" b="1" dirty="0">
+                <a:solidFill>
+                  <a:srgbClr val="800000"/>
+                </a:solidFill>
+                <a:effectLst/>
+                <a:highlight>
+                  <a:srgbClr val="FFFFFF"/>
+                </a:highlight>
+                <a:latin typeface="Menlo" panose="020B0609030804020204" pitchFamily="49" charset="0"/>
+              </a:rPr>
+              <a:t>Bundle Stickiness: Churn Rate by TV × Mobile Product</a:t>
+            </a:r>
+            <a:br>
+              <a:rPr lang="en-GB" sz="800" b="0" dirty="0">
+                <a:solidFill>
+                  <a:srgbClr val="3B3B3B"/>
+                </a:solidFill>
+                <a:effectLst/>
+                <a:highlight>
+                  <a:srgbClr val="FFFFFF"/>
+                </a:highlight>
+                <a:latin typeface="Menlo" panose="020B0609030804020204" pitchFamily="49" charset="0"/>
+              </a:rPr>
+            </a:br>
+            <a:br>
+              <a:rPr lang="en-GB" sz="800" b="0" dirty="0">
+                <a:solidFill>
+                  <a:srgbClr val="3B3B3B"/>
+                </a:solidFill>
+                <a:effectLst/>
+                <a:highlight>
+                  <a:srgbClr val="FFFFFF"/>
+                </a:highlight>
+                <a:latin typeface="Menlo" panose="020B0609030804020204" pitchFamily="49" charset="0"/>
+              </a:rPr>
+            </a:br>
+            <a:endParaRPr lang="en-GB" sz="800" b="0" dirty="0">
+              <a:solidFill>
+                <a:srgbClr val="3B3B3B"/>
+              </a:solidFill>
+              <a:effectLst/>
+              <a:highlight>
+                <a:srgbClr val="FFFFFF"/>
+              </a:highlight>
+              <a:latin typeface="Menlo" panose="020B0609030804020204" pitchFamily="49" charset="0"/>
+            </a:endParaRPr>
+          </a:p>
+        </p:txBody>
+      </p:sp>
+      <p:sp>
+        <p:nvSpPr>
+          <p:cNvPr id="3" name="Date Placeholder 2">
+            <a:extLst>
+              <a:ext uri="{FF2B5EF4-FFF2-40B4-BE49-F238E27FC236}">
+                <a16:creationId xmlns:a16="http://schemas.microsoft.com/office/drawing/2014/main" id="{FD21AEE3-2BE6-41DD-9339-8AB831FDAD37}"/>
+              </a:ext>
+            </a:extLst>
+          </p:cNvPr>
+          <p:cNvSpPr>
+            <a:spLocks noGrp="1"/>
+          </p:cNvSpPr>
+          <p:nvPr>
+            <p:ph type="dt" sz="half" idx="2"/>
+          </p:nvPr>
+        </p:nvSpPr>
+        <p:spPr/>
+        <p:txBody>
+          <a:bodyPr/>
+          <a:lstStyle/>
+          <a:p>
+            <a:fld id="{822B4C34-8539-4A47-8763-AA072889AAA3}" type="datetime1">
+              <a:rPr lang="en-GB" smtClean="0"/>
+              <a:t>18/06/2026</a:t>
+            </a:fld>
+            <a:endParaRPr lang="en-GB" dirty="0"/>
+          </a:p>
+        </p:txBody>
+      </p:sp>
+      <p:sp>
+        <p:nvSpPr>
+          <p:cNvPr id="4" name="Footer Placeholder 3">
+            <a:extLst>
+              <a:ext uri="{FF2B5EF4-FFF2-40B4-BE49-F238E27FC236}">
+                <a16:creationId xmlns:a16="http://schemas.microsoft.com/office/drawing/2014/main" id="{03DB8B41-E93A-C363-8829-B3E6089E661E}"/>
+              </a:ext>
+            </a:extLst>
+          </p:cNvPr>
+          <p:cNvSpPr>
+            <a:spLocks noGrp="1"/>
+          </p:cNvSpPr>
+          <p:nvPr>
+            <p:ph type="ftr" sz="quarter" idx="3"/>
+          </p:nvPr>
+        </p:nvSpPr>
+        <p:spPr/>
+        <p:txBody>
+          <a:bodyPr/>
+          <a:lstStyle/>
+          <a:p>
+            <a:r>
+              <a:rPr lang="en-GB"/>
+              <a:t>Presentation description - CONFIDENTIALTY NOTE</a:t>
+            </a:r>
+            <a:endParaRPr lang="en-GB" dirty="0"/>
+          </a:p>
+        </p:txBody>
+      </p:sp>
+      <p:sp>
+        <p:nvSpPr>
+          <p:cNvPr id="5" name="Slide Number Placeholder 4">
+            <a:extLst>
+              <a:ext uri="{FF2B5EF4-FFF2-40B4-BE49-F238E27FC236}">
+                <a16:creationId xmlns:a16="http://schemas.microsoft.com/office/drawing/2014/main" id="{46CC81B9-412C-E14C-F863-C8FF1F740A73}"/>
+              </a:ext>
+            </a:extLst>
+          </p:cNvPr>
+          <p:cNvSpPr>
+            <a:spLocks noGrp="1"/>
+          </p:cNvSpPr>
+          <p:nvPr>
+            <p:ph type="sldNum" sz="quarter" idx="4"/>
+          </p:nvPr>
+        </p:nvSpPr>
+        <p:spPr/>
+        <p:txBody>
+          <a:bodyPr/>
+          <a:lstStyle/>
+          <a:p>
+            <a:fld id="{D622C71B-F0A5-40B6-B6DA-5780E9494F8A}" type="slidenum">
+              <a:rPr lang="en-GB" smtClean="0"/>
+              <a:pPr/>
+              <a:t>11</a:t>
+            </a:fld>
+            <a:endParaRPr lang="en-GB" dirty="0"/>
+          </a:p>
+        </p:txBody>
+      </p:sp>
+      <p:pic>
+        <p:nvPicPr>
+          <p:cNvPr id="7" name="Picture 6">
+            <a:extLst>
+              <a:ext uri="{FF2B5EF4-FFF2-40B4-BE49-F238E27FC236}">
+                <a16:creationId xmlns:a16="http://schemas.microsoft.com/office/drawing/2014/main" id="{C7EF5108-0C44-38A0-DC8F-778928DF15A8}"/>
+              </a:ext>
+            </a:extLst>
+          </p:cNvPr>
+          <p:cNvPicPr>
+            <a:picLocks noChangeAspect="1"/>
+          </p:cNvPicPr>
+          <p:nvPr/>
+        </p:nvPicPr>
+        <p:blipFill>
+          <a:blip r:embed="rId2"/>
+          <a:stretch>
+            <a:fillRect/>
+          </a:stretch>
+        </p:blipFill>
+        <p:spPr>
+          <a:xfrm>
+            <a:off x="3719736" y="1350800"/>
+            <a:ext cx="5526675" cy="3869998"/>
+          </a:xfrm>
+          <a:prstGeom prst="rect">
+            <a:avLst/>
+          </a:prstGeom>
+        </p:spPr>
+      </p:pic>
+      <p:sp>
+        <p:nvSpPr>
+          <p:cNvPr id="9" name="TextBox 8">
+            <a:extLst>
+              <a:ext uri="{FF2B5EF4-FFF2-40B4-BE49-F238E27FC236}">
+                <a16:creationId xmlns:a16="http://schemas.microsoft.com/office/drawing/2014/main" id="{B3D005D7-70A8-904B-79FB-D89A56B28C83}"/>
+              </a:ext>
+            </a:extLst>
+          </p:cNvPr>
+          <p:cNvSpPr txBox="1"/>
+          <p:nvPr/>
+        </p:nvSpPr>
+        <p:spPr>
+          <a:xfrm>
+            <a:off x="504491" y="5415652"/>
+            <a:ext cx="10723101" cy="646331"/>
+          </a:xfrm>
+          <a:prstGeom prst="rect">
+            <a:avLst/>
+          </a:prstGeom>
+          <a:noFill/>
+        </p:spPr>
+        <p:txBody>
+          <a:bodyPr wrap="square">
+            <a:spAutoFit/>
+          </a:bodyPr>
+          <a:lstStyle/>
+          <a:p>
+            <a:r>
+              <a:rPr lang="en-GB" b="0" dirty="0">
+                <a:solidFill>
+                  <a:srgbClr val="3B3B3B"/>
+                </a:solidFill>
+                <a:effectLst/>
+                <a:highlight>
+                  <a:srgbClr val="FFFFFF"/>
+                </a:highlight>
+                <a:latin typeface="Menlo" panose="020B0609030804020204" pitchFamily="49" charset="0"/>
+              </a:rPr>
+              <a:t>TV × Mobile bundle heatmap → No-bundle customers churn at 20%, vs 12% for bundled (golden handcuffs)</a:t>
+            </a:r>
+          </a:p>
+        </p:txBody>
+      </p:sp>
+    </p:spTree>
+    <p:extLst>
+      <p:ext uri="{BB962C8B-B14F-4D97-AF65-F5344CB8AC3E}">
+        <p14:creationId xmlns:p14="http://schemas.microsoft.com/office/powerpoint/2010/main" val="2463311170"/>
+      </p:ext>
+    </p:extLst>
+  </p:cSld>
+  <p:clrMapOvr>
+    <a:masterClrMapping/>
+  </p:clrMapOvr>
+</p:sld>
+</file>
+
+<file path=ppt/slides/slide12.xml><?xml version="1.0" encoding="utf-8"?>
+<p:sld xmlns:a="http://schemas.openxmlformats.org/drawingml/2006/main" xmlns:r="http://schemas.openxmlformats.org/officeDocument/2006/relationships" xmlns:p="http://schemas.openxmlformats.org/presentationml/2006/main">
+  <p:cSld>
+    <p:spTree>
+      <p:nvGrpSpPr>
+        <p:cNvPr id="1" name="">
+          <a:extLst>
+            <a:ext uri="{FF2B5EF4-FFF2-40B4-BE49-F238E27FC236}">
+              <a16:creationId xmlns:a16="http://schemas.microsoft.com/office/drawing/2014/main" id="{0442458F-6B55-A416-7402-A7C88B403B02}"/>
+            </a:ext>
+          </a:extLst>
+        </p:cNvPr>
+        <p:cNvGrpSpPr/>
+        <p:nvPr/>
+      </p:nvGrpSpPr>
+      <p:grpSpPr>
+        <a:xfrm>
+          <a:off x="0" y="0"/>
+          <a:ext cx="0" cy="0"/>
+          <a:chOff x="0" y="0"/>
+          <a:chExt cx="0" cy="0"/>
+        </a:xfrm>
+      </p:grpSpPr>
+      <p:sp>
+        <p:nvSpPr>
+          <p:cNvPr id="2" name="Title 1">
+            <a:extLst>
+              <a:ext uri="{FF2B5EF4-FFF2-40B4-BE49-F238E27FC236}">
+                <a16:creationId xmlns:a16="http://schemas.microsoft.com/office/drawing/2014/main" id="{7E525241-5394-0795-03E4-7BB44FE7C305}"/>
+              </a:ext>
+            </a:extLst>
+          </p:cNvPr>
+          <p:cNvSpPr>
+            <a:spLocks noGrp="1"/>
+          </p:cNvSpPr>
+          <p:nvPr>
+            <p:ph type="title"/>
+          </p:nvPr>
+        </p:nvSpPr>
+        <p:spPr/>
+        <p:txBody>
+          <a:bodyPr/>
+          <a:lstStyle/>
+          <a:p>
+            <a:r>
+              <a:rPr lang="en-GB" sz="800" b="1" dirty="0">
+                <a:solidFill>
+                  <a:srgbClr val="800000"/>
+                </a:solidFill>
+                <a:effectLst/>
+                <a:highlight>
+                  <a:srgbClr val="FFFFFF"/>
+                </a:highlight>
+                <a:latin typeface="Menlo" panose="020B0609030804020204" pitchFamily="49" charset="0"/>
+              </a:rPr>
+              <a:t>Tenure Cohorts vs Churn Rate (Life-stage Curve)</a:t>
+            </a:r>
+            <a:endParaRPr lang="en-GB" sz="800" b="0" dirty="0">
+              <a:solidFill>
+                <a:srgbClr val="3B3B3B"/>
+              </a:solidFill>
+              <a:effectLst/>
+              <a:highlight>
+                <a:srgbClr val="FFFFFF"/>
+              </a:highlight>
+              <a:latin typeface="Menlo" panose="020B0609030804020204" pitchFamily="49" charset="0"/>
+            </a:endParaRPr>
+          </a:p>
+        </p:txBody>
+      </p:sp>
+      <p:sp>
+        <p:nvSpPr>
+          <p:cNvPr id="3" name="Date Placeholder 2">
+            <a:extLst>
+              <a:ext uri="{FF2B5EF4-FFF2-40B4-BE49-F238E27FC236}">
+                <a16:creationId xmlns:a16="http://schemas.microsoft.com/office/drawing/2014/main" id="{07FD85DC-5B2A-F4F6-AC74-D4CCB1DB8FC7}"/>
+              </a:ext>
+            </a:extLst>
+          </p:cNvPr>
+          <p:cNvSpPr>
+            <a:spLocks noGrp="1"/>
+          </p:cNvSpPr>
+          <p:nvPr>
+            <p:ph type="dt" sz="half" idx="2"/>
+          </p:nvPr>
+        </p:nvSpPr>
+        <p:spPr/>
+        <p:txBody>
+          <a:bodyPr/>
+          <a:lstStyle/>
+          <a:p>
+            <a:fld id="{822B4C34-8539-4A47-8763-AA072889AAA3}" type="datetime1">
+              <a:rPr lang="en-GB" smtClean="0"/>
+              <a:t>18/06/2026</a:t>
+            </a:fld>
+            <a:endParaRPr lang="en-GB" dirty="0"/>
+          </a:p>
+        </p:txBody>
+      </p:sp>
+      <p:sp>
+        <p:nvSpPr>
+          <p:cNvPr id="4" name="Footer Placeholder 3">
+            <a:extLst>
+              <a:ext uri="{FF2B5EF4-FFF2-40B4-BE49-F238E27FC236}">
+                <a16:creationId xmlns:a16="http://schemas.microsoft.com/office/drawing/2014/main" id="{3EAAD3ED-9FD7-AB7D-A5E8-E9664AE57178}"/>
+              </a:ext>
+            </a:extLst>
+          </p:cNvPr>
+          <p:cNvSpPr>
+            <a:spLocks noGrp="1"/>
+          </p:cNvSpPr>
+          <p:nvPr>
+            <p:ph type="ftr" sz="quarter" idx="3"/>
+          </p:nvPr>
+        </p:nvSpPr>
+        <p:spPr/>
+        <p:txBody>
+          <a:bodyPr/>
+          <a:lstStyle/>
+          <a:p>
+            <a:r>
+              <a:rPr lang="en-GB"/>
+              <a:t>Presentation description - CONFIDENTIALTY NOTE</a:t>
+            </a:r>
+            <a:endParaRPr lang="en-GB" dirty="0"/>
+          </a:p>
+        </p:txBody>
+      </p:sp>
+      <p:sp>
+        <p:nvSpPr>
+          <p:cNvPr id="5" name="Slide Number Placeholder 4">
+            <a:extLst>
+              <a:ext uri="{FF2B5EF4-FFF2-40B4-BE49-F238E27FC236}">
+                <a16:creationId xmlns:a16="http://schemas.microsoft.com/office/drawing/2014/main" id="{81264E9A-D534-C695-595F-99B9AA5EC61D}"/>
+              </a:ext>
+            </a:extLst>
+          </p:cNvPr>
+          <p:cNvSpPr>
+            <a:spLocks noGrp="1"/>
+          </p:cNvSpPr>
+          <p:nvPr>
+            <p:ph type="sldNum" sz="quarter" idx="4"/>
+          </p:nvPr>
+        </p:nvSpPr>
+        <p:spPr/>
+        <p:txBody>
+          <a:bodyPr/>
+          <a:lstStyle/>
+          <a:p>
+            <a:fld id="{D622C71B-F0A5-40B6-B6DA-5780E9494F8A}" type="slidenum">
+              <a:rPr lang="en-GB" smtClean="0"/>
+              <a:pPr/>
+              <a:t>12</a:t>
+            </a:fld>
+            <a:endParaRPr lang="en-GB" dirty="0"/>
+          </a:p>
+        </p:txBody>
+      </p:sp>
+      <p:pic>
+        <p:nvPicPr>
+          <p:cNvPr id="6" name="Picture 5">
+            <a:extLst>
+              <a:ext uri="{FF2B5EF4-FFF2-40B4-BE49-F238E27FC236}">
+                <a16:creationId xmlns:a16="http://schemas.microsoft.com/office/drawing/2014/main" id="{1990FBC7-EB21-64E4-9404-D9AF7CCDFBD3}"/>
+              </a:ext>
+            </a:extLst>
+          </p:cNvPr>
+          <p:cNvPicPr>
+            <a:picLocks noChangeAspect="1"/>
+          </p:cNvPicPr>
+          <p:nvPr/>
+        </p:nvPicPr>
+        <p:blipFill>
+          <a:blip r:embed="rId2"/>
+          <a:stretch>
+            <a:fillRect/>
+          </a:stretch>
+        </p:blipFill>
+        <p:spPr>
+          <a:xfrm>
+            <a:off x="2526508" y="1567546"/>
+            <a:ext cx="7600292" cy="3722907"/>
+          </a:xfrm>
+          <a:prstGeom prst="rect">
+            <a:avLst/>
+          </a:prstGeom>
+        </p:spPr>
+      </p:pic>
+      <p:sp>
+        <p:nvSpPr>
+          <p:cNvPr id="9" name="TextBox 8">
+            <a:extLst>
+              <a:ext uri="{FF2B5EF4-FFF2-40B4-BE49-F238E27FC236}">
+                <a16:creationId xmlns:a16="http://schemas.microsoft.com/office/drawing/2014/main" id="{79C6BB0F-9F51-80CD-3A75-6D9D8038B9CC}"/>
+              </a:ext>
+            </a:extLst>
+          </p:cNvPr>
+          <p:cNvSpPr txBox="1"/>
+          <p:nvPr/>
+        </p:nvSpPr>
+        <p:spPr>
+          <a:xfrm>
+            <a:off x="623392" y="5670346"/>
+            <a:ext cx="10338741" cy="369332"/>
+          </a:xfrm>
+          <a:prstGeom prst="rect">
+            <a:avLst/>
+          </a:prstGeom>
+          <a:noFill/>
+        </p:spPr>
+        <p:txBody>
+          <a:bodyPr wrap="square">
+            <a:spAutoFit/>
+          </a:bodyPr>
+          <a:lstStyle/>
+          <a:p>
+            <a:r>
+              <a:rPr lang="en-GB" b="0" dirty="0">
+                <a:solidFill>
+                  <a:srgbClr val="3B3B3B"/>
+                </a:solidFill>
+                <a:effectLst/>
+                <a:highlight>
+                  <a:srgbClr val="FFFFFF"/>
+                </a:highlight>
+                <a:latin typeface="Menlo" panose="020B0609030804020204" pitchFamily="49" charset="0"/>
+              </a:rPr>
+              <a:t>Life-stage curve → Churn peaks 13–24 months then falls (tenure effect)</a:t>
+            </a:r>
+          </a:p>
+        </p:txBody>
+      </p:sp>
+    </p:spTree>
+    <p:extLst>
+      <p:ext uri="{BB962C8B-B14F-4D97-AF65-F5344CB8AC3E}">
+        <p14:creationId xmlns:p14="http://schemas.microsoft.com/office/powerpoint/2010/main" val="1559025084"/>
+      </p:ext>
+    </p:extLst>
+  </p:cSld>
+  <p:clrMapOvr>
+    <a:masterClrMapping/>
+  </p:clrMapOvr>
+</p:sld>
+</file>
+
+<file path=ppt/slides/slide13.xml><?xml version="1.0" encoding="utf-8"?>
+<p:sld xmlns:a="http://schemas.openxmlformats.org/drawingml/2006/main" xmlns:r="http://schemas.openxmlformats.org/officeDocument/2006/relationships" xmlns:p="http://schemas.openxmlformats.org/presentationml/2006/main">
+  <p:cSld>
+    <p:spTree>
+      <p:nvGrpSpPr>
+        <p:cNvPr id="1" name="">
+          <a:extLst>
+            <a:ext uri="{FF2B5EF4-FFF2-40B4-BE49-F238E27FC236}">
+              <a16:creationId xmlns:a16="http://schemas.microsoft.com/office/drawing/2014/main" id="{83CAD734-7DB7-243E-A0AD-A0689CC54210}"/>
+            </a:ext>
+          </a:extLst>
+        </p:cNvPr>
+        <p:cNvGrpSpPr/>
+        <p:nvPr/>
+      </p:nvGrpSpPr>
+      <p:grpSpPr>
+        <a:xfrm>
+          <a:off x="0" y="0"/>
+          <a:ext cx="0" cy="0"/>
+          <a:chOff x="0" y="0"/>
+          <a:chExt cx="0" cy="0"/>
+        </a:xfrm>
+      </p:grpSpPr>
+      <p:sp>
+        <p:nvSpPr>
+          <p:cNvPr id="2" name="Title 1">
+            <a:extLst>
+              <a:ext uri="{FF2B5EF4-FFF2-40B4-BE49-F238E27FC236}">
+                <a16:creationId xmlns:a16="http://schemas.microsoft.com/office/drawing/2014/main" id="{1B123952-347E-4917-8CC8-A09B098C2FFA}"/>
+              </a:ext>
+            </a:extLst>
+          </p:cNvPr>
+          <p:cNvSpPr>
+            <a:spLocks noGrp="1"/>
+          </p:cNvSpPr>
+          <p:nvPr>
+            <p:ph type="title"/>
+          </p:nvPr>
+        </p:nvSpPr>
+        <p:spPr/>
+        <p:txBody>
+          <a:bodyPr/>
+          <a:lstStyle/>
+          <a:p>
+            <a:r>
+              <a:rPr lang="en-GB" sz="800" b="0" dirty="0">
+                <a:solidFill>
+                  <a:srgbClr val="008000"/>
+                </a:solidFill>
+                <a:effectLst/>
+                <a:highlight>
+                  <a:srgbClr val="FFFFFF"/>
+                </a:highlight>
+                <a:latin typeface="Menlo" panose="020B0609030804020204" pitchFamily="49" charset="0"/>
+              </a:rPr>
+              <a:t>Data Health: Mixed Correlation Heatmap</a:t>
+            </a:r>
+            <a:endParaRPr lang="en-GB" sz="800" b="0" dirty="0">
+              <a:solidFill>
+                <a:srgbClr val="3B3B3B"/>
+              </a:solidFill>
+              <a:effectLst/>
+              <a:highlight>
+                <a:srgbClr val="FFFFFF"/>
+              </a:highlight>
+              <a:latin typeface="Menlo" panose="020B0609030804020204" pitchFamily="49" charset="0"/>
+            </a:endParaRPr>
+          </a:p>
+        </p:txBody>
+      </p:sp>
+      <p:sp>
+        <p:nvSpPr>
+          <p:cNvPr id="3" name="Date Placeholder 2">
+            <a:extLst>
+              <a:ext uri="{FF2B5EF4-FFF2-40B4-BE49-F238E27FC236}">
+                <a16:creationId xmlns:a16="http://schemas.microsoft.com/office/drawing/2014/main" id="{E82A80DC-E9C8-21BA-3989-0C9032BD0FBB}"/>
+              </a:ext>
+            </a:extLst>
+          </p:cNvPr>
+          <p:cNvSpPr>
+            <a:spLocks noGrp="1"/>
+          </p:cNvSpPr>
+          <p:nvPr>
+            <p:ph type="dt" sz="half" idx="2"/>
+          </p:nvPr>
+        </p:nvSpPr>
+        <p:spPr/>
+        <p:txBody>
+          <a:bodyPr/>
+          <a:lstStyle/>
+          <a:p>
+            <a:fld id="{822B4C34-8539-4A47-8763-AA072889AAA3}" type="datetime1">
+              <a:rPr lang="en-GB" smtClean="0"/>
+              <a:t>18/06/2026</a:t>
+            </a:fld>
+            <a:endParaRPr lang="en-GB" dirty="0"/>
+          </a:p>
+        </p:txBody>
+      </p:sp>
+      <p:sp>
+        <p:nvSpPr>
+          <p:cNvPr id="4" name="Footer Placeholder 3">
+            <a:extLst>
+              <a:ext uri="{FF2B5EF4-FFF2-40B4-BE49-F238E27FC236}">
+                <a16:creationId xmlns:a16="http://schemas.microsoft.com/office/drawing/2014/main" id="{86E92532-8AFF-36C0-7E23-27E96D9CA05E}"/>
+              </a:ext>
+            </a:extLst>
+          </p:cNvPr>
+          <p:cNvSpPr>
+            <a:spLocks noGrp="1"/>
+          </p:cNvSpPr>
+          <p:nvPr>
+            <p:ph type="ftr" sz="quarter" idx="3"/>
+          </p:nvPr>
+        </p:nvSpPr>
+        <p:spPr/>
+        <p:txBody>
+          <a:bodyPr/>
+          <a:lstStyle/>
+          <a:p>
+            <a:r>
+              <a:rPr lang="en-GB"/>
+              <a:t>Presentation description - CONFIDENTIALTY NOTE</a:t>
+            </a:r>
+            <a:endParaRPr lang="en-GB" dirty="0"/>
+          </a:p>
+        </p:txBody>
+      </p:sp>
+      <p:sp>
+        <p:nvSpPr>
+          <p:cNvPr id="5" name="Slide Number Placeholder 4">
+            <a:extLst>
+              <a:ext uri="{FF2B5EF4-FFF2-40B4-BE49-F238E27FC236}">
+                <a16:creationId xmlns:a16="http://schemas.microsoft.com/office/drawing/2014/main" id="{83408288-AAA9-9853-E0B8-13B5D447A575}"/>
+              </a:ext>
+            </a:extLst>
+          </p:cNvPr>
+          <p:cNvSpPr>
+            <a:spLocks noGrp="1"/>
+          </p:cNvSpPr>
+          <p:nvPr>
+            <p:ph type="sldNum" sz="quarter" idx="4"/>
+          </p:nvPr>
+        </p:nvSpPr>
+        <p:spPr/>
+        <p:txBody>
+          <a:bodyPr/>
+          <a:lstStyle/>
+          <a:p>
+            <a:fld id="{D622C71B-F0A5-40B6-B6DA-5780E9494F8A}" type="slidenum">
+              <a:rPr lang="en-GB" smtClean="0"/>
+              <a:pPr/>
+              <a:t>13</a:t>
+            </a:fld>
+            <a:endParaRPr lang="en-GB" dirty="0"/>
+          </a:p>
+        </p:txBody>
+      </p:sp>
+      <p:sp>
+        <p:nvSpPr>
+          <p:cNvPr id="8" name="TextBox 7">
+            <a:extLst>
+              <a:ext uri="{FF2B5EF4-FFF2-40B4-BE49-F238E27FC236}">
+                <a16:creationId xmlns:a16="http://schemas.microsoft.com/office/drawing/2014/main" id="{FDB9CEC0-54C6-78B8-3F5D-763472AE3F91}"/>
+              </a:ext>
+            </a:extLst>
+          </p:cNvPr>
+          <p:cNvSpPr txBox="1"/>
+          <p:nvPr/>
+        </p:nvSpPr>
+        <p:spPr>
+          <a:xfrm>
+            <a:off x="7464152" y="1628800"/>
+            <a:ext cx="4428492" cy="830997"/>
+          </a:xfrm>
+          <a:prstGeom prst="rect">
+            <a:avLst/>
+          </a:prstGeom>
+          <a:noFill/>
+        </p:spPr>
+        <p:txBody>
+          <a:bodyPr wrap="square">
+            <a:spAutoFit/>
+          </a:bodyPr>
+          <a:lstStyle/>
+          <a:p>
+            <a:r>
+              <a:rPr lang="en-GB" sz="1200" b="0" dirty="0">
+                <a:solidFill>
+                  <a:srgbClr val="3B3B3B"/>
+                </a:solidFill>
+                <a:effectLst/>
+                <a:highlight>
+                  <a:srgbClr val="FFFFFF"/>
+                </a:highlight>
+                <a:latin typeface="Menlo" panose="020B0609030804020204" pitchFamily="49" charset="0"/>
+              </a:rPr>
+              <a:t>Mixed correlation heatmap (Pearson / Point-Biserial / Cramér's V) → </a:t>
+            </a:r>
+            <a:r>
+              <a:rPr lang="en-GB" sz="1200" b="0" dirty="0" err="1">
+                <a:solidFill>
+                  <a:srgbClr val="3B3B3B"/>
+                </a:solidFill>
+                <a:effectLst/>
+                <a:highlight>
+                  <a:srgbClr val="FFFFFF"/>
+                </a:highlight>
+                <a:latin typeface="Menlo" panose="020B0609030804020204" pitchFamily="49" charset="0"/>
+              </a:rPr>
+              <a:t>has_booster</a:t>
+            </a:r>
+            <a:r>
+              <a:rPr lang="en-GB" sz="1200" b="0" dirty="0">
+                <a:solidFill>
+                  <a:srgbClr val="3B3B3B"/>
+                </a:solidFill>
+                <a:effectLst/>
+                <a:highlight>
+                  <a:srgbClr val="FFFFFF"/>
+                </a:highlight>
+                <a:latin typeface="Menlo" panose="020B0609030804020204" pitchFamily="49" charset="0"/>
+              </a:rPr>
+              <a:t> ↔ </a:t>
+            </a:r>
+            <a:r>
+              <a:rPr lang="en-GB" sz="1200" b="0" dirty="0" err="1">
+                <a:solidFill>
+                  <a:srgbClr val="3B3B3B"/>
+                </a:solidFill>
+                <a:effectLst/>
+                <a:highlight>
+                  <a:srgbClr val="FFFFFF"/>
+                </a:highlight>
+                <a:latin typeface="Menlo" panose="020B0609030804020204" pitchFamily="49" charset="0"/>
+              </a:rPr>
+              <a:t>tv_product</a:t>
+            </a:r>
+            <a:r>
+              <a:rPr lang="en-GB" sz="1200" b="0" dirty="0">
+                <a:solidFill>
+                  <a:srgbClr val="3B3B3B"/>
+                </a:solidFill>
+                <a:effectLst/>
+                <a:highlight>
+                  <a:srgbClr val="FFFFFF"/>
+                </a:highlight>
+                <a:latin typeface="Menlo" panose="020B0609030804020204" pitchFamily="49" charset="0"/>
+              </a:rPr>
+              <a:t> V=0.34, the key confounder for the logistic model</a:t>
+            </a:r>
+          </a:p>
+        </p:txBody>
+      </p:sp>
+      <p:pic>
+        <p:nvPicPr>
+          <p:cNvPr id="10" name="Picture 9">
+            <a:extLst>
+              <a:ext uri="{FF2B5EF4-FFF2-40B4-BE49-F238E27FC236}">
+                <a16:creationId xmlns:a16="http://schemas.microsoft.com/office/drawing/2014/main" id="{D340B5E7-8E6D-8037-7B4F-142946DEBE42}"/>
+              </a:ext>
+            </a:extLst>
+          </p:cNvPr>
+          <p:cNvPicPr>
+            <a:picLocks noChangeAspect="1"/>
+          </p:cNvPicPr>
+          <p:nvPr/>
+        </p:nvPicPr>
+        <p:blipFill>
+          <a:blip r:embed="rId2"/>
+          <a:stretch>
+            <a:fillRect/>
+          </a:stretch>
+        </p:blipFill>
+        <p:spPr>
+          <a:xfrm>
+            <a:off x="1316650" y="1628800"/>
+            <a:ext cx="4761710" cy="4248472"/>
+          </a:xfrm>
+          <a:prstGeom prst="rect">
+            <a:avLst/>
+          </a:prstGeom>
+        </p:spPr>
+      </p:pic>
+    </p:spTree>
+    <p:extLst>
+      <p:ext uri="{BB962C8B-B14F-4D97-AF65-F5344CB8AC3E}">
+        <p14:creationId xmlns:p14="http://schemas.microsoft.com/office/powerpoint/2010/main" val="1665685275"/>
+      </p:ext>
+    </p:extLst>
+  </p:cSld>
+  <p:clrMapOvr>
+    <a:masterClrMapping/>
+  </p:clrMapOvr>
+</p:sld>
+</file>
+
+<file path=ppt/slides/slide14.xml><?xml version="1.0" encoding="utf-8"?>
+<p:sld xmlns:a="http://schemas.openxmlformats.org/drawingml/2006/main" xmlns:r="http://schemas.openxmlformats.org/officeDocument/2006/relationships" xmlns:p="http://schemas.openxmlformats.org/presentationml/2006/main">
+  <p:cSld>
+    <p:spTree>
+      <p:nvGrpSpPr>
+        <p:cNvPr id="1" name="">
+          <a:extLst>
+            <a:ext uri="{FF2B5EF4-FFF2-40B4-BE49-F238E27FC236}">
+              <a16:creationId xmlns:a16="http://schemas.microsoft.com/office/drawing/2014/main" id="{02CF09DD-7A5D-3E4F-D39F-1C0EC9DC15EB}"/>
+            </a:ext>
+          </a:extLst>
+        </p:cNvPr>
+        <p:cNvGrpSpPr/>
+        <p:nvPr/>
+      </p:nvGrpSpPr>
+      <p:grpSpPr>
+        <a:xfrm>
+          <a:off x="0" y="0"/>
+          <a:ext cx="0" cy="0"/>
+          <a:chOff x="0" y="0"/>
+          <a:chExt cx="0" cy="0"/>
+        </a:xfrm>
+      </p:grpSpPr>
+      <p:sp>
+        <p:nvSpPr>
+          <p:cNvPr id="2" name="Title 1">
+            <a:extLst>
+              <a:ext uri="{FF2B5EF4-FFF2-40B4-BE49-F238E27FC236}">
+                <a16:creationId xmlns:a16="http://schemas.microsoft.com/office/drawing/2014/main" id="{49A30EE9-C54B-E0A2-C261-F5C93F9654E1}"/>
+              </a:ext>
+            </a:extLst>
+          </p:cNvPr>
+          <p:cNvSpPr>
+            <a:spLocks noGrp="1"/>
+          </p:cNvSpPr>
+          <p:nvPr>
+            <p:ph type="title"/>
+          </p:nvPr>
+        </p:nvSpPr>
+        <p:spPr/>
+        <p:txBody>
+          <a:bodyPr/>
+          <a:lstStyle/>
+          <a:p>
+            <a:r>
+              <a:rPr lang="en-GB" sz="800" b="0" dirty="0">
+                <a:solidFill>
+                  <a:srgbClr val="AF00DB"/>
+                </a:solidFill>
+                <a:effectLst/>
+                <a:highlight>
+                  <a:srgbClr val="FFFFFF"/>
+                </a:highlight>
+                <a:latin typeface="Menlo" panose="020B0609030804020204" pitchFamily="49" charset="0"/>
+              </a:rPr>
+              <a:t>*</a:t>
+            </a:r>
+            <a:r>
+              <a:rPr lang="en-GB" sz="800" b="0" dirty="0">
+                <a:solidFill>
+                  <a:srgbClr val="001080"/>
+                </a:solidFill>
+                <a:effectLst/>
+                <a:highlight>
+                  <a:srgbClr val="FFFFFF"/>
+                </a:highlight>
+                <a:latin typeface="Menlo" panose="020B0609030804020204" pitchFamily="49" charset="0"/>
+              </a:rPr>
+              <a:t>*Non-linear</a:t>
+            </a:r>
+            <a:r>
+              <a:rPr lang="en-GB" sz="800" b="0" dirty="0">
+                <a:solidFill>
+                  <a:srgbClr val="000000"/>
+                </a:solidFill>
+                <a:effectLst/>
+                <a:highlight>
+                  <a:srgbClr val="FFFFFF"/>
+                </a:highlight>
+                <a:latin typeface="Menlo" panose="020B0609030804020204" pitchFamily="49" charset="0"/>
+              </a:rPr>
+              <a:t> </a:t>
+            </a:r>
+            <a:r>
+              <a:rPr lang="en-GB" sz="800" b="0" dirty="0">
+                <a:solidFill>
+                  <a:srgbClr val="0000FF"/>
+                </a:solidFill>
+                <a:effectLst/>
+                <a:highlight>
+                  <a:srgbClr val="FFFFFF"/>
+                </a:highlight>
+                <a:latin typeface="Menlo" panose="020B0609030804020204" pitchFamily="49" charset="0"/>
+              </a:rPr>
+              <a:t>churn by life stage** — does churn peak for young or old customers?</a:t>
+            </a:r>
+            <a:endParaRPr lang="en-GB" sz="800" b="0" dirty="0">
+              <a:solidFill>
+                <a:srgbClr val="3B3B3B"/>
+              </a:solidFill>
+              <a:effectLst/>
+              <a:highlight>
+                <a:srgbClr val="FFFFFF"/>
+              </a:highlight>
+              <a:latin typeface="Menlo" panose="020B0609030804020204" pitchFamily="49" charset="0"/>
+            </a:endParaRPr>
+          </a:p>
+        </p:txBody>
+      </p:sp>
+      <p:sp>
+        <p:nvSpPr>
+          <p:cNvPr id="3" name="Date Placeholder 2">
+            <a:extLst>
+              <a:ext uri="{FF2B5EF4-FFF2-40B4-BE49-F238E27FC236}">
+                <a16:creationId xmlns:a16="http://schemas.microsoft.com/office/drawing/2014/main" id="{E5D9B1BD-9F9B-0B42-84E4-DC03AA335077}"/>
+              </a:ext>
+            </a:extLst>
+          </p:cNvPr>
+          <p:cNvSpPr>
+            <a:spLocks noGrp="1"/>
+          </p:cNvSpPr>
+          <p:nvPr>
+            <p:ph type="dt" sz="half" idx="2"/>
+          </p:nvPr>
+        </p:nvSpPr>
+        <p:spPr/>
+        <p:txBody>
+          <a:bodyPr/>
+          <a:lstStyle/>
+          <a:p>
+            <a:fld id="{822B4C34-8539-4A47-8763-AA072889AAA3}" type="datetime1">
+              <a:rPr lang="en-GB" smtClean="0"/>
+              <a:t>18/06/2026</a:t>
+            </a:fld>
+            <a:endParaRPr lang="en-GB" dirty="0"/>
+          </a:p>
+        </p:txBody>
+      </p:sp>
+      <p:sp>
+        <p:nvSpPr>
+          <p:cNvPr id="4" name="Footer Placeholder 3">
+            <a:extLst>
+              <a:ext uri="{FF2B5EF4-FFF2-40B4-BE49-F238E27FC236}">
+                <a16:creationId xmlns:a16="http://schemas.microsoft.com/office/drawing/2014/main" id="{C795DAC2-5EDB-8F0B-F8E8-5042AF4CEBEA}"/>
+              </a:ext>
+            </a:extLst>
+          </p:cNvPr>
+          <p:cNvSpPr>
+            <a:spLocks noGrp="1"/>
+          </p:cNvSpPr>
+          <p:nvPr>
+            <p:ph type="ftr" sz="quarter" idx="3"/>
+          </p:nvPr>
+        </p:nvSpPr>
+        <p:spPr/>
+        <p:txBody>
+          <a:bodyPr/>
+          <a:lstStyle/>
+          <a:p>
+            <a:r>
+              <a:rPr lang="en-GB"/>
+              <a:t>Presentation description - CONFIDENTIALTY NOTE</a:t>
+            </a:r>
+            <a:endParaRPr lang="en-GB" dirty="0"/>
+          </a:p>
+        </p:txBody>
+      </p:sp>
+      <p:sp>
+        <p:nvSpPr>
+          <p:cNvPr id="5" name="Slide Number Placeholder 4">
+            <a:extLst>
+              <a:ext uri="{FF2B5EF4-FFF2-40B4-BE49-F238E27FC236}">
+                <a16:creationId xmlns:a16="http://schemas.microsoft.com/office/drawing/2014/main" id="{997E9E4A-266C-52D3-42CB-AA53A3E69608}"/>
+              </a:ext>
+            </a:extLst>
+          </p:cNvPr>
+          <p:cNvSpPr>
+            <a:spLocks noGrp="1"/>
+          </p:cNvSpPr>
+          <p:nvPr>
+            <p:ph type="sldNum" sz="quarter" idx="4"/>
+          </p:nvPr>
+        </p:nvSpPr>
+        <p:spPr/>
+        <p:txBody>
+          <a:bodyPr/>
+          <a:lstStyle/>
+          <a:p>
+            <a:fld id="{D622C71B-F0A5-40B6-B6DA-5780E9494F8A}" type="slidenum">
+              <a:rPr lang="en-GB" smtClean="0"/>
+              <a:pPr/>
+              <a:t>14</a:t>
+            </a:fld>
+            <a:endParaRPr lang="en-GB" dirty="0"/>
+          </a:p>
+        </p:txBody>
+      </p:sp>
+      <p:sp>
+        <p:nvSpPr>
+          <p:cNvPr id="8" name="TextBox 7">
+            <a:extLst>
+              <a:ext uri="{FF2B5EF4-FFF2-40B4-BE49-F238E27FC236}">
+                <a16:creationId xmlns:a16="http://schemas.microsoft.com/office/drawing/2014/main" id="{B75CE9EF-7DDF-FD8B-EF62-2447425DAFAE}"/>
+              </a:ext>
+            </a:extLst>
+          </p:cNvPr>
+          <p:cNvSpPr txBox="1"/>
+          <p:nvPr/>
+        </p:nvSpPr>
+        <p:spPr>
+          <a:xfrm>
+            <a:off x="562708" y="5445224"/>
+            <a:ext cx="11629292" cy="646331"/>
+          </a:xfrm>
+          <a:prstGeom prst="rect">
+            <a:avLst/>
+          </a:prstGeom>
+          <a:noFill/>
+        </p:spPr>
+        <p:txBody>
+          <a:bodyPr wrap="square">
+            <a:spAutoFit/>
+          </a:bodyPr>
+          <a:lstStyle/>
+          <a:p>
+            <a:r>
+              <a:rPr lang="en-GB" sz="1200" b="0" dirty="0">
+                <a:solidFill>
+                  <a:srgbClr val="3B3B3B"/>
+                </a:solidFill>
+                <a:effectLst/>
+                <a:highlight>
+                  <a:srgbClr val="FFFFFF"/>
+                </a:highlight>
+                <a:latin typeface="Menlo" panose="020B0609030804020204" pitchFamily="49" charset="0"/>
+              </a:rPr>
+              <a:t>Non-linear Age Check: U-shaped churn curve — young customers (18–25: 19.1%) churn most, drops sharply to 51–65 (12.4%), then rises slightly at 66+ (13.7%). Implication: a linear age term in the logit model would not capture this; the </a:t>
+            </a:r>
+            <a:r>
+              <a:rPr lang="en-GB" sz="1200" b="0" dirty="0" err="1">
+                <a:solidFill>
+                  <a:srgbClr val="3B3B3B"/>
+                </a:solidFill>
+                <a:effectLst/>
+                <a:highlight>
+                  <a:srgbClr val="FFFFFF"/>
+                </a:highlight>
+                <a:latin typeface="Menlo" panose="020B0609030804020204" pitchFamily="49" charset="0"/>
+              </a:rPr>
+              <a:t>age_group</a:t>
+            </a:r>
+            <a:r>
+              <a:rPr lang="en-GB" sz="1200" b="0" dirty="0">
+                <a:solidFill>
+                  <a:srgbClr val="3B3B3B"/>
+                </a:solidFill>
+                <a:effectLst/>
+                <a:highlight>
+                  <a:srgbClr val="FFFFFF"/>
+                </a:highlight>
+                <a:latin typeface="Menlo" panose="020B0609030804020204" pitchFamily="49" charset="0"/>
+              </a:rPr>
+              <a:t> dummy approach is preferable.</a:t>
+            </a:r>
+          </a:p>
+        </p:txBody>
+      </p:sp>
+      <p:pic>
+        <p:nvPicPr>
+          <p:cNvPr id="6" name="Picture 5">
+            <a:extLst>
+              <a:ext uri="{FF2B5EF4-FFF2-40B4-BE49-F238E27FC236}">
+                <a16:creationId xmlns:a16="http://schemas.microsoft.com/office/drawing/2014/main" id="{29F3C4BE-003F-8FFF-7986-D5EE0D94039F}"/>
+              </a:ext>
+            </a:extLst>
+          </p:cNvPr>
+          <p:cNvPicPr>
+            <a:picLocks noChangeAspect="1"/>
+          </p:cNvPicPr>
+          <p:nvPr/>
+        </p:nvPicPr>
+        <p:blipFill>
+          <a:blip r:embed="rId2"/>
+          <a:stretch>
+            <a:fillRect/>
+          </a:stretch>
+        </p:blipFill>
+        <p:spPr>
+          <a:xfrm>
+            <a:off x="2495600" y="1465886"/>
+            <a:ext cx="6407100" cy="3493464"/>
+          </a:xfrm>
+          <a:prstGeom prst="rect">
+            <a:avLst/>
+          </a:prstGeom>
+        </p:spPr>
+      </p:pic>
+    </p:spTree>
+    <p:extLst>
+      <p:ext uri="{BB962C8B-B14F-4D97-AF65-F5344CB8AC3E}">
+        <p14:creationId xmlns:p14="http://schemas.microsoft.com/office/powerpoint/2010/main" val="1995906793"/>
+      </p:ext>
+    </p:extLst>
+  </p:cSld>
+  <p:clrMapOvr>
+    <a:masterClrMapping/>
+  </p:clrMapOvr>
+</p:sld>
+</file>
+
+<file path=ppt/slides/slide15.xml><?xml version="1.0" encoding="utf-8"?>
+<p:sld xmlns:a="http://schemas.openxmlformats.org/drawingml/2006/main" xmlns:r="http://schemas.openxmlformats.org/officeDocument/2006/relationships" xmlns:p="http://schemas.openxmlformats.org/presentationml/2006/main">
+  <p:cSld>
+    <p:spTree>
+      <p:nvGrpSpPr>
+        <p:cNvPr id="1" name="">
+          <a:extLst>
+            <a:ext uri="{FF2B5EF4-FFF2-40B4-BE49-F238E27FC236}">
+              <a16:creationId xmlns:a16="http://schemas.microsoft.com/office/drawing/2014/main" id="{71D704ED-418A-994F-D23A-6A632A156169}"/>
+            </a:ext>
+          </a:extLst>
+        </p:cNvPr>
+        <p:cNvGrpSpPr/>
+        <p:nvPr/>
+      </p:nvGrpSpPr>
+      <p:grpSpPr>
+        <a:xfrm>
+          <a:off x="0" y="0"/>
+          <a:ext cx="0" cy="0"/>
+          <a:chOff x="0" y="0"/>
+          <a:chExt cx="0" cy="0"/>
+        </a:xfrm>
+      </p:grpSpPr>
+      <p:sp>
+        <p:nvSpPr>
+          <p:cNvPr id="2" name="Title 1">
+            <a:extLst>
+              <a:ext uri="{FF2B5EF4-FFF2-40B4-BE49-F238E27FC236}">
+                <a16:creationId xmlns:a16="http://schemas.microsoft.com/office/drawing/2014/main" id="{525623C4-58CE-FE28-30C0-5DAAD09E4006}"/>
+              </a:ext>
+            </a:extLst>
+          </p:cNvPr>
+          <p:cNvSpPr>
+            <a:spLocks noGrp="1"/>
+          </p:cNvSpPr>
+          <p:nvPr>
+            <p:ph type="title"/>
+          </p:nvPr>
+        </p:nvSpPr>
+        <p:spPr/>
+        <p:txBody>
+          <a:bodyPr/>
+          <a:lstStyle/>
+          <a:p>
+            <a:r>
+              <a:rPr lang="en-GB" sz="800" b="1" dirty="0">
+                <a:solidFill>
+                  <a:srgbClr val="800000"/>
+                </a:solidFill>
+                <a:effectLst/>
+                <a:highlight>
+                  <a:srgbClr val="FFFFFF"/>
+                </a:highlight>
+                <a:latin typeface="Menlo" panose="020B0609030804020204" pitchFamily="49" charset="0"/>
+              </a:rPr>
+              <a:t>Regional Churn: Average Churned Rate by Swiss Region</a:t>
+            </a:r>
+            <a:endParaRPr lang="en-GB" sz="800" b="0" dirty="0">
+              <a:solidFill>
+                <a:srgbClr val="3B3B3B"/>
+              </a:solidFill>
+              <a:effectLst/>
+              <a:highlight>
+                <a:srgbClr val="FFFFFF"/>
+              </a:highlight>
+              <a:latin typeface="Menlo" panose="020B0609030804020204" pitchFamily="49" charset="0"/>
+            </a:endParaRPr>
+          </a:p>
+        </p:txBody>
+      </p:sp>
+      <p:sp>
+        <p:nvSpPr>
+          <p:cNvPr id="3" name="Date Placeholder 2">
+            <a:extLst>
+              <a:ext uri="{FF2B5EF4-FFF2-40B4-BE49-F238E27FC236}">
+                <a16:creationId xmlns:a16="http://schemas.microsoft.com/office/drawing/2014/main" id="{FDE7553B-9E4D-882D-8D5B-9EAA27E5F874}"/>
+              </a:ext>
+            </a:extLst>
+          </p:cNvPr>
+          <p:cNvSpPr>
+            <a:spLocks noGrp="1"/>
+          </p:cNvSpPr>
+          <p:nvPr>
+            <p:ph type="dt" sz="half" idx="2"/>
+          </p:nvPr>
+        </p:nvSpPr>
+        <p:spPr/>
+        <p:txBody>
+          <a:bodyPr/>
+          <a:lstStyle/>
+          <a:p>
+            <a:fld id="{822B4C34-8539-4A47-8763-AA072889AAA3}" type="datetime1">
+              <a:rPr lang="en-GB" smtClean="0"/>
+              <a:t>18/06/2026</a:t>
+            </a:fld>
+            <a:endParaRPr lang="en-GB" dirty="0"/>
+          </a:p>
+        </p:txBody>
+      </p:sp>
+      <p:sp>
+        <p:nvSpPr>
+          <p:cNvPr id="4" name="Footer Placeholder 3">
+            <a:extLst>
+              <a:ext uri="{FF2B5EF4-FFF2-40B4-BE49-F238E27FC236}">
+                <a16:creationId xmlns:a16="http://schemas.microsoft.com/office/drawing/2014/main" id="{A2C5CDF0-CAB6-DF62-CA79-2EAFC1F516B2}"/>
+              </a:ext>
+            </a:extLst>
+          </p:cNvPr>
+          <p:cNvSpPr>
+            <a:spLocks noGrp="1"/>
+          </p:cNvSpPr>
+          <p:nvPr>
+            <p:ph type="ftr" sz="quarter" idx="3"/>
+          </p:nvPr>
+        </p:nvSpPr>
+        <p:spPr/>
+        <p:txBody>
+          <a:bodyPr/>
+          <a:lstStyle/>
+          <a:p>
+            <a:r>
+              <a:rPr lang="en-GB"/>
+              <a:t>Presentation description - CONFIDENTIALTY NOTE</a:t>
+            </a:r>
+            <a:endParaRPr lang="en-GB" dirty="0"/>
+          </a:p>
+        </p:txBody>
+      </p:sp>
+      <p:sp>
+        <p:nvSpPr>
+          <p:cNvPr id="5" name="Slide Number Placeholder 4">
+            <a:extLst>
+              <a:ext uri="{FF2B5EF4-FFF2-40B4-BE49-F238E27FC236}">
+                <a16:creationId xmlns:a16="http://schemas.microsoft.com/office/drawing/2014/main" id="{4573AC11-4106-2BC3-717A-B38709936D26}"/>
+              </a:ext>
+            </a:extLst>
+          </p:cNvPr>
+          <p:cNvSpPr>
+            <a:spLocks noGrp="1"/>
+          </p:cNvSpPr>
+          <p:nvPr>
+            <p:ph type="sldNum" sz="quarter" idx="4"/>
+          </p:nvPr>
+        </p:nvSpPr>
+        <p:spPr/>
+        <p:txBody>
+          <a:bodyPr/>
+          <a:lstStyle/>
+          <a:p>
+            <a:fld id="{D622C71B-F0A5-40B6-B6DA-5780E9494F8A}" type="slidenum">
+              <a:rPr lang="en-GB" smtClean="0"/>
+              <a:pPr/>
+              <a:t>15</a:t>
+            </a:fld>
+            <a:endParaRPr lang="en-GB" dirty="0"/>
+          </a:p>
+        </p:txBody>
+      </p:sp>
+      <p:sp>
+        <p:nvSpPr>
+          <p:cNvPr id="8" name="TextBox 7">
+            <a:extLst>
+              <a:ext uri="{FF2B5EF4-FFF2-40B4-BE49-F238E27FC236}">
+                <a16:creationId xmlns:a16="http://schemas.microsoft.com/office/drawing/2014/main" id="{5242D549-2133-34C6-6AD8-F937E99745E7}"/>
+              </a:ext>
+            </a:extLst>
+          </p:cNvPr>
+          <p:cNvSpPr txBox="1"/>
+          <p:nvPr/>
+        </p:nvSpPr>
+        <p:spPr>
+          <a:xfrm>
+            <a:off x="562708" y="5445224"/>
+            <a:ext cx="11629292" cy="461665"/>
+          </a:xfrm>
+          <a:prstGeom prst="rect">
+            <a:avLst/>
+          </a:prstGeom>
+          <a:noFill/>
+        </p:spPr>
+        <p:txBody>
+          <a:bodyPr wrap="square">
+            <a:spAutoFit/>
+          </a:bodyPr>
+          <a:lstStyle/>
+          <a:p>
+            <a:r>
+              <a:rPr lang="en-GB" sz="1200" b="0" dirty="0">
+                <a:solidFill>
+                  <a:srgbClr val="3B3B3B"/>
+                </a:solidFill>
+                <a:effectLst/>
+                <a:highlight>
+                  <a:srgbClr val="FFFFFF"/>
+                </a:highlight>
+                <a:latin typeface="Menlo" panose="020B0609030804020204" pitchFamily="49" charset="0"/>
+              </a:rPr>
+              <a:t>Regional Churn: Bern/</a:t>
+            </a:r>
+            <a:r>
+              <a:rPr lang="en-GB" sz="1200" b="0" dirty="0" err="1">
+                <a:solidFill>
+                  <a:srgbClr val="3B3B3B"/>
+                </a:solidFill>
+                <a:effectLst/>
+                <a:highlight>
+                  <a:srgbClr val="FFFFFF"/>
+                </a:highlight>
+                <a:latin typeface="Menlo" panose="020B0609030804020204" pitchFamily="49" charset="0"/>
+              </a:rPr>
+              <a:t>Mittelland</a:t>
+            </a:r>
+            <a:r>
+              <a:rPr lang="en-GB" sz="1200" b="0" dirty="0">
+                <a:solidFill>
+                  <a:srgbClr val="3B3B3B"/>
+                </a:solidFill>
+                <a:effectLst/>
+                <a:highlight>
+                  <a:srgbClr val="FFFFFF"/>
+                </a:highlight>
+                <a:latin typeface="Menlo" panose="020B0609030804020204" pitchFamily="49" charset="0"/>
+              </a:rPr>
+              <a:t> (14.6%), Lake Geneva (14.4%), and Zürich (14.3%) are above the 14.1% average; Eastern Switzerland (13.2%) and Central Switzerland (13.6%) are below. Regional variation is modest (~1.4pp range) but real.</a:t>
+            </a:r>
+          </a:p>
+        </p:txBody>
+      </p:sp>
+      <p:pic>
+        <p:nvPicPr>
+          <p:cNvPr id="7" name="Picture 6">
+            <a:extLst>
+              <a:ext uri="{FF2B5EF4-FFF2-40B4-BE49-F238E27FC236}">
+                <a16:creationId xmlns:a16="http://schemas.microsoft.com/office/drawing/2014/main" id="{BBACA44E-1CB7-4CF2-8734-246D789804B5}"/>
+              </a:ext>
+            </a:extLst>
+          </p:cNvPr>
+          <p:cNvPicPr>
+            <a:picLocks noChangeAspect="1"/>
+          </p:cNvPicPr>
+          <p:nvPr/>
+        </p:nvPicPr>
+        <p:blipFill>
+          <a:blip r:embed="rId2"/>
+          <a:stretch>
+            <a:fillRect/>
+          </a:stretch>
+        </p:blipFill>
+        <p:spPr>
+          <a:xfrm>
+            <a:off x="1775520" y="1762022"/>
+            <a:ext cx="7762180" cy="3465770"/>
+          </a:xfrm>
+          <a:prstGeom prst="rect">
+            <a:avLst/>
+          </a:prstGeom>
+        </p:spPr>
+      </p:pic>
+    </p:spTree>
+    <p:extLst>
+      <p:ext uri="{BB962C8B-B14F-4D97-AF65-F5344CB8AC3E}">
+        <p14:creationId xmlns:p14="http://schemas.microsoft.com/office/powerpoint/2010/main" val="1947885772"/>
+      </p:ext>
+    </p:extLst>
+  </p:cSld>
+  <p:clrMapOvr>
+    <a:masterClrMapping/>
+  </p:clrMapOvr>
+</p:sld>
+</file>
+
+<file path=ppt/slides/slide16.xml><?xml version="1.0" encoding="utf-8"?>
+<p:sld xmlns:a="http://schemas.openxmlformats.org/drawingml/2006/main" xmlns:r="http://schemas.openxmlformats.org/officeDocument/2006/relationships" xmlns:p="http://schemas.openxmlformats.org/presentationml/2006/main">
+  <p:cSld>
+    <p:spTree>
+      <p:nvGrpSpPr>
+        <p:cNvPr id="1" name=""/>
+        <p:cNvGrpSpPr/>
+        <p:nvPr/>
+      </p:nvGrpSpPr>
+      <p:grpSpPr>
+        <a:xfrm>
+          <a:off x="0" y="0"/>
+          <a:ext cx="0" cy="0"/>
+          <a:chOff x="0" y="0"/>
+          <a:chExt cx="0" cy="0"/>
+        </a:xfrm>
+      </p:grpSpPr>
+    </p:spTree>
+    <p:extLst>
+      <p:ext uri="{BB962C8B-B14F-4D97-AF65-F5344CB8AC3E}">
+        <p14:creationId xmlns:p14="http://schemas.microsoft.com/office/powerpoint/2010/main" val="3841146111"/>
+      </p:ext>
+    </p:extLst>
+  </p:cSld>
+  <p:clrMapOvr>
+    <a:masterClrMapping/>
+  </p:clrMapOvr>
+</p:sld>
+</file>
+
 <file path=ppt/slides/slide2.xml><?xml version="1.0" encoding="utf-8"?>
 <p:sld xmlns:a="http://schemas.openxmlformats.org/drawingml/2006/main" xmlns:r="http://schemas.openxmlformats.org/officeDocument/2006/relationships" xmlns:p="http://schemas.openxmlformats.org/presentationml/2006/main">
   <p:cSld>
@@ -25981,6 +27656,36 @@
           <a:chExt cx="0" cy="0"/>
         </a:xfrm>
       </p:grpSpPr>
+      <p:pic>
+        <p:nvPicPr>
+          <p:cNvPr id="30" name="Picture 29">
+            <a:extLst>
+              <a:ext uri="{FF2B5EF4-FFF2-40B4-BE49-F238E27FC236}">
+                <a16:creationId xmlns:a16="http://schemas.microsoft.com/office/drawing/2014/main" id="{84FF1AF7-4DFF-6627-2DC1-F65E0D55C562}"/>
+              </a:ext>
+            </a:extLst>
+          </p:cNvPr>
+          <p:cNvPicPr>
+            <a:picLocks noChangeAspect="1"/>
+          </p:cNvPicPr>
+          <p:nvPr/>
+        </p:nvPicPr>
+        <p:blipFill>
+          <a:blip r:embed="rId2"/>
+          <a:stretch>
+            <a:fillRect/>
+          </a:stretch>
+        </p:blipFill>
+        <p:spPr>
+          <a:xfrm>
+            <a:off x="6248935" y="2479206"/>
+            <a:ext cx="5588000" cy="3060700"/>
+          </a:xfrm>
+          <a:prstGeom prst="rect">
+            <a:avLst/>
+          </a:prstGeom>
+        </p:spPr>
+      </p:pic>
       <p:sp>
         <p:nvSpPr>
           <p:cNvPr id="2" name="Title 1">
@@ -26033,7 +27738,7 @@
           <a:p>
             <a:fld id="{822B4C34-8539-4A47-8763-AA072889AAA3}" type="datetime1">
               <a:rPr lang="en-GB" smtClean="0"/>
-              <a:t>17/06/2026</a:t>
+              <a:t>18/06/2026</a:t>
             </a:fld>
             <a:endParaRPr lang="en-GB" dirty="0"/>
           </a:p>
@@ -26112,8 +27817,8 @@
         </p:nvSpPr>
         <p:spPr>
           <a:xfrm>
-            <a:off x="2207568" y="5661248"/>
-            <a:ext cx="10586578" cy="369332"/>
+            <a:off x="2063552" y="5786869"/>
+            <a:ext cx="9002402" cy="369332"/>
           </a:xfrm>
           <a:prstGeom prst="rect">
             <a:avLst/>
@@ -26134,7 +27839,7 @@
                 <a:effectLst/>
                 <a:latin typeface="-webkit-standard"/>
               </a:rPr>
-              <a:t>Comparing raw averages would overestimate the booster effect.</a:t>
+              <a:t>Comparing raw averages would overestimate the booster effect. So we need to adjust for that.</a:t>
             </a:r>
             <a:endParaRPr lang="en-CZ" dirty="0"/>
           </a:p>
@@ -26155,44 +27860,15 @@
           <p:nvPr/>
         </p:nvPicPr>
         <p:blipFill>
-          <a:blip r:embed="rId2"/>
+          <a:blip r:embed="rId3"/>
           <a:stretch>
             <a:fillRect/>
           </a:stretch>
         </p:blipFill>
         <p:spPr>
           <a:xfrm>
-            <a:off x="367081" y="1700808"/>
-            <a:ext cx="5600700" cy="3060700"/>
-          </a:xfrm>
-          <a:prstGeom prst="rect">
-            <a:avLst/>
-          </a:prstGeom>
-        </p:spPr>
-      </p:pic>
-      <p:pic>
-        <p:nvPicPr>
-          <p:cNvPr id="10" name="Picture 9">
-            <a:extLst>
-              <a:ext uri="{FF2B5EF4-FFF2-40B4-BE49-F238E27FC236}">
-                <a16:creationId xmlns:a16="http://schemas.microsoft.com/office/drawing/2014/main" id="{EF5DC152-9431-849F-69E5-BF2DB56FCD98}"/>
-              </a:ext>
-            </a:extLst>
-          </p:cNvPr>
-          <p:cNvPicPr>
-            <a:picLocks noChangeAspect="1"/>
-          </p:cNvPicPr>
-          <p:nvPr/>
-        </p:nvPicPr>
-        <p:blipFill rotWithShape="1">
-          <a:blip r:embed="rId3"/>
-          <a:srcRect l="50000" t="5228"/>
-          <a:stretch/>
-        </p:blipFill>
-        <p:spPr>
-          <a:xfrm>
-            <a:off x="6698718" y="1556792"/>
-            <a:ext cx="4719783" cy="3332164"/>
+            <a:off x="430076" y="2443562"/>
+            <a:ext cx="5665924" cy="3096344"/>
           </a:xfrm>
           <a:prstGeom prst="rect">
             <a:avLst/>
@@ -26213,8 +27889,8 @@
         </p:nvSpPr>
         <p:spPr>
           <a:xfrm>
-            <a:off x="5075113" y="2564904"/>
-            <a:ext cx="1656184" cy="1015663"/>
+            <a:off x="2898439" y="1535981"/>
+            <a:ext cx="6395122" cy="276999"/>
           </a:xfrm>
           <a:prstGeom prst="rect">
             <a:avLst/>
@@ -26241,6 +27917,204 @@
           </a:p>
         </p:txBody>
       </p:sp>
+      <p:sp>
+        <p:nvSpPr>
+          <p:cNvPr id="17" name="Oval 16">
+            <a:extLst>
+              <a:ext uri="{FF2B5EF4-FFF2-40B4-BE49-F238E27FC236}">
+                <a16:creationId xmlns:a16="http://schemas.microsoft.com/office/drawing/2014/main" id="{3422DF75-E527-1651-DAB8-903245C329DA}"/>
+              </a:ext>
+            </a:extLst>
+          </p:cNvPr>
+          <p:cNvSpPr/>
+          <p:nvPr/>
+        </p:nvSpPr>
+        <p:spPr>
+          <a:xfrm>
+            <a:off x="3946724" y="2601932"/>
+            <a:ext cx="1152128" cy="1152128"/>
+          </a:xfrm>
+          <a:prstGeom prst="ellipse">
+            <a:avLst/>
+          </a:prstGeom>
+          <a:noFill/>
+          <a:ln>
+            <a:solidFill>
+              <a:schemeClr val="tx1"/>
+            </a:solidFill>
+          </a:ln>
+        </p:spPr>
+        <p:style>
+          <a:lnRef idx="2">
+            <a:schemeClr val="accent1">
+              <a:shade val="50000"/>
+            </a:schemeClr>
+          </a:lnRef>
+          <a:fillRef idx="1">
+            <a:schemeClr val="accent1"/>
+          </a:fillRef>
+          <a:effectRef idx="0">
+            <a:schemeClr val="accent1"/>
+          </a:effectRef>
+          <a:fontRef idx="minor">
+            <a:schemeClr val="lt1"/>
+          </a:fontRef>
+        </p:style>
+        <p:txBody>
+          <a:bodyPr rtlCol="0" anchor="ctr"/>
+          <a:lstStyle/>
+          <a:p>
+            <a:pPr algn="ctr"/>
+            <a:endParaRPr lang="en-CZ" sz="1600" dirty="0" err="1">
+              <a:solidFill>
+                <a:schemeClr val="bg1"/>
+              </a:solidFill>
+            </a:endParaRPr>
+          </a:p>
+        </p:txBody>
+      </p:sp>
+      <p:sp>
+        <p:nvSpPr>
+          <p:cNvPr id="18" name="Oval 17">
+            <a:extLst>
+              <a:ext uri="{FF2B5EF4-FFF2-40B4-BE49-F238E27FC236}">
+                <a16:creationId xmlns:a16="http://schemas.microsoft.com/office/drawing/2014/main" id="{72352343-D58F-DC2C-1B41-27E7B76D9E7C}"/>
+              </a:ext>
+            </a:extLst>
+          </p:cNvPr>
+          <p:cNvSpPr/>
+          <p:nvPr/>
+        </p:nvSpPr>
+        <p:spPr>
+          <a:xfrm>
+            <a:off x="10410635" y="2728080"/>
+            <a:ext cx="1579235" cy="1579235"/>
+          </a:xfrm>
+          <a:prstGeom prst="ellipse">
+            <a:avLst/>
+          </a:prstGeom>
+          <a:noFill/>
+          <a:ln>
+            <a:solidFill>
+              <a:schemeClr val="tx1"/>
+            </a:solidFill>
+          </a:ln>
+        </p:spPr>
+        <p:style>
+          <a:lnRef idx="2">
+            <a:schemeClr val="accent1">
+              <a:shade val="50000"/>
+            </a:schemeClr>
+          </a:lnRef>
+          <a:fillRef idx="1">
+            <a:schemeClr val="accent1"/>
+          </a:fillRef>
+          <a:effectRef idx="0">
+            <a:schemeClr val="accent1"/>
+          </a:effectRef>
+          <a:fontRef idx="minor">
+            <a:schemeClr val="lt1"/>
+          </a:fontRef>
+        </p:style>
+        <p:txBody>
+          <a:bodyPr rtlCol="0" anchor="ctr"/>
+          <a:lstStyle/>
+          <a:p>
+            <a:pPr algn="ctr"/>
+            <a:endParaRPr lang="en-CZ" sz="1600" dirty="0" err="1">
+              <a:solidFill>
+                <a:schemeClr val="bg1"/>
+              </a:solidFill>
+            </a:endParaRPr>
+          </a:p>
+        </p:txBody>
+      </p:sp>
+      <p:cxnSp>
+        <p:nvCxnSpPr>
+          <p:cNvPr id="20" name="Straight Arrow Connector 19">
+            <a:extLst>
+              <a:ext uri="{FF2B5EF4-FFF2-40B4-BE49-F238E27FC236}">
+                <a16:creationId xmlns:a16="http://schemas.microsoft.com/office/drawing/2014/main" id="{75095A65-A7B8-4C9F-E443-43FD8E98911F}"/>
+              </a:ext>
+            </a:extLst>
+          </p:cNvPr>
+          <p:cNvCxnSpPr>
+            <a:cxnSpLocks/>
+            <a:stCxn id="12" idx="3"/>
+            <a:endCxn id="18" idx="0"/>
+          </p:cNvCxnSpPr>
+          <p:nvPr/>
+        </p:nvCxnSpPr>
+        <p:spPr>
+          <a:xfrm>
+            <a:off x="9293561" y="1674481"/>
+            <a:ext cx="1906692" cy="1053599"/>
+          </a:xfrm>
+          <a:prstGeom prst="straightConnector1">
+            <a:avLst/>
+          </a:prstGeom>
+          <a:ln>
+            <a:tailEnd type="triangle"/>
+          </a:ln>
+        </p:spPr>
+        <p:style>
+          <a:lnRef idx="1">
+            <a:schemeClr val="accent1"/>
+          </a:lnRef>
+          <a:fillRef idx="0">
+            <a:schemeClr val="accent1"/>
+          </a:fillRef>
+          <a:effectRef idx="0">
+            <a:schemeClr val="accent1"/>
+          </a:effectRef>
+          <a:fontRef idx="minor">
+            <a:schemeClr val="tx1"/>
+          </a:fontRef>
+        </p:style>
+      </p:cxnSp>
+      <p:cxnSp>
+        <p:nvCxnSpPr>
+          <p:cNvPr id="23" name="Straight Arrow Connector 22">
+            <a:extLst>
+              <a:ext uri="{FF2B5EF4-FFF2-40B4-BE49-F238E27FC236}">
+                <a16:creationId xmlns:a16="http://schemas.microsoft.com/office/drawing/2014/main" id="{9E926BF1-489A-67B1-BB4D-DA5227FC81B6}"/>
+              </a:ext>
+            </a:extLst>
+          </p:cNvPr>
+          <p:cNvCxnSpPr>
+            <a:cxnSpLocks/>
+            <a:stCxn id="12" idx="2"/>
+            <a:endCxn id="17" idx="0"/>
+          </p:cNvCxnSpPr>
+          <p:nvPr/>
+        </p:nvCxnSpPr>
+        <p:spPr>
+          <a:xfrm flipH="1">
+            <a:off x="4522788" y="1812980"/>
+            <a:ext cx="1573212" cy="788952"/>
+          </a:xfrm>
+          <a:prstGeom prst="straightConnector1">
+            <a:avLst/>
+          </a:prstGeom>
+          <a:ln>
+            <a:tailEnd type="triangle"/>
+          </a:ln>
+        </p:spPr>
+        <p:style>
+          <a:lnRef idx="1">
+            <a:schemeClr val="accent1"/>
+          </a:lnRef>
+          <a:fillRef idx="0">
+            <a:schemeClr val="accent1"/>
+          </a:fillRef>
+          <a:effectRef idx="0">
+            <a:schemeClr val="accent1"/>
+          </a:effectRef>
+          <a:fontRef idx="minor">
+            <a:schemeClr val="tx1"/>
+          </a:fontRef>
+        </p:style>
+      </p:cxnSp>
     </p:spTree>
     <p:extLst>
       <p:ext uri="{BB962C8B-B14F-4D97-AF65-F5344CB8AC3E}">
@@ -26408,8 +28282,8 @@
         </p:nvSpPr>
         <p:spPr>
           <a:xfrm>
-            <a:off x="406799" y="5212081"/>
-            <a:ext cx="11011701" cy="646331"/>
+            <a:off x="406800" y="5662655"/>
+            <a:ext cx="11011701" cy="584775"/>
           </a:xfrm>
           <a:prstGeom prst="rect">
             <a:avLst/>
@@ -26424,7 +28298,7 @@
           <a:p>
             <a:pPr algn="l"/>
             <a:r>
-              <a:rPr lang="en-GB" b="0" i="0" u="none" strike="noStrike" dirty="0">
+              <a:rPr lang="en-GB" sz="1600" b="0" i="0" u="none" strike="noStrike" dirty="0">
                 <a:solidFill>
                   <a:srgbClr val="000000"/>
                 </a:solidFill>
@@ -26435,298 +28309,36 @@
           </a:p>
         </p:txBody>
       </p:sp>
-      <p:graphicFrame>
-        <p:nvGraphicFramePr>
-          <p:cNvPr id="6" name="Table 5">
-            <a:extLst>
-              <a:ext uri="{FF2B5EF4-FFF2-40B4-BE49-F238E27FC236}">
-                <a16:creationId xmlns:a16="http://schemas.microsoft.com/office/drawing/2014/main" id="{EDB1A1EC-11D0-E3E8-75CD-E7F38D9AAB90}"/>
-              </a:ext>
-            </a:extLst>
-          </p:cNvPr>
-          <p:cNvGraphicFramePr>
-            <a:graphicFrameLocks noGrp="1"/>
-          </p:cNvGraphicFramePr>
-          <p:nvPr>
-            <p:extLst>
-              <p:ext uri="{D42A27DB-BD31-4B8C-83A1-F6EECF244321}">
-                <p14:modId xmlns:p14="http://schemas.microsoft.com/office/powerpoint/2010/main" val="2743627651"/>
-              </p:ext>
-            </p:extLst>
-          </p:nvPr>
-        </p:nvGraphicFramePr>
-        <p:xfrm>
-          <a:off x="6320729" y="2437920"/>
-          <a:ext cx="5076486" cy="1463040"/>
-        </p:xfrm>
-        <a:graphic>
-          <a:graphicData uri="http://schemas.openxmlformats.org/drawingml/2006/table">
-            <a:tbl>
-              <a:tblPr/>
-              <a:tblGrid>
-                <a:gridCol w="2205112">
-                  <a:extLst>
-                    <a:ext uri="{9D8B030D-6E8A-4147-A177-3AD203B41FA5}">
-                      <a16:colId xmlns:a16="http://schemas.microsoft.com/office/drawing/2014/main" val="354998943"/>
-                    </a:ext>
-                  </a:extLst>
-                </a:gridCol>
-                <a:gridCol w="2871374">
-                  <a:extLst>
-                    <a:ext uri="{9D8B030D-6E8A-4147-A177-3AD203B41FA5}">
-                      <a16:colId xmlns:a16="http://schemas.microsoft.com/office/drawing/2014/main" val="2910239633"/>
-                    </a:ext>
-                  </a:extLst>
-                </a:gridCol>
-              </a:tblGrid>
-              <a:tr h="365760">
-                <a:tc>
-                  <a:txBody>
-                    <a:bodyPr/>
-                    <a:lstStyle/>
-                    <a:p>
-                      <a:r>
-                        <a:rPr lang="en-GB" sz="1800"/>
-                        <a:t>Method</a:t>
-                      </a:r>
-                    </a:p>
-                  </a:txBody>
-                  <a:tcPr anchor="ctr">
-                    <a:lnL>
-                      <a:noFill/>
-                    </a:lnL>
-                    <a:lnR>
-                      <a:noFill/>
-                    </a:lnR>
-                    <a:lnT>
-                      <a:noFill/>
-                    </a:lnT>
-                    <a:lnB>
-                      <a:noFill/>
-                    </a:lnB>
-                    <a:noFill/>
-                  </a:tcPr>
-                </a:tc>
-                <a:tc>
-                  <a:txBody>
-                    <a:bodyPr/>
-                    <a:lstStyle/>
-                    <a:p>
-                      <a:r>
-                        <a:rPr lang="en-GB" sz="1800" dirty="0"/>
-                        <a:t>Estimated churn reduction</a:t>
-                      </a:r>
-                    </a:p>
-                  </a:txBody>
-                  <a:tcPr anchor="ctr">
-                    <a:lnL>
-                      <a:noFill/>
-                    </a:lnL>
-                    <a:lnR>
-                      <a:noFill/>
-                    </a:lnR>
-                    <a:lnT>
-                      <a:noFill/>
-                    </a:lnT>
-                    <a:lnB>
-                      <a:noFill/>
-                    </a:lnB>
-                    <a:noFill/>
-                  </a:tcPr>
-                </a:tc>
-                <a:extLst>
-                  <a:ext uri="{0D108BD9-81ED-4DB2-BD59-A6C34878D82A}">
-                    <a16:rowId xmlns:a16="http://schemas.microsoft.com/office/drawing/2014/main" val="755743016"/>
-                  </a:ext>
-                </a:extLst>
-              </a:tr>
-              <a:tr h="365760">
-                <a:tc>
-                  <a:txBody>
-                    <a:bodyPr/>
-                    <a:lstStyle/>
-                    <a:p>
-                      <a:r>
-                        <a:rPr lang="en-GB" sz="1800"/>
-                        <a:t>Naive</a:t>
-                      </a:r>
-                    </a:p>
-                  </a:txBody>
-                  <a:tcPr anchor="ctr">
-                    <a:lnL>
-                      <a:noFill/>
-                    </a:lnL>
-                    <a:lnR>
-                      <a:noFill/>
-                    </a:lnR>
-                    <a:lnT>
-                      <a:noFill/>
-                    </a:lnT>
-                    <a:lnB>
-                      <a:noFill/>
-                    </a:lnB>
-                    <a:noFill/>
-                  </a:tcPr>
-                </a:tc>
-                <a:tc>
-                  <a:txBody>
-                    <a:bodyPr/>
-                    <a:lstStyle/>
-                    <a:p>
-                      <a:r>
-                        <a:rPr lang="en-GB" sz="1800" dirty="0"/>
-                        <a:t>-2 pp</a:t>
-                      </a:r>
-                    </a:p>
-                  </a:txBody>
-                  <a:tcPr anchor="ctr">
-                    <a:lnL>
-                      <a:noFill/>
-                    </a:lnL>
-                    <a:lnR>
-                      <a:noFill/>
-                    </a:lnR>
-                    <a:lnT>
-                      <a:noFill/>
-                    </a:lnT>
-                    <a:lnB>
-                      <a:noFill/>
-                    </a:lnB>
-                    <a:noFill/>
-                  </a:tcPr>
-                </a:tc>
-                <a:extLst>
-                  <a:ext uri="{0D108BD9-81ED-4DB2-BD59-A6C34878D82A}">
-                    <a16:rowId xmlns:a16="http://schemas.microsoft.com/office/drawing/2014/main" val="2416295896"/>
-                  </a:ext>
-                </a:extLst>
-              </a:tr>
-              <a:tr h="365760">
-                <a:tc>
-                  <a:txBody>
-                    <a:bodyPr/>
-                    <a:lstStyle/>
-                    <a:p>
-                      <a:r>
-                        <a:rPr lang="en-GB" sz="1800" dirty="0"/>
-                        <a:t>Digital Twins (PSM)</a:t>
-                      </a:r>
-                    </a:p>
-                  </a:txBody>
-                  <a:tcPr anchor="ctr">
-                    <a:lnL>
-                      <a:noFill/>
-                    </a:lnL>
-                    <a:lnR>
-                      <a:noFill/>
-                    </a:lnR>
-                    <a:lnT>
-                      <a:noFill/>
-                    </a:lnT>
-                    <a:lnB>
-                      <a:noFill/>
-                    </a:lnB>
-                    <a:noFill/>
-                  </a:tcPr>
-                </a:tc>
-                <a:tc>
-                  <a:txBody>
-                    <a:bodyPr/>
-                    <a:lstStyle/>
-                    <a:p>
-                      <a:r>
-                        <a:rPr lang="en-GB" sz="1800" dirty="0"/>
-                        <a:t>-1.6 pp</a:t>
-                      </a:r>
-                    </a:p>
-                  </a:txBody>
-                  <a:tcPr anchor="ctr">
-                    <a:lnL>
-                      <a:noFill/>
-                    </a:lnL>
-                    <a:lnR>
-                      <a:noFill/>
-                    </a:lnR>
-                    <a:lnT>
-                      <a:noFill/>
-                    </a:lnT>
-                    <a:lnB>
-                      <a:noFill/>
-                    </a:lnB>
-                    <a:noFill/>
-                  </a:tcPr>
-                </a:tc>
-                <a:extLst>
-                  <a:ext uri="{0D108BD9-81ED-4DB2-BD59-A6C34878D82A}">
-                    <a16:rowId xmlns:a16="http://schemas.microsoft.com/office/drawing/2014/main" val="1027641952"/>
-                  </a:ext>
-                </a:extLst>
-              </a:tr>
-              <a:tr h="365760">
-                <a:tc>
-                  <a:txBody>
-                    <a:bodyPr/>
-                    <a:lstStyle/>
-                    <a:p>
-                      <a:r>
-                        <a:rPr lang="en-GB" sz="1800" dirty="0"/>
-                        <a:t>Logistic AME</a:t>
-                      </a:r>
-                    </a:p>
-                  </a:txBody>
-                  <a:tcPr anchor="ctr">
-                    <a:lnL>
-                      <a:noFill/>
-                    </a:lnL>
-                    <a:lnR>
-                      <a:noFill/>
-                    </a:lnR>
-                    <a:lnT>
-                      <a:noFill/>
-                    </a:lnT>
-                    <a:lnB>
-                      <a:noFill/>
-                    </a:lnB>
-                    <a:noFill/>
-                  </a:tcPr>
-                </a:tc>
-                <a:tc>
-                  <a:txBody>
-                    <a:bodyPr/>
-                    <a:lstStyle/>
-                    <a:p>
-                      <a:r>
-                        <a:rPr lang="en-GB" sz="1800" dirty="0"/>
-                        <a:t>-1.0 pp</a:t>
-                      </a:r>
-                    </a:p>
-                  </a:txBody>
-                  <a:tcPr anchor="ctr">
-                    <a:lnL>
-                      <a:noFill/>
-                    </a:lnL>
-                    <a:lnR>
-                      <a:noFill/>
-                    </a:lnR>
-                    <a:lnT>
-                      <a:noFill/>
-                    </a:lnT>
-                    <a:lnB>
-                      <a:noFill/>
-                    </a:lnB>
-                    <a:noFill/>
-                  </a:tcPr>
-                </a:tc>
-                <a:extLst>
-                  <a:ext uri="{0D108BD9-81ED-4DB2-BD59-A6C34878D82A}">
-                    <a16:rowId xmlns:a16="http://schemas.microsoft.com/office/drawing/2014/main" val="2249185178"/>
-                  </a:ext>
-                </a:extLst>
-              </a:tr>
-            </a:tbl>
-          </a:graphicData>
-        </a:graphic>
-      </p:graphicFrame>
+      <p:pic>
+        <p:nvPicPr>
+          <p:cNvPr id="13" name="Picture 12">
+            <a:extLst>
+              <a:ext uri="{FF2B5EF4-FFF2-40B4-BE49-F238E27FC236}">
+                <a16:creationId xmlns:a16="http://schemas.microsoft.com/office/drawing/2014/main" id="{85B75B1B-048E-5633-5FC4-954568CB7955}"/>
+              </a:ext>
+            </a:extLst>
+          </p:cNvPr>
+          <p:cNvPicPr>
+            <a:picLocks noChangeAspect="1"/>
+          </p:cNvPicPr>
+          <p:nvPr/>
+        </p:nvPicPr>
+        <p:blipFill>
+          <a:blip r:embed="rId2"/>
+          <a:stretch>
+            <a:fillRect/>
+          </a:stretch>
+        </p:blipFill>
+        <p:spPr>
+          <a:xfrm>
+            <a:off x="1847528" y="1484784"/>
+            <a:ext cx="7772400" cy="2597956"/>
+          </a:xfrm>
+          <a:prstGeom prst="rect">
+            <a:avLst/>
+          </a:prstGeom>
+        </p:spPr>
+      </p:pic>
     </p:spTree>
     <p:extLst>
       <p:ext uri="{BB962C8B-B14F-4D97-AF65-F5344CB8AC3E}">
@@ -27768,7 +29380,7 @@
         </p:blipFill>
         <p:spPr>
           <a:xfrm>
-            <a:off x="922911" y="1916832"/>
+            <a:off x="850333" y="1844824"/>
             <a:ext cx="10346178" cy="3865476"/>
           </a:xfrm>
           <a:prstGeom prst="rect">
@@ -28869,10 +30481,284 @@
           <a:chExt cx="0" cy="0"/>
         </a:xfrm>
       </p:grpSpPr>
+      <p:sp>
+        <p:nvSpPr>
+          <p:cNvPr id="2" name="Title 1">
+            <a:extLst>
+              <a:ext uri="{FF2B5EF4-FFF2-40B4-BE49-F238E27FC236}">
+                <a16:creationId xmlns:a16="http://schemas.microsoft.com/office/drawing/2014/main" id="{CA683DAE-E903-1AD3-541C-B0B94A7EEBE5}"/>
+              </a:ext>
+            </a:extLst>
+          </p:cNvPr>
+          <p:cNvSpPr>
+            <a:spLocks noGrp="1"/>
+          </p:cNvSpPr>
+          <p:nvPr>
+            <p:ph type="ctrTitle"/>
+          </p:nvPr>
+        </p:nvSpPr>
+        <p:spPr/>
+        <p:txBody>
+          <a:bodyPr/>
+          <a:lstStyle/>
+          <a:p>
+            <a:r>
+              <a:rPr lang="en-US" dirty="0"/>
+              <a:t>Appendix</a:t>
+            </a:r>
+            <a:endParaRPr lang="en-CH" dirty="0"/>
+          </a:p>
+        </p:txBody>
+      </p:sp>
     </p:spTree>
     <p:extLst>
       <p:ext uri="{BB962C8B-B14F-4D97-AF65-F5344CB8AC3E}">
-        <p14:creationId xmlns:p14="http://schemas.microsoft.com/office/powerpoint/2010/main" val="3841146111"/>
+        <p14:creationId xmlns:p14="http://schemas.microsoft.com/office/powerpoint/2010/main" val="3023933571"/>
+      </p:ext>
+    </p:extLst>
+  </p:cSld>
+  <p:clrMapOvr>
+    <a:masterClrMapping/>
+  </p:clrMapOvr>
+</p:sld>
+</file>
+
+<file path=ppt/slides/slide9.xml><?xml version="1.0" encoding="utf-8"?>
+<p:sld xmlns:a="http://schemas.openxmlformats.org/drawingml/2006/main" xmlns:r="http://schemas.openxmlformats.org/officeDocument/2006/relationships" xmlns:p="http://schemas.openxmlformats.org/presentationml/2006/main">
+  <p:cSld>
+    <p:spTree>
+      <p:nvGrpSpPr>
+        <p:cNvPr id="1" name="">
+          <a:extLst>
+            <a:ext uri="{FF2B5EF4-FFF2-40B4-BE49-F238E27FC236}">
+              <a16:creationId xmlns:a16="http://schemas.microsoft.com/office/drawing/2014/main" id="{64822507-8817-78A8-D98E-16AB86B74205}"/>
+            </a:ext>
+          </a:extLst>
+        </p:cNvPr>
+        <p:cNvGrpSpPr/>
+        <p:nvPr/>
+      </p:nvGrpSpPr>
+      <p:grpSpPr>
+        <a:xfrm>
+          <a:off x="0" y="0"/>
+          <a:ext cx="0" cy="0"/>
+          <a:chOff x="0" y="0"/>
+          <a:chExt cx="0" cy="0"/>
+        </a:xfrm>
+      </p:grpSpPr>
+      <p:sp>
+        <p:nvSpPr>
+          <p:cNvPr id="2" name="Title 1">
+            <a:extLst>
+              <a:ext uri="{FF2B5EF4-FFF2-40B4-BE49-F238E27FC236}">
+                <a16:creationId xmlns:a16="http://schemas.microsoft.com/office/drawing/2014/main" id="{C84E6C8F-C1DE-A2B5-2740-0A9ED057D158}"/>
+              </a:ext>
+            </a:extLst>
+          </p:cNvPr>
+          <p:cNvSpPr>
+            <a:spLocks noGrp="1"/>
+          </p:cNvSpPr>
+          <p:nvPr>
+            <p:ph type="title"/>
+          </p:nvPr>
+        </p:nvSpPr>
+        <p:spPr/>
+        <p:txBody>
+          <a:bodyPr/>
+          <a:lstStyle/>
+          <a:p>
+            <a:r>
+              <a:rPr lang="en-GB" sz="1000" b="1" dirty="0">
+                <a:solidFill>
+                  <a:srgbClr val="800000"/>
+                </a:solidFill>
+                <a:effectLst/>
+                <a:highlight>
+                  <a:srgbClr val="FFFFFF"/>
+                </a:highlight>
+                <a:latin typeface="Menlo" panose="020B0609030804020204" pitchFamily="49" charset="0"/>
+              </a:rPr>
+              <a:t>Booster Adoption by Commune (Urban vs Rural)</a:t>
+            </a:r>
+            <a:endParaRPr lang="en-GB" sz="1000" b="0" dirty="0">
+              <a:solidFill>
+                <a:srgbClr val="3B3B3B"/>
+              </a:solidFill>
+              <a:effectLst/>
+              <a:highlight>
+                <a:srgbClr val="FFFFFF"/>
+              </a:highlight>
+              <a:latin typeface="Menlo" panose="020B0609030804020204" pitchFamily="49" charset="0"/>
+            </a:endParaRPr>
+          </a:p>
+        </p:txBody>
+      </p:sp>
+      <p:sp>
+        <p:nvSpPr>
+          <p:cNvPr id="3" name="Date Placeholder 2">
+            <a:extLst>
+              <a:ext uri="{FF2B5EF4-FFF2-40B4-BE49-F238E27FC236}">
+                <a16:creationId xmlns:a16="http://schemas.microsoft.com/office/drawing/2014/main" id="{AED5308D-CD8A-45AF-F95B-19E4E058B4DA}"/>
+              </a:ext>
+            </a:extLst>
+          </p:cNvPr>
+          <p:cNvSpPr>
+            <a:spLocks noGrp="1"/>
+          </p:cNvSpPr>
+          <p:nvPr>
+            <p:ph type="dt" sz="half" idx="2"/>
+          </p:nvPr>
+        </p:nvSpPr>
+        <p:spPr/>
+        <p:txBody>
+          <a:bodyPr/>
+          <a:lstStyle/>
+          <a:p>
+            <a:fld id="{822B4C34-8539-4A47-8763-AA072889AAA3}" type="datetime1">
+              <a:rPr lang="en-GB" smtClean="0"/>
+              <a:t>18/06/2026</a:t>
+            </a:fld>
+            <a:endParaRPr lang="en-GB" dirty="0"/>
+          </a:p>
+        </p:txBody>
+      </p:sp>
+      <p:sp>
+        <p:nvSpPr>
+          <p:cNvPr id="4" name="Footer Placeholder 3">
+            <a:extLst>
+              <a:ext uri="{FF2B5EF4-FFF2-40B4-BE49-F238E27FC236}">
+                <a16:creationId xmlns:a16="http://schemas.microsoft.com/office/drawing/2014/main" id="{5E4FD016-9AAA-6614-0DB2-187473E0889B}"/>
+              </a:ext>
+            </a:extLst>
+          </p:cNvPr>
+          <p:cNvSpPr>
+            <a:spLocks noGrp="1"/>
+          </p:cNvSpPr>
+          <p:nvPr>
+            <p:ph type="ftr" sz="quarter" idx="3"/>
+          </p:nvPr>
+        </p:nvSpPr>
+        <p:spPr/>
+        <p:txBody>
+          <a:bodyPr/>
+          <a:lstStyle/>
+          <a:p>
+            <a:r>
+              <a:rPr lang="en-GB"/>
+              <a:t>Presentation description - CONFIDENTIALTY NOTE</a:t>
+            </a:r>
+            <a:endParaRPr lang="en-GB" dirty="0"/>
+          </a:p>
+        </p:txBody>
+      </p:sp>
+      <p:sp>
+        <p:nvSpPr>
+          <p:cNvPr id="5" name="Slide Number Placeholder 4">
+            <a:extLst>
+              <a:ext uri="{FF2B5EF4-FFF2-40B4-BE49-F238E27FC236}">
+                <a16:creationId xmlns:a16="http://schemas.microsoft.com/office/drawing/2014/main" id="{4FF47039-538F-AC9F-93DB-E9846C2B5B16}"/>
+              </a:ext>
+            </a:extLst>
+          </p:cNvPr>
+          <p:cNvSpPr>
+            <a:spLocks noGrp="1"/>
+          </p:cNvSpPr>
+          <p:nvPr>
+            <p:ph type="sldNum" sz="quarter" idx="4"/>
+          </p:nvPr>
+        </p:nvSpPr>
+        <p:spPr/>
+        <p:txBody>
+          <a:bodyPr/>
+          <a:lstStyle/>
+          <a:p>
+            <a:fld id="{D622C71B-F0A5-40B6-B6DA-5780E9494F8A}" type="slidenum">
+              <a:rPr lang="en-GB" smtClean="0"/>
+              <a:pPr/>
+              <a:t>9</a:t>
+            </a:fld>
+            <a:endParaRPr lang="en-GB" dirty="0"/>
+          </a:p>
+        </p:txBody>
+      </p:sp>
+      <p:pic>
+        <p:nvPicPr>
+          <p:cNvPr id="10" name="Picture 9">
+            <a:extLst>
+              <a:ext uri="{FF2B5EF4-FFF2-40B4-BE49-F238E27FC236}">
+                <a16:creationId xmlns:a16="http://schemas.microsoft.com/office/drawing/2014/main" id="{48ADBED2-2F40-3A99-12F5-7BC66ECEFB27}"/>
+              </a:ext>
+            </a:extLst>
+          </p:cNvPr>
+          <p:cNvPicPr>
+            <a:picLocks noChangeAspect="1"/>
+          </p:cNvPicPr>
+          <p:nvPr/>
+        </p:nvPicPr>
+        <p:blipFill>
+          <a:blip r:embed="rId2"/>
+          <a:stretch>
+            <a:fillRect/>
+          </a:stretch>
+        </p:blipFill>
+        <p:spPr>
+          <a:xfrm>
+            <a:off x="1127448" y="1268760"/>
+            <a:ext cx="9634674" cy="4010372"/>
+          </a:xfrm>
+          <a:prstGeom prst="rect">
+            <a:avLst/>
+          </a:prstGeom>
+        </p:spPr>
+      </p:pic>
+      <p:sp>
+        <p:nvSpPr>
+          <p:cNvPr id="12" name="TextBox 11">
+            <a:extLst>
+              <a:ext uri="{FF2B5EF4-FFF2-40B4-BE49-F238E27FC236}">
+                <a16:creationId xmlns:a16="http://schemas.microsoft.com/office/drawing/2014/main" id="{E5839FA8-A612-E0F9-CB4D-D000F71D7D5E}"/>
+              </a:ext>
+            </a:extLst>
+          </p:cNvPr>
+          <p:cNvSpPr txBox="1"/>
+          <p:nvPr/>
+        </p:nvSpPr>
+        <p:spPr>
+          <a:xfrm>
+            <a:off x="344664" y="5470893"/>
+            <a:ext cx="10719888" cy="369332"/>
+          </a:xfrm>
+          <a:prstGeom prst="rect">
+            <a:avLst/>
+          </a:prstGeom>
+          <a:noFill/>
+        </p:spPr>
+        <p:txBody>
+          <a:bodyPr wrap="square">
+            <a:spAutoFit/>
+          </a:bodyPr>
+          <a:lstStyle/>
+          <a:p>
+            <a:r>
+              <a:rPr lang="en-GB" b="0" dirty="0">
+                <a:solidFill>
+                  <a:srgbClr val="3B3B3B"/>
+                </a:solidFill>
+                <a:effectLst/>
+                <a:highlight>
+                  <a:srgbClr val="FFFFFF"/>
+                </a:highlight>
+                <a:latin typeface="Menlo" panose="020B0609030804020204" pitchFamily="49" charset="0"/>
+              </a:rPr>
+              <a:t>Adoption by commune → Urban customers request it more than rural</a:t>
+            </a:r>
+          </a:p>
+        </p:txBody>
+      </p:sp>
+    </p:spTree>
+    <p:extLst>
+      <p:ext uri="{BB962C8B-B14F-4D97-AF65-F5344CB8AC3E}">
+        <p14:creationId xmlns:p14="http://schemas.microsoft.com/office/powerpoint/2010/main" val="2200950105"/>
       </p:ext>
     </p:extLst>
   </p:cSld>

--- a/presentation_new.pptx
+++ b/presentation_new.pptx
@@ -5,7 +5,7 @@
     <p:sldMasterId id="2147483860" r:id="rId4"/>
   </p:sldMasterIdLst>
   <p:notesMasterIdLst>
-    <p:notesMasterId r:id="rId21"/>
+    <p:notesMasterId r:id="rId26"/>
   </p:notesMasterIdLst>
   <p:sldIdLst>
     <p:sldId id="256" r:id="rId5"/>
@@ -23,12 +23,17 @@
     <p:sldId id="2147474656" r:id="rId17"/>
     <p:sldId id="2147474657" r:id="rId18"/>
     <p:sldId id="2147474658" r:id="rId19"/>
-    <p:sldId id="2147474626" r:id="rId20"/>
+    <p:sldId id="2147474659" r:id="rId20"/>
+    <p:sldId id="2147474660" r:id="rId21"/>
+    <p:sldId id="2147474662" r:id="rId22"/>
+    <p:sldId id="2147474661" r:id="rId23"/>
+    <p:sldId id="2147474663" r:id="rId24"/>
+    <p:sldId id="2147474626" r:id="rId25"/>
   </p:sldIdLst>
   <p:sldSz cx="12192000" cy="6858000"/>
   <p:notesSz cx="6858000" cy="9144000"/>
   <p:custDataLst>
-    <p:tags r:id="rId22"/>
+    <p:tags r:id="rId27"/>
   </p:custDataLst>
   <p:defaultTextStyle>
     <a:defPPr>
@@ -236,7 +241,7 @@
           <a:p>
             <a:fld id="{C0D074E5-F24B-4253-A921-8FC4C04D927C}" type="datetimeFigureOut">
               <a:rPr lang="de-DE" smtClean="0"/>
-              <a:t>17.06.26</a:t>
+              <a:t>18.06.26</a:t>
             </a:fld>
             <a:endParaRPr lang="de-DE"/>
           </a:p>
@@ -1139,7 +1144,7 @@
           <a:p>
             <a:fld id="{8C21673D-680A-4025-B6B6-528AB9DA251C}" type="datetime1">
               <a:rPr lang="en-GB" smtClean="0"/>
-              <a:t>17/06/2026</a:t>
+              <a:t>18/06/2026</a:t>
             </a:fld>
             <a:endParaRPr lang="en-GB" dirty="0"/>
           </a:p>
@@ -1483,7 +1488,7 @@
           <a:p>
             <a:fld id="{980D3C6D-0C60-4077-B8F5-4AFD9EB44CEB}" type="datetime1">
               <a:rPr lang="en-GB" smtClean="0"/>
-              <a:t>17/06/2026</a:t>
+              <a:t>18/06/2026</a:t>
             </a:fld>
             <a:endParaRPr lang="en-GB" dirty="0"/>
           </a:p>
@@ -1866,7 +1871,7 @@
           <a:p>
             <a:fld id="{14FF7643-2260-4D08-BBF8-F7646AE050AE}" type="datetime1">
               <a:rPr lang="en-GB" smtClean="0"/>
-              <a:t>17/06/2026</a:t>
+              <a:t>18/06/2026</a:t>
             </a:fld>
             <a:endParaRPr lang="en-GB" dirty="0"/>
           </a:p>
@@ -2306,7 +2311,7 @@
           <a:p>
             <a:fld id="{46984B99-A897-4A05-A0F3-1741C3D6E03C}" type="datetime1">
               <a:rPr lang="en-GB" smtClean="0"/>
-              <a:t>17/06/2026</a:t>
+              <a:t>18/06/2026</a:t>
             </a:fld>
             <a:endParaRPr lang="en-GB" dirty="0"/>
           </a:p>
@@ -2790,7 +2795,7 @@
           <a:p>
             <a:fld id="{F886E17A-53FD-412F-869A-60D88EE1E54A}" type="datetime1">
               <a:rPr lang="en-GB" smtClean="0"/>
-              <a:t>17/06/2026</a:t>
+              <a:t>18/06/2026</a:t>
             </a:fld>
             <a:endParaRPr lang="en-GB" dirty="0"/>
           </a:p>
@@ -3130,7 +3135,7 @@
           <a:p>
             <a:fld id="{84524D99-D08C-47D2-9C1D-2F9369D5FC7A}" type="datetime1">
               <a:rPr lang="en-GB" smtClean="0"/>
-              <a:t>17/06/2026</a:t>
+              <a:t>18/06/2026</a:t>
             </a:fld>
             <a:endParaRPr lang="en-GB" dirty="0"/>
           </a:p>
@@ -3389,7 +3394,7 @@
           <a:p>
             <a:fld id="{28F1BA84-C88E-4FDF-B562-D56B575E9501}" type="datetime1">
               <a:rPr lang="en-GB" smtClean="0"/>
-              <a:t>17/06/2026</a:t>
+              <a:t>18/06/2026</a:t>
             </a:fld>
             <a:endParaRPr lang="en-GB" dirty="0"/>
           </a:p>
@@ -3903,7 +3908,7 @@
           <a:p>
             <a:fld id="{E2F89AF4-20FC-4616-ACAC-599714B2D075}" type="datetime1">
               <a:rPr lang="en-GB" smtClean="0"/>
-              <a:t>17/06/2026</a:t>
+              <a:t>18/06/2026</a:t>
             </a:fld>
             <a:endParaRPr lang="en-GB" dirty="0"/>
           </a:p>
@@ -4493,7 +4498,7 @@
           <a:p>
             <a:fld id="{C5BF00B2-647E-424E-88BB-194BA4333135}" type="datetime1">
               <a:rPr lang="en-GB" smtClean="0"/>
-              <a:t>17/06/2026</a:t>
+              <a:t>18/06/2026</a:t>
             </a:fld>
             <a:endParaRPr lang="en-GB" dirty="0"/>
           </a:p>
@@ -5716,7 +5721,7 @@
           <a:p>
             <a:fld id="{6F9DA59C-E5C1-4CC8-8A7C-03BD03EA2C2F}" type="datetime1">
               <a:rPr lang="en-GB" smtClean="0"/>
-              <a:t>17/06/2026</a:t>
+              <a:t>18/06/2026</a:t>
             </a:fld>
             <a:endParaRPr lang="en-GB" dirty="0"/>
           </a:p>
@@ -7638,7 +7643,7 @@
           <a:p>
             <a:fld id="{D34B78A1-1E98-4D0A-918E-FDF3FA825995}" type="datetime1">
               <a:rPr lang="en-GB" smtClean="0"/>
-              <a:t>17/06/2026</a:t>
+              <a:t>18/06/2026</a:t>
             </a:fld>
             <a:endParaRPr lang="en-GB" dirty="0"/>
           </a:p>
@@ -13185,7 +13190,7 @@
             <a:fld id="{D34B78A1-1E98-4D0A-918E-FDF3FA825995}" type="datetime1">
               <a:rPr lang="en-GB" smtClean="0"/>
               <a:pPr/>
-              <a:t>17/06/2026</a:t>
+              <a:t>18/06/2026</a:t>
             </a:fld>
             <a:endParaRPr lang="en-GB" dirty="0"/>
           </a:p>
@@ -15918,7 +15923,7 @@
             <a:fld id="{D34B78A1-1E98-4D0A-918E-FDF3FA825995}" type="datetime1">
               <a:rPr lang="en-GB" smtClean="0"/>
               <a:pPr/>
-              <a:t>17/06/2026</a:t>
+              <a:t>18/06/2026</a:t>
             </a:fld>
             <a:endParaRPr lang="en-GB" dirty="0"/>
           </a:p>
@@ -19209,7 +19214,7 @@
             <a:fld id="{D34B78A1-1E98-4D0A-918E-FDF3FA825995}" type="datetime1">
               <a:rPr lang="en-GB" smtClean="0"/>
               <a:pPr/>
-              <a:t>17/06/2026</a:t>
+              <a:t>18/06/2026</a:t>
             </a:fld>
             <a:endParaRPr lang="en-GB" dirty="0"/>
           </a:p>
@@ -23085,7 +23090,7 @@
           <a:p>
             <a:fld id="{6963F8C3-E174-46F7-A860-B75DC1343E3B}" type="datetime1">
               <a:rPr lang="en-GB" smtClean="0"/>
-              <a:t>17/06/2026</a:t>
+              <a:t>18/06/2026</a:t>
             </a:fld>
             <a:endParaRPr lang="en-GB" dirty="0"/>
           </a:p>
@@ -23425,7 +23430,7 @@
           <a:p>
             <a:fld id="{EB1C7205-C863-4E78-8E8D-3B4876964C7F}" type="datetime1">
               <a:rPr lang="en-GB" smtClean="0"/>
-              <a:t>17/06/2026</a:t>
+              <a:t>18/06/2026</a:t>
             </a:fld>
             <a:endParaRPr lang="en-GB" dirty="0"/>
           </a:p>
@@ -23612,7 +23617,7 @@
           <a:p>
             <a:fld id="{92BD7BEA-F208-4EA6-9D7D-7072581083D1}" type="datetime1">
               <a:rPr lang="en-GB" smtClean="0"/>
-              <a:t>17/06/2026</a:t>
+              <a:t>18/06/2026</a:t>
             </a:fld>
             <a:endParaRPr lang="en-GB" dirty="0"/>
           </a:p>
@@ -23845,7 +23850,7 @@
           <a:p>
             <a:fld id="{822B4C34-8539-4A47-8763-AA072889AAA3}" type="datetime1">
               <a:rPr lang="en-GB" smtClean="0"/>
-              <a:t>17/06/2026</a:t>
+              <a:t>18/06/2026</a:t>
             </a:fld>
             <a:endParaRPr lang="en-GB" dirty="0"/>
           </a:p>
@@ -24226,7 +24231,7 @@
           <a:p>
             <a:fld id="{822B4C34-8539-4A47-8763-AA072889AAA3}" type="datetime1">
               <a:rPr lang="en-GB" smtClean="0"/>
-              <a:t>17/06/2026</a:t>
+              <a:t>18/06/2026</a:t>
             </a:fld>
             <a:endParaRPr lang="en-GB" dirty="0"/>
           </a:p>
@@ -26985,7 +26990,13 @@
   <p:cSld>
     <p:spTree>
       <p:nvGrpSpPr>
-        <p:cNvPr id="1" name=""/>
+        <p:cNvPr id="1" name="">
+          <a:extLst>
+            <a:ext uri="{FF2B5EF4-FFF2-40B4-BE49-F238E27FC236}">
+              <a16:creationId xmlns:a16="http://schemas.microsoft.com/office/drawing/2014/main" id="{40CF06B0-DB72-0C98-D1D9-94BC2C5BB704}"/>
+            </a:ext>
+          </a:extLst>
+        </p:cNvPr>
         <p:cNvGrpSpPr/>
         <p:nvPr/>
       </p:nvGrpSpPr>
@@ -26997,10 +27008,5212 @@
           <a:chExt cx="0" cy="0"/>
         </a:xfrm>
       </p:grpSpPr>
+      <p:sp>
+        <p:nvSpPr>
+          <p:cNvPr id="2" name="Title 1">
+            <a:extLst>
+              <a:ext uri="{FF2B5EF4-FFF2-40B4-BE49-F238E27FC236}">
+                <a16:creationId xmlns:a16="http://schemas.microsoft.com/office/drawing/2014/main" id="{431066FE-C7B5-8F4A-77BF-B3A79D8BA84F}"/>
+              </a:ext>
+            </a:extLst>
+          </p:cNvPr>
+          <p:cNvSpPr>
+            <a:spLocks noGrp="1"/>
+          </p:cNvSpPr>
+          <p:nvPr>
+            <p:ph type="ctrTitle"/>
+          </p:nvPr>
+        </p:nvSpPr>
+        <p:spPr/>
+        <p:txBody>
+          <a:bodyPr/>
+          <a:lstStyle/>
+          <a:p>
+            <a:r>
+              <a:rPr lang="en-US" dirty="0"/>
+              <a:t>Appendix: AME, ATT</a:t>
+            </a:r>
+            <a:endParaRPr lang="en-CH" dirty="0"/>
+          </a:p>
+        </p:txBody>
+      </p:sp>
     </p:spTree>
     <p:extLst>
       <p:ext uri="{BB962C8B-B14F-4D97-AF65-F5344CB8AC3E}">
-        <p14:creationId xmlns:p14="http://schemas.microsoft.com/office/powerpoint/2010/main" val="3841146111"/>
+        <p14:creationId xmlns:p14="http://schemas.microsoft.com/office/powerpoint/2010/main" val="643755910"/>
+      </p:ext>
+    </p:extLst>
+  </p:cSld>
+  <p:clrMapOvr>
+    <a:masterClrMapping/>
+  </p:clrMapOvr>
+</p:sld>
+</file>
+
+<file path=ppt/slides/slide17.xml><?xml version="1.0" encoding="utf-8"?>
+<p:sld xmlns:a="http://schemas.openxmlformats.org/drawingml/2006/main" xmlns:r="http://schemas.openxmlformats.org/officeDocument/2006/relationships" xmlns:p="http://schemas.openxmlformats.org/presentationml/2006/main">
+  <p:cSld>
+    <p:spTree>
+      <p:nvGrpSpPr>
+        <p:cNvPr id="1" name="">
+          <a:extLst>
+            <a:ext uri="{FF2B5EF4-FFF2-40B4-BE49-F238E27FC236}">
+              <a16:creationId xmlns:a16="http://schemas.microsoft.com/office/drawing/2014/main" id="{A8AEDEBA-E730-F910-E755-D4C70EE08A74}"/>
+            </a:ext>
+          </a:extLst>
+        </p:cNvPr>
+        <p:cNvGrpSpPr/>
+        <p:nvPr/>
+      </p:nvGrpSpPr>
+      <p:grpSpPr>
+        <a:xfrm>
+          <a:off x="0" y="0"/>
+          <a:ext cx="0" cy="0"/>
+          <a:chOff x="0" y="0"/>
+          <a:chExt cx="0" cy="0"/>
+        </a:xfrm>
+      </p:grpSpPr>
+      <p:sp>
+        <p:nvSpPr>
+          <p:cNvPr id="2" name="Title 1">
+            <a:extLst>
+              <a:ext uri="{FF2B5EF4-FFF2-40B4-BE49-F238E27FC236}">
+                <a16:creationId xmlns:a16="http://schemas.microsoft.com/office/drawing/2014/main" id="{528401D7-A488-235A-9042-120CD43D68A4}"/>
+              </a:ext>
+            </a:extLst>
+          </p:cNvPr>
+          <p:cNvSpPr>
+            <a:spLocks noGrp="1"/>
+          </p:cNvSpPr>
+          <p:nvPr>
+            <p:ph type="title"/>
+          </p:nvPr>
+        </p:nvSpPr>
+        <p:spPr/>
+        <p:txBody>
+          <a:bodyPr/>
+          <a:lstStyle/>
+          <a:p>
+            <a:r>
+              <a:rPr lang="en-GB" sz="800" b="1" dirty="0">
+                <a:solidFill>
+                  <a:srgbClr val="800000"/>
+                </a:solidFill>
+                <a:effectLst/>
+                <a:highlight>
+                  <a:srgbClr val="FFFFFF"/>
+                </a:highlight>
+                <a:latin typeface="Menlo" panose="020B0609030804020204" pitchFamily="49" charset="0"/>
+              </a:rPr>
+              <a:t>Propensity score matching: Average treatment effect on treated</a:t>
+            </a:r>
+            <a:endParaRPr lang="en-GB" sz="800" b="0" dirty="0">
+              <a:solidFill>
+                <a:srgbClr val="3B3B3B"/>
+              </a:solidFill>
+              <a:effectLst/>
+              <a:highlight>
+                <a:srgbClr val="FFFFFF"/>
+              </a:highlight>
+              <a:latin typeface="Menlo" panose="020B0609030804020204" pitchFamily="49" charset="0"/>
+            </a:endParaRPr>
+          </a:p>
+        </p:txBody>
+      </p:sp>
+      <p:sp>
+        <p:nvSpPr>
+          <p:cNvPr id="3" name="Date Placeholder 2">
+            <a:extLst>
+              <a:ext uri="{FF2B5EF4-FFF2-40B4-BE49-F238E27FC236}">
+                <a16:creationId xmlns:a16="http://schemas.microsoft.com/office/drawing/2014/main" id="{9B1E98D8-19DA-283E-44E3-6F83649B2E7E}"/>
+              </a:ext>
+            </a:extLst>
+          </p:cNvPr>
+          <p:cNvSpPr>
+            <a:spLocks noGrp="1"/>
+          </p:cNvSpPr>
+          <p:nvPr>
+            <p:ph type="dt" sz="half" idx="2"/>
+          </p:nvPr>
+        </p:nvSpPr>
+        <p:spPr/>
+        <p:txBody>
+          <a:bodyPr/>
+          <a:lstStyle/>
+          <a:p>
+            <a:fld id="{822B4C34-8539-4A47-8763-AA072889AAA3}" type="datetime1">
+              <a:rPr lang="en-GB" smtClean="0"/>
+              <a:t>18/06/2026</a:t>
+            </a:fld>
+            <a:endParaRPr lang="en-GB" dirty="0"/>
+          </a:p>
+        </p:txBody>
+      </p:sp>
+      <p:sp>
+        <p:nvSpPr>
+          <p:cNvPr id="4" name="Footer Placeholder 3">
+            <a:extLst>
+              <a:ext uri="{FF2B5EF4-FFF2-40B4-BE49-F238E27FC236}">
+                <a16:creationId xmlns:a16="http://schemas.microsoft.com/office/drawing/2014/main" id="{DB2D0A03-B75E-6C28-78E4-819DC3698248}"/>
+              </a:ext>
+            </a:extLst>
+          </p:cNvPr>
+          <p:cNvSpPr>
+            <a:spLocks noGrp="1"/>
+          </p:cNvSpPr>
+          <p:nvPr>
+            <p:ph type="ftr" sz="quarter" idx="3"/>
+          </p:nvPr>
+        </p:nvSpPr>
+        <p:spPr/>
+        <p:txBody>
+          <a:bodyPr/>
+          <a:lstStyle/>
+          <a:p>
+            <a:r>
+              <a:rPr lang="en-GB"/>
+              <a:t>Presentation description - CONFIDENTIALTY NOTE</a:t>
+            </a:r>
+            <a:endParaRPr lang="en-GB" dirty="0"/>
+          </a:p>
+        </p:txBody>
+      </p:sp>
+      <p:sp>
+        <p:nvSpPr>
+          <p:cNvPr id="5" name="Slide Number Placeholder 4">
+            <a:extLst>
+              <a:ext uri="{FF2B5EF4-FFF2-40B4-BE49-F238E27FC236}">
+                <a16:creationId xmlns:a16="http://schemas.microsoft.com/office/drawing/2014/main" id="{5B640907-0F6C-48D4-5E49-5EE72B6E54E9}"/>
+              </a:ext>
+            </a:extLst>
+          </p:cNvPr>
+          <p:cNvSpPr>
+            <a:spLocks noGrp="1"/>
+          </p:cNvSpPr>
+          <p:nvPr>
+            <p:ph type="sldNum" sz="quarter" idx="4"/>
+          </p:nvPr>
+        </p:nvSpPr>
+        <p:spPr/>
+        <p:txBody>
+          <a:bodyPr/>
+          <a:lstStyle/>
+          <a:p>
+            <a:fld id="{D622C71B-F0A5-40B6-B6DA-5780E9494F8A}" type="slidenum">
+              <a:rPr lang="en-GB" smtClean="0"/>
+              <a:pPr/>
+              <a:t>17</a:t>
+            </a:fld>
+            <a:endParaRPr lang="en-GB" dirty="0"/>
+          </a:p>
+        </p:txBody>
+      </p:sp>
+      <p:sp>
+        <p:nvSpPr>
+          <p:cNvPr id="9" name="TextBox 8">
+            <a:extLst>
+              <a:ext uri="{FF2B5EF4-FFF2-40B4-BE49-F238E27FC236}">
+                <a16:creationId xmlns:a16="http://schemas.microsoft.com/office/drawing/2014/main" id="{6EDD697F-47B0-BD8E-3964-8DB3628D0830}"/>
+              </a:ext>
+            </a:extLst>
+          </p:cNvPr>
+          <p:cNvSpPr txBox="1"/>
+          <p:nvPr/>
+        </p:nvSpPr>
+        <p:spPr>
+          <a:xfrm>
+            <a:off x="406800" y="1556791"/>
+            <a:ext cx="11161808" cy="4662815"/>
+          </a:xfrm>
+          <a:prstGeom prst="rect">
+            <a:avLst/>
+          </a:prstGeom>
+          <a:noFill/>
+        </p:spPr>
+        <p:txBody>
+          <a:bodyPr wrap="square">
+            <a:spAutoFit/>
+          </a:bodyPr>
+          <a:lstStyle/>
+          <a:p>
+            <a:r>
+              <a:rPr lang="en-GB" sz="900" b="1" dirty="0">
+                <a:solidFill>
+                  <a:srgbClr val="800000"/>
+                </a:solidFill>
+                <a:effectLst/>
+                <a:highlight>
+                  <a:srgbClr val="FFFFFF"/>
+                </a:highlight>
+                <a:latin typeface="Menlo" panose="020B0609030804020204" pitchFamily="49" charset="0"/>
+              </a:rPr>
+              <a:t>## Method Overview With Formulas</a:t>
+            </a:r>
+            <a:endParaRPr lang="en-GB" sz="900" b="0" dirty="0">
+              <a:solidFill>
+                <a:srgbClr val="3B3B3B"/>
+              </a:solidFill>
+              <a:effectLst/>
+              <a:highlight>
+                <a:srgbClr val="FFFFFF"/>
+              </a:highlight>
+              <a:latin typeface="Menlo" panose="020B0609030804020204" pitchFamily="49" charset="0"/>
+            </a:endParaRPr>
+          </a:p>
+          <a:p>
+            <a:br>
+              <a:rPr lang="en-GB" sz="900" b="0" dirty="0">
+                <a:solidFill>
+                  <a:srgbClr val="3B3B3B"/>
+                </a:solidFill>
+                <a:effectLst/>
+                <a:highlight>
+                  <a:srgbClr val="FFFFFF"/>
+                </a:highlight>
+                <a:latin typeface="Menlo" panose="020B0609030804020204" pitchFamily="49" charset="0"/>
+              </a:rPr>
+            </a:br>
+            <a:r>
+              <a:rPr lang="en-GB" sz="900" b="0" dirty="0">
+                <a:solidFill>
+                  <a:srgbClr val="3B3B3B"/>
+                </a:solidFill>
+                <a:effectLst/>
+                <a:highlight>
+                  <a:srgbClr val="FFFFFF"/>
+                </a:highlight>
+                <a:latin typeface="Menlo" panose="020B0609030804020204" pitchFamily="49" charset="0"/>
+              </a:rPr>
+              <a:t>Let $</a:t>
+            </a:r>
+            <a:r>
+              <a:rPr lang="en-GB" sz="900" b="0" dirty="0" err="1">
+                <a:solidFill>
+                  <a:srgbClr val="000000"/>
+                </a:solidFill>
+                <a:effectLst/>
+                <a:highlight>
+                  <a:srgbClr val="FFFFFF"/>
+                </a:highlight>
+                <a:latin typeface="Menlo" panose="020B0609030804020204" pitchFamily="49" charset="0"/>
+              </a:rPr>
+              <a:t>T_i</a:t>
+            </a:r>
+            <a:r>
+              <a:rPr lang="en-GB" sz="900" b="0" dirty="0">
+                <a:solidFill>
+                  <a:srgbClr val="000000"/>
+                </a:solidFill>
+                <a:effectLst/>
+                <a:highlight>
+                  <a:srgbClr val="FFFFFF"/>
+                </a:highlight>
+                <a:latin typeface="Menlo" panose="020B0609030804020204" pitchFamily="49" charset="0"/>
+              </a:rPr>
+              <a:t> </a:t>
+            </a:r>
+            <a:r>
+              <a:rPr lang="en-GB" sz="900" b="0" dirty="0">
+                <a:solidFill>
+                  <a:srgbClr val="0000FF"/>
+                </a:solidFill>
+                <a:effectLst/>
+                <a:highlight>
+                  <a:srgbClr val="FFFFFF"/>
+                </a:highlight>
+                <a:latin typeface="Menlo" panose="020B0609030804020204" pitchFamily="49" charset="0"/>
+              </a:rPr>
+              <a:t>\in</a:t>
+            </a:r>
+            <a:r>
+              <a:rPr lang="en-GB" sz="900" b="0" dirty="0">
+                <a:solidFill>
+                  <a:srgbClr val="000000"/>
+                </a:solidFill>
+                <a:effectLst/>
+                <a:highlight>
+                  <a:srgbClr val="FFFFFF"/>
+                </a:highlight>
+                <a:latin typeface="Menlo" panose="020B0609030804020204" pitchFamily="49" charset="0"/>
+              </a:rPr>
+              <a:t> \{</a:t>
+            </a:r>
+            <a:r>
+              <a:rPr lang="en-GB" sz="900" b="0" dirty="0">
+                <a:solidFill>
+                  <a:srgbClr val="098658"/>
+                </a:solidFill>
+                <a:effectLst/>
+                <a:highlight>
+                  <a:srgbClr val="FFFFFF"/>
+                </a:highlight>
+                <a:latin typeface="Menlo" panose="020B0609030804020204" pitchFamily="49" charset="0"/>
+              </a:rPr>
+              <a:t>0</a:t>
+            </a:r>
+            <a:r>
+              <a:rPr lang="en-GB" sz="900" b="0" dirty="0">
+                <a:solidFill>
+                  <a:srgbClr val="000000"/>
+                </a:solidFill>
+                <a:effectLst/>
+                <a:highlight>
+                  <a:srgbClr val="FFFFFF"/>
+                </a:highlight>
+                <a:latin typeface="Menlo" panose="020B0609030804020204" pitchFamily="49" charset="0"/>
+              </a:rPr>
+              <a:t>,</a:t>
+            </a:r>
+            <a:r>
+              <a:rPr lang="en-GB" sz="900" b="0" dirty="0">
+                <a:solidFill>
+                  <a:srgbClr val="098658"/>
+                </a:solidFill>
+                <a:effectLst/>
+                <a:highlight>
+                  <a:srgbClr val="FFFFFF"/>
+                </a:highlight>
+                <a:latin typeface="Menlo" panose="020B0609030804020204" pitchFamily="49" charset="0"/>
+              </a:rPr>
+              <a:t>1</a:t>
+            </a:r>
+            <a:r>
+              <a:rPr lang="en-GB" sz="900" b="0" dirty="0">
+                <a:solidFill>
+                  <a:srgbClr val="000000"/>
+                </a:solidFill>
+                <a:effectLst/>
+                <a:highlight>
+                  <a:srgbClr val="FFFFFF"/>
+                </a:highlight>
+                <a:latin typeface="Menlo" panose="020B0609030804020204" pitchFamily="49" charset="0"/>
+              </a:rPr>
+              <a:t>\}</a:t>
+            </a:r>
+            <a:r>
+              <a:rPr lang="en-GB" sz="900" b="0" dirty="0">
+                <a:solidFill>
+                  <a:srgbClr val="3B3B3B"/>
+                </a:solidFill>
+                <a:effectLst/>
+                <a:highlight>
+                  <a:srgbClr val="FFFFFF"/>
+                </a:highlight>
+                <a:latin typeface="Menlo" panose="020B0609030804020204" pitchFamily="49" charset="0"/>
+              </a:rPr>
+              <a:t>$ indicate booster adoption, $</a:t>
+            </a:r>
+            <a:r>
+              <a:rPr lang="en-GB" sz="900" b="0" dirty="0" err="1">
+                <a:solidFill>
+                  <a:srgbClr val="000000"/>
+                </a:solidFill>
+                <a:effectLst/>
+                <a:highlight>
+                  <a:srgbClr val="FFFFFF"/>
+                </a:highlight>
+                <a:latin typeface="Menlo" panose="020B0609030804020204" pitchFamily="49" charset="0"/>
+              </a:rPr>
+              <a:t>Y_i</a:t>
+            </a:r>
+            <a:r>
+              <a:rPr lang="en-GB" sz="900" b="0" dirty="0">
+                <a:solidFill>
+                  <a:srgbClr val="000000"/>
+                </a:solidFill>
+                <a:effectLst/>
+                <a:highlight>
+                  <a:srgbClr val="FFFFFF"/>
+                </a:highlight>
+                <a:latin typeface="Menlo" panose="020B0609030804020204" pitchFamily="49" charset="0"/>
+              </a:rPr>
+              <a:t> </a:t>
+            </a:r>
+            <a:r>
+              <a:rPr lang="en-GB" sz="900" b="0" dirty="0">
+                <a:solidFill>
+                  <a:srgbClr val="0000FF"/>
+                </a:solidFill>
+                <a:effectLst/>
+                <a:highlight>
+                  <a:srgbClr val="FFFFFF"/>
+                </a:highlight>
+                <a:latin typeface="Menlo" panose="020B0609030804020204" pitchFamily="49" charset="0"/>
+              </a:rPr>
+              <a:t>\in</a:t>
+            </a:r>
+            <a:r>
+              <a:rPr lang="en-GB" sz="900" b="0" dirty="0">
+                <a:solidFill>
+                  <a:srgbClr val="000000"/>
+                </a:solidFill>
+                <a:effectLst/>
+                <a:highlight>
+                  <a:srgbClr val="FFFFFF"/>
+                </a:highlight>
+                <a:latin typeface="Menlo" panose="020B0609030804020204" pitchFamily="49" charset="0"/>
+              </a:rPr>
+              <a:t> \{</a:t>
+            </a:r>
+            <a:r>
+              <a:rPr lang="en-GB" sz="900" b="0" dirty="0">
+                <a:solidFill>
+                  <a:srgbClr val="098658"/>
+                </a:solidFill>
+                <a:effectLst/>
+                <a:highlight>
+                  <a:srgbClr val="FFFFFF"/>
+                </a:highlight>
+                <a:latin typeface="Menlo" panose="020B0609030804020204" pitchFamily="49" charset="0"/>
+              </a:rPr>
+              <a:t>0</a:t>
+            </a:r>
+            <a:r>
+              <a:rPr lang="en-GB" sz="900" b="0" dirty="0">
+                <a:solidFill>
+                  <a:srgbClr val="000000"/>
+                </a:solidFill>
+                <a:effectLst/>
+                <a:highlight>
+                  <a:srgbClr val="FFFFFF"/>
+                </a:highlight>
+                <a:latin typeface="Menlo" panose="020B0609030804020204" pitchFamily="49" charset="0"/>
+              </a:rPr>
+              <a:t>,</a:t>
+            </a:r>
+            <a:r>
+              <a:rPr lang="en-GB" sz="900" b="0" dirty="0">
+                <a:solidFill>
+                  <a:srgbClr val="098658"/>
+                </a:solidFill>
+                <a:effectLst/>
+                <a:highlight>
+                  <a:srgbClr val="FFFFFF"/>
+                </a:highlight>
+                <a:latin typeface="Menlo" panose="020B0609030804020204" pitchFamily="49" charset="0"/>
+              </a:rPr>
+              <a:t>1</a:t>
+            </a:r>
+            <a:r>
+              <a:rPr lang="en-GB" sz="900" b="0" dirty="0">
+                <a:solidFill>
+                  <a:srgbClr val="000000"/>
+                </a:solidFill>
+                <a:effectLst/>
+                <a:highlight>
+                  <a:srgbClr val="FFFFFF"/>
+                </a:highlight>
+                <a:latin typeface="Menlo" panose="020B0609030804020204" pitchFamily="49" charset="0"/>
+              </a:rPr>
+              <a:t>\}</a:t>
+            </a:r>
+            <a:r>
+              <a:rPr lang="en-GB" sz="900" b="0" dirty="0">
+                <a:solidFill>
+                  <a:srgbClr val="3B3B3B"/>
+                </a:solidFill>
+                <a:effectLst/>
+                <a:highlight>
+                  <a:srgbClr val="FFFFFF"/>
+                </a:highlight>
+                <a:latin typeface="Menlo" panose="020B0609030804020204" pitchFamily="49" charset="0"/>
+              </a:rPr>
+              <a:t>$ indicate churn, and $</a:t>
+            </a:r>
+            <a:r>
+              <a:rPr lang="en-GB" sz="900" b="0" dirty="0" err="1">
+                <a:solidFill>
+                  <a:srgbClr val="000000"/>
+                </a:solidFill>
+                <a:effectLst/>
+                <a:highlight>
+                  <a:srgbClr val="FFFFFF"/>
+                </a:highlight>
+                <a:latin typeface="Menlo" panose="020B0609030804020204" pitchFamily="49" charset="0"/>
+              </a:rPr>
+              <a:t>X_i</a:t>
+            </a:r>
+            <a:r>
+              <a:rPr lang="en-GB" sz="900" b="0" dirty="0">
+                <a:solidFill>
+                  <a:srgbClr val="3B3B3B"/>
+                </a:solidFill>
+                <a:effectLst/>
+                <a:highlight>
+                  <a:srgbClr val="FFFFFF"/>
+                </a:highlight>
+                <a:latin typeface="Menlo" panose="020B0609030804020204" pitchFamily="49" charset="0"/>
+              </a:rPr>
+              <a:t>$ be observed covariates.</a:t>
+            </a:r>
+          </a:p>
+          <a:p>
+            <a:br>
+              <a:rPr lang="en-GB" sz="900" b="0" dirty="0">
+                <a:solidFill>
+                  <a:srgbClr val="3B3B3B"/>
+                </a:solidFill>
+                <a:effectLst/>
+                <a:highlight>
+                  <a:srgbClr val="FFFFFF"/>
+                </a:highlight>
+                <a:latin typeface="Menlo" panose="020B0609030804020204" pitchFamily="49" charset="0"/>
+              </a:rPr>
+            </a:br>
+            <a:r>
+              <a:rPr lang="en-GB" sz="900" b="1" dirty="0">
+                <a:solidFill>
+                  <a:srgbClr val="800000"/>
+                </a:solidFill>
+                <a:effectLst/>
+                <a:highlight>
+                  <a:srgbClr val="FFFFFF"/>
+                </a:highlight>
+                <a:latin typeface="Menlo" panose="020B0609030804020204" pitchFamily="49" charset="0"/>
+              </a:rPr>
+              <a:t>### 1) Propensity score estimation</a:t>
+            </a:r>
+            <a:endParaRPr lang="en-GB" sz="900" b="0" dirty="0">
+              <a:solidFill>
+                <a:srgbClr val="3B3B3B"/>
+              </a:solidFill>
+              <a:effectLst/>
+              <a:highlight>
+                <a:srgbClr val="FFFFFF"/>
+              </a:highlight>
+              <a:latin typeface="Menlo" panose="020B0609030804020204" pitchFamily="49" charset="0"/>
+            </a:endParaRPr>
+          </a:p>
+          <a:p>
+            <a:br>
+              <a:rPr lang="en-GB" sz="900" b="0" dirty="0">
+                <a:solidFill>
+                  <a:srgbClr val="3B3B3B"/>
+                </a:solidFill>
+                <a:effectLst/>
+                <a:highlight>
+                  <a:srgbClr val="FFFFFF"/>
+                </a:highlight>
+                <a:latin typeface="Menlo" panose="020B0609030804020204" pitchFamily="49" charset="0"/>
+              </a:rPr>
+            </a:br>
+            <a:r>
+              <a:rPr lang="en-GB" sz="900" b="0" dirty="0">
+                <a:solidFill>
+                  <a:srgbClr val="3B3B3B"/>
+                </a:solidFill>
+                <a:effectLst/>
+                <a:highlight>
+                  <a:srgbClr val="FFFFFF"/>
+                </a:highlight>
+                <a:latin typeface="Menlo" panose="020B0609030804020204" pitchFamily="49" charset="0"/>
+              </a:rPr>
+              <a:t>We estimate treatment selection with logistic regression:</a:t>
+            </a:r>
+          </a:p>
+          <a:p>
+            <a:r>
+              <a:rPr lang="en-GB" sz="900" b="0" dirty="0">
+                <a:solidFill>
+                  <a:srgbClr val="3B3B3B"/>
+                </a:solidFill>
+                <a:effectLst/>
+                <a:highlight>
+                  <a:srgbClr val="FFFFFF"/>
+                </a:highlight>
+                <a:latin typeface="Menlo" panose="020B0609030804020204" pitchFamily="49" charset="0"/>
+              </a:rPr>
+              <a:t>$$</a:t>
+            </a:r>
+          </a:p>
+          <a:p>
+            <a:r>
+              <a:rPr lang="en-GB" sz="900" b="0" dirty="0">
+                <a:solidFill>
+                  <a:srgbClr val="000000"/>
+                </a:solidFill>
+                <a:effectLst/>
+                <a:highlight>
+                  <a:srgbClr val="FFFFFF"/>
+                </a:highlight>
+                <a:latin typeface="Menlo" panose="020B0609030804020204" pitchFamily="49" charset="0"/>
+              </a:rPr>
+              <a:t>e(</a:t>
+            </a:r>
+            <a:r>
+              <a:rPr lang="en-GB" sz="900" b="0" dirty="0" err="1">
+                <a:solidFill>
+                  <a:srgbClr val="000000"/>
+                </a:solidFill>
+                <a:effectLst/>
+                <a:highlight>
+                  <a:srgbClr val="FFFFFF"/>
+                </a:highlight>
+                <a:latin typeface="Menlo" panose="020B0609030804020204" pitchFamily="49" charset="0"/>
+              </a:rPr>
+              <a:t>X_i</a:t>
+            </a:r>
+            <a:r>
+              <a:rPr lang="en-GB" sz="900" b="0" dirty="0">
+                <a:solidFill>
+                  <a:srgbClr val="000000"/>
+                </a:solidFill>
+                <a:effectLst/>
+                <a:highlight>
+                  <a:srgbClr val="FFFFFF"/>
+                </a:highlight>
+                <a:latin typeface="Menlo" panose="020B0609030804020204" pitchFamily="49" charset="0"/>
+              </a:rPr>
+              <a:t>) = P(</a:t>
+            </a:r>
+            <a:r>
+              <a:rPr lang="en-GB" sz="900" b="0" dirty="0" err="1">
+                <a:solidFill>
+                  <a:srgbClr val="000000"/>
+                </a:solidFill>
+                <a:effectLst/>
+                <a:highlight>
+                  <a:srgbClr val="FFFFFF"/>
+                </a:highlight>
+                <a:latin typeface="Menlo" panose="020B0609030804020204" pitchFamily="49" charset="0"/>
+              </a:rPr>
+              <a:t>T_i</a:t>
+            </a:r>
+            <a:r>
+              <a:rPr lang="en-GB" sz="900" b="0" dirty="0">
+                <a:solidFill>
+                  <a:srgbClr val="000000"/>
+                </a:solidFill>
+                <a:effectLst/>
+                <a:highlight>
+                  <a:srgbClr val="FFFFFF"/>
+                </a:highlight>
+                <a:latin typeface="Menlo" panose="020B0609030804020204" pitchFamily="49" charset="0"/>
+              </a:rPr>
+              <a:t>=</a:t>
+            </a:r>
+            <a:r>
+              <a:rPr lang="en-GB" sz="900" b="0" dirty="0">
+                <a:solidFill>
+                  <a:srgbClr val="098658"/>
+                </a:solidFill>
+                <a:effectLst/>
+                <a:highlight>
+                  <a:srgbClr val="FFFFFF"/>
+                </a:highlight>
+                <a:latin typeface="Menlo" panose="020B0609030804020204" pitchFamily="49" charset="0"/>
+              </a:rPr>
+              <a:t>1</a:t>
+            </a:r>
+            <a:r>
+              <a:rPr lang="en-GB" sz="900" b="0" dirty="0">
+                <a:solidFill>
+                  <a:srgbClr val="0000FF"/>
+                </a:solidFill>
+                <a:effectLst/>
+                <a:highlight>
+                  <a:srgbClr val="FFFFFF"/>
+                </a:highlight>
+                <a:latin typeface="Menlo" panose="020B0609030804020204" pitchFamily="49" charset="0"/>
+              </a:rPr>
+              <a:t>\mid</a:t>
+            </a:r>
+            <a:r>
+              <a:rPr lang="en-GB" sz="900" b="0" dirty="0">
+                <a:solidFill>
+                  <a:srgbClr val="000000"/>
+                </a:solidFill>
+                <a:effectLst/>
+                <a:highlight>
+                  <a:srgbClr val="FFFFFF"/>
+                </a:highlight>
+                <a:latin typeface="Menlo" panose="020B0609030804020204" pitchFamily="49" charset="0"/>
+              </a:rPr>
+              <a:t> </a:t>
+            </a:r>
+            <a:r>
+              <a:rPr lang="en-GB" sz="900" b="0" dirty="0" err="1">
+                <a:solidFill>
+                  <a:srgbClr val="000000"/>
+                </a:solidFill>
+                <a:effectLst/>
+                <a:highlight>
+                  <a:srgbClr val="FFFFFF"/>
+                </a:highlight>
+                <a:latin typeface="Menlo" panose="020B0609030804020204" pitchFamily="49" charset="0"/>
+              </a:rPr>
+              <a:t>X_i</a:t>
+            </a:r>
+            <a:r>
+              <a:rPr lang="en-GB" sz="900" b="0" dirty="0">
+                <a:solidFill>
+                  <a:srgbClr val="000000"/>
+                </a:solidFill>
+                <a:effectLst/>
+                <a:highlight>
+                  <a:srgbClr val="FFFFFF"/>
+                </a:highlight>
+                <a:latin typeface="Menlo" panose="020B0609030804020204" pitchFamily="49" charset="0"/>
+              </a:rPr>
+              <a:t>) = </a:t>
+            </a:r>
+            <a:r>
+              <a:rPr lang="en-GB" sz="900" b="0" dirty="0">
+                <a:solidFill>
+                  <a:srgbClr val="0000FF"/>
+                </a:solidFill>
+                <a:effectLst/>
+                <a:highlight>
+                  <a:srgbClr val="FFFFFF"/>
+                </a:highlight>
+                <a:latin typeface="Menlo" panose="020B0609030804020204" pitchFamily="49" charset="0"/>
+              </a:rPr>
+              <a:t>\Lambda</a:t>
+            </a:r>
+            <a:r>
+              <a:rPr lang="en-GB" sz="900" b="0" dirty="0">
+                <a:solidFill>
+                  <a:srgbClr val="000000"/>
+                </a:solidFill>
+                <a:effectLst/>
+                <a:highlight>
+                  <a:srgbClr val="FFFFFF"/>
+                </a:highlight>
+                <a:latin typeface="Menlo" panose="020B0609030804020204" pitchFamily="49" charset="0"/>
+              </a:rPr>
+              <a:t>(</a:t>
+            </a:r>
+            <a:r>
+              <a:rPr lang="en-GB" sz="900" b="0" dirty="0" err="1">
+                <a:solidFill>
+                  <a:srgbClr val="000000"/>
+                </a:solidFill>
+                <a:effectLst/>
+                <a:highlight>
+                  <a:srgbClr val="FFFFFF"/>
+                </a:highlight>
+                <a:latin typeface="Menlo" panose="020B0609030804020204" pitchFamily="49" charset="0"/>
+              </a:rPr>
+              <a:t>X_i</a:t>
+            </a:r>
+            <a:r>
+              <a:rPr lang="en-GB" sz="900" b="0" dirty="0">
+                <a:solidFill>
+                  <a:srgbClr val="000000"/>
+                </a:solidFill>
+                <a:effectLst/>
+                <a:highlight>
+                  <a:srgbClr val="FFFFFF"/>
+                </a:highlight>
+                <a:latin typeface="Menlo" panose="020B0609030804020204" pitchFamily="49" charset="0"/>
+              </a:rPr>
+              <a:t>^</a:t>
+            </a:r>
+            <a:r>
+              <a:rPr lang="en-GB" sz="900" b="0" dirty="0">
+                <a:solidFill>
+                  <a:srgbClr val="0000FF"/>
+                </a:solidFill>
+                <a:effectLst/>
+                <a:highlight>
+                  <a:srgbClr val="FFFFFF"/>
+                </a:highlight>
+                <a:latin typeface="Menlo" panose="020B0609030804020204" pitchFamily="49" charset="0"/>
+              </a:rPr>
+              <a:t>\top\beta</a:t>
+            </a:r>
+            <a:r>
+              <a:rPr lang="en-GB" sz="900" b="0" dirty="0">
+                <a:solidFill>
+                  <a:srgbClr val="000000"/>
+                </a:solidFill>
+                <a:effectLst/>
+                <a:highlight>
+                  <a:srgbClr val="FFFFFF"/>
+                </a:highlight>
+                <a:latin typeface="Menlo" panose="020B0609030804020204" pitchFamily="49" charset="0"/>
+              </a:rPr>
+              <a:t>), </a:t>
+            </a:r>
+            <a:r>
+              <a:rPr lang="en-GB" sz="900" b="0" dirty="0">
+                <a:solidFill>
+                  <a:srgbClr val="0000FF"/>
+                </a:solidFill>
+                <a:effectLst/>
+                <a:highlight>
+                  <a:srgbClr val="FFFFFF"/>
+                </a:highlight>
+                <a:latin typeface="Menlo" panose="020B0609030804020204" pitchFamily="49" charset="0"/>
+              </a:rPr>
+              <a:t>\quad</a:t>
+            </a:r>
+            <a:r>
+              <a:rPr lang="en-GB" sz="900" b="0" dirty="0">
+                <a:solidFill>
+                  <a:srgbClr val="000000"/>
+                </a:solidFill>
+                <a:effectLst/>
+                <a:highlight>
+                  <a:srgbClr val="FFFFFF"/>
+                </a:highlight>
+                <a:latin typeface="Menlo" panose="020B0609030804020204" pitchFamily="49" charset="0"/>
+              </a:rPr>
+              <a:t> </a:t>
+            </a:r>
+            <a:r>
+              <a:rPr lang="en-GB" sz="900" b="0" dirty="0">
+                <a:solidFill>
+                  <a:srgbClr val="0000FF"/>
+                </a:solidFill>
+                <a:effectLst/>
+                <a:highlight>
+                  <a:srgbClr val="FFFFFF"/>
+                </a:highlight>
+                <a:latin typeface="Menlo" panose="020B0609030804020204" pitchFamily="49" charset="0"/>
+              </a:rPr>
+              <a:t>\Lambda</a:t>
+            </a:r>
+            <a:r>
+              <a:rPr lang="en-GB" sz="900" b="0" dirty="0">
+                <a:solidFill>
+                  <a:srgbClr val="000000"/>
+                </a:solidFill>
+                <a:effectLst/>
+                <a:highlight>
+                  <a:srgbClr val="FFFFFF"/>
+                </a:highlight>
+                <a:latin typeface="Menlo" panose="020B0609030804020204" pitchFamily="49" charset="0"/>
+              </a:rPr>
+              <a:t>(z)=</a:t>
+            </a:r>
+            <a:r>
+              <a:rPr lang="en-GB" sz="900" b="0" dirty="0">
+                <a:solidFill>
+                  <a:srgbClr val="0000FF"/>
+                </a:solidFill>
+                <a:effectLst/>
+                <a:highlight>
+                  <a:srgbClr val="FFFFFF"/>
+                </a:highlight>
+                <a:latin typeface="Menlo" panose="020B0609030804020204" pitchFamily="49" charset="0"/>
+              </a:rPr>
+              <a:t>\</a:t>
+            </a:r>
+            <a:r>
+              <a:rPr lang="en-GB" sz="900" b="0" dirty="0">
+                <a:solidFill>
+                  <a:srgbClr val="795E26"/>
+                </a:solidFill>
+                <a:effectLst/>
+                <a:highlight>
+                  <a:srgbClr val="FFFFFF"/>
+                </a:highlight>
+                <a:latin typeface="Menlo" panose="020B0609030804020204" pitchFamily="49" charset="0"/>
+              </a:rPr>
+              <a:t>frac</a:t>
+            </a:r>
+            <a:r>
+              <a:rPr lang="en-GB" sz="900" b="0" dirty="0">
+                <a:solidFill>
+                  <a:srgbClr val="000000"/>
+                </a:solidFill>
+                <a:effectLst/>
+                <a:highlight>
+                  <a:srgbClr val="FFFFFF"/>
+                </a:highlight>
+                <a:latin typeface="Menlo" panose="020B0609030804020204" pitchFamily="49" charset="0"/>
+              </a:rPr>
+              <a:t>{</a:t>
+            </a:r>
+            <a:r>
+              <a:rPr lang="en-GB" sz="900" b="0" dirty="0">
+                <a:solidFill>
+                  <a:srgbClr val="098658"/>
+                </a:solidFill>
+                <a:effectLst/>
+                <a:highlight>
+                  <a:srgbClr val="FFFFFF"/>
+                </a:highlight>
+                <a:latin typeface="Menlo" panose="020B0609030804020204" pitchFamily="49" charset="0"/>
+              </a:rPr>
+              <a:t>1</a:t>
+            </a:r>
+            <a:r>
+              <a:rPr lang="en-GB" sz="900" b="0" dirty="0">
+                <a:solidFill>
+                  <a:srgbClr val="000000"/>
+                </a:solidFill>
+                <a:effectLst/>
+                <a:highlight>
+                  <a:srgbClr val="FFFFFF"/>
+                </a:highlight>
+                <a:latin typeface="Menlo" panose="020B0609030804020204" pitchFamily="49" charset="0"/>
+              </a:rPr>
+              <a:t>}{</a:t>
+            </a:r>
+            <a:r>
+              <a:rPr lang="en-GB" sz="900" b="0" dirty="0">
+                <a:solidFill>
+                  <a:srgbClr val="098658"/>
+                </a:solidFill>
+                <a:effectLst/>
+                <a:highlight>
+                  <a:srgbClr val="FFFFFF"/>
+                </a:highlight>
+                <a:latin typeface="Menlo" panose="020B0609030804020204" pitchFamily="49" charset="0"/>
+              </a:rPr>
+              <a:t>1</a:t>
+            </a:r>
+            <a:r>
+              <a:rPr lang="en-GB" sz="900" b="0" dirty="0">
+                <a:solidFill>
+                  <a:srgbClr val="000000"/>
+                </a:solidFill>
+                <a:effectLst/>
+                <a:highlight>
+                  <a:srgbClr val="FFFFFF"/>
+                </a:highlight>
+                <a:latin typeface="Menlo" panose="020B0609030804020204" pitchFamily="49" charset="0"/>
+              </a:rPr>
+              <a:t>+e^{-z}}</a:t>
+            </a:r>
+            <a:endParaRPr lang="en-GB" sz="900" b="0" dirty="0">
+              <a:solidFill>
+                <a:srgbClr val="3B3B3B"/>
+              </a:solidFill>
+              <a:effectLst/>
+              <a:highlight>
+                <a:srgbClr val="FFFFFF"/>
+              </a:highlight>
+              <a:latin typeface="Menlo" panose="020B0609030804020204" pitchFamily="49" charset="0"/>
+            </a:endParaRPr>
+          </a:p>
+          <a:p>
+            <a:r>
+              <a:rPr lang="en-GB" sz="900" b="0" dirty="0">
+                <a:solidFill>
+                  <a:srgbClr val="3B3B3B"/>
+                </a:solidFill>
+                <a:effectLst/>
+                <a:highlight>
+                  <a:srgbClr val="FFFFFF"/>
+                </a:highlight>
+                <a:latin typeface="Menlo" panose="020B0609030804020204" pitchFamily="49" charset="0"/>
+              </a:rPr>
+              <a:t>$$</a:t>
+            </a:r>
+          </a:p>
+          <a:p>
+            <a:br>
+              <a:rPr lang="en-GB" sz="900" b="0" dirty="0">
+                <a:solidFill>
+                  <a:srgbClr val="3B3B3B"/>
+                </a:solidFill>
+                <a:effectLst/>
+                <a:highlight>
+                  <a:srgbClr val="FFFFFF"/>
+                </a:highlight>
+                <a:latin typeface="Menlo" panose="020B0609030804020204" pitchFamily="49" charset="0"/>
+              </a:rPr>
+            </a:br>
+            <a:r>
+              <a:rPr lang="en-GB" sz="900" b="1" dirty="0">
+                <a:solidFill>
+                  <a:srgbClr val="800000"/>
+                </a:solidFill>
+                <a:effectLst/>
+                <a:highlight>
+                  <a:srgbClr val="FFFFFF"/>
+                </a:highlight>
+                <a:latin typeface="Menlo" panose="020B0609030804020204" pitchFamily="49" charset="0"/>
+              </a:rPr>
+              <a:t>### 2) Nearest-</a:t>
+            </a:r>
+            <a:r>
+              <a:rPr lang="en-GB" sz="900" b="1" dirty="0" err="1">
+                <a:solidFill>
+                  <a:srgbClr val="800000"/>
+                </a:solidFill>
+                <a:effectLst/>
+                <a:highlight>
+                  <a:srgbClr val="FFFFFF"/>
+                </a:highlight>
+                <a:latin typeface="Menlo" panose="020B0609030804020204" pitchFamily="49" charset="0"/>
+              </a:rPr>
+              <a:t>neighbor</a:t>
+            </a:r>
+            <a:r>
+              <a:rPr lang="en-GB" sz="900" b="1" dirty="0">
+                <a:solidFill>
+                  <a:srgbClr val="800000"/>
+                </a:solidFill>
+                <a:effectLst/>
+                <a:highlight>
+                  <a:srgbClr val="FFFFFF"/>
+                </a:highlight>
+                <a:latin typeface="Menlo" panose="020B0609030804020204" pitchFamily="49" charset="0"/>
+              </a:rPr>
+              <a:t> matching in score space</a:t>
+            </a:r>
+            <a:endParaRPr lang="en-GB" sz="900" b="0" dirty="0">
+              <a:solidFill>
+                <a:srgbClr val="3B3B3B"/>
+              </a:solidFill>
+              <a:effectLst/>
+              <a:highlight>
+                <a:srgbClr val="FFFFFF"/>
+              </a:highlight>
+              <a:latin typeface="Menlo" panose="020B0609030804020204" pitchFamily="49" charset="0"/>
+            </a:endParaRPr>
+          </a:p>
+          <a:p>
+            <a:br>
+              <a:rPr lang="en-GB" sz="900" b="0" dirty="0">
+                <a:solidFill>
+                  <a:srgbClr val="3B3B3B"/>
+                </a:solidFill>
+                <a:effectLst/>
+                <a:highlight>
+                  <a:srgbClr val="FFFFFF"/>
+                </a:highlight>
+                <a:latin typeface="Menlo" panose="020B0609030804020204" pitchFamily="49" charset="0"/>
+              </a:rPr>
+            </a:br>
+            <a:r>
+              <a:rPr lang="en-GB" sz="900" b="0" dirty="0">
+                <a:solidFill>
+                  <a:srgbClr val="3B3B3B"/>
+                </a:solidFill>
+                <a:effectLst/>
+                <a:highlight>
+                  <a:srgbClr val="FFFFFF"/>
+                </a:highlight>
+                <a:latin typeface="Menlo" panose="020B0609030804020204" pitchFamily="49" charset="0"/>
+              </a:rPr>
+              <a:t>For each treated unit $</a:t>
+            </a:r>
+            <a:r>
+              <a:rPr lang="en-GB" sz="900" b="0" dirty="0" err="1">
+                <a:solidFill>
+                  <a:srgbClr val="000000"/>
+                </a:solidFill>
+                <a:effectLst/>
+                <a:highlight>
+                  <a:srgbClr val="FFFFFF"/>
+                </a:highlight>
+                <a:latin typeface="Menlo" panose="020B0609030804020204" pitchFamily="49" charset="0"/>
+              </a:rPr>
+              <a:t>i</a:t>
+            </a:r>
+            <a:r>
+              <a:rPr lang="en-GB" sz="900" b="0" dirty="0">
+                <a:solidFill>
+                  <a:srgbClr val="3B3B3B"/>
+                </a:solidFill>
+                <a:effectLst/>
+                <a:highlight>
+                  <a:srgbClr val="FFFFFF"/>
+                </a:highlight>
+                <a:latin typeface="Menlo" panose="020B0609030804020204" pitchFamily="49" charset="0"/>
+              </a:rPr>
+              <a:t>$ ($</a:t>
+            </a:r>
+            <a:r>
+              <a:rPr lang="en-GB" sz="900" b="0" dirty="0" err="1">
+                <a:solidFill>
+                  <a:srgbClr val="000000"/>
+                </a:solidFill>
+                <a:effectLst/>
+                <a:highlight>
+                  <a:srgbClr val="FFFFFF"/>
+                </a:highlight>
+                <a:latin typeface="Menlo" panose="020B0609030804020204" pitchFamily="49" charset="0"/>
+              </a:rPr>
+              <a:t>T_i</a:t>
+            </a:r>
+            <a:r>
+              <a:rPr lang="en-GB" sz="900" b="0" dirty="0">
+                <a:solidFill>
+                  <a:srgbClr val="000000"/>
+                </a:solidFill>
+                <a:effectLst/>
+                <a:highlight>
+                  <a:srgbClr val="FFFFFF"/>
+                </a:highlight>
+                <a:latin typeface="Menlo" panose="020B0609030804020204" pitchFamily="49" charset="0"/>
+              </a:rPr>
+              <a:t>=</a:t>
+            </a:r>
+            <a:r>
+              <a:rPr lang="en-GB" sz="900" b="0" dirty="0">
+                <a:solidFill>
+                  <a:srgbClr val="098658"/>
+                </a:solidFill>
+                <a:effectLst/>
+                <a:highlight>
+                  <a:srgbClr val="FFFFFF"/>
+                </a:highlight>
+                <a:latin typeface="Menlo" panose="020B0609030804020204" pitchFamily="49" charset="0"/>
+              </a:rPr>
+              <a:t>1</a:t>
+            </a:r>
+            <a:r>
+              <a:rPr lang="en-GB" sz="900" b="0" dirty="0">
+                <a:solidFill>
+                  <a:srgbClr val="3B3B3B"/>
+                </a:solidFill>
+                <a:effectLst/>
+                <a:highlight>
+                  <a:srgbClr val="FFFFFF"/>
+                </a:highlight>
+                <a:latin typeface="Menlo" panose="020B0609030804020204" pitchFamily="49" charset="0"/>
+              </a:rPr>
+              <a:t>$), find control unit(s) $</a:t>
+            </a:r>
+            <a:r>
+              <a:rPr lang="en-GB" sz="900" b="0" dirty="0">
+                <a:solidFill>
+                  <a:srgbClr val="000000"/>
+                </a:solidFill>
+                <a:effectLst/>
+                <a:highlight>
+                  <a:srgbClr val="FFFFFF"/>
+                </a:highlight>
+                <a:latin typeface="Menlo" panose="020B0609030804020204" pitchFamily="49" charset="0"/>
+              </a:rPr>
+              <a:t>j</a:t>
+            </a:r>
+            <a:r>
+              <a:rPr lang="en-GB" sz="900" b="0" dirty="0">
+                <a:solidFill>
+                  <a:srgbClr val="3B3B3B"/>
+                </a:solidFill>
+                <a:effectLst/>
+                <a:highlight>
+                  <a:srgbClr val="FFFFFF"/>
+                </a:highlight>
+                <a:latin typeface="Menlo" panose="020B0609030804020204" pitchFamily="49" charset="0"/>
+              </a:rPr>
+              <a:t>$ ($</a:t>
+            </a:r>
+            <a:r>
+              <a:rPr lang="en-GB" sz="900" b="0" dirty="0" err="1">
+                <a:solidFill>
+                  <a:srgbClr val="000000"/>
+                </a:solidFill>
+                <a:effectLst/>
+                <a:highlight>
+                  <a:srgbClr val="FFFFFF"/>
+                </a:highlight>
+                <a:latin typeface="Menlo" panose="020B0609030804020204" pitchFamily="49" charset="0"/>
+              </a:rPr>
+              <a:t>T_j</a:t>
+            </a:r>
+            <a:r>
+              <a:rPr lang="en-GB" sz="900" b="0" dirty="0">
+                <a:solidFill>
+                  <a:srgbClr val="000000"/>
+                </a:solidFill>
+                <a:effectLst/>
+                <a:highlight>
+                  <a:srgbClr val="FFFFFF"/>
+                </a:highlight>
+                <a:latin typeface="Menlo" panose="020B0609030804020204" pitchFamily="49" charset="0"/>
+              </a:rPr>
+              <a:t>=</a:t>
+            </a:r>
+            <a:r>
+              <a:rPr lang="en-GB" sz="900" b="0" dirty="0">
+                <a:solidFill>
+                  <a:srgbClr val="098658"/>
+                </a:solidFill>
+                <a:effectLst/>
+                <a:highlight>
+                  <a:srgbClr val="FFFFFF"/>
+                </a:highlight>
+                <a:latin typeface="Menlo" panose="020B0609030804020204" pitchFamily="49" charset="0"/>
+              </a:rPr>
+              <a:t>0</a:t>
+            </a:r>
+            <a:r>
+              <a:rPr lang="en-GB" sz="900" b="0" dirty="0">
+                <a:solidFill>
+                  <a:srgbClr val="3B3B3B"/>
+                </a:solidFill>
+                <a:effectLst/>
+                <a:highlight>
+                  <a:srgbClr val="FFFFFF"/>
+                </a:highlight>
+                <a:latin typeface="Menlo" panose="020B0609030804020204" pitchFamily="49" charset="0"/>
+              </a:rPr>
+              <a:t>$) that minimize</a:t>
+            </a:r>
+          </a:p>
+          <a:p>
+            <a:r>
+              <a:rPr lang="en-GB" sz="900" b="0" dirty="0">
+                <a:solidFill>
+                  <a:srgbClr val="3B3B3B"/>
+                </a:solidFill>
+                <a:effectLst/>
+                <a:highlight>
+                  <a:srgbClr val="FFFFFF"/>
+                </a:highlight>
+                <a:latin typeface="Menlo" panose="020B0609030804020204" pitchFamily="49" charset="0"/>
+              </a:rPr>
+              <a:t>$$</a:t>
+            </a:r>
+          </a:p>
+          <a:p>
+            <a:r>
+              <a:rPr lang="en-GB" sz="900" b="0" dirty="0">
+                <a:solidFill>
+                  <a:srgbClr val="000000"/>
+                </a:solidFill>
+                <a:effectLst/>
+                <a:highlight>
+                  <a:srgbClr val="FFFFFF"/>
+                </a:highlight>
+                <a:latin typeface="Menlo" panose="020B0609030804020204" pitchFamily="49" charset="0"/>
+              </a:rPr>
+              <a:t>d(</a:t>
+            </a:r>
+            <a:r>
+              <a:rPr lang="en-GB" sz="900" b="0" dirty="0" err="1">
+                <a:solidFill>
+                  <a:srgbClr val="000000"/>
+                </a:solidFill>
+                <a:effectLst/>
+                <a:highlight>
+                  <a:srgbClr val="FFFFFF"/>
+                </a:highlight>
+                <a:latin typeface="Menlo" panose="020B0609030804020204" pitchFamily="49" charset="0"/>
+              </a:rPr>
+              <a:t>i,j</a:t>
+            </a:r>
+            <a:r>
+              <a:rPr lang="en-GB" sz="900" b="0" dirty="0">
+                <a:solidFill>
+                  <a:srgbClr val="000000"/>
+                </a:solidFill>
+                <a:effectLst/>
+                <a:highlight>
+                  <a:srgbClr val="FFFFFF"/>
+                </a:highlight>
+                <a:latin typeface="Menlo" panose="020B0609030804020204" pitchFamily="49" charset="0"/>
+              </a:rPr>
+              <a:t>)=|e(</a:t>
+            </a:r>
+            <a:r>
+              <a:rPr lang="en-GB" sz="900" b="0" dirty="0" err="1">
+                <a:solidFill>
+                  <a:srgbClr val="000000"/>
+                </a:solidFill>
+                <a:effectLst/>
+                <a:highlight>
+                  <a:srgbClr val="FFFFFF"/>
+                </a:highlight>
+                <a:latin typeface="Menlo" panose="020B0609030804020204" pitchFamily="49" charset="0"/>
+              </a:rPr>
+              <a:t>X_i</a:t>
+            </a:r>
+            <a:r>
+              <a:rPr lang="en-GB" sz="900" b="0" dirty="0">
+                <a:solidFill>
+                  <a:srgbClr val="000000"/>
+                </a:solidFill>
+                <a:effectLst/>
+                <a:highlight>
+                  <a:srgbClr val="FFFFFF"/>
+                </a:highlight>
+                <a:latin typeface="Menlo" panose="020B0609030804020204" pitchFamily="49" charset="0"/>
+              </a:rPr>
+              <a:t>)-e(</a:t>
+            </a:r>
+            <a:r>
+              <a:rPr lang="en-GB" sz="900" b="0" dirty="0" err="1">
+                <a:solidFill>
+                  <a:srgbClr val="000000"/>
+                </a:solidFill>
+                <a:effectLst/>
+                <a:highlight>
+                  <a:srgbClr val="FFFFFF"/>
+                </a:highlight>
+                <a:latin typeface="Menlo" panose="020B0609030804020204" pitchFamily="49" charset="0"/>
+              </a:rPr>
+              <a:t>X_j</a:t>
+            </a:r>
+            <a:r>
+              <a:rPr lang="en-GB" sz="900" b="0" dirty="0">
+                <a:solidFill>
+                  <a:srgbClr val="000000"/>
+                </a:solidFill>
+                <a:effectLst/>
+                <a:highlight>
+                  <a:srgbClr val="FFFFFF"/>
+                </a:highlight>
+                <a:latin typeface="Menlo" panose="020B0609030804020204" pitchFamily="49" charset="0"/>
+              </a:rPr>
+              <a:t>)|</a:t>
+            </a:r>
+            <a:endParaRPr lang="en-GB" sz="900" b="0" dirty="0">
+              <a:solidFill>
+                <a:srgbClr val="3B3B3B"/>
+              </a:solidFill>
+              <a:effectLst/>
+              <a:highlight>
+                <a:srgbClr val="FFFFFF"/>
+              </a:highlight>
+              <a:latin typeface="Menlo" panose="020B0609030804020204" pitchFamily="49" charset="0"/>
+            </a:endParaRPr>
+          </a:p>
+          <a:p>
+            <a:r>
+              <a:rPr lang="en-GB" sz="900" b="0" dirty="0">
+                <a:solidFill>
+                  <a:srgbClr val="3B3B3B"/>
+                </a:solidFill>
+                <a:effectLst/>
+                <a:highlight>
+                  <a:srgbClr val="FFFFFF"/>
+                </a:highlight>
+                <a:latin typeface="Menlo" panose="020B0609030804020204" pitchFamily="49" charset="0"/>
+              </a:rPr>
+              <a:t>$$</a:t>
+            </a:r>
+          </a:p>
+          <a:p>
+            <a:r>
+              <a:rPr lang="en-GB" sz="900" b="0" dirty="0">
+                <a:solidFill>
+                  <a:srgbClr val="3B3B3B"/>
+                </a:solidFill>
+                <a:effectLst/>
+                <a:highlight>
+                  <a:srgbClr val="FFFFFF"/>
+                </a:highlight>
+                <a:latin typeface="Menlo" panose="020B0609030804020204" pitchFamily="49" charset="0"/>
+              </a:rPr>
+              <a:t>subject to </a:t>
+            </a:r>
+            <a:r>
+              <a:rPr lang="en-GB" sz="900" b="0" dirty="0" err="1">
+                <a:solidFill>
+                  <a:srgbClr val="3B3B3B"/>
+                </a:solidFill>
+                <a:effectLst/>
+                <a:highlight>
+                  <a:srgbClr val="FFFFFF"/>
+                </a:highlight>
+                <a:latin typeface="Menlo" panose="020B0609030804020204" pitchFamily="49" charset="0"/>
+              </a:rPr>
+              <a:t>caliper</a:t>
+            </a:r>
+            <a:r>
+              <a:rPr lang="en-GB" sz="900" b="0" dirty="0">
+                <a:solidFill>
+                  <a:srgbClr val="3B3B3B"/>
+                </a:solidFill>
+                <a:effectLst/>
+                <a:highlight>
+                  <a:srgbClr val="FFFFFF"/>
+                </a:highlight>
+                <a:latin typeface="Menlo" panose="020B0609030804020204" pitchFamily="49" charset="0"/>
+              </a:rPr>
+              <a:t> constraint $</a:t>
+            </a:r>
+            <a:r>
+              <a:rPr lang="en-GB" sz="900" b="0" dirty="0">
+                <a:solidFill>
+                  <a:srgbClr val="000000"/>
+                </a:solidFill>
+                <a:effectLst/>
+                <a:highlight>
+                  <a:srgbClr val="FFFFFF"/>
+                </a:highlight>
+                <a:latin typeface="Menlo" panose="020B0609030804020204" pitchFamily="49" charset="0"/>
+              </a:rPr>
+              <a:t>d(</a:t>
+            </a:r>
+            <a:r>
+              <a:rPr lang="en-GB" sz="900" b="0" dirty="0" err="1">
+                <a:solidFill>
+                  <a:srgbClr val="000000"/>
+                </a:solidFill>
+                <a:effectLst/>
+                <a:highlight>
+                  <a:srgbClr val="FFFFFF"/>
+                </a:highlight>
+                <a:latin typeface="Menlo" panose="020B0609030804020204" pitchFamily="49" charset="0"/>
+              </a:rPr>
+              <a:t>i,j</a:t>
+            </a:r>
+            <a:r>
+              <a:rPr lang="en-GB" sz="900" b="0" dirty="0">
+                <a:solidFill>
+                  <a:srgbClr val="000000"/>
+                </a:solidFill>
+                <a:effectLst/>
+                <a:highlight>
+                  <a:srgbClr val="FFFFFF"/>
+                </a:highlight>
+                <a:latin typeface="Menlo" panose="020B0609030804020204" pitchFamily="49" charset="0"/>
+              </a:rPr>
+              <a:t>) </a:t>
+            </a:r>
+            <a:r>
+              <a:rPr lang="en-GB" sz="900" b="0" dirty="0">
+                <a:solidFill>
+                  <a:srgbClr val="0000FF"/>
+                </a:solidFill>
+                <a:effectLst/>
+                <a:highlight>
+                  <a:srgbClr val="FFFFFF"/>
+                </a:highlight>
+                <a:latin typeface="Menlo" panose="020B0609030804020204" pitchFamily="49" charset="0"/>
+              </a:rPr>
+              <a:t>\le</a:t>
+            </a:r>
+            <a:r>
+              <a:rPr lang="en-GB" sz="900" b="0" dirty="0">
+                <a:solidFill>
+                  <a:srgbClr val="000000"/>
+                </a:solidFill>
+                <a:effectLst/>
+                <a:highlight>
+                  <a:srgbClr val="FFFFFF"/>
+                </a:highlight>
+                <a:latin typeface="Menlo" panose="020B0609030804020204" pitchFamily="49" charset="0"/>
+              </a:rPr>
+              <a:t> c</a:t>
+            </a:r>
+            <a:r>
+              <a:rPr lang="en-GB" sz="900" b="0" dirty="0">
+                <a:solidFill>
+                  <a:srgbClr val="3B3B3B"/>
+                </a:solidFill>
+                <a:effectLst/>
+                <a:highlight>
+                  <a:srgbClr val="FFFFFF"/>
+                </a:highlight>
+                <a:latin typeface="Menlo" panose="020B0609030804020204" pitchFamily="49" charset="0"/>
+              </a:rPr>
+              <a:t>$. This notebook uses $</a:t>
+            </a:r>
+            <a:r>
+              <a:rPr lang="en-GB" sz="900" b="0" dirty="0">
+                <a:solidFill>
+                  <a:srgbClr val="000000"/>
+                </a:solidFill>
+                <a:effectLst/>
+                <a:highlight>
+                  <a:srgbClr val="FFFFFF"/>
+                </a:highlight>
+                <a:latin typeface="Menlo" panose="020B0609030804020204" pitchFamily="49" charset="0"/>
+              </a:rPr>
+              <a:t>k=</a:t>
+            </a:r>
+            <a:r>
+              <a:rPr lang="en-GB" sz="900" b="0" dirty="0">
+                <a:solidFill>
+                  <a:srgbClr val="098658"/>
+                </a:solidFill>
+                <a:effectLst/>
+                <a:highlight>
+                  <a:srgbClr val="FFFFFF"/>
+                </a:highlight>
+                <a:latin typeface="Menlo" panose="020B0609030804020204" pitchFamily="49" charset="0"/>
+              </a:rPr>
+              <a:t>1</a:t>
+            </a:r>
+            <a:r>
+              <a:rPr lang="en-GB" sz="900" b="0" dirty="0">
+                <a:solidFill>
+                  <a:srgbClr val="3B3B3B"/>
+                </a:solidFill>
+                <a:effectLst/>
+                <a:highlight>
+                  <a:srgbClr val="FFFFFF"/>
+                </a:highlight>
+                <a:latin typeface="Menlo" panose="020B0609030804020204" pitchFamily="49" charset="0"/>
+              </a:rPr>
+              <a:t>$ match per treated unit and </a:t>
+            </a:r>
+            <a:r>
+              <a:rPr lang="en-GB" sz="900" b="0" dirty="0" err="1">
+                <a:solidFill>
+                  <a:srgbClr val="3B3B3B"/>
+                </a:solidFill>
+                <a:effectLst/>
+                <a:highlight>
+                  <a:srgbClr val="FFFFFF"/>
+                </a:highlight>
+                <a:latin typeface="Menlo" panose="020B0609030804020204" pitchFamily="49" charset="0"/>
+              </a:rPr>
+              <a:t>caliper</a:t>
+            </a:r>
+            <a:r>
+              <a:rPr lang="en-GB" sz="900" b="0" dirty="0">
+                <a:solidFill>
+                  <a:srgbClr val="3B3B3B"/>
+                </a:solidFill>
+                <a:effectLst/>
+                <a:highlight>
+                  <a:srgbClr val="FFFFFF"/>
+                </a:highlight>
+                <a:latin typeface="Menlo" panose="020B0609030804020204" pitchFamily="49" charset="0"/>
+              </a:rPr>
+              <a:t> $</a:t>
+            </a:r>
+            <a:r>
+              <a:rPr lang="en-GB" sz="900" b="0" dirty="0">
+                <a:solidFill>
+                  <a:srgbClr val="000000"/>
+                </a:solidFill>
+                <a:effectLst/>
+                <a:highlight>
+                  <a:srgbClr val="FFFFFF"/>
+                </a:highlight>
+                <a:latin typeface="Menlo" panose="020B0609030804020204" pitchFamily="49" charset="0"/>
+              </a:rPr>
+              <a:t>c=</a:t>
+            </a:r>
+            <a:r>
+              <a:rPr lang="en-GB" sz="900" b="0" dirty="0">
+                <a:solidFill>
+                  <a:srgbClr val="098658"/>
+                </a:solidFill>
+                <a:effectLst/>
+                <a:highlight>
+                  <a:srgbClr val="FFFFFF"/>
+                </a:highlight>
+                <a:latin typeface="Menlo" panose="020B0609030804020204" pitchFamily="49" charset="0"/>
+              </a:rPr>
+              <a:t>0.02</a:t>
+            </a:r>
+            <a:r>
+              <a:rPr lang="en-GB" sz="900" b="0" dirty="0">
+                <a:solidFill>
+                  <a:srgbClr val="3B3B3B"/>
+                </a:solidFill>
+                <a:effectLst/>
+                <a:highlight>
+                  <a:srgbClr val="FFFFFF"/>
+                </a:highlight>
+                <a:latin typeface="Menlo" panose="020B0609030804020204" pitchFamily="49" charset="0"/>
+              </a:rPr>
+              <a:t>$.</a:t>
+            </a:r>
+          </a:p>
+          <a:p>
+            <a:br>
+              <a:rPr lang="en-GB" sz="900" b="0" dirty="0">
+                <a:solidFill>
+                  <a:srgbClr val="3B3B3B"/>
+                </a:solidFill>
+                <a:effectLst/>
+                <a:highlight>
+                  <a:srgbClr val="FFFFFF"/>
+                </a:highlight>
+                <a:latin typeface="Menlo" panose="020B0609030804020204" pitchFamily="49" charset="0"/>
+              </a:rPr>
+            </a:br>
+            <a:r>
+              <a:rPr lang="en-GB" sz="900" b="1" dirty="0">
+                <a:solidFill>
+                  <a:srgbClr val="800000"/>
+                </a:solidFill>
+                <a:effectLst/>
+                <a:highlight>
+                  <a:srgbClr val="FFFFFF"/>
+                </a:highlight>
+                <a:latin typeface="Menlo" panose="020B0609030804020204" pitchFamily="49" charset="0"/>
+              </a:rPr>
+              <a:t>### 3) Counterfactual construction and ATT</a:t>
+            </a:r>
+            <a:endParaRPr lang="en-GB" sz="900" b="0" dirty="0">
+              <a:solidFill>
+                <a:srgbClr val="3B3B3B"/>
+              </a:solidFill>
+              <a:effectLst/>
+              <a:highlight>
+                <a:srgbClr val="FFFFFF"/>
+              </a:highlight>
+              <a:latin typeface="Menlo" panose="020B0609030804020204" pitchFamily="49" charset="0"/>
+            </a:endParaRPr>
+          </a:p>
+          <a:p>
+            <a:br>
+              <a:rPr lang="en-GB" sz="900" b="0" dirty="0">
+                <a:solidFill>
+                  <a:srgbClr val="3B3B3B"/>
+                </a:solidFill>
+                <a:effectLst/>
+                <a:highlight>
+                  <a:srgbClr val="FFFFFF"/>
+                </a:highlight>
+                <a:latin typeface="Menlo" panose="020B0609030804020204" pitchFamily="49" charset="0"/>
+              </a:rPr>
+            </a:br>
+            <a:r>
+              <a:rPr lang="en-GB" sz="900" b="0" dirty="0">
+                <a:solidFill>
+                  <a:srgbClr val="3B3B3B"/>
+                </a:solidFill>
+                <a:effectLst/>
+                <a:highlight>
+                  <a:srgbClr val="FFFFFF"/>
+                </a:highlight>
+                <a:latin typeface="Menlo" panose="020B0609030804020204" pitchFamily="49" charset="0"/>
+              </a:rPr>
+              <a:t>With matched control set $</a:t>
+            </a:r>
+            <a:r>
+              <a:rPr lang="en-GB" sz="900" b="0" dirty="0">
+                <a:solidFill>
+                  <a:srgbClr val="0000FF"/>
+                </a:solidFill>
+                <a:effectLst/>
+                <a:highlight>
+                  <a:srgbClr val="FFFFFF"/>
+                </a:highlight>
+                <a:latin typeface="Menlo" panose="020B0609030804020204" pitchFamily="49" charset="0"/>
+              </a:rPr>
+              <a:t>\</a:t>
+            </a:r>
+            <a:r>
+              <a:rPr lang="en-GB" sz="900" b="0" dirty="0" err="1">
+                <a:solidFill>
+                  <a:srgbClr val="795E26"/>
+                </a:solidFill>
+                <a:effectLst/>
+                <a:highlight>
+                  <a:srgbClr val="FFFFFF"/>
+                </a:highlight>
+                <a:latin typeface="Menlo" panose="020B0609030804020204" pitchFamily="49" charset="0"/>
+              </a:rPr>
+              <a:t>mathcal</a:t>
+            </a:r>
+            <a:r>
+              <a:rPr lang="en-GB" sz="900" b="0" dirty="0">
+                <a:solidFill>
+                  <a:srgbClr val="000000"/>
+                </a:solidFill>
+                <a:effectLst/>
+                <a:highlight>
+                  <a:srgbClr val="FFFFFF"/>
+                </a:highlight>
+                <a:latin typeface="Menlo" panose="020B0609030804020204" pitchFamily="49" charset="0"/>
+              </a:rPr>
+              <a:t>{M}(</a:t>
+            </a:r>
+            <a:r>
+              <a:rPr lang="en-GB" sz="900" b="0" dirty="0" err="1">
+                <a:solidFill>
+                  <a:srgbClr val="000000"/>
+                </a:solidFill>
+                <a:effectLst/>
+                <a:highlight>
+                  <a:srgbClr val="FFFFFF"/>
+                </a:highlight>
+                <a:latin typeface="Menlo" panose="020B0609030804020204" pitchFamily="49" charset="0"/>
+              </a:rPr>
+              <a:t>i</a:t>
+            </a:r>
+            <a:r>
+              <a:rPr lang="en-GB" sz="900" b="0" dirty="0">
+                <a:solidFill>
+                  <a:srgbClr val="000000"/>
+                </a:solidFill>
+                <a:effectLst/>
+                <a:highlight>
+                  <a:srgbClr val="FFFFFF"/>
+                </a:highlight>
+                <a:latin typeface="Menlo" panose="020B0609030804020204" pitchFamily="49" charset="0"/>
+              </a:rPr>
+              <a:t>)</a:t>
+            </a:r>
+            <a:r>
+              <a:rPr lang="en-GB" sz="900" b="0" dirty="0">
+                <a:solidFill>
+                  <a:srgbClr val="3B3B3B"/>
+                </a:solidFill>
+                <a:effectLst/>
+                <a:highlight>
+                  <a:srgbClr val="FFFFFF"/>
+                </a:highlight>
+                <a:latin typeface="Menlo" panose="020B0609030804020204" pitchFamily="49" charset="0"/>
+              </a:rPr>
+              <a:t>$ for treated unit $</a:t>
+            </a:r>
+            <a:r>
+              <a:rPr lang="en-GB" sz="900" b="0" dirty="0" err="1">
+                <a:solidFill>
+                  <a:srgbClr val="000000"/>
+                </a:solidFill>
+                <a:effectLst/>
+                <a:highlight>
+                  <a:srgbClr val="FFFFFF"/>
+                </a:highlight>
+                <a:latin typeface="Menlo" panose="020B0609030804020204" pitchFamily="49" charset="0"/>
+              </a:rPr>
+              <a:t>i</a:t>
+            </a:r>
+            <a:r>
+              <a:rPr lang="en-GB" sz="900" b="0" dirty="0">
+                <a:solidFill>
+                  <a:srgbClr val="3B3B3B"/>
+                </a:solidFill>
+                <a:effectLst/>
+                <a:highlight>
+                  <a:srgbClr val="FFFFFF"/>
+                </a:highlight>
+                <a:latin typeface="Menlo" panose="020B0609030804020204" pitchFamily="49" charset="0"/>
+              </a:rPr>
+              <a:t>$, estimate its counterfactual outcome as</a:t>
+            </a:r>
+          </a:p>
+          <a:p>
+            <a:r>
+              <a:rPr lang="en-GB" sz="900" b="0" dirty="0">
+                <a:solidFill>
+                  <a:srgbClr val="3B3B3B"/>
+                </a:solidFill>
+                <a:effectLst/>
+                <a:highlight>
+                  <a:srgbClr val="FFFFFF"/>
+                </a:highlight>
+                <a:latin typeface="Menlo" panose="020B0609030804020204" pitchFamily="49" charset="0"/>
+              </a:rPr>
+              <a:t>$$</a:t>
+            </a:r>
+          </a:p>
+          <a:p>
+            <a:r>
+              <a:rPr lang="en-GB" sz="900" b="0" dirty="0">
+                <a:solidFill>
+                  <a:srgbClr val="0000FF"/>
+                </a:solidFill>
+                <a:effectLst/>
+                <a:highlight>
+                  <a:srgbClr val="FFFFFF"/>
+                </a:highlight>
+                <a:latin typeface="Menlo" panose="020B0609030804020204" pitchFamily="49" charset="0"/>
+              </a:rPr>
+              <a:t>\</a:t>
+            </a:r>
+            <a:r>
+              <a:rPr lang="en-GB" sz="900" b="0" dirty="0" err="1">
+                <a:solidFill>
+                  <a:srgbClr val="795E26"/>
+                </a:solidFill>
+                <a:effectLst/>
+                <a:highlight>
+                  <a:srgbClr val="FFFFFF"/>
+                </a:highlight>
+                <a:latin typeface="Menlo" panose="020B0609030804020204" pitchFamily="49" charset="0"/>
+              </a:rPr>
+              <a:t>widehat</a:t>
+            </a:r>
+            <a:r>
+              <a:rPr lang="en-GB" sz="900" b="0" dirty="0">
+                <a:solidFill>
+                  <a:srgbClr val="000000"/>
+                </a:solidFill>
+                <a:effectLst/>
+                <a:highlight>
+                  <a:srgbClr val="FFFFFF"/>
+                </a:highlight>
+                <a:latin typeface="Menlo" panose="020B0609030804020204" pitchFamily="49" charset="0"/>
+              </a:rPr>
+              <a:t>{</a:t>
+            </a:r>
+            <a:r>
+              <a:rPr lang="en-GB" sz="900" b="0" dirty="0" err="1">
+                <a:solidFill>
+                  <a:srgbClr val="000000"/>
+                </a:solidFill>
+                <a:effectLst/>
+                <a:highlight>
+                  <a:srgbClr val="FFFFFF"/>
+                </a:highlight>
+                <a:latin typeface="Menlo" panose="020B0609030804020204" pitchFamily="49" charset="0"/>
+              </a:rPr>
+              <a:t>Y_i</a:t>
+            </a:r>
+            <a:r>
+              <a:rPr lang="en-GB" sz="900" b="0" dirty="0">
+                <a:solidFill>
+                  <a:srgbClr val="000000"/>
+                </a:solidFill>
+                <a:effectLst/>
+                <a:highlight>
+                  <a:srgbClr val="FFFFFF"/>
+                </a:highlight>
+                <a:latin typeface="Menlo" panose="020B0609030804020204" pitchFamily="49" charset="0"/>
+              </a:rPr>
+              <a:t>(</a:t>
+            </a:r>
+            <a:r>
+              <a:rPr lang="en-GB" sz="900" b="0" dirty="0">
+                <a:solidFill>
+                  <a:srgbClr val="098658"/>
+                </a:solidFill>
+                <a:effectLst/>
+                <a:highlight>
+                  <a:srgbClr val="FFFFFF"/>
+                </a:highlight>
+                <a:latin typeface="Menlo" panose="020B0609030804020204" pitchFamily="49" charset="0"/>
+              </a:rPr>
+              <a:t>0</a:t>
+            </a:r>
+            <a:r>
+              <a:rPr lang="en-GB" sz="900" b="0" dirty="0">
+                <a:solidFill>
+                  <a:srgbClr val="000000"/>
+                </a:solidFill>
+                <a:effectLst/>
+                <a:highlight>
+                  <a:srgbClr val="FFFFFF"/>
+                </a:highlight>
+                <a:latin typeface="Menlo" panose="020B0609030804020204" pitchFamily="49" charset="0"/>
+              </a:rPr>
+              <a:t>)} = </a:t>
+            </a:r>
+            <a:r>
+              <a:rPr lang="en-GB" sz="900" b="0" dirty="0">
+                <a:solidFill>
+                  <a:srgbClr val="0000FF"/>
+                </a:solidFill>
+                <a:effectLst/>
+                <a:highlight>
+                  <a:srgbClr val="FFFFFF"/>
+                </a:highlight>
+                <a:latin typeface="Menlo" panose="020B0609030804020204" pitchFamily="49" charset="0"/>
+              </a:rPr>
+              <a:t>\</a:t>
+            </a:r>
+            <a:r>
+              <a:rPr lang="en-GB" sz="900" b="0" dirty="0">
+                <a:solidFill>
+                  <a:srgbClr val="795E26"/>
+                </a:solidFill>
+                <a:effectLst/>
+                <a:highlight>
+                  <a:srgbClr val="FFFFFF"/>
+                </a:highlight>
+                <a:latin typeface="Menlo" panose="020B0609030804020204" pitchFamily="49" charset="0"/>
+              </a:rPr>
+              <a:t>frac</a:t>
+            </a:r>
+            <a:r>
+              <a:rPr lang="en-GB" sz="900" b="0" dirty="0">
+                <a:solidFill>
+                  <a:srgbClr val="000000"/>
+                </a:solidFill>
+                <a:effectLst/>
+                <a:highlight>
+                  <a:srgbClr val="FFFFFF"/>
+                </a:highlight>
+                <a:latin typeface="Menlo" panose="020B0609030804020204" pitchFamily="49" charset="0"/>
+              </a:rPr>
+              <a:t>{</a:t>
+            </a:r>
+            <a:r>
+              <a:rPr lang="en-GB" sz="900" b="0" dirty="0">
+                <a:solidFill>
+                  <a:srgbClr val="098658"/>
+                </a:solidFill>
+                <a:effectLst/>
+                <a:highlight>
+                  <a:srgbClr val="FFFFFF"/>
+                </a:highlight>
+                <a:latin typeface="Menlo" panose="020B0609030804020204" pitchFamily="49" charset="0"/>
+              </a:rPr>
+              <a:t>1</a:t>
+            </a:r>
+            <a:r>
+              <a:rPr lang="en-GB" sz="900" b="0" dirty="0">
+                <a:solidFill>
+                  <a:srgbClr val="000000"/>
+                </a:solidFill>
+                <a:effectLst/>
+                <a:highlight>
+                  <a:srgbClr val="FFFFFF"/>
+                </a:highlight>
+                <a:latin typeface="Menlo" panose="020B0609030804020204" pitchFamily="49" charset="0"/>
+              </a:rPr>
+              <a:t>}{|</a:t>
+            </a:r>
+            <a:r>
+              <a:rPr lang="en-GB" sz="900" b="0" dirty="0">
+                <a:solidFill>
+                  <a:srgbClr val="0000FF"/>
+                </a:solidFill>
+                <a:effectLst/>
+                <a:highlight>
+                  <a:srgbClr val="FFFFFF"/>
+                </a:highlight>
+                <a:latin typeface="Menlo" panose="020B0609030804020204" pitchFamily="49" charset="0"/>
+              </a:rPr>
+              <a:t>\</a:t>
+            </a:r>
+            <a:r>
+              <a:rPr lang="en-GB" sz="900" b="0" dirty="0" err="1">
+                <a:solidFill>
+                  <a:srgbClr val="795E26"/>
+                </a:solidFill>
+                <a:effectLst/>
+                <a:highlight>
+                  <a:srgbClr val="FFFFFF"/>
+                </a:highlight>
+                <a:latin typeface="Menlo" panose="020B0609030804020204" pitchFamily="49" charset="0"/>
+              </a:rPr>
+              <a:t>mathcal</a:t>
+            </a:r>
+            <a:r>
+              <a:rPr lang="en-GB" sz="900" b="0" dirty="0">
+                <a:solidFill>
+                  <a:srgbClr val="000000"/>
+                </a:solidFill>
+                <a:effectLst/>
+                <a:highlight>
+                  <a:srgbClr val="FFFFFF"/>
+                </a:highlight>
+                <a:latin typeface="Menlo" panose="020B0609030804020204" pitchFamily="49" charset="0"/>
+              </a:rPr>
+              <a:t>{M}(</a:t>
+            </a:r>
+            <a:r>
+              <a:rPr lang="en-GB" sz="900" b="0" dirty="0" err="1">
+                <a:solidFill>
+                  <a:srgbClr val="000000"/>
+                </a:solidFill>
+                <a:effectLst/>
+                <a:highlight>
+                  <a:srgbClr val="FFFFFF"/>
+                </a:highlight>
+                <a:latin typeface="Menlo" panose="020B0609030804020204" pitchFamily="49" charset="0"/>
+              </a:rPr>
+              <a:t>i</a:t>
+            </a:r>
+            <a:r>
+              <a:rPr lang="en-GB" sz="900" b="0" dirty="0">
+                <a:solidFill>
+                  <a:srgbClr val="000000"/>
+                </a:solidFill>
+                <a:effectLst/>
+                <a:highlight>
+                  <a:srgbClr val="FFFFFF"/>
+                </a:highlight>
+                <a:latin typeface="Menlo" panose="020B0609030804020204" pitchFamily="49" charset="0"/>
+              </a:rPr>
+              <a:t>)|}</a:t>
+            </a:r>
+            <a:r>
+              <a:rPr lang="en-GB" sz="900" b="0" dirty="0">
+                <a:solidFill>
+                  <a:srgbClr val="0000FF"/>
+                </a:solidFill>
+                <a:effectLst/>
+                <a:highlight>
+                  <a:srgbClr val="FFFFFF"/>
+                </a:highlight>
+                <a:latin typeface="Menlo" panose="020B0609030804020204" pitchFamily="49" charset="0"/>
+              </a:rPr>
+              <a:t>\</a:t>
+            </a:r>
+            <a:r>
+              <a:rPr lang="en-GB" sz="900" b="0" dirty="0">
+                <a:solidFill>
+                  <a:srgbClr val="795E26"/>
+                </a:solidFill>
+                <a:effectLst/>
+                <a:highlight>
+                  <a:srgbClr val="FFFFFF"/>
+                </a:highlight>
+                <a:latin typeface="Menlo" panose="020B0609030804020204" pitchFamily="49" charset="0"/>
+              </a:rPr>
+              <a:t>sum_</a:t>
+            </a:r>
+            <a:r>
+              <a:rPr lang="en-GB" sz="900" b="0" dirty="0">
+                <a:solidFill>
+                  <a:srgbClr val="000000"/>
+                </a:solidFill>
+                <a:effectLst/>
+                <a:highlight>
+                  <a:srgbClr val="FFFFFF"/>
+                </a:highlight>
+                <a:latin typeface="Menlo" panose="020B0609030804020204" pitchFamily="49" charset="0"/>
+              </a:rPr>
+              <a:t>{j</a:t>
+            </a:r>
+            <a:r>
+              <a:rPr lang="en-GB" sz="900" b="0" dirty="0">
+                <a:solidFill>
+                  <a:srgbClr val="0000FF"/>
+                </a:solidFill>
+                <a:effectLst/>
+                <a:highlight>
+                  <a:srgbClr val="FFFFFF"/>
+                </a:highlight>
+                <a:latin typeface="Menlo" panose="020B0609030804020204" pitchFamily="49" charset="0"/>
+              </a:rPr>
+              <a:t>\in\</a:t>
+            </a:r>
+            <a:r>
+              <a:rPr lang="en-GB" sz="900" b="0" dirty="0" err="1">
+                <a:solidFill>
+                  <a:srgbClr val="795E26"/>
+                </a:solidFill>
+                <a:effectLst/>
+                <a:highlight>
+                  <a:srgbClr val="FFFFFF"/>
+                </a:highlight>
+                <a:latin typeface="Menlo" panose="020B0609030804020204" pitchFamily="49" charset="0"/>
+              </a:rPr>
+              <a:t>mathcal</a:t>
+            </a:r>
+            <a:r>
+              <a:rPr lang="en-GB" sz="900" b="0" dirty="0">
+                <a:solidFill>
+                  <a:srgbClr val="000000"/>
+                </a:solidFill>
+                <a:effectLst/>
+                <a:highlight>
+                  <a:srgbClr val="FFFFFF"/>
+                </a:highlight>
+                <a:latin typeface="Menlo" panose="020B0609030804020204" pitchFamily="49" charset="0"/>
+              </a:rPr>
+              <a:t>{M}(</a:t>
+            </a:r>
+            <a:r>
+              <a:rPr lang="en-GB" sz="900" b="0" dirty="0" err="1">
+                <a:solidFill>
+                  <a:srgbClr val="000000"/>
+                </a:solidFill>
+                <a:effectLst/>
+                <a:highlight>
+                  <a:srgbClr val="FFFFFF"/>
+                </a:highlight>
+                <a:latin typeface="Menlo" panose="020B0609030804020204" pitchFamily="49" charset="0"/>
+              </a:rPr>
+              <a:t>i</a:t>
+            </a:r>
+            <a:r>
+              <a:rPr lang="en-GB" sz="900" b="0" dirty="0">
+                <a:solidFill>
+                  <a:srgbClr val="000000"/>
+                </a:solidFill>
+                <a:effectLst/>
+                <a:highlight>
+                  <a:srgbClr val="FFFFFF"/>
+                </a:highlight>
+                <a:latin typeface="Menlo" panose="020B0609030804020204" pitchFamily="49" charset="0"/>
+              </a:rPr>
+              <a:t>)} </a:t>
+            </a:r>
+            <a:r>
+              <a:rPr lang="en-GB" sz="900" b="0" dirty="0" err="1">
+                <a:solidFill>
+                  <a:srgbClr val="000000"/>
+                </a:solidFill>
+                <a:effectLst/>
+                <a:highlight>
+                  <a:srgbClr val="FFFFFF"/>
+                </a:highlight>
+                <a:latin typeface="Menlo" panose="020B0609030804020204" pitchFamily="49" charset="0"/>
+              </a:rPr>
+              <a:t>Y_j</a:t>
+            </a:r>
+            <a:endParaRPr lang="en-GB" sz="900" b="0" dirty="0">
+              <a:solidFill>
+                <a:srgbClr val="3B3B3B"/>
+              </a:solidFill>
+              <a:effectLst/>
+              <a:highlight>
+                <a:srgbClr val="FFFFFF"/>
+              </a:highlight>
+              <a:latin typeface="Menlo" panose="020B0609030804020204" pitchFamily="49" charset="0"/>
+            </a:endParaRPr>
+          </a:p>
+          <a:p>
+            <a:r>
+              <a:rPr lang="en-GB" sz="900" b="0" dirty="0">
+                <a:solidFill>
+                  <a:srgbClr val="3B3B3B"/>
+                </a:solidFill>
+                <a:effectLst/>
+                <a:highlight>
+                  <a:srgbClr val="FFFFFF"/>
+                </a:highlight>
+                <a:latin typeface="Menlo" panose="020B0609030804020204" pitchFamily="49" charset="0"/>
+              </a:rPr>
+              <a:t>$$</a:t>
+            </a:r>
+          </a:p>
+          <a:p>
+            <a:r>
+              <a:rPr lang="en-GB" sz="900" b="0" dirty="0">
+                <a:solidFill>
+                  <a:srgbClr val="3B3B3B"/>
+                </a:solidFill>
+                <a:effectLst/>
+                <a:highlight>
+                  <a:srgbClr val="FFFFFF"/>
+                </a:highlight>
+                <a:latin typeface="Menlo" panose="020B0609030804020204" pitchFamily="49" charset="0"/>
+              </a:rPr>
+              <a:t>Then estimate ATT over matched treated units $</a:t>
+            </a:r>
+            <a:r>
+              <a:rPr lang="en-GB" sz="900" b="0" dirty="0">
+                <a:solidFill>
+                  <a:srgbClr val="0000FF"/>
+                </a:solidFill>
+                <a:effectLst/>
+                <a:highlight>
+                  <a:srgbClr val="FFFFFF"/>
+                </a:highlight>
+                <a:latin typeface="Menlo" panose="020B0609030804020204" pitchFamily="49" charset="0"/>
+              </a:rPr>
+              <a:t>\</a:t>
+            </a:r>
+            <a:r>
+              <a:rPr lang="en-GB" sz="900" b="0" dirty="0" err="1">
+                <a:solidFill>
+                  <a:srgbClr val="795E26"/>
+                </a:solidFill>
+                <a:effectLst/>
+                <a:highlight>
+                  <a:srgbClr val="FFFFFF"/>
+                </a:highlight>
+                <a:latin typeface="Menlo" panose="020B0609030804020204" pitchFamily="49" charset="0"/>
+              </a:rPr>
+              <a:t>mathcal</a:t>
+            </a:r>
+            <a:r>
+              <a:rPr lang="en-GB" sz="900" b="0" dirty="0">
+                <a:solidFill>
+                  <a:srgbClr val="000000"/>
+                </a:solidFill>
+                <a:effectLst/>
+                <a:highlight>
+                  <a:srgbClr val="FFFFFF"/>
+                </a:highlight>
+                <a:latin typeface="Menlo" panose="020B0609030804020204" pitchFamily="49" charset="0"/>
+              </a:rPr>
+              <a:t>{T}_m</a:t>
+            </a:r>
+            <a:r>
+              <a:rPr lang="en-GB" sz="900" b="0" dirty="0">
+                <a:solidFill>
+                  <a:srgbClr val="3B3B3B"/>
+                </a:solidFill>
+                <a:effectLst/>
+                <a:highlight>
+                  <a:srgbClr val="FFFFFF"/>
+                </a:highlight>
+                <a:latin typeface="Menlo" panose="020B0609030804020204" pitchFamily="49" charset="0"/>
+              </a:rPr>
+              <a:t>$:</a:t>
+            </a:r>
+          </a:p>
+          <a:p>
+            <a:r>
+              <a:rPr lang="en-GB" sz="900" b="0" dirty="0">
+                <a:solidFill>
+                  <a:srgbClr val="3B3B3B"/>
+                </a:solidFill>
+                <a:effectLst/>
+                <a:highlight>
+                  <a:srgbClr val="FFFFFF"/>
+                </a:highlight>
+                <a:latin typeface="Menlo" panose="020B0609030804020204" pitchFamily="49" charset="0"/>
+              </a:rPr>
+              <a:t>$$</a:t>
+            </a:r>
+          </a:p>
+          <a:p>
+            <a:r>
+              <a:rPr lang="en-GB" sz="900" b="0" dirty="0">
+                <a:solidFill>
+                  <a:srgbClr val="0000FF"/>
+                </a:solidFill>
+                <a:effectLst/>
+                <a:highlight>
+                  <a:srgbClr val="FFFFFF"/>
+                </a:highlight>
+                <a:latin typeface="Menlo" panose="020B0609030804020204" pitchFamily="49" charset="0"/>
+              </a:rPr>
+              <a:t>\</a:t>
+            </a:r>
+            <a:r>
+              <a:rPr lang="en-GB" sz="900" b="0" dirty="0" err="1">
+                <a:solidFill>
+                  <a:srgbClr val="795E26"/>
+                </a:solidFill>
+                <a:effectLst/>
+                <a:highlight>
+                  <a:srgbClr val="FFFFFF"/>
+                </a:highlight>
+                <a:latin typeface="Menlo" panose="020B0609030804020204" pitchFamily="49" charset="0"/>
+              </a:rPr>
+              <a:t>widehat</a:t>
+            </a:r>
+            <a:r>
+              <a:rPr lang="en-GB" sz="900" b="0" dirty="0">
+                <a:solidFill>
+                  <a:srgbClr val="000000"/>
+                </a:solidFill>
+                <a:effectLst/>
+                <a:highlight>
+                  <a:srgbClr val="FFFFFF"/>
+                </a:highlight>
+                <a:latin typeface="Menlo" panose="020B0609030804020204" pitchFamily="49" charset="0"/>
+              </a:rPr>
+              <a:t>{</a:t>
+            </a:r>
+            <a:r>
+              <a:rPr lang="en-GB" sz="900" b="0" dirty="0">
+                <a:solidFill>
+                  <a:srgbClr val="0000FF"/>
+                </a:solidFill>
+                <a:effectLst/>
+                <a:highlight>
+                  <a:srgbClr val="FFFFFF"/>
+                </a:highlight>
+                <a:latin typeface="Menlo" panose="020B0609030804020204" pitchFamily="49" charset="0"/>
+              </a:rPr>
+              <a:t>\</a:t>
+            </a:r>
+            <a:r>
+              <a:rPr lang="en-GB" sz="900" b="0" dirty="0" err="1">
+                <a:solidFill>
+                  <a:srgbClr val="795E26"/>
+                </a:solidFill>
+                <a:effectLst/>
+                <a:highlight>
+                  <a:srgbClr val="FFFFFF"/>
+                </a:highlight>
+                <a:latin typeface="Menlo" panose="020B0609030804020204" pitchFamily="49" charset="0"/>
+              </a:rPr>
+              <a:t>mathrm</a:t>
+            </a:r>
+            <a:r>
+              <a:rPr lang="en-GB" sz="900" b="0" dirty="0">
+                <a:solidFill>
+                  <a:srgbClr val="000000"/>
+                </a:solidFill>
+                <a:effectLst/>
+                <a:highlight>
+                  <a:srgbClr val="FFFFFF"/>
+                </a:highlight>
+                <a:latin typeface="Menlo" panose="020B0609030804020204" pitchFamily="49" charset="0"/>
+              </a:rPr>
+              <a:t>{ATT}} = </a:t>
+            </a:r>
+            <a:r>
+              <a:rPr lang="en-GB" sz="900" b="0" dirty="0">
+                <a:solidFill>
+                  <a:srgbClr val="0000FF"/>
+                </a:solidFill>
+                <a:effectLst/>
+                <a:highlight>
+                  <a:srgbClr val="FFFFFF"/>
+                </a:highlight>
+                <a:latin typeface="Menlo" panose="020B0609030804020204" pitchFamily="49" charset="0"/>
+              </a:rPr>
+              <a:t>\</a:t>
+            </a:r>
+            <a:r>
+              <a:rPr lang="en-GB" sz="900" b="0" dirty="0">
+                <a:solidFill>
+                  <a:srgbClr val="795E26"/>
+                </a:solidFill>
+                <a:effectLst/>
+                <a:highlight>
+                  <a:srgbClr val="FFFFFF"/>
+                </a:highlight>
+                <a:latin typeface="Menlo" panose="020B0609030804020204" pitchFamily="49" charset="0"/>
+              </a:rPr>
+              <a:t>frac</a:t>
+            </a:r>
+            <a:r>
+              <a:rPr lang="en-GB" sz="900" b="0" dirty="0">
+                <a:solidFill>
+                  <a:srgbClr val="000000"/>
+                </a:solidFill>
+                <a:effectLst/>
+                <a:highlight>
+                  <a:srgbClr val="FFFFFF"/>
+                </a:highlight>
+                <a:latin typeface="Menlo" panose="020B0609030804020204" pitchFamily="49" charset="0"/>
+              </a:rPr>
+              <a:t>{</a:t>
+            </a:r>
+            <a:r>
+              <a:rPr lang="en-GB" sz="900" b="0" dirty="0">
+                <a:solidFill>
+                  <a:srgbClr val="098658"/>
+                </a:solidFill>
+                <a:effectLst/>
+                <a:highlight>
+                  <a:srgbClr val="FFFFFF"/>
+                </a:highlight>
+                <a:latin typeface="Menlo" panose="020B0609030804020204" pitchFamily="49" charset="0"/>
+              </a:rPr>
+              <a:t>1</a:t>
+            </a:r>
+            <a:r>
+              <a:rPr lang="en-GB" sz="900" b="0" dirty="0">
+                <a:solidFill>
+                  <a:srgbClr val="000000"/>
+                </a:solidFill>
+                <a:effectLst/>
+                <a:highlight>
+                  <a:srgbClr val="FFFFFF"/>
+                </a:highlight>
+                <a:latin typeface="Menlo" panose="020B0609030804020204" pitchFamily="49" charset="0"/>
+              </a:rPr>
+              <a:t>}{|</a:t>
+            </a:r>
+            <a:r>
+              <a:rPr lang="en-GB" sz="900" b="0" dirty="0">
+                <a:solidFill>
+                  <a:srgbClr val="0000FF"/>
+                </a:solidFill>
+                <a:effectLst/>
+                <a:highlight>
+                  <a:srgbClr val="FFFFFF"/>
+                </a:highlight>
+                <a:latin typeface="Menlo" panose="020B0609030804020204" pitchFamily="49" charset="0"/>
+              </a:rPr>
+              <a:t>\</a:t>
+            </a:r>
+            <a:r>
+              <a:rPr lang="en-GB" sz="900" b="0" dirty="0" err="1">
+                <a:solidFill>
+                  <a:srgbClr val="795E26"/>
+                </a:solidFill>
+                <a:effectLst/>
+                <a:highlight>
+                  <a:srgbClr val="FFFFFF"/>
+                </a:highlight>
+                <a:latin typeface="Menlo" panose="020B0609030804020204" pitchFamily="49" charset="0"/>
+              </a:rPr>
+              <a:t>mathcal</a:t>
+            </a:r>
+            <a:r>
+              <a:rPr lang="en-GB" sz="900" b="0" dirty="0">
+                <a:solidFill>
+                  <a:srgbClr val="000000"/>
+                </a:solidFill>
+                <a:effectLst/>
+                <a:highlight>
+                  <a:srgbClr val="FFFFFF"/>
+                </a:highlight>
+                <a:latin typeface="Menlo" panose="020B0609030804020204" pitchFamily="49" charset="0"/>
+              </a:rPr>
+              <a:t>{T}_m|}</a:t>
+            </a:r>
+            <a:r>
+              <a:rPr lang="en-GB" sz="900" b="0" dirty="0">
+                <a:solidFill>
+                  <a:srgbClr val="0000FF"/>
+                </a:solidFill>
+                <a:effectLst/>
+                <a:highlight>
+                  <a:srgbClr val="FFFFFF"/>
+                </a:highlight>
+                <a:latin typeface="Menlo" panose="020B0609030804020204" pitchFamily="49" charset="0"/>
+              </a:rPr>
+              <a:t>\</a:t>
+            </a:r>
+            <a:r>
+              <a:rPr lang="en-GB" sz="900" b="0" dirty="0">
+                <a:solidFill>
+                  <a:srgbClr val="795E26"/>
+                </a:solidFill>
+                <a:effectLst/>
+                <a:highlight>
+                  <a:srgbClr val="FFFFFF"/>
+                </a:highlight>
+                <a:latin typeface="Menlo" panose="020B0609030804020204" pitchFamily="49" charset="0"/>
+              </a:rPr>
+              <a:t>sum_</a:t>
+            </a:r>
+            <a:r>
+              <a:rPr lang="en-GB" sz="900" b="0" dirty="0">
+                <a:solidFill>
+                  <a:srgbClr val="000000"/>
+                </a:solidFill>
+                <a:effectLst/>
+                <a:highlight>
+                  <a:srgbClr val="FFFFFF"/>
+                </a:highlight>
+                <a:latin typeface="Menlo" panose="020B0609030804020204" pitchFamily="49" charset="0"/>
+              </a:rPr>
+              <a:t>{</a:t>
+            </a:r>
+            <a:r>
+              <a:rPr lang="en-GB" sz="900" b="0" dirty="0" err="1">
+                <a:solidFill>
+                  <a:srgbClr val="000000"/>
+                </a:solidFill>
+                <a:effectLst/>
+                <a:highlight>
+                  <a:srgbClr val="FFFFFF"/>
+                </a:highlight>
+                <a:latin typeface="Menlo" panose="020B0609030804020204" pitchFamily="49" charset="0"/>
+              </a:rPr>
+              <a:t>i</a:t>
+            </a:r>
+            <a:r>
+              <a:rPr lang="en-GB" sz="900" b="0" dirty="0">
+                <a:solidFill>
+                  <a:srgbClr val="0000FF"/>
+                </a:solidFill>
+                <a:effectLst/>
+                <a:highlight>
+                  <a:srgbClr val="FFFFFF"/>
+                </a:highlight>
+                <a:latin typeface="Menlo" panose="020B0609030804020204" pitchFamily="49" charset="0"/>
+              </a:rPr>
+              <a:t>\in\</a:t>
+            </a:r>
+            <a:r>
+              <a:rPr lang="en-GB" sz="900" b="0" dirty="0" err="1">
+                <a:solidFill>
+                  <a:srgbClr val="795E26"/>
+                </a:solidFill>
+                <a:effectLst/>
+                <a:highlight>
+                  <a:srgbClr val="FFFFFF"/>
+                </a:highlight>
+                <a:latin typeface="Menlo" panose="020B0609030804020204" pitchFamily="49" charset="0"/>
+              </a:rPr>
+              <a:t>mathcal</a:t>
+            </a:r>
+            <a:r>
+              <a:rPr lang="en-GB" sz="900" b="0" dirty="0">
+                <a:solidFill>
+                  <a:srgbClr val="000000"/>
+                </a:solidFill>
+                <a:effectLst/>
+                <a:highlight>
+                  <a:srgbClr val="FFFFFF"/>
+                </a:highlight>
+                <a:latin typeface="Menlo" panose="020B0609030804020204" pitchFamily="49" charset="0"/>
+              </a:rPr>
+              <a:t>{T}_m}</a:t>
+            </a:r>
+            <a:r>
+              <a:rPr lang="en-GB" sz="900" b="0" dirty="0">
+                <a:solidFill>
+                  <a:srgbClr val="0000FF"/>
+                </a:solidFill>
+                <a:effectLst/>
+                <a:highlight>
+                  <a:srgbClr val="FFFFFF"/>
+                </a:highlight>
+                <a:latin typeface="Menlo" panose="020B0609030804020204" pitchFamily="49" charset="0"/>
+              </a:rPr>
+              <a:t>\left</a:t>
+            </a:r>
+            <a:r>
+              <a:rPr lang="en-GB" sz="900" b="0" dirty="0">
+                <a:solidFill>
+                  <a:srgbClr val="000000"/>
+                </a:solidFill>
+                <a:effectLst/>
+                <a:highlight>
+                  <a:srgbClr val="FFFFFF"/>
+                </a:highlight>
+                <a:latin typeface="Menlo" panose="020B0609030804020204" pitchFamily="49" charset="0"/>
+              </a:rPr>
+              <a:t>(</a:t>
+            </a:r>
+            <a:r>
+              <a:rPr lang="en-GB" sz="900" b="0" dirty="0" err="1">
+                <a:solidFill>
+                  <a:srgbClr val="000000"/>
+                </a:solidFill>
+                <a:effectLst/>
+                <a:highlight>
+                  <a:srgbClr val="FFFFFF"/>
+                </a:highlight>
+                <a:latin typeface="Menlo" panose="020B0609030804020204" pitchFamily="49" charset="0"/>
+              </a:rPr>
+              <a:t>Y_i</a:t>
+            </a:r>
+            <a:r>
+              <a:rPr lang="en-GB" sz="900" b="0" dirty="0">
+                <a:solidFill>
+                  <a:srgbClr val="000000"/>
+                </a:solidFill>
+                <a:effectLst/>
+                <a:highlight>
+                  <a:srgbClr val="FFFFFF"/>
+                </a:highlight>
+                <a:latin typeface="Menlo" panose="020B0609030804020204" pitchFamily="49" charset="0"/>
+              </a:rPr>
+              <a:t>-</a:t>
+            </a:r>
+            <a:r>
+              <a:rPr lang="en-GB" sz="900" b="0" dirty="0">
+                <a:solidFill>
+                  <a:srgbClr val="0000FF"/>
+                </a:solidFill>
+                <a:effectLst/>
+                <a:highlight>
+                  <a:srgbClr val="FFFFFF"/>
+                </a:highlight>
+                <a:latin typeface="Menlo" panose="020B0609030804020204" pitchFamily="49" charset="0"/>
+              </a:rPr>
+              <a:t>\</a:t>
+            </a:r>
+            <a:r>
+              <a:rPr lang="en-GB" sz="900" b="0" dirty="0" err="1">
+                <a:solidFill>
+                  <a:srgbClr val="795E26"/>
+                </a:solidFill>
+                <a:effectLst/>
+                <a:highlight>
+                  <a:srgbClr val="FFFFFF"/>
+                </a:highlight>
+                <a:latin typeface="Menlo" panose="020B0609030804020204" pitchFamily="49" charset="0"/>
+              </a:rPr>
+              <a:t>widehat</a:t>
+            </a:r>
+            <a:r>
+              <a:rPr lang="en-GB" sz="900" b="0" dirty="0">
+                <a:solidFill>
+                  <a:srgbClr val="000000"/>
+                </a:solidFill>
+                <a:effectLst/>
+                <a:highlight>
+                  <a:srgbClr val="FFFFFF"/>
+                </a:highlight>
+                <a:latin typeface="Menlo" panose="020B0609030804020204" pitchFamily="49" charset="0"/>
+              </a:rPr>
+              <a:t>{</a:t>
+            </a:r>
+            <a:r>
+              <a:rPr lang="en-GB" sz="900" b="0" dirty="0" err="1">
+                <a:solidFill>
+                  <a:srgbClr val="000000"/>
+                </a:solidFill>
+                <a:effectLst/>
+                <a:highlight>
+                  <a:srgbClr val="FFFFFF"/>
+                </a:highlight>
+                <a:latin typeface="Menlo" panose="020B0609030804020204" pitchFamily="49" charset="0"/>
+              </a:rPr>
+              <a:t>Y_i</a:t>
+            </a:r>
+            <a:r>
+              <a:rPr lang="en-GB" sz="900" b="0" dirty="0">
+                <a:solidFill>
+                  <a:srgbClr val="000000"/>
+                </a:solidFill>
+                <a:effectLst/>
+                <a:highlight>
+                  <a:srgbClr val="FFFFFF"/>
+                </a:highlight>
+                <a:latin typeface="Menlo" panose="020B0609030804020204" pitchFamily="49" charset="0"/>
+              </a:rPr>
+              <a:t>(</a:t>
+            </a:r>
+            <a:r>
+              <a:rPr lang="en-GB" sz="900" b="0" dirty="0">
+                <a:solidFill>
+                  <a:srgbClr val="098658"/>
+                </a:solidFill>
+                <a:effectLst/>
+                <a:highlight>
+                  <a:srgbClr val="FFFFFF"/>
+                </a:highlight>
+                <a:latin typeface="Menlo" panose="020B0609030804020204" pitchFamily="49" charset="0"/>
+              </a:rPr>
+              <a:t>0</a:t>
+            </a:r>
+            <a:r>
+              <a:rPr lang="en-GB" sz="900" b="0" dirty="0">
+                <a:solidFill>
+                  <a:srgbClr val="000000"/>
+                </a:solidFill>
+                <a:effectLst/>
+                <a:highlight>
+                  <a:srgbClr val="FFFFFF"/>
+                </a:highlight>
+                <a:latin typeface="Menlo" panose="020B0609030804020204" pitchFamily="49" charset="0"/>
+              </a:rPr>
+              <a:t>)}</a:t>
+            </a:r>
+            <a:r>
+              <a:rPr lang="en-GB" sz="900" b="0" dirty="0">
+                <a:solidFill>
+                  <a:srgbClr val="0000FF"/>
+                </a:solidFill>
+                <a:effectLst/>
+                <a:highlight>
+                  <a:srgbClr val="FFFFFF"/>
+                </a:highlight>
+                <a:latin typeface="Menlo" panose="020B0609030804020204" pitchFamily="49" charset="0"/>
+              </a:rPr>
+              <a:t>\right</a:t>
+            </a:r>
+            <a:r>
+              <a:rPr lang="en-GB" sz="900" b="0" dirty="0">
+                <a:solidFill>
+                  <a:srgbClr val="000000"/>
+                </a:solidFill>
+                <a:effectLst/>
+                <a:highlight>
+                  <a:srgbClr val="FFFFFF"/>
+                </a:highlight>
+                <a:latin typeface="Menlo" panose="020B0609030804020204" pitchFamily="49" charset="0"/>
+              </a:rPr>
+              <a:t>)</a:t>
+            </a:r>
+            <a:endParaRPr lang="en-GB" sz="900" b="0" dirty="0">
+              <a:solidFill>
+                <a:srgbClr val="3B3B3B"/>
+              </a:solidFill>
+              <a:effectLst/>
+              <a:highlight>
+                <a:srgbClr val="FFFFFF"/>
+              </a:highlight>
+              <a:latin typeface="Menlo" panose="020B0609030804020204" pitchFamily="49" charset="0"/>
+            </a:endParaRPr>
+          </a:p>
+          <a:p>
+            <a:r>
+              <a:rPr lang="en-GB" sz="900" b="0" dirty="0">
+                <a:solidFill>
+                  <a:srgbClr val="3B3B3B"/>
+                </a:solidFill>
+                <a:effectLst/>
+                <a:highlight>
+                  <a:srgbClr val="FFFFFF"/>
+                </a:highlight>
+                <a:latin typeface="Menlo" panose="020B0609030804020204" pitchFamily="49" charset="0"/>
+              </a:rPr>
+              <a:t>$$</a:t>
+            </a:r>
+          </a:p>
+          <a:p>
+            <a:br>
+              <a:rPr lang="en-GB" sz="900" b="0" dirty="0">
+                <a:solidFill>
+                  <a:srgbClr val="3B3B3B"/>
+                </a:solidFill>
+                <a:effectLst/>
+                <a:highlight>
+                  <a:srgbClr val="FFFFFF"/>
+                </a:highlight>
+                <a:latin typeface="Menlo" panose="020B0609030804020204" pitchFamily="49" charset="0"/>
+              </a:rPr>
+            </a:br>
+            <a:r>
+              <a:rPr lang="en-GB" sz="900" b="1" dirty="0">
+                <a:solidFill>
+                  <a:srgbClr val="800000"/>
+                </a:solidFill>
+                <a:effectLst/>
+                <a:highlight>
+                  <a:srgbClr val="FFFFFF"/>
+                </a:highlight>
+                <a:latin typeface="Menlo" panose="020B0609030804020204" pitchFamily="49" charset="0"/>
+              </a:rPr>
+              <a:t>### 4) Interpretation</a:t>
+            </a:r>
+            <a:endParaRPr lang="en-GB" sz="900" b="0" dirty="0">
+              <a:solidFill>
+                <a:srgbClr val="3B3B3B"/>
+              </a:solidFill>
+              <a:effectLst/>
+              <a:highlight>
+                <a:srgbClr val="FFFFFF"/>
+              </a:highlight>
+              <a:latin typeface="Menlo" panose="020B0609030804020204" pitchFamily="49" charset="0"/>
+            </a:endParaRPr>
+          </a:p>
+          <a:p>
+            <a:br>
+              <a:rPr lang="en-GB" sz="900" b="0" dirty="0">
+                <a:solidFill>
+                  <a:srgbClr val="3B3B3B"/>
+                </a:solidFill>
+                <a:effectLst/>
+                <a:highlight>
+                  <a:srgbClr val="FFFFFF"/>
+                </a:highlight>
+                <a:latin typeface="Menlo" panose="020B0609030804020204" pitchFamily="49" charset="0"/>
+              </a:rPr>
+            </a:br>
+            <a:r>
+              <a:rPr lang="en-GB" sz="900" b="0" dirty="0">
+                <a:solidFill>
+                  <a:srgbClr val="3B3B3B"/>
+                </a:solidFill>
+                <a:effectLst/>
+                <a:highlight>
+                  <a:srgbClr val="FFFFFF"/>
+                </a:highlight>
+                <a:latin typeface="Menlo" panose="020B0609030804020204" pitchFamily="49" charset="0"/>
+              </a:rPr>
+              <a:t>Because $</a:t>
+            </a:r>
+            <a:r>
+              <a:rPr lang="en-GB" sz="900" b="0" dirty="0">
+                <a:solidFill>
+                  <a:srgbClr val="000000"/>
+                </a:solidFill>
+                <a:effectLst/>
+                <a:highlight>
+                  <a:srgbClr val="FFFFFF"/>
+                </a:highlight>
+                <a:latin typeface="Menlo" panose="020B0609030804020204" pitchFamily="49" charset="0"/>
+              </a:rPr>
+              <a:t>Y=</a:t>
+            </a:r>
+            <a:r>
+              <a:rPr lang="en-GB" sz="900" b="0" dirty="0">
+                <a:solidFill>
+                  <a:srgbClr val="098658"/>
+                </a:solidFill>
+                <a:effectLst/>
+                <a:highlight>
+                  <a:srgbClr val="FFFFFF"/>
+                </a:highlight>
+                <a:latin typeface="Menlo" panose="020B0609030804020204" pitchFamily="49" charset="0"/>
+              </a:rPr>
+              <a:t>1</a:t>
+            </a:r>
+            <a:r>
+              <a:rPr lang="en-GB" sz="900" b="0" dirty="0">
+                <a:solidFill>
+                  <a:srgbClr val="3B3B3B"/>
+                </a:solidFill>
+                <a:effectLst/>
+                <a:highlight>
+                  <a:srgbClr val="FFFFFF"/>
+                </a:highlight>
+                <a:latin typeface="Menlo" panose="020B0609030804020204" pitchFamily="49" charset="0"/>
+              </a:rPr>
+              <a:t>$ means churn, a negative ATT means boosters reduce churn for users who actually adopted boosters.</a:t>
+            </a:r>
+          </a:p>
+        </p:txBody>
+      </p:sp>
+    </p:spTree>
+    <p:extLst>
+      <p:ext uri="{BB962C8B-B14F-4D97-AF65-F5344CB8AC3E}">
+        <p14:creationId xmlns:p14="http://schemas.microsoft.com/office/powerpoint/2010/main" val="1519464334"/>
+      </p:ext>
+    </p:extLst>
+  </p:cSld>
+  <p:clrMapOvr>
+    <a:masterClrMapping/>
+  </p:clrMapOvr>
+</p:sld>
+</file>
+
+<file path=ppt/slides/slide18.xml><?xml version="1.0" encoding="utf-8"?>
+<p:sld xmlns:a="http://schemas.openxmlformats.org/drawingml/2006/main" xmlns:r="http://schemas.openxmlformats.org/officeDocument/2006/relationships" xmlns:p="http://schemas.openxmlformats.org/presentationml/2006/main">
+  <p:cSld>
+    <p:spTree>
+      <p:nvGrpSpPr>
+        <p:cNvPr id="1" name="">
+          <a:extLst>
+            <a:ext uri="{FF2B5EF4-FFF2-40B4-BE49-F238E27FC236}">
+              <a16:creationId xmlns:a16="http://schemas.microsoft.com/office/drawing/2014/main" id="{9A0A947C-12A8-28F2-E45E-6D4929E66035}"/>
+            </a:ext>
+          </a:extLst>
+        </p:cNvPr>
+        <p:cNvGrpSpPr/>
+        <p:nvPr/>
+      </p:nvGrpSpPr>
+      <p:grpSpPr>
+        <a:xfrm>
+          <a:off x="0" y="0"/>
+          <a:ext cx="0" cy="0"/>
+          <a:chOff x="0" y="0"/>
+          <a:chExt cx="0" cy="0"/>
+        </a:xfrm>
+      </p:grpSpPr>
+      <p:sp>
+        <p:nvSpPr>
+          <p:cNvPr id="2" name="Title 1">
+            <a:extLst>
+              <a:ext uri="{FF2B5EF4-FFF2-40B4-BE49-F238E27FC236}">
+                <a16:creationId xmlns:a16="http://schemas.microsoft.com/office/drawing/2014/main" id="{B16382DA-1251-21F3-E013-4B8372335655}"/>
+              </a:ext>
+            </a:extLst>
+          </p:cNvPr>
+          <p:cNvSpPr>
+            <a:spLocks noGrp="1"/>
+          </p:cNvSpPr>
+          <p:nvPr>
+            <p:ph type="title"/>
+          </p:nvPr>
+        </p:nvSpPr>
+        <p:spPr/>
+        <p:txBody>
+          <a:bodyPr/>
+          <a:lstStyle/>
+          <a:p>
+            <a:r>
+              <a:rPr lang="en-GB" sz="800" b="1" dirty="0">
+                <a:solidFill>
+                  <a:srgbClr val="800000"/>
+                </a:solidFill>
+                <a:effectLst/>
+                <a:highlight>
+                  <a:srgbClr val="FFFFFF"/>
+                </a:highlight>
+                <a:latin typeface="Menlo" panose="020B0609030804020204" pitchFamily="49" charset="0"/>
+              </a:rPr>
+              <a:t>Propensity score matching: results</a:t>
+            </a:r>
+            <a:endParaRPr lang="en-GB" sz="800" b="0" dirty="0">
+              <a:solidFill>
+                <a:srgbClr val="3B3B3B"/>
+              </a:solidFill>
+              <a:effectLst/>
+              <a:highlight>
+                <a:srgbClr val="FFFFFF"/>
+              </a:highlight>
+              <a:latin typeface="Menlo" panose="020B0609030804020204" pitchFamily="49" charset="0"/>
+            </a:endParaRPr>
+          </a:p>
+        </p:txBody>
+      </p:sp>
+      <p:sp>
+        <p:nvSpPr>
+          <p:cNvPr id="3" name="Date Placeholder 2">
+            <a:extLst>
+              <a:ext uri="{FF2B5EF4-FFF2-40B4-BE49-F238E27FC236}">
+                <a16:creationId xmlns:a16="http://schemas.microsoft.com/office/drawing/2014/main" id="{3C2C4E89-67F3-638C-208D-9EEC4B204133}"/>
+              </a:ext>
+            </a:extLst>
+          </p:cNvPr>
+          <p:cNvSpPr>
+            <a:spLocks noGrp="1"/>
+          </p:cNvSpPr>
+          <p:nvPr>
+            <p:ph type="dt" sz="half" idx="2"/>
+          </p:nvPr>
+        </p:nvSpPr>
+        <p:spPr/>
+        <p:txBody>
+          <a:bodyPr/>
+          <a:lstStyle/>
+          <a:p>
+            <a:fld id="{822B4C34-8539-4A47-8763-AA072889AAA3}" type="datetime1">
+              <a:rPr lang="en-GB" smtClean="0"/>
+              <a:t>18/06/2026</a:t>
+            </a:fld>
+            <a:endParaRPr lang="en-GB" dirty="0"/>
+          </a:p>
+        </p:txBody>
+      </p:sp>
+      <p:sp>
+        <p:nvSpPr>
+          <p:cNvPr id="4" name="Footer Placeholder 3">
+            <a:extLst>
+              <a:ext uri="{FF2B5EF4-FFF2-40B4-BE49-F238E27FC236}">
+                <a16:creationId xmlns:a16="http://schemas.microsoft.com/office/drawing/2014/main" id="{95DDDF58-CD71-DA85-B136-9586FC9B4460}"/>
+              </a:ext>
+            </a:extLst>
+          </p:cNvPr>
+          <p:cNvSpPr>
+            <a:spLocks noGrp="1"/>
+          </p:cNvSpPr>
+          <p:nvPr>
+            <p:ph type="ftr" sz="quarter" idx="3"/>
+          </p:nvPr>
+        </p:nvSpPr>
+        <p:spPr/>
+        <p:txBody>
+          <a:bodyPr/>
+          <a:lstStyle/>
+          <a:p>
+            <a:r>
+              <a:rPr lang="en-GB"/>
+              <a:t>Presentation description - CONFIDENTIALTY NOTE</a:t>
+            </a:r>
+            <a:endParaRPr lang="en-GB" dirty="0"/>
+          </a:p>
+        </p:txBody>
+      </p:sp>
+      <p:sp>
+        <p:nvSpPr>
+          <p:cNvPr id="5" name="Slide Number Placeholder 4">
+            <a:extLst>
+              <a:ext uri="{FF2B5EF4-FFF2-40B4-BE49-F238E27FC236}">
+                <a16:creationId xmlns:a16="http://schemas.microsoft.com/office/drawing/2014/main" id="{168E6504-DA46-648E-F0C5-64BD746E7F6D}"/>
+              </a:ext>
+            </a:extLst>
+          </p:cNvPr>
+          <p:cNvSpPr>
+            <a:spLocks noGrp="1"/>
+          </p:cNvSpPr>
+          <p:nvPr>
+            <p:ph type="sldNum" sz="quarter" idx="4"/>
+          </p:nvPr>
+        </p:nvSpPr>
+        <p:spPr/>
+        <p:txBody>
+          <a:bodyPr/>
+          <a:lstStyle/>
+          <a:p>
+            <a:fld id="{D622C71B-F0A5-40B6-B6DA-5780E9494F8A}" type="slidenum">
+              <a:rPr lang="en-GB" smtClean="0"/>
+              <a:pPr/>
+              <a:t>18</a:t>
+            </a:fld>
+            <a:endParaRPr lang="en-GB" dirty="0"/>
+          </a:p>
+        </p:txBody>
+      </p:sp>
+      <p:sp>
+        <p:nvSpPr>
+          <p:cNvPr id="9" name="TextBox 8">
+            <a:extLst>
+              <a:ext uri="{FF2B5EF4-FFF2-40B4-BE49-F238E27FC236}">
+                <a16:creationId xmlns:a16="http://schemas.microsoft.com/office/drawing/2014/main" id="{3A1D8B18-8DB9-D76C-E6AD-C5CD010B1702}"/>
+              </a:ext>
+            </a:extLst>
+          </p:cNvPr>
+          <p:cNvSpPr txBox="1"/>
+          <p:nvPr/>
+        </p:nvSpPr>
+        <p:spPr>
+          <a:xfrm>
+            <a:off x="406800" y="1556791"/>
+            <a:ext cx="11161808" cy="230832"/>
+          </a:xfrm>
+          <a:prstGeom prst="rect">
+            <a:avLst/>
+          </a:prstGeom>
+          <a:noFill/>
+        </p:spPr>
+        <p:txBody>
+          <a:bodyPr wrap="square">
+            <a:spAutoFit/>
+          </a:bodyPr>
+          <a:lstStyle/>
+          <a:p>
+            <a:r>
+              <a:rPr lang="en-GB" sz="900" b="0" i="0" dirty="0">
+                <a:solidFill>
+                  <a:srgbClr val="3B3B3B"/>
+                </a:solidFill>
+                <a:effectLst/>
+                <a:latin typeface="Menlo" panose="020B0609030804020204" pitchFamily="49" charset="0"/>
+              </a:rPr>
+              <a:t>Baseline ATT (</a:t>
+            </a:r>
+            <a:r>
+              <a:rPr lang="en-GB" sz="900" b="0" i="0" dirty="0" err="1">
+                <a:solidFill>
+                  <a:srgbClr val="3B3B3B"/>
+                </a:solidFill>
+                <a:effectLst/>
+                <a:latin typeface="Menlo" panose="020B0609030804020204" pitchFamily="49" charset="0"/>
+              </a:rPr>
+              <a:t>caliper</a:t>
+            </a:r>
+            <a:r>
+              <a:rPr lang="en-GB" sz="900" b="0" i="0" dirty="0">
+                <a:solidFill>
+                  <a:srgbClr val="3B3B3B"/>
+                </a:solidFill>
+                <a:effectLst/>
+                <a:latin typeface="Menlo" panose="020B0609030804020204" pitchFamily="49" charset="0"/>
+              </a:rPr>
+              <a:t>=0.02, ratio=1:1): -1.63 pp Matched pairs: 25,000 | Coverage: 100.0% Average match distance: 0.0000</a:t>
+            </a:r>
+            <a:endParaRPr lang="en-GB" sz="900" b="0" dirty="0">
+              <a:solidFill>
+                <a:srgbClr val="3B3B3B"/>
+              </a:solidFill>
+              <a:effectLst/>
+              <a:highlight>
+                <a:srgbClr val="FFFFFF"/>
+              </a:highlight>
+              <a:latin typeface="Menlo" panose="020B0609030804020204" pitchFamily="49" charset="0"/>
+            </a:endParaRPr>
+          </a:p>
+        </p:txBody>
+      </p:sp>
+    </p:spTree>
+    <p:extLst>
+      <p:ext uri="{BB962C8B-B14F-4D97-AF65-F5344CB8AC3E}">
+        <p14:creationId xmlns:p14="http://schemas.microsoft.com/office/powerpoint/2010/main" val="3798710088"/>
+      </p:ext>
+    </p:extLst>
+  </p:cSld>
+  <p:clrMapOvr>
+    <a:masterClrMapping/>
+  </p:clrMapOvr>
+</p:sld>
+</file>
+
+<file path=ppt/slides/slide19.xml><?xml version="1.0" encoding="utf-8"?>
+<p:sld xmlns:a="http://schemas.openxmlformats.org/drawingml/2006/main" xmlns:r="http://schemas.openxmlformats.org/officeDocument/2006/relationships" xmlns:p="http://schemas.openxmlformats.org/presentationml/2006/main">
+  <p:cSld>
+    <p:spTree>
+      <p:nvGrpSpPr>
+        <p:cNvPr id="1" name="">
+          <a:extLst>
+            <a:ext uri="{FF2B5EF4-FFF2-40B4-BE49-F238E27FC236}">
+              <a16:creationId xmlns:a16="http://schemas.microsoft.com/office/drawing/2014/main" id="{1571856F-A877-4085-A221-1EFFD8355FD3}"/>
+            </a:ext>
+          </a:extLst>
+        </p:cNvPr>
+        <p:cNvGrpSpPr/>
+        <p:nvPr/>
+      </p:nvGrpSpPr>
+      <p:grpSpPr>
+        <a:xfrm>
+          <a:off x="0" y="0"/>
+          <a:ext cx="0" cy="0"/>
+          <a:chOff x="0" y="0"/>
+          <a:chExt cx="0" cy="0"/>
+        </a:xfrm>
+      </p:grpSpPr>
+      <p:sp>
+        <p:nvSpPr>
+          <p:cNvPr id="2" name="Title 1">
+            <a:extLst>
+              <a:ext uri="{FF2B5EF4-FFF2-40B4-BE49-F238E27FC236}">
+                <a16:creationId xmlns:a16="http://schemas.microsoft.com/office/drawing/2014/main" id="{96EA9B80-74AC-7AE7-DC1E-2AB2712B181E}"/>
+              </a:ext>
+            </a:extLst>
+          </p:cNvPr>
+          <p:cNvSpPr>
+            <a:spLocks noGrp="1"/>
+          </p:cNvSpPr>
+          <p:nvPr>
+            <p:ph type="title"/>
+          </p:nvPr>
+        </p:nvSpPr>
+        <p:spPr/>
+        <p:txBody>
+          <a:bodyPr/>
+          <a:lstStyle/>
+          <a:p>
+            <a:r>
+              <a:rPr lang="en-GB" sz="800" b="1" dirty="0">
+                <a:solidFill>
+                  <a:srgbClr val="800000"/>
+                </a:solidFill>
+                <a:effectLst/>
+                <a:highlight>
+                  <a:srgbClr val="FFFFFF"/>
+                </a:highlight>
+                <a:latin typeface="Menlo" panose="020B0609030804020204" pitchFamily="49" charset="0"/>
+              </a:rPr>
+              <a:t>Logistic regression: Average marginal effect (AME) and HTE (</a:t>
+            </a:r>
+            <a:r>
+              <a:rPr lang="en-GB" sz="800" b="1" dirty="0" err="1">
+                <a:solidFill>
+                  <a:srgbClr val="800000"/>
+                </a:solidFill>
+                <a:effectLst/>
+                <a:highlight>
+                  <a:srgbClr val="FFFFFF"/>
+                </a:highlight>
+                <a:latin typeface="Menlo" panose="020B0609030804020204" pitchFamily="49" charset="0"/>
+              </a:rPr>
+              <a:t>heterogenious</a:t>
+            </a:r>
+            <a:r>
+              <a:rPr lang="en-GB" sz="800" b="1" dirty="0">
+                <a:solidFill>
+                  <a:srgbClr val="800000"/>
+                </a:solidFill>
+                <a:effectLst/>
+                <a:highlight>
+                  <a:srgbClr val="FFFFFF"/>
+                </a:highlight>
+                <a:latin typeface="Menlo" panose="020B0609030804020204" pitchFamily="49" charset="0"/>
+              </a:rPr>
+              <a:t> treatment effect)</a:t>
+            </a:r>
+            <a:endParaRPr lang="en-GB" sz="800" b="0" dirty="0">
+              <a:solidFill>
+                <a:srgbClr val="3B3B3B"/>
+              </a:solidFill>
+              <a:effectLst/>
+              <a:highlight>
+                <a:srgbClr val="FFFFFF"/>
+              </a:highlight>
+              <a:latin typeface="Menlo" panose="020B0609030804020204" pitchFamily="49" charset="0"/>
+            </a:endParaRPr>
+          </a:p>
+        </p:txBody>
+      </p:sp>
+      <p:sp>
+        <p:nvSpPr>
+          <p:cNvPr id="3" name="Date Placeholder 2">
+            <a:extLst>
+              <a:ext uri="{FF2B5EF4-FFF2-40B4-BE49-F238E27FC236}">
+                <a16:creationId xmlns:a16="http://schemas.microsoft.com/office/drawing/2014/main" id="{F11529E9-8F3E-E8CF-9D5A-7A485BAC7F4C}"/>
+              </a:ext>
+            </a:extLst>
+          </p:cNvPr>
+          <p:cNvSpPr>
+            <a:spLocks noGrp="1"/>
+          </p:cNvSpPr>
+          <p:nvPr>
+            <p:ph type="dt" sz="half" idx="2"/>
+          </p:nvPr>
+        </p:nvSpPr>
+        <p:spPr/>
+        <p:txBody>
+          <a:bodyPr/>
+          <a:lstStyle/>
+          <a:p>
+            <a:fld id="{822B4C34-8539-4A47-8763-AA072889AAA3}" type="datetime1">
+              <a:rPr lang="en-GB" smtClean="0"/>
+              <a:t>18/06/2026</a:t>
+            </a:fld>
+            <a:endParaRPr lang="en-GB" dirty="0"/>
+          </a:p>
+        </p:txBody>
+      </p:sp>
+      <p:sp>
+        <p:nvSpPr>
+          <p:cNvPr id="4" name="Footer Placeholder 3">
+            <a:extLst>
+              <a:ext uri="{FF2B5EF4-FFF2-40B4-BE49-F238E27FC236}">
+                <a16:creationId xmlns:a16="http://schemas.microsoft.com/office/drawing/2014/main" id="{12627F12-9131-C3F6-C82D-B0EB9651C7E3}"/>
+              </a:ext>
+            </a:extLst>
+          </p:cNvPr>
+          <p:cNvSpPr>
+            <a:spLocks noGrp="1"/>
+          </p:cNvSpPr>
+          <p:nvPr>
+            <p:ph type="ftr" sz="quarter" idx="3"/>
+          </p:nvPr>
+        </p:nvSpPr>
+        <p:spPr/>
+        <p:txBody>
+          <a:bodyPr/>
+          <a:lstStyle/>
+          <a:p>
+            <a:r>
+              <a:rPr lang="en-GB"/>
+              <a:t>Presentation description - CONFIDENTIALTY NOTE</a:t>
+            </a:r>
+            <a:endParaRPr lang="en-GB" dirty="0"/>
+          </a:p>
+        </p:txBody>
+      </p:sp>
+      <p:sp>
+        <p:nvSpPr>
+          <p:cNvPr id="5" name="Slide Number Placeholder 4">
+            <a:extLst>
+              <a:ext uri="{FF2B5EF4-FFF2-40B4-BE49-F238E27FC236}">
+                <a16:creationId xmlns:a16="http://schemas.microsoft.com/office/drawing/2014/main" id="{1378E922-6A79-1932-1967-144809AA25C0}"/>
+              </a:ext>
+            </a:extLst>
+          </p:cNvPr>
+          <p:cNvSpPr>
+            <a:spLocks noGrp="1"/>
+          </p:cNvSpPr>
+          <p:nvPr>
+            <p:ph type="sldNum" sz="quarter" idx="4"/>
+          </p:nvPr>
+        </p:nvSpPr>
+        <p:spPr/>
+        <p:txBody>
+          <a:bodyPr/>
+          <a:lstStyle/>
+          <a:p>
+            <a:fld id="{D622C71B-F0A5-40B6-B6DA-5780E9494F8A}" type="slidenum">
+              <a:rPr lang="en-GB" smtClean="0"/>
+              <a:pPr/>
+              <a:t>19</a:t>
+            </a:fld>
+            <a:endParaRPr lang="en-GB" dirty="0"/>
+          </a:p>
+        </p:txBody>
+      </p:sp>
+      <p:sp>
+        <p:nvSpPr>
+          <p:cNvPr id="8" name="TextBox 7">
+            <a:extLst>
+              <a:ext uri="{FF2B5EF4-FFF2-40B4-BE49-F238E27FC236}">
+                <a16:creationId xmlns:a16="http://schemas.microsoft.com/office/drawing/2014/main" id="{96F89BF0-DA34-F87F-D016-619B5C525D08}"/>
+              </a:ext>
+            </a:extLst>
+          </p:cNvPr>
+          <p:cNvSpPr txBox="1"/>
+          <p:nvPr/>
+        </p:nvSpPr>
+        <p:spPr>
+          <a:xfrm>
+            <a:off x="504012" y="1367819"/>
+            <a:ext cx="10736088" cy="4708981"/>
+          </a:xfrm>
+          <a:prstGeom prst="rect">
+            <a:avLst/>
+          </a:prstGeom>
+          <a:noFill/>
+        </p:spPr>
+        <p:txBody>
+          <a:bodyPr wrap="square">
+            <a:spAutoFit/>
+          </a:bodyPr>
+          <a:lstStyle/>
+          <a:p>
+            <a:r>
+              <a:rPr lang="en-GB" sz="1200" b="0" dirty="0">
+                <a:solidFill>
+                  <a:srgbClr val="3B3B3B"/>
+                </a:solidFill>
+                <a:effectLst/>
+                <a:highlight>
+                  <a:srgbClr val="FFFFFF"/>
+                </a:highlight>
+                <a:latin typeface="Menlo" panose="020B0609030804020204" pitchFamily="49" charset="0"/>
+              </a:rPr>
+              <a:t>Logit allows to estimate the causal effect of booster adoption on churn probability while allowing the effect to vary by internet-usage tier.</a:t>
+            </a:r>
+          </a:p>
+          <a:p>
+            <a:br>
+              <a:rPr lang="en-GB" sz="1200" b="0" dirty="0">
+                <a:solidFill>
+                  <a:srgbClr val="3B3B3B"/>
+                </a:solidFill>
+                <a:effectLst/>
+                <a:highlight>
+                  <a:srgbClr val="FFFFFF"/>
+                </a:highlight>
+                <a:latin typeface="Menlo" panose="020B0609030804020204" pitchFamily="49" charset="0"/>
+              </a:rPr>
+            </a:br>
+            <a:r>
+              <a:rPr lang="en-GB" sz="1200" b="0" dirty="0">
+                <a:solidFill>
+                  <a:srgbClr val="3B3B3B"/>
+                </a:solidFill>
+                <a:effectLst/>
+                <a:highlight>
+                  <a:srgbClr val="FFFFFF"/>
+                </a:highlight>
+                <a:latin typeface="Menlo" panose="020B0609030804020204" pitchFamily="49" charset="0"/>
+              </a:rPr>
+              <a:t>Let:</a:t>
+            </a:r>
+          </a:p>
+          <a:p>
+            <a:r>
+              <a:rPr lang="en-GB" sz="1200" b="0" dirty="0">
+                <a:solidFill>
+                  <a:srgbClr val="0451A5"/>
+                </a:solidFill>
+                <a:effectLst/>
+                <a:highlight>
+                  <a:srgbClr val="FFFFFF"/>
+                </a:highlight>
+                <a:latin typeface="Menlo" panose="020B0609030804020204" pitchFamily="49" charset="0"/>
+              </a:rPr>
+              <a:t>-</a:t>
+            </a:r>
+            <a:r>
+              <a:rPr lang="en-GB" sz="1200" b="0" dirty="0">
+                <a:solidFill>
+                  <a:srgbClr val="3B3B3B"/>
+                </a:solidFill>
+                <a:effectLst/>
+                <a:highlight>
+                  <a:srgbClr val="FFFFFF"/>
+                </a:highlight>
+                <a:latin typeface="Menlo" panose="020B0609030804020204" pitchFamily="49" charset="0"/>
+              </a:rPr>
+              <a:t> $</a:t>
+            </a:r>
+            <a:r>
+              <a:rPr lang="en-GB" sz="1200" b="0" dirty="0" err="1">
+                <a:solidFill>
+                  <a:srgbClr val="000000"/>
+                </a:solidFill>
+                <a:effectLst/>
+                <a:highlight>
+                  <a:srgbClr val="FFFFFF"/>
+                </a:highlight>
+                <a:latin typeface="Menlo" panose="020B0609030804020204" pitchFamily="49" charset="0"/>
+              </a:rPr>
+              <a:t>Y_i</a:t>
+            </a:r>
+            <a:r>
+              <a:rPr lang="en-GB" sz="1200" b="0" dirty="0">
+                <a:solidFill>
+                  <a:srgbClr val="000000"/>
+                </a:solidFill>
+                <a:effectLst/>
+                <a:highlight>
+                  <a:srgbClr val="FFFFFF"/>
+                </a:highlight>
+                <a:latin typeface="Menlo" panose="020B0609030804020204" pitchFamily="49" charset="0"/>
+              </a:rPr>
+              <a:t> </a:t>
+            </a:r>
+            <a:r>
+              <a:rPr lang="en-GB" sz="1200" b="0" dirty="0">
+                <a:solidFill>
+                  <a:srgbClr val="0000FF"/>
+                </a:solidFill>
+                <a:effectLst/>
+                <a:highlight>
+                  <a:srgbClr val="FFFFFF"/>
+                </a:highlight>
+                <a:latin typeface="Menlo" panose="020B0609030804020204" pitchFamily="49" charset="0"/>
+              </a:rPr>
+              <a:t>\in</a:t>
+            </a:r>
+            <a:r>
+              <a:rPr lang="en-GB" sz="1200" b="0" dirty="0">
+                <a:solidFill>
+                  <a:srgbClr val="000000"/>
+                </a:solidFill>
+                <a:effectLst/>
+                <a:highlight>
+                  <a:srgbClr val="FFFFFF"/>
+                </a:highlight>
+                <a:latin typeface="Menlo" panose="020B0609030804020204" pitchFamily="49" charset="0"/>
+              </a:rPr>
+              <a:t> \{</a:t>
+            </a:r>
+            <a:r>
+              <a:rPr lang="en-GB" sz="1200" b="0" dirty="0">
+                <a:solidFill>
+                  <a:srgbClr val="098658"/>
+                </a:solidFill>
+                <a:effectLst/>
+                <a:highlight>
+                  <a:srgbClr val="FFFFFF"/>
+                </a:highlight>
+                <a:latin typeface="Menlo" panose="020B0609030804020204" pitchFamily="49" charset="0"/>
+              </a:rPr>
+              <a:t>0</a:t>
+            </a:r>
+            <a:r>
+              <a:rPr lang="en-GB" sz="1200" b="0" dirty="0">
+                <a:solidFill>
+                  <a:srgbClr val="000000"/>
+                </a:solidFill>
+                <a:effectLst/>
+                <a:highlight>
+                  <a:srgbClr val="FFFFFF"/>
+                </a:highlight>
+                <a:latin typeface="Menlo" panose="020B0609030804020204" pitchFamily="49" charset="0"/>
+              </a:rPr>
+              <a:t>,</a:t>
+            </a:r>
+            <a:r>
+              <a:rPr lang="en-GB" sz="1200" b="0" dirty="0">
+                <a:solidFill>
+                  <a:srgbClr val="098658"/>
+                </a:solidFill>
+                <a:effectLst/>
+                <a:highlight>
+                  <a:srgbClr val="FFFFFF"/>
+                </a:highlight>
+                <a:latin typeface="Menlo" panose="020B0609030804020204" pitchFamily="49" charset="0"/>
+              </a:rPr>
+              <a:t>1</a:t>
+            </a:r>
+            <a:r>
+              <a:rPr lang="en-GB" sz="1200" b="0" dirty="0">
+                <a:solidFill>
+                  <a:srgbClr val="000000"/>
+                </a:solidFill>
+                <a:effectLst/>
+                <a:highlight>
+                  <a:srgbClr val="FFFFFF"/>
+                </a:highlight>
+                <a:latin typeface="Menlo" panose="020B0609030804020204" pitchFamily="49" charset="0"/>
+              </a:rPr>
+              <a:t>\}</a:t>
+            </a:r>
+            <a:r>
+              <a:rPr lang="en-GB" sz="1200" b="0" dirty="0">
+                <a:solidFill>
+                  <a:srgbClr val="3B3B3B"/>
+                </a:solidFill>
+                <a:effectLst/>
+                <a:highlight>
+                  <a:srgbClr val="FFFFFF"/>
+                </a:highlight>
+                <a:latin typeface="Menlo" panose="020B0609030804020204" pitchFamily="49" charset="0"/>
+              </a:rPr>
+              <a:t>$ be churn</a:t>
+            </a:r>
+          </a:p>
+          <a:p>
+            <a:r>
+              <a:rPr lang="en-GB" sz="1200" b="0" dirty="0">
+                <a:solidFill>
+                  <a:srgbClr val="0451A5"/>
+                </a:solidFill>
+                <a:effectLst/>
+                <a:highlight>
+                  <a:srgbClr val="FFFFFF"/>
+                </a:highlight>
+                <a:latin typeface="Menlo" panose="020B0609030804020204" pitchFamily="49" charset="0"/>
+              </a:rPr>
+              <a:t>-</a:t>
+            </a:r>
+            <a:r>
+              <a:rPr lang="en-GB" sz="1200" b="0" dirty="0">
+                <a:solidFill>
+                  <a:srgbClr val="3B3B3B"/>
+                </a:solidFill>
+                <a:effectLst/>
+                <a:highlight>
+                  <a:srgbClr val="FFFFFF"/>
+                </a:highlight>
+                <a:latin typeface="Menlo" panose="020B0609030804020204" pitchFamily="49" charset="0"/>
+              </a:rPr>
+              <a:t> $</a:t>
+            </a:r>
+            <a:r>
+              <a:rPr lang="en-GB" sz="1200" b="0" dirty="0" err="1">
+                <a:solidFill>
+                  <a:srgbClr val="000000"/>
+                </a:solidFill>
+                <a:effectLst/>
+                <a:highlight>
+                  <a:srgbClr val="FFFFFF"/>
+                </a:highlight>
+                <a:latin typeface="Menlo" panose="020B0609030804020204" pitchFamily="49" charset="0"/>
+              </a:rPr>
+              <a:t>T_i</a:t>
+            </a:r>
+            <a:r>
+              <a:rPr lang="en-GB" sz="1200" b="0" dirty="0">
+                <a:solidFill>
+                  <a:srgbClr val="000000"/>
+                </a:solidFill>
+                <a:effectLst/>
+                <a:highlight>
+                  <a:srgbClr val="FFFFFF"/>
+                </a:highlight>
+                <a:latin typeface="Menlo" panose="020B0609030804020204" pitchFamily="49" charset="0"/>
+              </a:rPr>
+              <a:t> </a:t>
+            </a:r>
+            <a:r>
+              <a:rPr lang="en-GB" sz="1200" b="0" dirty="0">
+                <a:solidFill>
+                  <a:srgbClr val="0000FF"/>
+                </a:solidFill>
+                <a:effectLst/>
+                <a:highlight>
+                  <a:srgbClr val="FFFFFF"/>
+                </a:highlight>
+                <a:latin typeface="Menlo" panose="020B0609030804020204" pitchFamily="49" charset="0"/>
+              </a:rPr>
+              <a:t>\in</a:t>
+            </a:r>
+            <a:r>
+              <a:rPr lang="en-GB" sz="1200" b="0" dirty="0">
+                <a:solidFill>
+                  <a:srgbClr val="000000"/>
+                </a:solidFill>
+                <a:effectLst/>
+                <a:highlight>
+                  <a:srgbClr val="FFFFFF"/>
+                </a:highlight>
+                <a:latin typeface="Menlo" panose="020B0609030804020204" pitchFamily="49" charset="0"/>
+              </a:rPr>
+              <a:t> \{</a:t>
+            </a:r>
+            <a:r>
+              <a:rPr lang="en-GB" sz="1200" b="0" dirty="0">
+                <a:solidFill>
+                  <a:srgbClr val="098658"/>
+                </a:solidFill>
+                <a:effectLst/>
+                <a:highlight>
+                  <a:srgbClr val="FFFFFF"/>
+                </a:highlight>
+                <a:latin typeface="Menlo" panose="020B0609030804020204" pitchFamily="49" charset="0"/>
+              </a:rPr>
+              <a:t>0</a:t>
+            </a:r>
+            <a:r>
+              <a:rPr lang="en-GB" sz="1200" b="0" dirty="0">
+                <a:solidFill>
+                  <a:srgbClr val="000000"/>
+                </a:solidFill>
+                <a:effectLst/>
+                <a:highlight>
+                  <a:srgbClr val="FFFFFF"/>
+                </a:highlight>
+                <a:latin typeface="Menlo" panose="020B0609030804020204" pitchFamily="49" charset="0"/>
+              </a:rPr>
+              <a:t>,</a:t>
+            </a:r>
+            <a:r>
+              <a:rPr lang="en-GB" sz="1200" b="0" dirty="0">
+                <a:solidFill>
+                  <a:srgbClr val="098658"/>
+                </a:solidFill>
+                <a:effectLst/>
+                <a:highlight>
+                  <a:srgbClr val="FFFFFF"/>
+                </a:highlight>
+                <a:latin typeface="Menlo" panose="020B0609030804020204" pitchFamily="49" charset="0"/>
+              </a:rPr>
+              <a:t>1</a:t>
+            </a:r>
+            <a:r>
+              <a:rPr lang="en-GB" sz="1200" b="0" dirty="0">
+                <a:solidFill>
+                  <a:srgbClr val="000000"/>
+                </a:solidFill>
+                <a:effectLst/>
+                <a:highlight>
+                  <a:srgbClr val="FFFFFF"/>
+                </a:highlight>
+                <a:latin typeface="Menlo" panose="020B0609030804020204" pitchFamily="49" charset="0"/>
+              </a:rPr>
+              <a:t>\}</a:t>
+            </a:r>
+            <a:r>
+              <a:rPr lang="en-GB" sz="1200" b="0" dirty="0">
+                <a:solidFill>
+                  <a:srgbClr val="3B3B3B"/>
+                </a:solidFill>
+                <a:effectLst/>
+                <a:highlight>
+                  <a:srgbClr val="FFFFFF"/>
+                </a:highlight>
+                <a:latin typeface="Menlo" panose="020B0609030804020204" pitchFamily="49" charset="0"/>
+              </a:rPr>
+              <a:t>$ be booster adoption</a:t>
+            </a:r>
+          </a:p>
+          <a:p>
+            <a:r>
+              <a:rPr lang="en-GB" sz="1200" b="0" dirty="0">
+                <a:solidFill>
+                  <a:srgbClr val="0451A5"/>
+                </a:solidFill>
+                <a:effectLst/>
+                <a:highlight>
+                  <a:srgbClr val="FFFFFF"/>
+                </a:highlight>
+                <a:latin typeface="Menlo" panose="020B0609030804020204" pitchFamily="49" charset="0"/>
+              </a:rPr>
+              <a:t>-</a:t>
+            </a:r>
+            <a:r>
+              <a:rPr lang="en-GB" sz="1200" b="0" dirty="0">
+                <a:solidFill>
+                  <a:srgbClr val="3B3B3B"/>
+                </a:solidFill>
+                <a:effectLst/>
+                <a:highlight>
+                  <a:srgbClr val="FFFFFF"/>
+                </a:highlight>
+                <a:latin typeface="Menlo" panose="020B0609030804020204" pitchFamily="49" charset="0"/>
+              </a:rPr>
+              <a:t> $</a:t>
+            </a:r>
+            <a:r>
+              <a:rPr lang="en-GB" sz="1200" b="0" dirty="0" err="1">
+                <a:solidFill>
+                  <a:srgbClr val="000000"/>
+                </a:solidFill>
+                <a:effectLst/>
+                <a:highlight>
+                  <a:srgbClr val="FFFFFF"/>
+                </a:highlight>
+                <a:latin typeface="Menlo" panose="020B0609030804020204" pitchFamily="49" charset="0"/>
+              </a:rPr>
+              <a:t>G_i</a:t>
+            </a:r>
+            <a:r>
+              <a:rPr lang="en-GB" sz="1200" b="0" dirty="0">
+                <a:solidFill>
+                  <a:srgbClr val="3B3B3B"/>
+                </a:solidFill>
+                <a:effectLst/>
+                <a:highlight>
+                  <a:srgbClr val="FFFFFF"/>
+                </a:highlight>
+                <a:latin typeface="Menlo" panose="020B0609030804020204" pitchFamily="49" charset="0"/>
+              </a:rPr>
+              <a:t>$ be internet-usage tier</a:t>
+            </a:r>
+          </a:p>
+          <a:p>
+            <a:r>
+              <a:rPr lang="en-GB" sz="1200" b="0" dirty="0">
+                <a:solidFill>
+                  <a:srgbClr val="0451A5"/>
+                </a:solidFill>
+                <a:effectLst/>
+                <a:highlight>
+                  <a:srgbClr val="FFFFFF"/>
+                </a:highlight>
+                <a:latin typeface="Menlo" panose="020B0609030804020204" pitchFamily="49" charset="0"/>
+              </a:rPr>
+              <a:t>-</a:t>
+            </a:r>
+            <a:r>
+              <a:rPr lang="en-GB" sz="1200" b="0" dirty="0">
+                <a:solidFill>
+                  <a:srgbClr val="3B3B3B"/>
+                </a:solidFill>
+                <a:effectLst/>
+                <a:highlight>
+                  <a:srgbClr val="FFFFFF"/>
+                </a:highlight>
+                <a:latin typeface="Menlo" panose="020B0609030804020204" pitchFamily="49" charset="0"/>
+              </a:rPr>
+              <a:t> $</a:t>
+            </a:r>
+            <a:r>
+              <a:rPr lang="en-GB" sz="1200" b="0" dirty="0" err="1">
+                <a:solidFill>
+                  <a:srgbClr val="000000"/>
+                </a:solidFill>
+                <a:effectLst/>
+                <a:highlight>
+                  <a:srgbClr val="FFFFFF"/>
+                </a:highlight>
+                <a:latin typeface="Menlo" panose="020B0609030804020204" pitchFamily="49" charset="0"/>
+              </a:rPr>
+              <a:t>X_i</a:t>
+            </a:r>
+            <a:r>
+              <a:rPr lang="en-GB" sz="1200" b="0" dirty="0">
+                <a:solidFill>
+                  <a:srgbClr val="3B3B3B"/>
+                </a:solidFill>
+                <a:effectLst/>
+                <a:highlight>
+                  <a:srgbClr val="FFFFFF"/>
+                </a:highlight>
+                <a:latin typeface="Menlo" panose="020B0609030804020204" pitchFamily="49" charset="0"/>
+              </a:rPr>
+              <a:t>$ be control covariates (age, tenure, TV/mobile products, commune)</a:t>
+            </a:r>
+          </a:p>
+          <a:p>
+            <a:br>
+              <a:rPr lang="en-GB" sz="1200" b="0" dirty="0">
+                <a:solidFill>
+                  <a:srgbClr val="3B3B3B"/>
+                </a:solidFill>
+                <a:effectLst/>
+                <a:highlight>
+                  <a:srgbClr val="FFFFFF"/>
+                </a:highlight>
+                <a:latin typeface="Menlo" panose="020B0609030804020204" pitchFamily="49" charset="0"/>
+              </a:rPr>
+            </a:br>
+            <a:r>
+              <a:rPr lang="en-GB" sz="1200" b="0" dirty="0">
+                <a:solidFill>
+                  <a:srgbClr val="3B3B3B"/>
+                </a:solidFill>
+                <a:effectLst/>
+                <a:highlight>
+                  <a:srgbClr val="FFFFFF"/>
+                </a:highlight>
+                <a:latin typeface="Menlo" panose="020B0609030804020204" pitchFamily="49" charset="0"/>
+              </a:rPr>
+              <a:t>We fit an interaction logistic model:</a:t>
+            </a:r>
+          </a:p>
+          <a:p>
+            <a:r>
+              <a:rPr lang="en-GB" sz="1200" b="0" dirty="0">
+                <a:solidFill>
+                  <a:srgbClr val="3B3B3B"/>
+                </a:solidFill>
+                <a:effectLst/>
+                <a:highlight>
+                  <a:srgbClr val="FFFFFF"/>
+                </a:highlight>
+                <a:latin typeface="Menlo" panose="020B0609030804020204" pitchFamily="49" charset="0"/>
+              </a:rPr>
+              <a:t>$$</a:t>
+            </a:r>
+          </a:p>
+          <a:p>
+            <a:r>
+              <a:rPr lang="en-GB" sz="1200" b="0" dirty="0">
+                <a:solidFill>
+                  <a:srgbClr val="0000FF"/>
+                </a:solidFill>
+                <a:effectLst/>
+                <a:highlight>
+                  <a:srgbClr val="FFFFFF"/>
+                </a:highlight>
+                <a:latin typeface="Menlo" panose="020B0609030804020204" pitchFamily="49" charset="0"/>
+              </a:rPr>
+              <a:t>\</a:t>
+            </a:r>
+            <a:r>
+              <a:rPr lang="en-GB" sz="1200" b="0" dirty="0" err="1">
+                <a:solidFill>
+                  <a:srgbClr val="0000FF"/>
+                </a:solidFill>
+                <a:effectLst/>
+                <a:highlight>
+                  <a:srgbClr val="FFFFFF"/>
+                </a:highlight>
+                <a:latin typeface="Menlo" panose="020B0609030804020204" pitchFamily="49" charset="0"/>
+              </a:rPr>
+              <a:t>Pr</a:t>
+            </a:r>
+            <a:r>
+              <a:rPr lang="en-GB" sz="1200" b="0" dirty="0">
+                <a:solidFill>
+                  <a:srgbClr val="000000"/>
+                </a:solidFill>
+                <a:effectLst/>
+                <a:highlight>
+                  <a:srgbClr val="FFFFFF"/>
+                </a:highlight>
+                <a:latin typeface="Menlo" panose="020B0609030804020204" pitchFamily="49" charset="0"/>
+              </a:rPr>
+              <a:t>(</a:t>
+            </a:r>
+            <a:r>
+              <a:rPr lang="en-GB" sz="1200" b="0" dirty="0" err="1">
+                <a:solidFill>
+                  <a:srgbClr val="000000"/>
+                </a:solidFill>
+                <a:effectLst/>
+                <a:highlight>
+                  <a:srgbClr val="FFFFFF"/>
+                </a:highlight>
+                <a:latin typeface="Menlo" panose="020B0609030804020204" pitchFamily="49" charset="0"/>
+              </a:rPr>
+              <a:t>Y_i</a:t>
+            </a:r>
+            <a:r>
+              <a:rPr lang="en-GB" sz="1200" b="0" dirty="0">
+                <a:solidFill>
+                  <a:srgbClr val="000000"/>
+                </a:solidFill>
+                <a:effectLst/>
+                <a:highlight>
+                  <a:srgbClr val="FFFFFF"/>
+                </a:highlight>
+                <a:latin typeface="Menlo" panose="020B0609030804020204" pitchFamily="49" charset="0"/>
+              </a:rPr>
+              <a:t>=</a:t>
+            </a:r>
+            <a:r>
+              <a:rPr lang="en-GB" sz="1200" b="0" dirty="0">
+                <a:solidFill>
+                  <a:srgbClr val="098658"/>
+                </a:solidFill>
+                <a:effectLst/>
+                <a:highlight>
+                  <a:srgbClr val="FFFFFF"/>
+                </a:highlight>
+                <a:latin typeface="Menlo" panose="020B0609030804020204" pitchFamily="49" charset="0"/>
+              </a:rPr>
+              <a:t>1</a:t>
+            </a:r>
+            <a:r>
+              <a:rPr lang="en-GB" sz="1200" b="0" dirty="0">
+                <a:solidFill>
+                  <a:srgbClr val="0000FF"/>
+                </a:solidFill>
+                <a:effectLst/>
+                <a:highlight>
+                  <a:srgbClr val="FFFFFF"/>
+                </a:highlight>
+                <a:latin typeface="Menlo" panose="020B0609030804020204" pitchFamily="49" charset="0"/>
+              </a:rPr>
+              <a:t>\mid</a:t>
+            </a:r>
+            <a:r>
+              <a:rPr lang="en-GB" sz="1200" b="0" dirty="0">
+                <a:solidFill>
+                  <a:srgbClr val="000000"/>
+                </a:solidFill>
+                <a:effectLst/>
+                <a:highlight>
+                  <a:srgbClr val="FFFFFF"/>
+                </a:highlight>
+                <a:latin typeface="Menlo" panose="020B0609030804020204" pitchFamily="49" charset="0"/>
+              </a:rPr>
+              <a:t> </a:t>
+            </a:r>
+            <a:r>
+              <a:rPr lang="en-GB" sz="1200" b="0" dirty="0" err="1">
+                <a:solidFill>
+                  <a:srgbClr val="000000"/>
+                </a:solidFill>
+                <a:effectLst/>
+                <a:highlight>
+                  <a:srgbClr val="FFFFFF"/>
+                </a:highlight>
+                <a:latin typeface="Menlo" panose="020B0609030804020204" pitchFamily="49" charset="0"/>
+              </a:rPr>
+              <a:t>T_i,G_i,X_i</a:t>
+            </a:r>
+            <a:r>
+              <a:rPr lang="en-GB" sz="1200" b="0" dirty="0">
+                <a:solidFill>
+                  <a:srgbClr val="000000"/>
+                </a:solidFill>
+                <a:effectLst/>
+                <a:highlight>
+                  <a:srgbClr val="FFFFFF"/>
+                </a:highlight>
+                <a:latin typeface="Menlo" panose="020B0609030804020204" pitchFamily="49" charset="0"/>
+              </a:rPr>
+              <a:t>) = </a:t>
+            </a:r>
+            <a:r>
+              <a:rPr lang="en-GB" sz="1200" b="0" dirty="0">
+                <a:solidFill>
+                  <a:srgbClr val="0000FF"/>
+                </a:solidFill>
+                <a:effectLst/>
+                <a:highlight>
+                  <a:srgbClr val="FFFFFF"/>
+                </a:highlight>
+                <a:latin typeface="Menlo" panose="020B0609030804020204" pitchFamily="49" charset="0"/>
+              </a:rPr>
+              <a:t>\Lambda\left</a:t>
+            </a:r>
+            <a:r>
+              <a:rPr lang="en-GB" sz="1200" b="0" dirty="0">
+                <a:solidFill>
+                  <a:srgbClr val="000000"/>
+                </a:solidFill>
+                <a:effectLst/>
+                <a:highlight>
+                  <a:srgbClr val="FFFFFF"/>
+                </a:highlight>
+                <a:latin typeface="Menlo" panose="020B0609030804020204" pitchFamily="49" charset="0"/>
+              </a:rPr>
+              <a:t>(\beta_</a:t>
+            </a:r>
+            <a:r>
+              <a:rPr lang="en-GB" sz="1200" b="0" dirty="0">
+                <a:solidFill>
+                  <a:srgbClr val="098658"/>
+                </a:solidFill>
+                <a:effectLst/>
+                <a:highlight>
+                  <a:srgbClr val="FFFFFF"/>
+                </a:highlight>
+                <a:latin typeface="Menlo" panose="020B0609030804020204" pitchFamily="49" charset="0"/>
+              </a:rPr>
+              <a:t>0</a:t>
+            </a:r>
+            <a:r>
+              <a:rPr lang="en-GB" sz="1200" b="0" dirty="0">
+                <a:solidFill>
+                  <a:srgbClr val="000000"/>
+                </a:solidFill>
+                <a:effectLst/>
+                <a:highlight>
+                  <a:srgbClr val="FFFFFF"/>
+                </a:highlight>
+                <a:latin typeface="Menlo" panose="020B0609030804020204" pitchFamily="49" charset="0"/>
+              </a:rPr>
+              <a:t> + </a:t>
+            </a:r>
+            <a:r>
+              <a:rPr lang="en-GB" sz="1200" b="0" dirty="0">
+                <a:solidFill>
+                  <a:srgbClr val="0000FF"/>
+                </a:solidFill>
+                <a:effectLst/>
+                <a:highlight>
+                  <a:srgbClr val="FFFFFF"/>
+                </a:highlight>
+                <a:latin typeface="Menlo" panose="020B0609030804020204" pitchFamily="49" charset="0"/>
+              </a:rPr>
+              <a:t>\</a:t>
+            </a:r>
+            <a:r>
+              <a:rPr lang="en-GB" sz="1200" b="0" dirty="0" err="1">
+                <a:solidFill>
+                  <a:srgbClr val="0000FF"/>
+                </a:solidFill>
+                <a:effectLst/>
+                <a:highlight>
+                  <a:srgbClr val="FFFFFF"/>
+                </a:highlight>
+                <a:latin typeface="Menlo" panose="020B0609030804020204" pitchFamily="49" charset="0"/>
+              </a:rPr>
+              <a:t>beta_T</a:t>
+            </a:r>
+            <a:r>
+              <a:rPr lang="en-GB" sz="1200" b="0" dirty="0">
+                <a:solidFill>
+                  <a:srgbClr val="000000"/>
+                </a:solidFill>
+                <a:effectLst/>
+                <a:highlight>
+                  <a:srgbClr val="FFFFFF"/>
+                </a:highlight>
+                <a:latin typeface="Menlo" panose="020B0609030804020204" pitchFamily="49" charset="0"/>
+              </a:rPr>
+              <a:t> </a:t>
+            </a:r>
+            <a:r>
+              <a:rPr lang="en-GB" sz="1200" b="0" dirty="0" err="1">
+                <a:solidFill>
+                  <a:srgbClr val="000000"/>
+                </a:solidFill>
+                <a:effectLst/>
+                <a:highlight>
+                  <a:srgbClr val="FFFFFF"/>
+                </a:highlight>
+                <a:latin typeface="Menlo" panose="020B0609030804020204" pitchFamily="49" charset="0"/>
+              </a:rPr>
+              <a:t>T_i</a:t>
+            </a:r>
+            <a:r>
+              <a:rPr lang="en-GB" sz="1200" b="0" dirty="0">
+                <a:solidFill>
+                  <a:srgbClr val="000000"/>
+                </a:solidFill>
+                <a:effectLst/>
+                <a:highlight>
+                  <a:srgbClr val="FFFFFF"/>
+                </a:highlight>
+                <a:latin typeface="Menlo" panose="020B0609030804020204" pitchFamily="49" charset="0"/>
+              </a:rPr>
+              <a:t> + </a:t>
+            </a:r>
+            <a:r>
+              <a:rPr lang="en-GB" sz="1200" b="0" dirty="0">
+                <a:solidFill>
+                  <a:srgbClr val="0000FF"/>
+                </a:solidFill>
+                <a:effectLst/>
+                <a:highlight>
+                  <a:srgbClr val="FFFFFF"/>
+                </a:highlight>
+                <a:latin typeface="Menlo" panose="020B0609030804020204" pitchFamily="49" charset="0"/>
+              </a:rPr>
+              <a:t>\</a:t>
+            </a:r>
+            <a:r>
+              <a:rPr lang="en-GB" sz="1200" b="0" dirty="0" err="1">
+                <a:solidFill>
+                  <a:srgbClr val="0000FF"/>
+                </a:solidFill>
+                <a:effectLst/>
+                <a:highlight>
+                  <a:srgbClr val="FFFFFF"/>
+                </a:highlight>
+                <a:latin typeface="Menlo" panose="020B0609030804020204" pitchFamily="49" charset="0"/>
+              </a:rPr>
+              <a:t>beta_G</a:t>
+            </a:r>
+            <a:r>
+              <a:rPr lang="en-GB" sz="1200" b="0" dirty="0">
+                <a:solidFill>
+                  <a:srgbClr val="000000"/>
+                </a:solidFill>
+                <a:effectLst/>
+                <a:highlight>
+                  <a:srgbClr val="FFFFFF"/>
+                </a:highlight>
+                <a:latin typeface="Menlo" panose="020B0609030804020204" pitchFamily="49" charset="0"/>
+              </a:rPr>
+              <a:t>^</a:t>
+            </a:r>
+            <a:r>
+              <a:rPr lang="en-GB" sz="1200" b="0" dirty="0">
+                <a:solidFill>
+                  <a:srgbClr val="0000FF"/>
+                </a:solidFill>
+                <a:effectLst/>
+                <a:highlight>
+                  <a:srgbClr val="FFFFFF"/>
+                </a:highlight>
+                <a:latin typeface="Menlo" panose="020B0609030804020204" pitchFamily="49" charset="0"/>
+              </a:rPr>
+              <a:t>\top</a:t>
+            </a:r>
+            <a:r>
+              <a:rPr lang="en-GB" sz="1200" b="0" dirty="0">
+                <a:solidFill>
+                  <a:srgbClr val="000000"/>
+                </a:solidFill>
+                <a:effectLst/>
+                <a:highlight>
+                  <a:srgbClr val="FFFFFF"/>
+                </a:highlight>
+                <a:latin typeface="Menlo" panose="020B0609030804020204" pitchFamily="49" charset="0"/>
+              </a:rPr>
+              <a:t> </a:t>
+            </a:r>
+            <a:r>
+              <a:rPr lang="en-GB" sz="1200" b="0" dirty="0" err="1">
+                <a:solidFill>
+                  <a:srgbClr val="000000"/>
+                </a:solidFill>
+                <a:effectLst/>
+                <a:highlight>
+                  <a:srgbClr val="FFFFFF"/>
+                </a:highlight>
+                <a:latin typeface="Menlo" panose="020B0609030804020204" pitchFamily="49" charset="0"/>
+              </a:rPr>
+              <a:t>G_i</a:t>
+            </a:r>
+            <a:r>
+              <a:rPr lang="en-GB" sz="1200" b="0" dirty="0">
+                <a:solidFill>
+                  <a:srgbClr val="000000"/>
+                </a:solidFill>
+                <a:effectLst/>
+                <a:highlight>
+                  <a:srgbClr val="FFFFFF"/>
+                </a:highlight>
+                <a:latin typeface="Menlo" panose="020B0609030804020204" pitchFamily="49" charset="0"/>
+              </a:rPr>
+              <a:t> + </a:t>
+            </a:r>
+            <a:r>
+              <a:rPr lang="en-GB" sz="1200" b="0" dirty="0">
+                <a:solidFill>
+                  <a:srgbClr val="0000FF"/>
+                </a:solidFill>
+                <a:effectLst/>
+                <a:highlight>
+                  <a:srgbClr val="FFFFFF"/>
+                </a:highlight>
+                <a:latin typeface="Menlo" panose="020B0609030804020204" pitchFamily="49" charset="0"/>
+              </a:rPr>
+              <a:t>\</a:t>
+            </a:r>
+            <a:r>
+              <a:rPr lang="en-GB" sz="1200" b="0" dirty="0">
+                <a:solidFill>
+                  <a:srgbClr val="795E26"/>
+                </a:solidFill>
+                <a:effectLst/>
+                <a:highlight>
+                  <a:srgbClr val="FFFFFF"/>
+                </a:highlight>
+                <a:latin typeface="Menlo" panose="020B0609030804020204" pitchFamily="49" charset="0"/>
+              </a:rPr>
+              <a:t>beta_</a:t>
+            </a:r>
+            <a:r>
+              <a:rPr lang="en-GB" sz="1200" b="0" dirty="0">
+                <a:solidFill>
+                  <a:srgbClr val="000000"/>
+                </a:solidFill>
+                <a:effectLst/>
+                <a:highlight>
+                  <a:srgbClr val="FFFFFF"/>
+                </a:highlight>
+                <a:latin typeface="Menlo" panose="020B0609030804020204" pitchFamily="49" charset="0"/>
+              </a:rPr>
+              <a:t>{TG}^</a:t>
+            </a:r>
+            <a:r>
+              <a:rPr lang="en-GB" sz="1200" b="0" dirty="0">
+                <a:solidFill>
+                  <a:srgbClr val="0000FF"/>
+                </a:solidFill>
+                <a:effectLst/>
+                <a:highlight>
+                  <a:srgbClr val="FFFFFF"/>
+                </a:highlight>
+                <a:latin typeface="Menlo" panose="020B0609030804020204" pitchFamily="49" charset="0"/>
+              </a:rPr>
+              <a:t>\top</a:t>
+            </a:r>
+            <a:r>
+              <a:rPr lang="en-GB" sz="1200" b="0" dirty="0">
+                <a:solidFill>
+                  <a:srgbClr val="000000"/>
+                </a:solidFill>
+                <a:effectLst/>
+                <a:highlight>
+                  <a:srgbClr val="FFFFFF"/>
+                </a:highlight>
+                <a:latin typeface="Menlo" panose="020B0609030804020204" pitchFamily="49" charset="0"/>
+              </a:rPr>
+              <a:t>(</a:t>
+            </a:r>
+            <a:r>
+              <a:rPr lang="en-GB" sz="1200" b="0" dirty="0" err="1">
+                <a:solidFill>
+                  <a:srgbClr val="000000"/>
+                </a:solidFill>
+                <a:effectLst/>
+                <a:highlight>
+                  <a:srgbClr val="FFFFFF"/>
+                </a:highlight>
+                <a:latin typeface="Menlo" panose="020B0609030804020204" pitchFamily="49" charset="0"/>
+              </a:rPr>
+              <a:t>T_i</a:t>
+            </a:r>
+            <a:r>
+              <a:rPr lang="en-GB" sz="1200" b="0" dirty="0">
+                <a:solidFill>
+                  <a:srgbClr val="0000FF"/>
+                </a:solidFill>
+                <a:effectLst/>
+                <a:highlight>
+                  <a:srgbClr val="FFFFFF"/>
+                </a:highlight>
+                <a:latin typeface="Menlo" panose="020B0609030804020204" pitchFamily="49" charset="0"/>
+              </a:rPr>
+              <a:t>\</a:t>
+            </a:r>
+            <a:r>
+              <a:rPr lang="en-GB" sz="1200" b="0" dirty="0" err="1">
+                <a:solidFill>
+                  <a:srgbClr val="0000FF"/>
+                </a:solidFill>
+                <a:effectLst/>
+                <a:highlight>
+                  <a:srgbClr val="FFFFFF"/>
+                </a:highlight>
+                <a:latin typeface="Menlo" panose="020B0609030804020204" pitchFamily="49" charset="0"/>
+              </a:rPr>
+              <a:t>cdot</a:t>
+            </a:r>
+            <a:r>
+              <a:rPr lang="en-GB" sz="1200" b="0" dirty="0">
+                <a:solidFill>
+                  <a:srgbClr val="000000"/>
+                </a:solidFill>
+                <a:effectLst/>
+                <a:highlight>
+                  <a:srgbClr val="FFFFFF"/>
+                </a:highlight>
+                <a:latin typeface="Menlo" panose="020B0609030804020204" pitchFamily="49" charset="0"/>
+              </a:rPr>
+              <a:t> </a:t>
+            </a:r>
+            <a:r>
+              <a:rPr lang="en-GB" sz="1200" b="0" dirty="0" err="1">
+                <a:solidFill>
+                  <a:srgbClr val="000000"/>
+                </a:solidFill>
+                <a:effectLst/>
+                <a:highlight>
+                  <a:srgbClr val="FFFFFF"/>
+                </a:highlight>
+                <a:latin typeface="Menlo" panose="020B0609030804020204" pitchFamily="49" charset="0"/>
+              </a:rPr>
+              <a:t>G_i</a:t>
+            </a:r>
+            <a:r>
+              <a:rPr lang="en-GB" sz="1200" b="0" dirty="0">
+                <a:solidFill>
+                  <a:srgbClr val="000000"/>
+                </a:solidFill>
+                <a:effectLst/>
+                <a:highlight>
+                  <a:srgbClr val="FFFFFF"/>
+                </a:highlight>
+                <a:latin typeface="Menlo" panose="020B0609030804020204" pitchFamily="49" charset="0"/>
+              </a:rPr>
+              <a:t>) + </a:t>
+            </a:r>
+            <a:r>
+              <a:rPr lang="en-GB" sz="1200" b="0" dirty="0">
+                <a:solidFill>
+                  <a:srgbClr val="0000FF"/>
+                </a:solidFill>
+                <a:effectLst/>
+                <a:highlight>
+                  <a:srgbClr val="FFFFFF"/>
+                </a:highlight>
+                <a:latin typeface="Menlo" panose="020B0609030804020204" pitchFamily="49" charset="0"/>
+              </a:rPr>
+              <a:t>\gamma</a:t>
+            </a:r>
+            <a:r>
+              <a:rPr lang="en-GB" sz="1200" b="0" dirty="0">
+                <a:solidFill>
+                  <a:srgbClr val="000000"/>
+                </a:solidFill>
+                <a:effectLst/>
+                <a:highlight>
+                  <a:srgbClr val="FFFFFF"/>
+                </a:highlight>
+                <a:latin typeface="Menlo" panose="020B0609030804020204" pitchFamily="49" charset="0"/>
+              </a:rPr>
+              <a:t>^</a:t>
+            </a:r>
+            <a:r>
+              <a:rPr lang="en-GB" sz="1200" b="0" dirty="0">
+                <a:solidFill>
+                  <a:srgbClr val="0000FF"/>
+                </a:solidFill>
+                <a:effectLst/>
+                <a:highlight>
+                  <a:srgbClr val="FFFFFF"/>
+                </a:highlight>
+                <a:latin typeface="Menlo" panose="020B0609030804020204" pitchFamily="49" charset="0"/>
+              </a:rPr>
+              <a:t>\top</a:t>
+            </a:r>
+            <a:r>
+              <a:rPr lang="en-GB" sz="1200" b="0" dirty="0">
+                <a:solidFill>
+                  <a:srgbClr val="000000"/>
+                </a:solidFill>
+                <a:effectLst/>
+                <a:highlight>
+                  <a:srgbClr val="FFFFFF"/>
+                </a:highlight>
+                <a:latin typeface="Menlo" panose="020B0609030804020204" pitchFamily="49" charset="0"/>
+              </a:rPr>
+              <a:t> </a:t>
+            </a:r>
+            <a:r>
+              <a:rPr lang="en-GB" sz="1200" b="0" dirty="0" err="1">
+                <a:solidFill>
+                  <a:srgbClr val="000000"/>
+                </a:solidFill>
+                <a:effectLst/>
+                <a:highlight>
+                  <a:srgbClr val="FFFFFF"/>
+                </a:highlight>
+                <a:latin typeface="Menlo" panose="020B0609030804020204" pitchFamily="49" charset="0"/>
+              </a:rPr>
+              <a:t>X_i</a:t>
+            </a:r>
+            <a:r>
+              <a:rPr lang="en-GB" sz="1200" b="0" dirty="0">
+                <a:solidFill>
+                  <a:srgbClr val="0000FF"/>
+                </a:solidFill>
+                <a:effectLst/>
+                <a:highlight>
+                  <a:srgbClr val="FFFFFF"/>
+                </a:highlight>
+                <a:latin typeface="Menlo" panose="020B0609030804020204" pitchFamily="49" charset="0"/>
+              </a:rPr>
+              <a:t>\right</a:t>
+            </a:r>
+            <a:r>
+              <a:rPr lang="en-GB" sz="1200" b="0" dirty="0">
+                <a:solidFill>
+                  <a:srgbClr val="000000"/>
+                </a:solidFill>
+                <a:effectLst/>
+                <a:highlight>
+                  <a:srgbClr val="FFFFFF"/>
+                </a:highlight>
+                <a:latin typeface="Menlo" panose="020B0609030804020204" pitchFamily="49" charset="0"/>
+              </a:rPr>
+              <a:t>),</a:t>
+            </a:r>
+            <a:endParaRPr lang="en-GB" sz="1200" b="0" dirty="0">
+              <a:solidFill>
+                <a:srgbClr val="3B3B3B"/>
+              </a:solidFill>
+              <a:effectLst/>
+              <a:highlight>
+                <a:srgbClr val="FFFFFF"/>
+              </a:highlight>
+              <a:latin typeface="Menlo" panose="020B0609030804020204" pitchFamily="49" charset="0"/>
+            </a:endParaRPr>
+          </a:p>
+          <a:p>
+            <a:r>
+              <a:rPr lang="en-GB" sz="1200" b="0" dirty="0">
+                <a:solidFill>
+                  <a:srgbClr val="0000FF"/>
+                </a:solidFill>
+                <a:effectLst/>
+                <a:highlight>
+                  <a:srgbClr val="FFFFFF"/>
+                </a:highlight>
+                <a:latin typeface="Menlo" panose="020B0609030804020204" pitchFamily="49" charset="0"/>
+              </a:rPr>
+              <a:t>\quad</a:t>
+            </a:r>
+            <a:r>
+              <a:rPr lang="en-GB" sz="1200" b="0" dirty="0">
+                <a:solidFill>
+                  <a:srgbClr val="000000"/>
+                </a:solidFill>
+                <a:effectLst/>
+                <a:highlight>
+                  <a:srgbClr val="FFFFFF"/>
+                </a:highlight>
+                <a:latin typeface="Menlo" panose="020B0609030804020204" pitchFamily="49" charset="0"/>
+              </a:rPr>
+              <a:t> </a:t>
+            </a:r>
+            <a:r>
+              <a:rPr lang="en-GB" sz="1200" b="0" dirty="0">
+                <a:solidFill>
+                  <a:srgbClr val="0000FF"/>
+                </a:solidFill>
+                <a:effectLst/>
+                <a:highlight>
+                  <a:srgbClr val="FFFFFF"/>
+                </a:highlight>
+                <a:latin typeface="Menlo" panose="020B0609030804020204" pitchFamily="49" charset="0"/>
+              </a:rPr>
+              <a:t>\Lambda</a:t>
+            </a:r>
+            <a:r>
+              <a:rPr lang="en-GB" sz="1200" b="0" dirty="0">
+                <a:solidFill>
+                  <a:srgbClr val="000000"/>
+                </a:solidFill>
+                <a:effectLst/>
+                <a:highlight>
+                  <a:srgbClr val="FFFFFF"/>
+                </a:highlight>
+                <a:latin typeface="Menlo" panose="020B0609030804020204" pitchFamily="49" charset="0"/>
+              </a:rPr>
+              <a:t>(z)=</a:t>
+            </a:r>
+            <a:r>
+              <a:rPr lang="en-GB" sz="1200" b="0" dirty="0">
+                <a:solidFill>
+                  <a:srgbClr val="0000FF"/>
+                </a:solidFill>
+                <a:effectLst/>
+                <a:highlight>
+                  <a:srgbClr val="FFFFFF"/>
+                </a:highlight>
+                <a:latin typeface="Menlo" panose="020B0609030804020204" pitchFamily="49" charset="0"/>
+              </a:rPr>
+              <a:t>\</a:t>
+            </a:r>
+            <a:r>
+              <a:rPr lang="en-GB" sz="1200" b="0" dirty="0">
+                <a:solidFill>
+                  <a:srgbClr val="795E26"/>
+                </a:solidFill>
+                <a:effectLst/>
+                <a:highlight>
+                  <a:srgbClr val="FFFFFF"/>
+                </a:highlight>
+                <a:latin typeface="Menlo" panose="020B0609030804020204" pitchFamily="49" charset="0"/>
+              </a:rPr>
+              <a:t>frac</a:t>
+            </a:r>
+            <a:r>
+              <a:rPr lang="en-GB" sz="1200" b="0" dirty="0">
+                <a:solidFill>
+                  <a:srgbClr val="000000"/>
+                </a:solidFill>
+                <a:effectLst/>
+                <a:highlight>
+                  <a:srgbClr val="FFFFFF"/>
+                </a:highlight>
+                <a:latin typeface="Menlo" panose="020B0609030804020204" pitchFamily="49" charset="0"/>
+              </a:rPr>
+              <a:t>{</a:t>
+            </a:r>
+            <a:r>
+              <a:rPr lang="en-GB" sz="1200" b="0" dirty="0">
+                <a:solidFill>
+                  <a:srgbClr val="098658"/>
+                </a:solidFill>
+                <a:effectLst/>
+                <a:highlight>
+                  <a:srgbClr val="FFFFFF"/>
+                </a:highlight>
+                <a:latin typeface="Menlo" panose="020B0609030804020204" pitchFamily="49" charset="0"/>
+              </a:rPr>
+              <a:t>1</a:t>
+            </a:r>
+            <a:r>
+              <a:rPr lang="en-GB" sz="1200" b="0" dirty="0">
+                <a:solidFill>
+                  <a:srgbClr val="000000"/>
+                </a:solidFill>
+                <a:effectLst/>
+                <a:highlight>
+                  <a:srgbClr val="FFFFFF"/>
+                </a:highlight>
+                <a:latin typeface="Menlo" panose="020B0609030804020204" pitchFamily="49" charset="0"/>
+              </a:rPr>
+              <a:t>}{</a:t>
+            </a:r>
+            <a:r>
+              <a:rPr lang="en-GB" sz="1200" b="0" dirty="0">
+                <a:solidFill>
+                  <a:srgbClr val="098658"/>
+                </a:solidFill>
+                <a:effectLst/>
+                <a:highlight>
+                  <a:srgbClr val="FFFFFF"/>
+                </a:highlight>
+                <a:latin typeface="Menlo" panose="020B0609030804020204" pitchFamily="49" charset="0"/>
+              </a:rPr>
+              <a:t>1</a:t>
+            </a:r>
+            <a:r>
+              <a:rPr lang="en-GB" sz="1200" b="0" dirty="0">
+                <a:solidFill>
+                  <a:srgbClr val="000000"/>
+                </a:solidFill>
+                <a:effectLst/>
+                <a:highlight>
+                  <a:srgbClr val="FFFFFF"/>
+                </a:highlight>
+                <a:latin typeface="Menlo" panose="020B0609030804020204" pitchFamily="49" charset="0"/>
+              </a:rPr>
+              <a:t>+e^{-z}}</a:t>
+            </a:r>
+            <a:endParaRPr lang="en-GB" sz="1200" b="0" dirty="0">
+              <a:solidFill>
+                <a:srgbClr val="3B3B3B"/>
+              </a:solidFill>
+              <a:effectLst/>
+              <a:highlight>
+                <a:srgbClr val="FFFFFF"/>
+              </a:highlight>
+              <a:latin typeface="Menlo" panose="020B0609030804020204" pitchFamily="49" charset="0"/>
+            </a:endParaRPr>
+          </a:p>
+          <a:p>
+            <a:r>
+              <a:rPr lang="en-GB" sz="1200" b="0" dirty="0">
+                <a:solidFill>
+                  <a:srgbClr val="3B3B3B"/>
+                </a:solidFill>
+                <a:effectLst/>
+                <a:highlight>
+                  <a:srgbClr val="FFFFFF"/>
+                </a:highlight>
+                <a:latin typeface="Menlo" panose="020B0609030804020204" pitchFamily="49" charset="0"/>
+              </a:rPr>
+              <a:t>$$</a:t>
+            </a:r>
+          </a:p>
+          <a:p>
+            <a:br>
+              <a:rPr lang="en-GB" sz="1200" b="0" dirty="0">
+                <a:solidFill>
+                  <a:srgbClr val="3B3B3B"/>
+                </a:solidFill>
+                <a:effectLst/>
+                <a:highlight>
+                  <a:srgbClr val="FFFFFF"/>
+                </a:highlight>
+                <a:latin typeface="Menlo" panose="020B0609030804020204" pitchFamily="49" charset="0"/>
+              </a:rPr>
+            </a:br>
+            <a:r>
+              <a:rPr lang="en-GB" sz="1200" b="0" dirty="0">
+                <a:solidFill>
+                  <a:srgbClr val="3B3B3B"/>
+                </a:solidFill>
+                <a:effectLst/>
+                <a:highlight>
+                  <a:srgbClr val="FFFFFF"/>
+                </a:highlight>
+                <a:latin typeface="Menlo" panose="020B0609030804020204" pitchFamily="49" charset="0"/>
+              </a:rPr>
+              <a:t>Why interaction matters: $</a:t>
+            </a:r>
+            <a:r>
+              <a:rPr lang="en-GB" sz="1200" b="0" dirty="0">
+                <a:solidFill>
+                  <a:srgbClr val="0000FF"/>
+                </a:solidFill>
+                <a:effectLst/>
+                <a:highlight>
+                  <a:srgbClr val="FFFFFF"/>
+                </a:highlight>
+                <a:latin typeface="Menlo" panose="020B0609030804020204" pitchFamily="49" charset="0"/>
+              </a:rPr>
+              <a:t>\</a:t>
+            </a:r>
+            <a:r>
+              <a:rPr lang="en-GB" sz="1200" b="0" dirty="0">
+                <a:solidFill>
+                  <a:srgbClr val="795E26"/>
+                </a:solidFill>
+                <a:effectLst/>
+                <a:highlight>
+                  <a:srgbClr val="FFFFFF"/>
+                </a:highlight>
+                <a:latin typeface="Menlo" panose="020B0609030804020204" pitchFamily="49" charset="0"/>
+              </a:rPr>
+              <a:t>beta_</a:t>
+            </a:r>
+            <a:r>
+              <a:rPr lang="en-GB" sz="1200" b="0" dirty="0">
+                <a:solidFill>
+                  <a:srgbClr val="000000"/>
+                </a:solidFill>
+                <a:effectLst/>
+                <a:highlight>
+                  <a:srgbClr val="FFFFFF"/>
+                </a:highlight>
+                <a:latin typeface="Menlo" panose="020B0609030804020204" pitchFamily="49" charset="0"/>
+              </a:rPr>
+              <a:t>{TG}</a:t>
+            </a:r>
+            <a:r>
+              <a:rPr lang="en-GB" sz="1200" b="0" dirty="0">
+                <a:solidFill>
+                  <a:srgbClr val="3B3B3B"/>
+                </a:solidFill>
+                <a:effectLst/>
+                <a:highlight>
+                  <a:srgbClr val="FFFFFF"/>
+                </a:highlight>
+                <a:latin typeface="Menlo" panose="020B0609030804020204" pitchFamily="49" charset="0"/>
+              </a:rPr>
+              <a:t>$ allows booster impact to differ across tiers instead of forcing one common treatment effect.</a:t>
+            </a:r>
+          </a:p>
+          <a:p>
+            <a:br>
+              <a:rPr lang="en-GB" sz="1200" b="0" dirty="0">
+                <a:solidFill>
+                  <a:srgbClr val="3B3B3B"/>
+                </a:solidFill>
+                <a:effectLst/>
+                <a:highlight>
+                  <a:srgbClr val="FFFFFF"/>
+                </a:highlight>
+                <a:latin typeface="Menlo" panose="020B0609030804020204" pitchFamily="49" charset="0"/>
+              </a:rPr>
+            </a:br>
+            <a:r>
+              <a:rPr lang="en-GB" sz="1200" b="0" dirty="0">
+                <a:solidFill>
+                  <a:srgbClr val="3B3B3B"/>
+                </a:solidFill>
+                <a:effectLst/>
+                <a:highlight>
+                  <a:srgbClr val="FFFFFF"/>
+                </a:highlight>
+                <a:latin typeface="Menlo" panose="020B0609030804020204" pitchFamily="49" charset="0"/>
+              </a:rPr>
+              <a:t>Potential-outcome view at unit level:</a:t>
+            </a:r>
+          </a:p>
+          <a:p>
+            <a:r>
+              <a:rPr lang="en-GB" sz="1200" b="0" dirty="0">
+                <a:solidFill>
+                  <a:srgbClr val="3B3B3B"/>
+                </a:solidFill>
+                <a:effectLst/>
+                <a:highlight>
+                  <a:srgbClr val="FFFFFF"/>
+                </a:highlight>
+                <a:latin typeface="Menlo" panose="020B0609030804020204" pitchFamily="49" charset="0"/>
+              </a:rPr>
+              <a:t>$$</a:t>
+            </a:r>
+          </a:p>
+          <a:p>
+            <a:r>
+              <a:rPr lang="en-GB" sz="1200" b="0" dirty="0">
+                <a:solidFill>
+                  <a:srgbClr val="0000FF"/>
+                </a:solidFill>
+                <a:effectLst/>
+                <a:highlight>
+                  <a:srgbClr val="FFFFFF"/>
+                </a:highlight>
+                <a:latin typeface="Menlo" panose="020B0609030804020204" pitchFamily="49" charset="0"/>
+              </a:rPr>
+              <a:t>\</a:t>
+            </a:r>
+            <a:r>
+              <a:rPr lang="en-GB" sz="1200" b="0" dirty="0" err="1">
+                <a:solidFill>
+                  <a:srgbClr val="795E26"/>
+                </a:solidFill>
+                <a:effectLst/>
+                <a:highlight>
+                  <a:srgbClr val="FFFFFF"/>
+                </a:highlight>
+                <a:latin typeface="Menlo" panose="020B0609030804020204" pitchFamily="49" charset="0"/>
+              </a:rPr>
+              <a:t>widehat</a:t>
+            </a:r>
+            <a:r>
+              <a:rPr lang="en-GB" sz="1200" b="0" dirty="0">
+                <a:solidFill>
+                  <a:srgbClr val="000000"/>
+                </a:solidFill>
+                <a:effectLst/>
+                <a:highlight>
+                  <a:srgbClr val="FFFFFF"/>
+                </a:highlight>
+                <a:latin typeface="Menlo" panose="020B0609030804020204" pitchFamily="49" charset="0"/>
+              </a:rPr>
+              <a:t>{</a:t>
+            </a:r>
+            <a:r>
+              <a:rPr lang="en-GB" sz="1200" b="0" dirty="0">
+                <a:solidFill>
+                  <a:srgbClr val="0000FF"/>
+                </a:solidFill>
+                <a:effectLst/>
+                <a:highlight>
+                  <a:srgbClr val="FFFFFF"/>
+                </a:highlight>
+                <a:latin typeface="Menlo" panose="020B0609030804020204" pitchFamily="49" charset="0"/>
+              </a:rPr>
+              <a:t>\tau</a:t>
+            </a:r>
+            <a:r>
+              <a:rPr lang="en-GB" sz="1200" b="0" dirty="0">
+                <a:solidFill>
+                  <a:srgbClr val="000000"/>
+                </a:solidFill>
+                <a:effectLst/>
+                <a:highlight>
+                  <a:srgbClr val="FFFFFF"/>
+                </a:highlight>
+                <a:latin typeface="Menlo" panose="020B0609030804020204" pitchFamily="49" charset="0"/>
+              </a:rPr>
+              <a:t>}_</a:t>
+            </a:r>
+            <a:r>
+              <a:rPr lang="en-GB" sz="1200" b="0" dirty="0" err="1">
+                <a:solidFill>
+                  <a:srgbClr val="000000"/>
+                </a:solidFill>
+                <a:effectLst/>
+                <a:highlight>
+                  <a:srgbClr val="FFFFFF"/>
+                </a:highlight>
+                <a:latin typeface="Menlo" panose="020B0609030804020204" pitchFamily="49" charset="0"/>
+              </a:rPr>
+              <a:t>i</a:t>
+            </a:r>
+            <a:r>
+              <a:rPr lang="en-GB" sz="1200" b="0" dirty="0">
+                <a:solidFill>
+                  <a:srgbClr val="000000"/>
+                </a:solidFill>
+                <a:effectLst/>
+                <a:highlight>
+                  <a:srgbClr val="FFFFFF"/>
+                </a:highlight>
+                <a:latin typeface="Menlo" panose="020B0609030804020204" pitchFamily="49" charset="0"/>
+              </a:rPr>
+              <a:t> = </a:t>
+            </a:r>
+            <a:r>
+              <a:rPr lang="en-GB" sz="1200" b="0" dirty="0">
+                <a:solidFill>
+                  <a:srgbClr val="0000FF"/>
+                </a:solidFill>
+                <a:effectLst/>
+                <a:highlight>
+                  <a:srgbClr val="FFFFFF"/>
+                </a:highlight>
+                <a:latin typeface="Menlo" panose="020B0609030804020204" pitchFamily="49" charset="0"/>
+              </a:rPr>
+              <a:t>\hat</a:t>
+            </a:r>
+            <a:r>
+              <a:rPr lang="en-GB" sz="1200" b="0" dirty="0">
+                <a:solidFill>
+                  <a:srgbClr val="000000"/>
+                </a:solidFill>
+                <a:effectLst/>
+                <a:highlight>
+                  <a:srgbClr val="FFFFFF"/>
+                </a:highlight>
+                <a:latin typeface="Menlo" panose="020B0609030804020204" pitchFamily="49" charset="0"/>
+              </a:rPr>
+              <a:t> </a:t>
+            </a:r>
+            <a:r>
+              <a:rPr lang="en-GB" sz="1200" b="0" dirty="0" err="1">
+                <a:solidFill>
+                  <a:srgbClr val="000000"/>
+                </a:solidFill>
+                <a:effectLst/>
+                <a:highlight>
+                  <a:srgbClr val="FFFFFF"/>
+                </a:highlight>
+                <a:latin typeface="Menlo" panose="020B0609030804020204" pitchFamily="49" charset="0"/>
+              </a:rPr>
+              <a:t>p_i</a:t>
+            </a:r>
+            <a:r>
+              <a:rPr lang="en-GB" sz="1200" b="0" dirty="0">
+                <a:solidFill>
+                  <a:srgbClr val="000000"/>
+                </a:solidFill>
+                <a:effectLst/>
+                <a:highlight>
+                  <a:srgbClr val="FFFFFF"/>
+                </a:highlight>
+                <a:latin typeface="Menlo" panose="020B0609030804020204" pitchFamily="49" charset="0"/>
+              </a:rPr>
+              <a:t>(</a:t>
+            </a:r>
+            <a:r>
+              <a:rPr lang="en-GB" sz="1200" b="0" dirty="0">
+                <a:solidFill>
+                  <a:srgbClr val="098658"/>
+                </a:solidFill>
+                <a:effectLst/>
+                <a:highlight>
+                  <a:srgbClr val="FFFFFF"/>
+                </a:highlight>
+                <a:latin typeface="Menlo" panose="020B0609030804020204" pitchFamily="49" charset="0"/>
+              </a:rPr>
+              <a:t>1</a:t>
+            </a:r>
+            <a:r>
+              <a:rPr lang="en-GB" sz="1200" b="0" dirty="0">
+                <a:solidFill>
+                  <a:srgbClr val="000000"/>
+                </a:solidFill>
+                <a:effectLst/>
+                <a:highlight>
+                  <a:srgbClr val="FFFFFF"/>
+                </a:highlight>
+                <a:latin typeface="Menlo" panose="020B0609030804020204" pitchFamily="49" charset="0"/>
+              </a:rPr>
+              <a:t>)-</a:t>
+            </a:r>
+            <a:r>
+              <a:rPr lang="en-GB" sz="1200" b="0" dirty="0">
+                <a:solidFill>
+                  <a:srgbClr val="0000FF"/>
+                </a:solidFill>
+                <a:effectLst/>
+                <a:highlight>
+                  <a:srgbClr val="FFFFFF"/>
+                </a:highlight>
+                <a:latin typeface="Menlo" panose="020B0609030804020204" pitchFamily="49" charset="0"/>
+              </a:rPr>
+              <a:t>\hat</a:t>
+            </a:r>
+            <a:r>
+              <a:rPr lang="en-GB" sz="1200" b="0" dirty="0">
+                <a:solidFill>
+                  <a:srgbClr val="000000"/>
+                </a:solidFill>
+                <a:effectLst/>
+                <a:highlight>
+                  <a:srgbClr val="FFFFFF"/>
+                </a:highlight>
+                <a:latin typeface="Menlo" panose="020B0609030804020204" pitchFamily="49" charset="0"/>
+              </a:rPr>
+              <a:t> </a:t>
+            </a:r>
+            <a:r>
+              <a:rPr lang="en-GB" sz="1200" b="0" dirty="0" err="1">
+                <a:solidFill>
+                  <a:srgbClr val="000000"/>
+                </a:solidFill>
+                <a:effectLst/>
+                <a:highlight>
+                  <a:srgbClr val="FFFFFF"/>
+                </a:highlight>
+                <a:latin typeface="Menlo" panose="020B0609030804020204" pitchFamily="49" charset="0"/>
+              </a:rPr>
+              <a:t>p_i</a:t>
+            </a:r>
+            <a:r>
+              <a:rPr lang="en-GB" sz="1200" b="0" dirty="0">
+                <a:solidFill>
+                  <a:srgbClr val="000000"/>
+                </a:solidFill>
+                <a:effectLst/>
+                <a:highlight>
+                  <a:srgbClr val="FFFFFF"/>
+                </a:highlight>
+                <a:latin typeface="Menlo" panose="020B0609030804020204" pitchFamily="49" charset="0"/>
+              </a:rPr>
+              <a:t>(</a:t>
+            </a:r>
+            <a:r>
+              <a:rPr lang="en-GB" sz="1200" b="0" dirty="0">
+                <a:solidFill>
+                  <a:srgbClr val="098658"/>
+                </a:solidFill>
+                <a:effectLst/>
+                <a:highlight>
+                  <a:srgbClr val="FFFFFF"/>
+                </a:highlight>
+                <a:latin typeface="Menlo" panose="020B0609030804020204" pitchFamily="49" charset="0"/>
+              </a:rPr>
+              <a:t>0</a:t>
+            </a:r>
+            <a:r>
+              <a:rPr lang="en-GB" sz="1200" b="0" dirty="0">
+                <a:solidFill>
+                  <a:srgbClr val="000000"/>
+                </a:solidFill>
+                <a:effectLst/>
+                <a:highlight>
+                  <a:srgbClr val="FFFFFF"/>
+                </a:highlight>
+                <a:latin typeface="Menlo" panose="020B0609030804020204" pitchFamily="49" charset="0"/>
+              </a:rPr>
+              <a:t>)</a:t>
+            </a:r>
+            <a:endParaRPr lang="en-GB" sz="1200" b="0" dirty="0">
+              <a:solidFill>
+                <a:srgbClr val="3B3B3B"/>
+              </a:solidFill>
+              <a:effectLst/>
+              <a:highlight>
+                <a:srgbClr val="FFFFFF"/>
+              </a:highlight>
+              <a:latin typeface="Menlo" panose="020B0609030804020204" pitchFamily="49" charset="0"/>
+            </a:endParaRPr>
+          </a:p>
+          <a:p>
+            <a:r>
+              <a:rPr lang="en-GB" sz="1200" b="0" dirty="0">
+                <a:solidFill>
+                  <a:srgbClr val="3B3B3B"/>
+                </a:solidFill>
+                <a:effectLst/>
+                <a:highlight>
+                  <a:srgbClr val="FFFFFF"/>
+                </a:highlight>
+                <a:latin typeface="Menlo" panose="020B0609030804020204" pitchFamily="49" charset="0"/>
+              </a:rPr>
+              <a:t>$$</a:t>
+            </a:r>
+          </a:p>
+          <a:p>
+            <a:r>
+              <a:rPr lang="en-GB" sz="1200" b="0" dirty="0">
+                <a:solidFill>
+                  <a:srgbClr val="3B3B3B"/>
+                </a:solidFill>
+                <a:effectLst/>
+                <a:highlight>
+                  <a:srgbClr val="FFFFFF"/>
+                </a:highlight>
+                <a:latin typeface="Menlo" panose="020B0609030804020204" pitchFamily="49" charset="0"/>
+              </a:rPr>
+              <a:t>where $</a:t>
+            </a:r>
+            <a:r>
+              <a:rPr lang="en-GB" sz="1200" b="0" dirty="0">
+                <a:solidFill>
+                  <a:srgbClr val="0000FF"/>
+                </a:solidFill>
+                <a:effectLst/>
+                <a:highlight>
+                  <a:srgbClr val="FFFFFF"/>
+                </a:highlight>
+                <a:latin typeface="Menlo" panose="020B0609030804020204" pitchFamily="49" charset="0"/>
+              </a:rPr>
+              <a:t>\hat</a:t>
+            </a:r>
+            <a:r>
+              <a:rPr lang="en-GB" sz="1200" b="0" dirty="0">
+                <a:solidFill>
+                  <a:srgbClr val="000000"/>
+                </a:solidFill>
+                <a:effectLst/>
+                <a:highlight>
+                  <a:srgbClr val="FFFFFF"/>
+                </a:highlight>
+                <a:latin typeface="Menlo" panose="020B0609030804020204" pitchFamily="49" charset="0"/>
+              </a:rPr>
+              <a:t> </a:t>
+            </a:r>
+            <a:r>
+              <a:rPr lang="en-GB" sz="1200" b="0" dirty="0" err="1">
+                <a:solidFill>
+                  <a:srgbClr val="000000"/>
+                </a:solidFill>
+                <a:effectLst/>
+                <a:highlight>
+                  <a:srgbClr val="FFFFFF"/>
+                </a:highlight>
+                <a:latin typeface="Menlo" panose="020B0609030804020204" pitchFamily="49" charset="0"/>
+              </a:rPr>
+              <a:t>p_i</a:t>
+            </a:r>
+            <a:r>
+              <a:rPr lang="en-GB" sz="1200" b="0" dirty="0">
+                <a:solidFill>
+                  <a:srgbClr val="000000"/>
+                </a:solidFill>
+                <a:effectLst/>
+                <a:highlight>
+                  <a:srgbClr val="FFFFFF"/>
+                </a:highlight>
+                <a:latin typeface="Menlo" panose="020B0609030804020204" pitchFamily="49" charset="0"/>
+              </a:rPr>
+              <a:t>(</a:t>
+            </a:r>
+            <a:r>
+              <a:rPr lang="en-GB" sz="1200" b="0" dirty="0">
+                <a:solidFill>
+                  <a:srgbClr val="098658"/>
+                </a:solidFill>
+                <a:effectLst/>
+                <a:highlight>
+                  <a:srgbClr val="FFFFFF"/>
+                </a:highlight>
+                <a:latin typeface="Menlo" panose="020B0609030804020204" pitchFamily="49" charset="0"/>
+              </a:rPr>
+              <a:t>1</a:t>
+            </a:r>
+            <a:r>
+              <a:rPr lang="en-GB" sz="1200" b="0" dirty="0">
+                <a:solidFill>
+                  <a:srgbClr val="000000"/>
+                </a:solidFill>
+                <a:effectLst/>
+                <a:highlight>
+                  <a:srgbClr val="FFFFFF"/>
+                </a:highlight>
+                <a:latin typeface="Menlo" panose="020B0609030804020204" pitchFamily="49" charset="0"/>
+              </a:rPr>
+              <a:t>)</a:t>
+            </a:r>
+            <a:r>
+              <a:rPr lang="en-GB" sz="1200" b="0" dirty="0">
+                <a:solidFill>
+                  <a:srgbClr val="3B3B3B"/>
+                </a:solidFill>
+                <a:effectLst/>
+                <a:highlight>
+                  <a:srgbClr val="FFFFFF"/>
+                </a:highlight>
+                <a:latin typeface="Menlo" panose="020B0609030804020204" pitchFamily="49" charset="0"/>
+              </a:rPr>
+              <a:t>$ is predicted churn with $</a:t>
+            </a:r>
+            <a:r>
+              <a:rPr lang="en-GB" sz="1200" b="0" dirty="0" err="1">
+                <a:solidFill>
+                  <a:srgbClr val="000000"/>
+                </a:solidFill>
+                <a:effectLst/>
+                <a:highlight>
+                  <a:srgbClr val="FFFFFF"/>
+                </a:highlight>
+                <a:latin typeface="Menlo" panose="020B0609030804020204" pitchFamily="49" charset="0"/>
+              </a:rPr>
+              <a:t>T_i</a:t>
+            </a:r>
+            <a:r>
+              <a:rPr lang="en-GB" sz="1200" b="0" dirty="0">
+                <a:solidFill>
+                  <a:srgbClr val="000000"/>
+                </a:solidFill>
+                <a:effectLst/>
+                <a:highlight>
+                  <a:srgbClr val="FFFFFF"/>
+                </a:highlight>
+                <a:latin typeface="Menlo" panose="020B0609030804020204" pitchFamily="49" charset="0"/>
+              </a:rPr>
+              <a:t>=</a:t>
+            </a:r>
+            <a:r>
+              <a:rPr lang="en-GB" sz="1200" b="0" dirty="0">
+                <a:solidFill>
+                  <a:srgbClr val="098658"/>
+                </a:solidFill>
+                <a:effectLst/>
+                <a:highlight>
+                  <a:srgbClr val="FFFFFF"/>
+                </a:highlight>
+                <a:latin typeface="Menlo" panose="020B0609030804020204" pitchFamily="49" charset="0"/>
+              </a:rPr>
+              <a:t>1</a:t>
+            </a:r>
+            <a:r>
+              <a:rPr lang="en-GB" sz="1200" b="0" dirty="0">
+                <a:solidFill>
+                  <a:srgbClr val="3B3B3B"/>
+                </a:solidFill>
+                <a:effectLst/>
+                <a:highlight>
+                  <a:srgbClr val="FFFFFF"/>
+                </a:highlight>
+                <a:latin typeface="Menlo" panose="020B0609030804020204" pitchFamily="49" charset="0"/>
+              </a:rPr>
+              <a:t>$ and $</a:t>
+            </a:r>
+            <a:r>
+              <a:rPr lang="en-GB" sz="1200" b="0" dirty="0">
+                <a:solidFill>
+                  <a:srgbClr val="0000FF"/>
+                </a:solidFill>
+                <a:effectLst/>
+                <a:highlight>
+                  <a:srgbClr val="FFFFFF"/>
+                </a:highlight>
+                <a:latin typeface="Menlo" panose="020B0609030804020204" pitchFamily="49" charset="0"/>
+              </a:rPr>
+              <a:t>\hat</a:t>
+            </a:r>
+            <a:r>
+              <a:rPr lang="en-GB" sz="1200" b="0" dirty="0">
+                <a:solidFill>
+                  <a:srgbClr val="000000"/>
+                </a:solidFill>
+                <a:effectLst/>
+                <a:highlight>
+                  <a:srgbClr val="FFFFFF"/>
+                </a:highlight>
+                <a:latin typeface="Menlo" panose="020B0609030804020204" pitchFamily="49" charset="0"/>
+              </a:rPr>
+              <a:t> </a:t>
+            </a:r>
+            <a:r>
+              <a:rPr lang="en-GB" sz="1200" b="0" dirty="0" err="1">
+                <a:solidFill>
+                  <a:srgbClr val="000000"/>
+                </a:solidFill>
+                <a:effectLst/>
+                <a:highlight>
+                  <a:srgbClr val="FFFFFF"/>
+                </a:highlight>
+                <a:latin typeface="Menlo" panose="020B0609030804020204" pitchFamily="49" charset="0"/>
+              </a:rPr>
+              <a:t>p_i</a:t>
+            </a:r>
+            <a:r>
+              <a:rPr lang="en-GB" sz="1200" b="0" dirty="0">
+                <a:solidFill>
+                  <a:srgbClr val="000000"/>
+                </a:solidFill>
+                <a:effectLst/>
+                <a:highlight>
+                  <a:srgbClr val="FFFFFF"/>
+                </a:highlight>
+                <a:latin typeface="Menlo" panose="020B0609030804020204" pitchFamily="49" charset="0"/>
+              </a:rPr>
+              <a:t>(</a:t>
+            </a:r>
+            <a:r>
+              <a:rPr lang="en-GB" sz="1200" b="0" dirty="0">
+                <a:solidFill>
+                  <a:srgbClr val="098658"/>
+                </a:solidFill>
+                <a:effectLst/>
+                <a:highlight>
+                  <a:srgbClr val="FFFFFF"/>
+                </a:highlight>
+                <a:latin typeface="Menlo" panose="020B0609030804020204" pitchFamily="49" charset="0"/>
+              </a:rPr>
+              <a:t>0</a:t>
+            </a:r>
+            <a:r>
+              <a:rPr lang="en-GB" sz="1200" b="0" dirty="0">
+                <a:solidFill>
+                  <a:srgbClr val="000000"/>
+                </a:solidFill>
+                <a:effectLst/>
+                <a:highlight>
+                  <a:srgbClr val="FFFFFF"/>
+                </a:highlight>
+                <a:latin typeface="Menlo" panose="020B0609030804020204" pitchFamily="49" charset="0"/>
+              </a:rPr>
+              <a:t>)</a:t>
+            </a:r>
+            <a:r>
+              <a:rPr lang="en-GB" sz="1200" b="0" dirty="0">
+                <a:solidFill>
+                  <a:srgbClr val="3B3B3B"/>
+                </a:solidFill>
+                <a:effectLst/>
+                <a:highlight>
+                  <a:srgbClr val="FFFFFF"/>
+                </a:highlight>
+                <a:latin typeface="Menlo" panose="020B0609030804020204" pitchFamily="49" charset="0"/>
+              </a:rPr>
+              <a:t>$ with $</a:t>
+            </a:r>
+            <a:r>
+              <a:rPr lang="en-GB" sz="1200" b="0" dirty="0" err="1">
+                <a:solidFill>
+                  <a:srgbClr val="000000"/>
+                </a:solidFill>
+                <a:effectLst/>
+                <a:highlight>
+                  <a:srgbClr val="FFFFFF"/>
+                </a:highlight>
+                <a:latin typeface="Menlo" panose="020B0609030804020204" pitchFamily="49" charset="0"/>
+              </a:rPr>
+              <a:t>T_i</a:t>
+            </a:r>
+            <a:r>
+              <a:rPr lang="en-GB" sz="1200" b="0" dirty="0">
+                <a:solidFill>
+                  <a:srgbClr val="000000"/>
+                </a:solidFill>
+                <a:effectLst/>
+                <a:highlight>
+                  <a:srgbClr val="FFFFFF"/>
+                </a:highlight>
+                <a:latin typeface="Menlo" panose="020B0609030804020204" pitchFamily="49" charset="0"/>
+              </a:rPr>
+              <a:t>=</a:t>
+            </a:r>
+            <a:r>
+              <a:rPr lang="en-GB" sz="1200" b="0" dirty="0">
+                <a:solidFill>
+                  <a:srgbClr val="098658"/>
+                </a:solidFill>
+                <a:effectLst/>
+                <a:highlight>
+                  <a:srgbClr val="FFFFFF"/>
+                </a:highlight>
+                <a:latin typeface="Menlo" panose="020B0609030804020204" pitchFamily="49" charset="0"/>
+              </a:rPr>
+              <a:t>0</a:t>
+            </a:r>
+            <a:r>
+              <a:rPr lang="en-GB" sz="1200" b="0" dirty="0">
+                <a:solidFill>
+                  <a:srgbClr val="3B3B3B"/>
+                </a:solidFill>
+                <a:effectLst/>
+                <a:highlight>
+                  <a:srgbClr val="FFFFFF"/>
+                </a:highlight>
+                <a:latin typeface="Menlo" panose="020B0609030804020204" pitchFamily="49" charset="0"/>
+              </a:rPr>
+              <a:t>$, holding all other features fixed for the same user.</a:t>
+            </a:r>
+          </a:p>
+        </p:txBody>
+      </p:sp>
+    </p:spTree>
+    <p:extLst>
+      <p:ext uri="{BB962C8B-B14F-4D97-AF65-F5344CB8AC3E}">
+        <p14:creationId xmlns:p14="http://schemas.microsoft.com/office/powerpoint/2010/main" val="1337350875"/>
       </p:ext>
     </p:extLst>
   </p:cSld>
@@ -27085,7 +32298,7 @@
           <a:p>
             <a:fld id="{822B4C34-8539-4A47-8763-AA072889AAA3}" type="datetime1">
               <a:rPr lang="en-GB" smtClean="0"/>
-              <a:t>17/06/2026</a:t>
+              <a:t>18/06/2026</a:t>
             </a:fld>
             <a:endParaRPr lang="en-GB" dirty="0"/>
           </a:p>
@@ -27633,6 +32846,929 @@
 </p:sld>
 </file>
 
+<file path=ppt/slides/slide20.xml><?xml version="1.0" encoding="utf-8"?>
+<p:sld xmlns:a="http://schemas.openxmlformats.org/drawingml/2006/main" xmlns:r="http://schemas.openxmlformats.org/officeDocument/2006/relationships" xmlns:p="http://schemas.openxmlformats.org/presentationml/2006/main">
+  <p:cSld>
+    <p:spTree>
+      <p:nvGrpSpPr>
+        <p:cNvPr id="1" name="">
+          <a:extLst>
+            <a:ext uri="{FF2B5EF4-FFF2-40B4-BE49-F238E27FC236}">
+              <a16:creationId xmlns:a16="http://schemas.microsoft.com/office/drawing/2014/main" id="{933D164C-F0AB-B122-43A5-0C0823B9A9CC}"/>
+            </a:ext>
+          </a:extLst>
+        </p:cNvPr>
+        <p:cNvGrpSpPr/>
+        <p:nvPr/>
+      </p:nvGrpSpPr>
+      <p:grpSpPr>
+        <a:xfrm>
+          <a:off x="0" y="0"/>
+          <a:ext cx="0" cy="0"/>
+          <a:chOff x="0" y="0"/>
+          <a:chExt cx="0" cy="0"/>
+        </a:xfrm>
+      </p:grpSpPr>
+      <p:sp>
+        <p:nvSpPr>
+          <p:cNvPr id="2" name="Title 1">
+            <a:extLst>
+              <a:ext uri="{FF2B5EF4-FFF2-40B4-BE49-F238E27FC236}">
+                <a16:creationId xmlns:a16="http://schemas.microsoft.com/office/drawing/2014/main" id="{CCC4A908-6D8B-653B-D660-A711DBE2BEDB}"/>
+              </a:ext>
+            </a:extLst>
+          </p:cNvPr>
+          <p:cNvSpPr>
+            <a:spLocks noGrp="1"/>
+          </p:cNvSpPr>
+          <p:nvPr>
+            <p:ph type="title"/>
+          </p:nvPr>
+        </p:nvSpPr>
+        <p:spPr/>
+        <p:txBody>
+          <a:bodyPr/>
+          <a:lstStyle/>
+          <a:p>
+            <a:r>
+              <a:rPr lang="en-GB" sz="800" b="1" dirty="0">
+                <a:solidFill>
+                  <a:srgbClr val="800000"/>
+                </a:solidFill>
+                <a:effectLst/>
+                <a:highlight>
+                  <a:srgbClr val="FFFFFF"/>
+                </a:highlight>
+                <a:latin typeface="Menlo" panose="020B0609030804020204" pitchFamily="49" charset="0"/>
+              </a:rPr>
+              <a:t>Logistic regression: Results</a:t>
+            </a:r>
+            <a:endParaRPr lang="en-GB" sz="800" b="0" dirty="0">
+              <a:solidFill>
+                <a:srgbClr val="3B3B3B"/>
+              </a:solidFill>
+              <a:effectLst/>
+              <a:highlight>
+                <a:srgbClr val="FFFFFF"/>
+              </a:highlight>
+              <a:latin typeface="Menlo" panose="020B0609030804020204" pitchFamily="49" charset="0"/>
+            </a:endParaRPr>
+          </a:p>
+        </p:txBody>
+      </p:sp>
+      <p:sp>
+        <p:nvSpPr>
+          <p:cNvPr id="3" name="Date Placeholder 2">
+            <a:extLst>
+              <a:ext uri="{FF2B5EF4-FFF2-40B4-BE49-F238E27FC236}">
+                <a16:creationId xmlns:a16="http://schemas.microsoft.com/office/drawing/2014/main" id="{B1D7546C-D95C-8CB9-19A5-2136E9B9B9E8}"/>
+              </a:ext>
+            </a:extLst>
+          </p:cNvPr>
+          <p:cNvSpPr>
+            <a:spLocks noGrp="1"/>
+          </p:cNvSpPr>
+          <p:nvPr>
+            <p:ph type="dt" sz="half" idx="2"/>
+          </p:nvPr>
+        </p:nvSpPr>
+        <p:spPr/>
+        <p:txBody>
+          <a:bodyPr/>
+          <a:lstStyle/>
+          <a:p>
+            <a:fld id="{822B4C34-8539-4A47-8763-AA072889AAA3}" type="datetime1">
+              <a:rPr lang="en-GB" smtClean="0"/>
+              <a:t>18/06/2026</a:t>
+            </a:fld>
+            <a:endParaRPr lang="en-GB" dirty="0"/>
+          </a:p>
+        </p:txBody>
+      </p:sp>
+      <p:sp>
+        <p:nvSpPr>
+          <p:cNvPr id="4" name="Footer Placeholder 3">
+            <a:extLst>
+              <a:ext uri="{FF2B5EF4-FFF2-40B4-BE49-F238E27FC236}">
+                <a16:creationId xmlns:a16="http://schemas.microsoft.com/office/drawing/2014/main" id="{19B2D42F-B3D1-DA73-6137-D1E5676502E5}"/>
+              </a:ext>
+            </a:extLst>
+          </p:cNvPr>
+          <p:cNvSpPr>
+            <a:spLocks noGrp="1"/>
+          </p:cNvSpPr>
+          <p:nvPr>
+            <p:ph type="ftr" sz="quarter" idx="3"/>
+          </p:nvPr>
+        </p:nvSpPr>
+        <p:spPr/>
+        <p:txBody>
+          <a:bodyPr/>
+          <a:lstStyle/>
+          <a:p>
+            <a:r>
+              <a:rPr lang="en-GB"/>
+              <a:t>Presentation description - CONFIDENTIALTY NOTE</a:t>
+            </a:r>
+            <a:endParaRPr lang="en-GB" dirty="0"/>
+          </a:p>
+        </p:txBody>
+      </p:sp>
+      <p:sp>
+        <p:nvSpPr>
+          <p:cNvPr id="5" name="Slide Number Placeholder 4">
+            <a:extLst>
+              <a:ext uri="{FF2B5EF4-FFF2-40B4-BE49-F238E27FC236}">
+                <a16:creationId xmlns:a16="http://schemas.microsoft.com/office/drawing/2014/main" id="{4F908F72-A12B-B9DC-5FED-CAAC1305F0EC}"/>
+              </a:ext>
+            </a:extLst>
+          </p:cNvPr>
+          <p:cNvSpPr>
+            <a:spLocks noGrp="1"/>
+          </p:cNvSpPr>
+          <p:nvPr>
+            <p:ph type="sldNum" sz="quarter" idx="4"/>
+          </p:nvPr>
+        </p:nvSpPr>
+        <p:spPr/>
+        <p:txBody>
+          <a:bodyPr/>
+          <a:lstStyle/>
+          <a:p>
+            <a:fld id="{D622C71B-F0A5-40B6-B6DA-5780E9494F8A}" type="slidenum">
+              <a:rPr lang="en-GB" smtClean="0"/>
+              <a:pPr/>
+              <a:t>20</a:t>
+            </a:fld>
+            <a:endParaRPr lang="en-GB" dirty="0"/>
+          </a:p>
+        </p:txBody>
+      </p:sp>
+      <p:sp>
+        <p:nvSpPr>
+          <p:cNvPr id="7" name="TextBox 6">
+            <a:extLst>
+              <a:ext uri="{FF2B5EF4-FFF2-40B4-BE49-F238E27FC236}">
+                <a16:creationId xmlns:a16="http://schemas.microsoft.com/office/drawing/2014/main" id="{07FFB286-5BE7-0A15-1D4A-E429BE75CC34}"/>
+              </a:ext>
+            </a:extLst>
+          </p:cNvPr>
+          <p:cNvSpPr txBox="1"/>
+          <p:nvPr/>
+        </p:nvSpPr>
+        <p:spPr>
+          <a:xfrm>
+            <a:off x="406800" y="1556792"/>
+            <a:ext cx="8742775" cy="4339650"/>
+          </a:xfrm>
+          <a:prstGeom prst="rect">
+            <a:avLst/>
+          </a:prstGeom>
+          <a:noFill/>
+        </p:spPr>
+        <p:txBody>
+          <a:bodyPr wrap="square">
+            <a:spAutoFit/>
+          </a:bodyPr>
+          <a:lstStyle/>
+          <a:p>
+            <a:r>
+              <a:rPr lang="en-GB" sz="1200" b="0" i="0" dirty="0">
+                <a:solidFill>
+                  <a:srgbClr val="3B3B3B"/>
+                </a:solidFill>
+                <a:effectLst/>
+                <a:latin typeface="Menlo" panose="020B0609030804020204" pitchFamily="49" charset="0"/>
+              </a:rPr>
+              <a:t>Logit Regression Results ============================================================================== Dep. Variable: churned No. Observations: 125000 Model: Logit </a:t>
+            </a:r>
+            <a:r>
+              <a:rPr lang="en-GB" sz="1200" b="0" i="0" dirty="0" err="1">
+                <a:solidFill>
+                  <a:srgbClr val="3B3B3B"/>
+                </a:solidFill>
+                <a:effectLst/>
+                <a:latin typeface="Menlo" panose="020B0609030804020204" pitchFamily="49" charset="0"/>
+              </a:rPr>
+              <a:t>Df</a:t>
+            </a:r>
+            <a:r>
+              <a:rPr lang="en-GB" sz="1200" b="0" i="0" dirty="0">
+                <a:solidFill>
+                  <a:srgbClr val="3B3B3B"/>
+                </a:solidFill>
+                <a:effectLst/>
+                <a:latin typeface="Menlo" panose="020B0609030804020204" pitchFamily="49" charset="0"/>
+              </a:rPr>
+              <a:t> Residuals: 124983 Method: MLE </a:t>
+            </a:r>
+            <a:r>
+              <a:rPr lang="en-GB" sz="1200" b="0" i="0" dirty="0" err="1">
+                <a:solidFill>
+                  <a:srgbClr val="3B3B3B"/>
+                </a:solidFill>
+                <a:effectLst/>
+                <a:latin typeface="Menlo" panose="020B0609030804020204" pitchFamily="49" charset="0"/>
+              </a:rPr>
+              <a:t>Df</a:t>
+            </a:r>
+            <a:r>
+              <a:rPr lang="en-GB" sz="1200" b="0" i="0" dirty="0">
+                <a:solidFill>
+                  <a:srgbClr val="3B3B3B"/>
+                </a:solidFill>
+                <a:effectLst/>
+                <a:latin typeface="Menlo" panose="020B0609030804020204" pitchFamily="49" charset="0"/>
+              </a:rPr>
+              <a:t> Model: 16 Date: Wed, 17 Jun 2026 Pseudo R-</a:t>
+            </a:r>
+            <a:r>
+              <a:rPr lang="en-GB" sz="1200" b="0" i="0" dirty="0" err="1">
+                <a:solidFill>
+                  <a:srgbClr val="3B3B3B"/>
+                </a:solidFill>
+                <a:effectLst/>
+                <a:latin typeface="Menlo" panose="020B0609030804020204" pitchFamily="49" charset="0"/>
+              </a:rPr>
+              <a:t>squ</a:t>
+            </a:r>
+            <a:r>
+              <a:rPr lang="en-GB" sz="1200" b="0" i="0" dirty="0">
+                <a:solidFill>
+                  <a:srgbClr val="3B3B3B"/>
+                </a:solidFill>
+                <a:effectLst/>
+                <a:latin typeface="Menlo" panose="020B0609030804020204" pitchFamily="49" charset="0"/>
+              </a:rPr>
+              <a:t>.: 0.01244 Time: 12:41:40 Log-Likelihood: -50271. converged: True LL-Null: -50905. Covariance Type: </a:t>
+            </a:r>
+            <a:r>
+              <a:rPr lang="en-GB" sz="1200" b="0" i="0" dirty="0" err="1">
+                <a:solidFill>
+                  <a:srgbClr val="3B3B3B"/>
+                </a:solidFill>
+                <a:effectLst/>
+                <a:latin typeface="Menlo" panose="020B0609030804020204" pitchFamily="49" charset="0"/>
+              </a:rPr>
+              <a:t>nonrobust</a:t>
+            </a:r>
+            <a:r>
+              <a:rPr lang="en-GB" sz="1200" b="0" i="0" dirty="0">
+                <a:solidFill>
+                  <a:srgbClr val="3B3B3B"/>
+                </a:solidFill>
+                <a:effectLst/>
+                <a:latin typeface="Menlo" panose="020B0609030804020204" pitchFamily="49" charset="0"/>
+              </a:rPr>
+              <a:t> LLR p-value: 8.079e-260 ============================================================================================================ </a:t>
+            </a:r>
+            <a:r>
+              <a:rPr lang="en-GB" sz="1200" b="0" i="0" dirty="0" err="1">
+                <a:solidFill>
+                  <a:srgbClr val="3B3B3B"/>
+                </a:solidFill>
+                <a:effectLst/>
+                <a:latin typeface="Menlo" panose="020B0609030804020204" pitchFamily="49" charset="0"/>
+              </a:rPr>
+              <a:t>coef</a:t>
+            </a:r>
+            <a:r>
+              <a:rPr lang="en-GB" sz="1200" b="0" i="0" dirty="0">
+                <a:solidFill>
+                  <a:srgbClr val="3B3B3B"/>
+                </a:solidFill>
+                <a:effectLst/>
+                <a:latin typeface="Menlo" panose="020B0609030804020204" pitchFamily="49" charset="0"/>
+              </a:rPr>
+              <a:t> std err z P&gt;|z| [0.025 0.975] ------------------------------------------------------------------------------------------------------------ Intercept -1.9277 0.041 -46.603 0.000 -2.009 -1.847 C(</a:t>
+            </a:r>
+            <a:r>
+              <a:rPr lang="en-GB" sz="1200" b="0" i="0" dirty="0" err="1">
+                <a:solidFill>
+                  <a:srgbClr val="3B3B3B"/>
+                </a:solidFill>
+                <a:effectLst/>
+                <a:latin typeface="Menlo" panose="020B0609030804020204" pitchFamily="49" charset="0"/>
+              </a:rPr>
+              <a:t>internet_usage</a:t>
+            </a:r>
+            <a:r>
+              <a:rPr lang="en-GB" sz="1200" b="0" i="0" dirty="0">
+                <a:solidFill>
+                  <a:srgbClr val="3B3B3B"/>
+                </a:solidFill>
+                <a:effectLst/>
+                <a:latin typeface="Menlo" panose="020B0609030804020204" pitchFamily="49" charset="0"/>
+              </a:rPr>
+              <a:t>)[</a:t>
+            </a:r>
+            <a:r>
+              <a:rPr lang="en-GB" sz="1200" b="0" i="0" dirty="0" err="1">
+                <a:solidFill>
+                  <a:srgbClr val="3B3B3B"/>
+                </a:solidFill>
+                <a:effectLst/>
+                <a:latin typeface="Menlo" panose="020B0609030804020204" pitchFamily="49" charset="0"/>
+              </a:rPr>
+              <a:t>T.Medium</a:t>
+            </a:r>
+            <a:r>
+              <a:rPr lang="en-GB" sz="1200" b="0" i="0" dirty="0">
+                <a:solidFill>
+                  <a:srgbClr val="3B3B3B"/>
+                </a:solidFill>
+                <a:effectLst/>
+                <a:latin typeface="Menlo" panose="020B0609030804020204" pitchFamily="49" charset="0"/>
+              </a:rPr>
+              <a:t>] -0.0265 0.024 -1.120 0.263 -0.073 0.020 C(</a:t>
+            </a:r>
+            <a:r>
+              <a:rPr lang="en-GB" sz="1200" b="0" i="0" dirty="0" err="1">
+                <a:solidFill>
+                  <a:srgbClr val="3B3B3B"/>
+                </a:solidFill>
+                <a:effectLst/>
+                <a:latin typeface="Menlo" panose="020B0609030804020204" pitchFamily="49" charset="0"/>
+              </a:rPr>
+              <a:t>internet_usage</a:t>
+            </a:r>
+            <a:r>
+              <a:rPr lang="en-GB" sz="1200" b="0" i="0" dirty="0">
+                <a:solidFill>
+                  <a:srgbClr val="3B3B3B"/>
+                </a:solidFill>
+                <a:effectLst/>
+                <a:latin typeface="Menlo" panose="020B0609030804020204" pitchFamily="49" charset="0"/>
+              </a:rPr>
+              <a:t>)[</a:t>
+            </a:r>
+            <a:r>
+              <a:rPr lang="en-GB" sz="1200" b="0" i="0" dirty="0" err="1">
+                <a:solidFill>
+                  <a:srgbClr val="3B3B3B"/>
+                </a:solidFill>
+                <a:effectLst/>
+                <a:latin typeface="Menlo" panose="020B0609030804020204" pitchFamily="49" charset="0"/>
+              </a:rPr>
+              <a:t>T.High</a:t>
+            </a:r>
+            <a:r>
+              <a:rPr lang="en-GB" sz="1200" b="0" i="0" dirty="0">
+                <a:solidFill>
+                  <a:srgbClr val="3B3B3B"/>
+                </a:solidFill>
+                <a:effectLst/>
+                <a:latin typeface="Menlo" panose="020B0609030804020204" pitchFamily="49" charset="0"/>
+              </a:rPr>
+              <a:t>] -0.0024 0.025 -0.094 0.925 -0.051 0.047 C(</a:t>
+            </a:r>
+            <a:r>
+              <a:rPr lang="en-GB" sz="1200" b="0" i="0" dirty="0" err="1">
+                <a:solidFill>
+                  <a:srgbClr val="3B3B3B"/>
+                </a:solidFill>
+                <a:effectLst/>
+                <a:latin typeface="Menlo" panose="020B0609030804020204" pitchFamily="49" charset="0"/>
+              </a:rPr>
+              <a:t>internet_usage</a:t>
+            </a:r>
+            <a:r>
+              <a:rPr lang="en-GB" sz="1200" b="0" i="0" dirty="0">
+                <a:solidFill>
+                  <a:srgbClr val="3B3B3B"/>
+                </a:solidFill>
+                <a:effectLst/>
+                <a:latin typeface="Menlo" panose="020B0609030804020204" pitchFamily="49" charset="0"/>
+              </a:rPr>
+              <a:t>)[</a:t>
+            </a:r>
+            <a:r>
+              <a:rPr lang="en-GB" sz="1200" b="0" i="0" dirty="0" err="1">
+                <a:solidFill>
+                  <a:srgbClr val="3B3B3B"/>
+                </a:solidFill>
+                <a:effectLst/>
+                <a:latin typeface="Menlo" panose="020B0609030804020204" pitchFamily="49" charset="0"/>
+              </a:rPr>
+              <a:t>T.Extreme</a:t>
+            </a:r>
+            <a:r>
+              <a:rPr lang="en-GB" sz="1200" b="0" i="0" dirty="0">
+                <a:solidFill>
+                  <a:srgbClr val="3B3B3B"/>
+                </a:solidFill>
+                <a:effectLst/>
+                <a:latin typeface="Menlo" panose="020B0609030804020204" pitchFamily="49" charset="0"/>
+              </a:rPr>
+              <a:t>] 0.2143 0.029 7.285 0.000 0.157 0.272 C(</a:t>
+            </a:r>
+            <a:r>
+              <a:rPr lang="en-GB" sz="1200" b="0" i="0" dirty="0" err="1">
+                <a:solidFill>
+                  <a:srgbClr val="3B3B3B"/>
+                </a:solidFill>
+                <a:effectLst/>
+                <a:latin typeface="Menlo" panose="020B0609030804020204" pitchFamily="49" charset="0"/>
+              </a:rPr>
+              <a:t>tv_product</a:t>
+            </a:r>
+            <a:r>
+              <a:rPr lang="en-GB" sz="1200" b="0" i="0" dirty="0">
+                <a:solidFill>
+                  <a:srgbClr val="3B3B3B"/>
+                </a:solidFill>
+                <a:effectLst/>
+                <a:latin typeface="Menlo" panose="020B0609030804020204" pitchFamily="49" charset="0"/>
+              </a:rPr>
+              <a:t>)[</a:t>
+            </a:r>
+            <a:r>
+              <a:rPr lang="en-GB" sz="1200" b="0" i="0" dirty="0" err="1">
+                <a:solidFill>
+                  <a:srgbClr val="3B3B3B"/>
+                </a:solidFill>
+                <a:effectLst/>
+                <a:latin typeface="Menlo" panose="020B0609030804020204" pitchFamily="49" charset="0"/>
+              </a:rPr>
+              <a:t>T.Low</a:t>
+            </a:r>
+            <a:r>
+              <a:rPr lang="en-GB" sz="1200" b="0" i="0" dirty="0">
+                <a:solidFill>
+                  <a:srgbClr val="3B3B3B"/>
+                </a:solidFill>
+                <a:effectLst/>
+                <a:latin typeface="Menlo" panose="020B0609030804020204" pitchFamily="49" charset="0"/>
+              </a:rPr>
+              <a:t>] -0.0449 0.028 -1.594 0.111 -0.100 0.010 C(</a:t>
+            </a:r>
+            <a:r>
+              <a:rPr lang="en-GB" sz="1200" b="0" i="0" dirty="0" err="1">
+                <a:solidFill>
+                  <a:srgbClr val="3B3B3B"/>
+                </a:solidFill>
+                <a:effectLst/>
+                <a:latin typeface="Menlo" panose="020B0609030804020204" pitchFamily="49" charset="0"/>
+              </a:rPr>
+              <a:t>tv_product</a:t>
+            </a:r>
+            <a:r>
+              <a:rPr lang="en-GB" sz="1200" b="0" i="0" dirty="0">
+                <a:solidFill>
+                  <a:srgbClr val="3B3B3B"/>
+                </a:solidFill>
+                <a:effectLst/>
+                <a:latin typeface="Menlo" panose="020B0609030804020204" pitchFamily="49" charset="0"/>
+              </a:rPr>
+              <a:t>)[</a:t>
+            </a:r>
+            <a:r>
+              <a:rPr lang="en-GB" sz="1200" b="0" i="0" dirty="0" err="1">
+                <a:solidFill>
+                  <a:srgbClr val="3B3B3B"/>
+                </a:solidFill>
+                <a:effectLst/>
+                <a:latin typeface="Menlo" panose="020B0609030804020204" pitchFamily="49" charset="0"/>
+              </a:rPr>
+              <a:t>T.Medium</a:t>
+            </a:r>
+            <a:r>
+              <a:rPr lang="en-GB" sz="1200" b="0" i="0" dirty="0">
+                <a:solidFill>
+                  <a:srgbClr val="3B3B3B"/>
+                </a:solidFill>
+                <a:effectLst/>
+                <a:latin typeface="Menlo" panose="020B0609030804020204" pitchFamily="49" charset="0"/>
+              </a:rPr>
+              <a:t>] -0.0436 0.029 -1.509 0.131 -0.100 0.013 C(</a:t>
+            </a:r>
+            <a:r>
+              <a:rPr lang="en-GB" sz="1200" b="0" i="0" dirty="0" err="1">
+                <a:solidFill>
+                  <a:srgbClr val="3B3B3B"/>
+                </a:solidFill>
+                <a:effectLst/>
+                <a:latin typeface="Menlo" panose="020B0609030804020204" pitchFamily="49" charset="0"/>
+              </a:rPr>
+              <a:t>tv_product</a:t>
+            </a:r>
+            <a:r>
+              <a:rPr lang="en-GB" sz="1200" b="0" i="0" dirty="0">
+                <a:solidFill>
+                  <a:srgbClr val="3B3B3B"/>
+                </a:solidFill>
+                <a:effectLst/>
+                <a:latin typeface="Menlo" panose="020B0609030804020204" pitchFamily="49" charset="0"/>
+              </a:rPr>
+              <a:t>)[</a:t>
+            </a:r>
+            <a:r>
+              <a:rPr lang="en-GB" sz="1200" b="0" i="0" dirty="0" err="1">
+                <a:solidFill>
+                  <a:srgbClr val="3B3B3B"/>
+                </a:solidFill>
+                <a:effectLst/>
+                <a:latin typeface="Menlo" panose="020B0609030804020204" pitchFamily="49" charset="0"/>
+              </a:rPr>
+              <a:t>T.no_product</a:t>
+            </a:r>
+            <a:r>
+              <a:rPr lang="en-GB" sz="1200" b="0" i="0" dirty="0">
+                <a:solidFill>
+                  <a:srgbClr val="3B3B3B"/>
+                </a:solidFill>
+                <a:effectLst/>
+                <a:latin typeface="Menlo" panose="020B0609030804020204" pitchFamily="49" charset="0"/>
+              </a:rPr>
+              <a:t>] 0.2225 0.029 7.772 0.000 0.166 0.279 C(</a:t>
+            </a:r>
+            <a:r>
+              <a:rPr lang="en-GB" sz="1200" b="0" i="0" dirty="0" err="1">
+                <a:solidFill>
+                  <a:srgbClr val="3B3B3B"/>
+                </a:solidFill>
+                <a:effectLst/>
+                <a:latin typeface="Menlo" panose="020B0609030804020204" pitchFamily="49" charset="0"/>
+              </a:rPr>
+              <a:t>mobile_product</a:t>
+            </a:r>
+            <a:r>
+              <a:rPr lang="en-GB" sz="1200" b="0" i="0" dirty="0">
+                <a:solidFill>
+                  <a:srgbClr val="3B3B3B"/>
+                </a:solidFill>
+                <a:effectLst/>
+                <a:latin typeface="Menlo" panose="020B0609030804020204" pitchFamily="49" charset="0"/>
+              </a:rPr>
+              <a:t>)[</a:t>
+            </a:r>
+            <a:r>
+              <a:rPr lang="en-GB" sz="1200" b="0" i="0" dirty="0" err="1">
+                <a:solidFill>
+                  <a:srgbClr val="3B3B3B"/>
+                </a:solidFill>
+                <a:effectLst/>
+                <a:latin typeface="Menlo" panose="020B0609030804020204" pitchFamily="49" charset="0"/>
+              </a:rPr>
+              <a:t>T.Low</a:t>
+            </a:r>
+            <a:r>
+              <a:rPr lang="en-GB" sz="1200" b="0" i="0" dirty="0">
+                <a:solidFill>
+                  <a:srgbClr val="3B3B3B"/>
+                </a:solidFill>
+                <a:effectLst/>
+                <a:latin typeface="Menlo" panose="020B0609030804020204" pitchFamily="49" charset="0"/>
+              </a:rPr>
+              <a:t>] 0.0261 0.023 1.143 0.253 -0.019 0.071 C(</a:t>
+            </a:r>
+            <a:r>
+              <a:rPr lang="en-GB" sz="1200" b="0" i="0" dirty="0" err="1">
+                <a:solidFill>
+                  <a:srgbClr val="3B3B3B"/>
+                </a:solidFill>
+                <a:effectLst/>
+                <a:latin typeface="Menlo" panose="020B0609030804020204" pitchFamily="49" charset="0"/>
+              </a:rPr>
+              <a:t>mobile_product</a:t>
+            </a:r>
+            <a:r>
+              <a:rPr lang="en-GB" sz="1200" b="0" i="0" dirty="0">
+                <a:solidFill>
+                  <a:srgbClr val="3B3B3B"/>
+                </a:solidFill>
+                <a:effectLst/>
+                <a:latin typeface="Menlo" panose="020B0609030804020204" pitchFamily="49" charset="0"/>
+              </a:rPr>
+              <a:t>)[</a:t>
+            </a:r>
+            <a:r>
+              <a:rPr lang="en-GB" sz="1200" b="0" i="0" dirty="0" err="1">
+                <a:solidFill>
+                  <a:srgbClr val="3B3B3B"/>
+                </a:solidFill>
+                <a:effectLst/>
+                <a:latin typeface="Menlo" panose="020B0609030804020204" pitchFamily="49" charset="0"/>
+              </a:rPr>
+              <a:t>T.Medium</a:t>
+            </a:r>
+            <a:r>
+              <a:rPr lang="en-GB" sz="1200" b="0" i="0" dirty="0">
+                <a:solidFill>
+                  <a:srgbClr val="3B3B3B"/>
+                </a:solidFill>
+                <a:effectLst/>
+                <a:latin typeface="Menlo" panose="020B0609030804020204" pitchFamily="49" charset="0"/>
+              </a:rPr>
+              <a:t>] -0.0040 0.024 -0.168 0.867 -0.050 0.043 C(</a:t>
+            </a:r>
+            <a:r>
+              <a:rPr lang="en-GB" sz="1200" b="0" i="0" dirty="0" err="1">
+                <a:solidFill>
+                  <a:srgbClr val="3B3B3B"/>
+                </a:solidFill>
+                <a:effectLst/>
+                <a:latin typeface="Menlo" panose="020B0609030804020204" pitchFamily="49" charset="0"/>
+              </a:rPr>
+              <a:t>mobile_product</a:t>
+            </a:r>
+            <a:r>
+              <a:rPr lang="en-GB" sz="1200" b="0" i="0" dirty="0">
+                <a:solidFill>
+                  <a:srgbClr val="3B3B3B"/>
+                </a:solidFill>
+                <a:effectLst/>
+                <a:latin typeface="Menlo" panose="020B0609030804020204" pitchFamily="49" charset="0"/>
+              </a:rPr>
+              <a:t>)[</a:t>
+            </a:r>
+            <a:r>
+              <a:rPr lang="en-GB" sz="1200" b="0" i="0" dirty="0" err="1">
+                <a:solidFill>
+                  <a:srgbClr val="3B3B3B"/>
+                </a:solidFill>
+                <a:effectLst/>
+                <a:latin typeface="Menlo" panose="020B0609030804020204" pitchFamily="49" charset="0"/>
+              </a:rPr>
+              <a:t>T.no_product</a:t>
+            </a:r>
+            <a:r>
+              <a:rPr lang="en-GB" sz="1200" b="0" i="0" dirty="0">
+                <a:solidFill>
+                  <a:srgbClr val="3B3B3B"/>
+                </a:solidFill>
+                <a:effectLst/>
+                <a:latin typeface="Menlo" panose="020B0609030804020204" pitchFamily="49" charset="0"/>
+              </a:rPr>
+              <a:t>] 0.3365 0.022 15.325 0.000 0.294 0.380 C(commune)[</a:t>
+            </a:r>
+            <a:r>
+              <a:rPr lang="en-GB" sz="1200" b="0" i="0" dirty="0" err="1">
+                <a:solidFill>
+                  <a:srgbClr val="3B3B3B"/>
+                </a:solidFill>
+                <a:effectLst/>
+                <a:latin typeface="Menlo" panose="020B0609030804020204" pitchFamily="49" charset="0"/>
+              </a:rPr>
+              <a:t>T.urban</a:t>
+            </a:r>
+            <a:r>
+              <a:rPr lang="en-GB" sz="1200" b="0" i="0" dirty="0">
+                <a:solidFill>
+                  <a:srgbClr val="3B3B3B"/>
+                </a:solidFill>
+                <a:effectLst/>
+                <a:latin typeface="Menlo" panose="020B0609030804020204" pitchFamily="49" charset="0"/>
+              </a:rPr>
+              <a:t>] 0.3142 0.017 18.694 0.000 0.281 0.347 </a:t>
+            </a:r>
+            <a:r>
+              <a:rPr lang="en-GB" sz="1200" b="0" i="0" dirty="0" err="1">
+                <a:solidFill>
+                  <a:srgbClr val="3B3B3B"/>
+                </a:solidFill>
+                <a:effectLst/>
+                <a:latin typeface="Menlo" panose="020B0609030804020204" pitchFamily="49" charset="0"/>
+              </a:rPr>
+              <a:t>has_booster</a:t>
+            </a:r>
+            <a:r>
+              <a:rPr lang="en-GB" sz="1200" b="0" i="0" dirty="0">
+                <a:solidFill>
+                  <a:srgbClr val="3B3B3B"/>
+                </a:solidFill>
+                <a:effectLst/>
+                <a:latin typeface="Menlo" panose="020B0609030804020204" pitchFamily="49" charset="0"/>
+              </a:rPr>
+              <a:t> -0.0155 0.062 -0.250 0.802 -0.137 0.106 </a:t>
+            </a:r>
+            <a:r>
+              <a:rPr lang="en-GB" sz="1200" b="0" i="0" dirty="0" err="1">
+                <a:solidFill>
+                  <a:srgbClr val="3B3B3B"/>
+                </a:solidFill>
+                <a:effectLst/>
+                <a:latin typeface="Menlo" panose="020B0609030804020204" pitchFamily="49" charset="0"/>
+              </a:rPr>
+              <a:t>has_booster:C</a:t>
+            </a:r>
+            <a:r>
+              <a:rPr lang="en-GB" sz="1200" b="0" i="0" dirty="0">
+                <a:solidFill>
+                  <a:srgbClr val="3B3B3B"/>
+                </a:solidFill>
+                <a:effectLst/>
+                <a:latin typeface="Menlo" panose="020B0609030804020204" pitchFamily="49" charset="0"/>
+              </a:rPr>
+              <a:t>(</a:t>
+            </a:r>
+            <a:r>
+              <a:rPr lang="en-GB" sz="1200" b="0" i="0" dirty="0" err="1">
+                <a:solidFill>
+                  <a:srgbClr val="3B3B3B"/>
+                </a:solidFill>
+                <a:effectLst/>
+                <a:latin typeface="Menlo" panose="020B0609030804020204" pitchFamily="49" charset="0"/>
+              </a:rPr>
+              <a:t>internet_usage</a:t>
+            </a:r>
+            <a:r>
+              <a:rPr lang="en-GB" sz="1200" b="0" i="0" dirty="0">
+                <a:solidFill>
+                  <a:srgbClr val="3B3B3B"/>
+                </a:solidFill>
+                <a:effectLst/>
+                <a:latin typeface="Menlo" panose="020B0609030804020204" pitchFamily="49" charset="0"/>
+              </a:rPr>
+              <a:t>)[</a:t>
+            </a:r>
+            <a:r>
+              <a:rPr lang="en-GB" sz="1200" b="0" i="0" dirty="0" err="1">
+                <a:solidFill>
+                  <a:srgbClr val="3B3B3B"/>
+                </a:solidFill>
+                <a:effectLst/>
+                <a:latin typeface="Menlo" panose="020B0609030804020204" pitchFamily="49" charset="0"/>
+              </a:rPr>
+              <a:t>T.Medium</a:t>
+            </a:r>
+            <a:r>
+              <a:rPr lang="en-GB" sz="1200" b="0" i="0" dirty="0">
+                <a:solidFill>
+                  <a:srgbClr val="3B3B3B"/>
+                </a:solidFill>
+                <a:effectLst/>
+                <a:latin typeface="Menlo" panose="020B0609030804020204" pitchFamily="49" charset="0"/>
+              </a:rPr>
+              <a:t>] 0.0563 0.073 0.769 0.442 -0.087 0.200 </a:t>
+            </a:r>
+            <a:r>
+              <a:rPr lang="en-GB" sz="1200" b="0" i="0" dirty="0" err="1">
+                <a:solidFill>
+                  <a:srgbClr val="3B3B3B"/>
+                </a:solidFill>
+                <a:effectLst/>
+                <a:latin typeface="Menlo" panose="020B0609030804020204" pitchFamily="49" charset="0"/>
+              </a:rPr>
+              <a:t>has_booster:C</a:t>
+            </a:r>
+            <a:r>
+              <a:rPr lang="en-GB" sz="1200" b="0" i="0" dirty="0">
+                <a:solidFill>
+                  <a:srgbClr val="3B3B3B"/>
+                </a:solidFill>
+                <a:effectLst/>
+                <a:latin typeface="Menlo" panose="020B0609030804020204" pitchFamily="49" charset="0"/>
+              </a:rPr>
+              <a:t>(</a:t>
+            </a:r>
+            <a:r>
+              <a:rPr lang="en-GB" sz="1200" b="0" i="0" dirty="0" err="1">
+                <a:solidFill>
+                  <a:srgbClr val="3B3B3B"/>
+                </a:solidFill>
+                <a:effectLst/>
+                <a:latin typeface="Menlo" panose="020B0609030804020204" pitchFamily="49" charset="0"/>
+              </a:rPr>
+              <a:t>internet_usage</a:t>
+            </a:r>
+            <a:r>
+              <a:rPr lang="en-GB" sz="1200" b="0" i="0" dirty="0">
+                <a:solidFill>
+                  <a:srgbClr val="3B3B3B"/>
+                </a:solidFill>
+                <a:effectLst/>
+                <a:latin typeface="Menlo" panose="020B0609030804020204" pitchFamily="49" charset="0"/>
+              </a:rPr>
+              <a:t>)[</a:t>
+            </a:r>
+            <a:r>
+              <a:rPr lang="en-GB" sz="1200" b="0" i="0" dirty="0" err="1">
+                <a:solidFill>
+                  <a:srgbClr val="3B3B3B"/>
+                </a:solidFill>
+                <a:effectLst/>
+                <a:latin typeface="Menlo" panose="020B0609030804020204" pitchFamily="49" charset="0"/>
+              </a:rPr>
+              <a:t>T.High</a:t>
+            </a:r>
+            <a:r>
+              <a:rPr lang="en-GB" sz="1200" b="0" i="0" dirty="0">
+                <a:solidFill>
+                  <a:srgbClr val="3B3B3B"/>
+                </a:solidFill>
+                <a:effectLst/>
+                <a:latin typeface="Menlo" panose="020B0609030804020204" pitchFamily="49" charset="0"/>
+              </a:rPr>
+              <a:t>] 0.0160 0.071 0.224 0.823 -0.124 0.156 </a:t>
+            </a:r>
+            <a:r>
+              <a:rPr lang="en-GB" sz="1200" b="0" i="0" dirty="0" err="1">
+                <a:solidFill>
+                  <a:srgbClr val="3B3B3B"/>
+                </a:solidFill>
+                <a:effectLst/>
+                <a:latin typeface="Menlo" panose="020B0609030804020204" pitchFamily="49" charset="0"/>
+              </a:rPr>
+              <a:t>has_booster:C</a:t>
+            </a:r>
+            <a:r>
+              <a:rPr lang="en-GB" sz="1200" b="0" i="0" dirty="0">
+                <a:solidFill>
+                  <a:srgbClr val="3B3B3B"/>
+                </a:solidFill>
+                <a:effectLst/>
+                <a:latin typeface="Menlo" panose="020B0609030804020204" pitchFamily="49" charset="0"/>
+              </a:rPr>
+              <a:t>(</a:t>
+            </a:r>
+            <a:r>
+              <a:rPr lang="en-GB" sz="1200" b="0" i="0" dirty="0" err="1">
+                <a:solidFill>
+                  <a:srgbClr val="3B3B3B"/>
+                </a:solidFill>
+                <a:effectLst/>
+                <a:latin typeface="Menlo" panose="020B0609030804020204" pitchFamily="49" charset="0"/>
+              </a:rPr>
+              <a:t>internet_usage</a:t>
+            </a:r>
+            <a:r>
+              <a:rPr lang="en-GB" sz="1200" b="0" i="0" dirty="0">
+                <a:solidFill>
+                  <a:srgbClr val="3B3B3B"/>
+                </a:solidFill>
+                <a:effectLst/>
+                <a:latin typeface="Menlo" panose="020B0609030804020204" pitchFamily="49" charset="0"/>
+              </a:rPr>
+              <a:t>)[</a:t>
+            </a:r>
+            <a:r>
+              <a:rPr lang="en-GB" sz="1200" b="0" i="0" dirty="0" err="1">
+                <a:solidFill>
+                  <a:srgbClr val="3B3B3B"/>
+                </a:solidFill>
+                <a:effectLst/>
+                <a:latin typeface="Menlo" panose="020B0609030804020204" pitchFamily="49" charset="0"/>
+              </a:rPr>
+              <a:t>T.Extreme</a:t>
+            </a:r>
+            <a:r>
+              <a:rPr lang="en-GB" sz="1200" b="0" i="0" dirty="0">
+                <a:solidFill>
+                  <a:srgbClr val="3B3B3B"/>
+                </a:solidFill>
+                <a:effectLst/>
+                <a:latin typeface="Menlo" panose="020B0609030804020204" pitchFamily="49" charset="0"/>
+              </a:rPr>
+              <a:t>] -0.5502 0.076 -7.278 0.000 -0.698 -0.402 age -0.0048 0.000 -11.939 0.000 -0.006 -0.004 tenure 0.0021 0.000 4.241 0.000 0.001 0.003 ============================================================================================================</a:t>
+            </a:r>
+            <a:endParaRPr lang="en-CZ" sz="1200" dirty="0"/>
+          </a:p>
+        </p:txBody>
+      </p:sp>
+    </p:spTree>
+    <p:extLst>
+      <p:ext uri="{BB962C8B-B14F-4D97-AF65-F5344CB8AC3E}">
+        <p14:creationId xmlns:p14="http://schemas.microsoft.com/office/powerpoint/2010/main" val="3885061055"/>
+      </p:ext>
+    </p:extLst>
+  </p:cSld>
+  <p:clrMapOvr>
+    <a:masterClrMapping/>
+  </p:clrMapOvr>
+</p:sld>
+</file>
+
+<file path=ppt/slides/slide21.xml><?xml version="1.0" encoding="utf-8"?>
+<p:sld xmlns:a="http://schemas.openxmlformats.org/drawingml/2006/main" xmlns:r="http://schemas.openxmlformats.org/officeDocument/2006/relationships" xmlns:p="http://schemas.openxmlformats.org/presentationml/2006/main">
+  <p:cSld>
+    <p:spTree>
+      <p:nvGrpSpPr>
+        <p:cNvPr id="1" name=""/>
+        <p:cNvGrpSpPr/>
+        <p:nvPr/>
+      </p:nvGrpSpPr>
+      <p:grpSpPr>
+        <a:xfrm>
+          <a:off x="0" y="0"/>
+          <a:ext cx="0" cy="0"/>
+          <a:chOff x="0" y="0"/>
+          <a:chExt cx="0" cy="0"/>
+        </a:xfrm>
+      </p:grpSpPr>
+    </p:spTree>
+    <p:extLst>
+      <p:ext uri="{BB962C8B-B14F-4D97-AF65-F5344CB8AC3E}">
+        <p14:creationId xmlns:p14="http://schemas.microsoft.com/office/powerpoint/2010/main" val="3841146111"/>
+      </p:ext>
+    </p:extLst>
+  </p:cSld>
+  <p:clrMapOvr>
+    <a:masterClrMapping/>
+  </p:clrMapOvr>
+</p:sld>
+</file>
+
 <file path=ppt/slides/slide3.xml><?xml version="1.0" encoding="utf-8"?>
 <p:sld xmlns:a="http://schemas.openxmlformats.org/drawingml/2006/main" xmlns:r="http://schemas.openxmlformats.org/officeDocument/2006/relationships" xmlns:p="http://schemas.openxmlformats.org/presentationml/2006/main">
   <p:cSld>
@@ -28203,7 +34339,7 @@
           <a:p>
             <a:fld id="{822B4C34-8539-4A47-8763-AA072889AAA3}" type="datetime1">
               <a:rPr lang="en-GB" smtClean="0"/>
-              <a:t>17/06/2026</a:t>
+              <a:t>18/06/2026</a:t>
             </a:fld>
             <a:endParaRPr lang="en-GB" dirty="0"/>
           </a:p>
@@ -28331,7 +34467,7 @@
         </p:blipFill>
         <p:spPr>
           <a:xfrm>
-            <a:off x="1847528" y="1484784"/>
+            <a:off x="2026450" y="1484784"/>
             <a:ext cx="7772400" cy="2597956"/>
           </a:xfrm>
           <a:prstGeom prst="rect">
@@ -28339,6 +34475,419 @@
           </a:prstGeom>
         </p:spPr>
       </p:pic>
+      <p:graphicFrame>
+        <p:nvGraphicFramePr>
+          <p:cNvPr id="6" name="Table 5">
+            <a:extLst>
+              <a:ext uri="{FF2B5EF4-FFF2-40B4-BE49-F238E27FC236}">
+                <a16:creationId xmlns:a16="http://schemas.microsoft.com/office/drawing/2014/main" id="{048A7E90-3CC2-989B-9B5D-E58A4C2164E5}"/>
+              </a:ext>
+            </a:extLst>
+          </p:cNvPr>
+          <p:cNvGraphicFramePr>
+            <a:graphicFrameLocks noGrp="1"/>
+          </p:cNvGraphicFramePr>
+          <p:nvPr>
+            <p:extLst>
+              <p:ext uri="{D42A27DB-BD31-4B8C-83A1-F6EECF244321}">
+                <p14:modId xmlns:p14="http://schemas.microsoft.com/office/powerpoint/2010/main" val="3053684165"/>
+              </p:ext>
+            </p:extLst>
+          </p:nvPr>
+        </p:nvGraphicFramePr>
+        <p:xfrm>
+          <a:off x="1199456" y="4440724"/>
+          <a:ext cx="9719999" cy="1477323"/>
+        </p:xfrm>
+        <a:graphic>
+          <a:graphicData uri="http://schemas.openxmlformats.org/drawingml/2006/table">
+            <a:tbl>
+              <a:tblPr/>
+              <a:tblGrid>
+                <a:gridCol w="2407384">
+                  <a:extLst>
+                    <a:ext uri="{9D8B030D-6E8A-4147-A177-3AD203B41FA5}">
+                      <a16:colId xmlns:a16="http://schemas.microsoft.com/office/drawing/2014/main" val="312666402"/>
+                    </a:ext>
+                  </a:extLst>
+                </a:gridCol>
+                <a:gridCol w="2346026">
+                  <a:extLst>
+                    <a:ext uri="{9D8B030D-6E8A-4147-A177-3AD203B41FA5}">
+                      <a16:colId xmlns:a16="http://schemas.microsoft.com/office/drawing/2014/main" val="2232484536"/>
+                    </a:ext>
+                  </a:extLst>
+                </a:gridCol>
+                <a:gridCol w="4966589">
+                  <a:extLst>
+                    <a:ext uri="{9D8B030D-6E8A-4147-A177-3AD203B41FA5}">
+                      <a16:colId xmlns:a16="http://schemas.microsoft.com/office/drawing/2014/main" val="3167786007"/>
+                    </a:ext>
+                  </a:extLst>
+                </a:gridCol>
+              </a:tblGrid>
+              <a:tr h="229144">
+                <a:tc>
+                  <a:txBody>
+                    <a:bodyPr/>
+                    <a:lstStyle/>
+                    <a:p>
+                      <a:r>
+                        <a:rPr lang="en-GB" sz="1200"/>
+                        <a:t>Method</a:t>
+                      </a:r>
+                    </a:p>
+                  </a:txBody>
+                  <a:tcPr anchor="ctr">
+                    <a:lnL>
+                      <a:noFill/>
+                    </a:lnL>
+                    <a:lnR>
+                      <a:noFill/>
+                    </a:lnR>
+                    <a:lnT>
+                      <a:noFill/>
+                    </a:lnT>
+                    <a:lnB>
+                      <a:noFill/>
+                    </a:lnB>
+                    <a:noFill/>
+                  </a:tcPr>
+                </a:tc>
+                <a:tc>
+                  <a:txBody>
+                    <a:bodyPr/>
+                    <a:lstStyle/>
+                    <a:p>
+                      <a:r>
+                        <a:rPr lang="en-GB" sz="1200"/>
+                        <a:t>Estimated reduction in churn</a:t>
+                      </a:r>
+                    </a:p>
+                  </a:txBody>
+                  <a:tcPr anchor="ctr">
+                    <a:lnL>
+                      <a:noFill/>
+                    </a:lnL>
+                    <a:lnR>
+                      <a:noFill/>
+                    </a:lnR>
+                    <a:lnT>
+                      <a:noFill/>
+                    </a:lnT>
+                    <a:lnB>
+                      <a:noFill/>
+                    </a:lnB>
+                    <a:noFill/>
+                  </a:tcPr>
+                </a:tc>
+                <a:tc>
+                  <a:txBody>
+                    <a:bodyPr/>
+                    <a:lstStyle/>
+                    <a:p>
+                      <a:r>
+                        <a:rPr lang="en-GB" sz="1200"/>
+                        <a:t>What it means</a:t>
+                      </a:r>
+                    </a:p>
+                  </a:txBody>
+                  <a:tcPr anchor="ctr">
+                    <a:lnL>
+                      <a:noFill/>
+                    </a:lnL>
+                    <a:lnR>
+                      <a:noFill/>
+                    </a:lnR>
+                    <a:lnT>
+                      <a:noFill/>
+                    </a:lnT>
+                    <a:lnB>
+                      <a:noFill/>
+                    </a:lnB>
+                    <a:noFill/>
+                  </a:tcPr>
+                </a:tc>
+                <a:extLst>
+                  <a:ext uri="{0D108BD9-81ED-4DB2-BD59-A6C34878D82A}">
+                    <a16:rowId xmlns:a16="http://schemas.microsoft.com/office/drawing/2014/main" val="3582693002"/>
+                  </a:ext>
+                </a:extLst>
+              </a:tr>
+              <a:tr h="401001">
+                <a:tc>
+                  <a:txBody>
+                    <a:bodyPr/>
+                    <a:lstStyle/>
+                    <a:p>
+                      <a:r>
+                        <a:rPr lang="en-GB" sz="1200" b="1"/>
+                        <a:t>Naive Comparison</a:t>
+                      </a:r>
+                      <a:endParaRPr lang="en-GB" sz="1200"/>
+                    </a:p>
+                  </a:txBody>
+                  <a:tcPr anchor="ctr">
+                    <a:lnL>
+                      <a:noFill/>
+                    </a:lnL>
+                    <a:lnR>
+                      <a:noFill/>
+                    </a:lnR>
+                    <a:lnT>
+                      <a:noFill/>
+                    </a:lnT>
+                    <a:lnB>
+                      <a:noFill/>
+                    </a:lnB>
+                    <a:noFill/>
+                  </a:tcPr>
+                </a:tc>
+                <a:tc>
+                  <a:txBody>
+                    <a:bodyPr/>
+                    <a:lstStyle/>
+                    <a:p>
+                      <a:r>
+                        <a:rPr lang="en-GB" sz="1200" b="1"/>
+                        <a:t>-2.0 pp</a:t>
+                      </a:r>
+                      <a:endParaRPr lang="en-GB" sz="1200"/>
+                    </a:p>
+                  </a:txBody>
+                  <a:tcPr anchor="ctr">
+                    <a:lnL>
+                      <a:noFill/>
+                    </a:lnL>
+                    <a:lnR>
+                      <a:noFill/>
+                    </a:lnR>
+                    <a:lnT>
+                      <a:noFill/>
+                    </a:lnT>
+                    <a:lnB>
+                      <a:noFill/>
+                    </a:lnB>
+                    <a:noFill/>
+                  </a:tcPr>
+                </a:tc>
+                <a:tc>
+                  <a:txBody>
+                    <a:bodyPr/>
+                    <a:lstStyle/>
+                    <a:p>
+                      <a:r>
+                        <a:rPr lang="en-GB" sz="1200"/>
+                        <a:t>Biased – heavier users self-select into the booster</a:t>
+                      </a:r>
+                    </a:p>
+                  </a:txBody>
+                  <a:tcPr anchor="ctr">
+                    <a:lnL>
+                      <a:noFill/>
+                    </a:lnL>
+                    <a:lnR>
+                      <a:noFill/>
+                    </a:lnR>
+                    <a:lnT>
+                      <a:noFill/>
+                    </a:lnT>
+                    <a:lnB>
+                      <a:noFill/>
+                    </a:lnB>
+                    <a:noFill/>
+                  </a:tcPr>
+                </a:tc>
+                <a:extLst>
+                  <a:ext uri="{0D108BD9-81ED-4DB2-BD59-A6C34878D82A}">
+                    <a16:rowId xmlns:a16="http://schemas.microsoft.com/office/drawing/2014/main" val="1281685266"/>
+                  </a:ext>
+                </a:extLst>
+              </a:tr>
+              <a:tr h="401001">
+                <a:tc>
+                  <a:txBody>
+                    <a:bodyPr/>
+                    <a:lstStyle/>
+                    <a:p>
+                      <a:r>
+                        <a:rPr lang="en-GB" sz="1200" b="1" dirty="0"/>
+                        <a:t>Logistic Regression (AME)</a:t>
+                      </a:r>
+                      <a:endParaRPr lang="en-GB" sz="1200" dirty="0"/>
+                    </a:p>
+                  </a:txBody>
+                  <a:tcPr anchor="ctr">
+                    <a:lnL>
+                      <a:noFill/>
+                    </a:lnL>
+                    <a:lnR>
+                      <a:noFill/>
+                    </a:lnR>
+                    <a:lnT>
+                      <a:noFill/>
+                    </a:lnT>
+                    <a:lnB>
+                      <a:noFill/>
+                    </a:lnB>
+                    <a:noFill/>
+                  </a:tcPr>
+                </a:tc>
+                <a:tc>
+                  <a:txBody>
+                    <a:bodyPr/>
+                    <a:lstStyle/>
+                    <a:p>
+                      <a:r>
+                        <a:rPr lang="en-GB" sz="1200" b="1"/>
+                        <a:t>-1.0 pp</a:t>
+                      </a:r>
+                      <a:endParaRPr lang="en-GB" sz="1200"/>
+                    </a:p>
+                  </a:txBody>
+                  <a:tcPr anchor="ctr">
+                    <a:lnL>
+                      <a:noFill/>
+                    </a:lnL>
+                    <a:lnR>
+                      <a:noFill/>
+                    </a:lnR>
+                    <a:lnT>
+                      <a:noFill/>
+                    </a:lnT>
+                    <a:lnB>
+                      <a:noFill/>
+                    </a:lnB>
+                    <a:noFill/>
+                  </a:tcPr>
+                </a:tc>
+                <a:tc>
+                  <a:txBody>
+                    <a:bodyPr/>
+                    <a:lstStyle/>
+                    <a:p>
+                      <a:r>
+                        <a:rPr lang="en-GB" sz="1200" dirty="0"/>
+                        <a:t>Controls for differences using a statistical model</a:t>
+                      </a:r>
+                    </a:p>
+                  </a:txBody>
+                  <a:tcPr anchor="ctr">
+                    <a:lnL>
+                      <a:noFill/>
+                    </a:lnL>
+                    <a:lnR>
+                      <a:noFill/>
+                    </a:lnR>
+                    <a:lnT>
+                      <a:noFill/>
+                    </a:lnT>
+                    <a:lnB>
+                      <a:noFill/>
+                    </a:lnB>
+                    <a:noFill/>
+                  </a:tcPr>
+                </a:tc>
+                <a:extLst>
+                  <a:ext uri="{0D108BD9-81ED-4DB2-BD59-A6C34878D82A}">
+                    <a16:rowId xmlns:a16="http://schemas.microsoft.com/office/drawing/2014/main" val="3164706805"/>
+                  </a:ext>
+                </a:extLst>
+              </a:tr>
+              <a:tr h="401001">
+                <a:tc>
+                  <a:txBody>
+                    <a:bodyPr/>
+                    <a:lstStyle/>
+                    <a:p>
+                      <a:r>
+                        <a:rPr lang="en-GB" sz="1200" b="1" dirty="0"/>
+                        <a:t>Digital Twins (PSM ATT)</a:t>
+                      </a:r>
+                      <a:endParaRPr lang="en-GB" sz="1200" dirty="0"/>
+                    </a:p>
+                  </a:txBody>
+                  <a:tcPr anchor="ctr">
+                    <a:lnL>
+                      <a:noFill/>
+                    </a:lnL>
+                    <a:lnR>
+                      <a:noFill/>
+                    </a:lnR>
+                    <a:lnT>
+                      <a:noFill/>
+                    </a:lnT>
+                    <a:lnB>
+                      <a:noFill/>
+                    </a:lnB>
+                    <a:noFill/>
+                  </a:tcPr>
+                </a:tc>
+                <a:tc>
+                  <a:txBody>
+                    <a:bodyPr/>
+                    <a:lstStyle/>
+                    <a:p>
+                      <a:r>
+                        <a:rPr lang="en-GB" sz="1200" b="1"/>
+                        <a:t>-1.6 pp</a:t>
+                      </a:r>
+                      <a:endParaRPr lang="en-GB" sz="1200"/>
+                    </a:p>
+                  </a:txBody>
+                  <a:tcPr anchor="ctr">
+                    <a:lnL>
+                      <a:noFill/>
+                    </a:lnL>
+                    <a:lnR>
+                      <a:noFill/>
+                    </a:lnR>
+                    <a:lnT>
+                      <a:noFill/>
+                    </a:lnT>
+                    <a:lnB>
+                      <a:noFill/>
+                    </a:lnB>
+                    <a:noFill/>
+                  </a:tcPr>
+                </a:tc>
+                <a:tc>
+                  <a:txBody>
+                    <a:bodyPr/>
+                    <a:lstStyle/>
+                    <a:p>
+                      <a:r>
+                        <a:rPr lang="en-GB" sz="1200" dirty="0"/>
+                        <a:t>Compares like-for-like customers (best causal proxy)</a:t>
+                      </a:r>
+                    </a:p>
+                  </a:txBody>
+                  <a:tcPr anchor="ctr">
+                    <a:lnL>
+                      <a:noFill/>
+                    </a:lnL>
+                    <a:lnR>
+                      <a:noFill/>
+                    </a:lnR>
+                    <a:lnT>
+                      <a:noFill/>
+                    </a:lnT>
+                    <a:lnB>
+                      <a:noFill/>
+                    </a:lnB>
+                    <a:noFill/>
+                  </a:tcPr>
+                </a:tc>
+                <a:extLst>
+                  <a:ext uri="{0D108BD9-81ED-4DB2-BD59-A6C34878D82A}">
+                    <a16:rowId xmlns:a16="http://schemas.microsoft.com/office/drawing/2014/main" val="3036267587"/>
+                  </a:ext>
+                </a:extLst>
+              </a:tr>
+            </a:tbl>
+          </a:graphicData>
+        </a:graphic>
+      </p:graphicFrame>
     </p:spTree>
     <p:extLst>
       <p:ext uri="{BB962C8B-B14F-4D97-AF65-F5344CB8AC3E}">
@@ -28427,7 +34976,7 @@
           <a:p>
             <a:fld id="{822B4C34-8539-4A47-8763-AA072889AAA3}" type="datetime1">
               <a:rPr lang="en-GB" smtClean="0"/>
-              <a:t>17/06/2026</a:t>
+              <a:t>18/06/2026</a:t>
             </a:fld>
             <a:endParaRPr lang="en-GB" dirty="0"/>
           </a:p>
@@ -28506,8 +35055,8 @@
         </p:nvSpPr>
         <p:spPr>
           <a:xfrm>
-            <a:off x="406800" y="5517232"/>
-            <a:ext cx="11011701" cy="369332"/>
+            <a:off x="2711340" y="5157192"/>
+            <a:ext cx="6769320" cy="369332"/>
           </a:xfrm>
           <a:prstGeom prst="rect">
             <a:avLst/>
@@ -28562,42 +35111,42 @@
           <p:nvPr>
             <p:extLst>
               <p:ext uri="{D42A27DB-BD31-4B8C-83A1-F6EECF244321}">
-                <p14:modId xmlns:p14="http://schemas.microsoft.com/office/powerpoint/2010/main" val="953099493"/>
+                <p14:modId xmlns:p14="http://schemas.microsoft.com/office/powerpoint/2010/main" val="236835117"/>
               </p:ext>
             </p:extLst>
           </p:nvPr>
         </p:nvGraphicFramePr>
         <p:xfrm>
-          <a:off x="3461551" y="2133296"/>
-          <a:ext cx="7990680" cy="2103120"/>
+          <a:off x="1250720" y="2348880"/>
+          <a:ext cx="9964744" cy="1828800"/>
         </p:xfrm>
         <a:graphic>
           <a:graphicData uri="http://schemas.openxmlformats.org/drawingml/2006/table">
             <a:tbl>
               <a:tblPr/>
               <a:tblGrid>
-                <a:gridCol w="1997670">
+                <a:gridCol w="2491186">
                   <a:extLst>
                     <a:ext uri="{9D8B030D-6E8A-4147-A177-3AD203B41FA5}">
                       <a16:colId xmlns:a16="http://schemas.microsoft.com/office/drawing/2014/main" val="4086756881"/>
                     </a:ext>
                   </a:extLst>
                 </a:gridCol>
-                <a:gridCol w="1997670">
+                <a:gridCol w="1541262">
                   <a:extLst>
                     <a:ext uri="{9D8B030D-6E8A-4147-A177-3AD203B41FA5}">
                       <a16:colId xmlns:a16="http://schemas.microsoft.com/office/drawing/2014/main" val="603415047"/>
                     </a:ext>
                   </a:extLst>
                 </a:gridCol>
-                <a:gridCol w="2167501">
+                <a:gridCol w="3652897">
                   <a:extLst>
                     <a:ext uri="{9D8B030D-6E8A-4147-A177-3AD203B41FA5}">
                       <a16:colId xmlns:a16="http://schemas.microsoft.com/office/drawing/2014/main" val="2754306448"/>
                     </a:ext>
                   </a:extLst>
                 </a:gridCol>
-                <a:gridCol w="1827839">
+                <a:gridCol w="2279399">
                   <a:extLst>
                     <a:ext uri="{9D8B030D-6E8A-4147-A177-3AD203B41FA5}">
                       <a16:colId xmlns:a16="http://schemas.microsoft.com/office/drawing/2014/main" val="3122914694"/>
@@ -29294,7 +35843,7 @@
           <a:p>
             <a:fld id="{822B4C34-8539-4A47-8763-AA072889AAA3}" type="datetime1">
               <a:rPr lang="en-GB" smtClean="0"/>
-              <a:t>17/06/2026</a:t>
+              <a:t>18/06/2026</a:t>
             </a:fld>
             <a:endParaRPr lang="en-GB" dirty="0"/>
           </a:p>
@@ -29476,7 +36025,7 @@
           <a:p>
             <a:fld id="{822B4C34-8539-4A47-8763-AA072889AAA3}" type="datetime1">
               <a:rPr lang="en-GB" smtClean="0"/>
-              <a:t>17/06/2026</a:t>
+              <a:t>18/06/2026</a:t>
             </a:fld>
             <a:endParaRPr lang="en-GB" dirty="0"/>
           </a:p>
@@ -30504,7 +37053,7 @@
           <a:p>
             <a:r>
               <a:rPr lang="en-US" dirty="0"/>
-              <a:t>Appendix</a:t>
+              <a:t>Appendix: EDA</a:t>
             </a:r>
             <a:endParaRPr lang="en-CH" dirty="0"/>
           </a:p>
@@ -31389,6 +37938,15 @@
 </file>
 
 <file path=customXml/item1.xml><?xml version="1.0" encoding="utf-8"?>
+<?mso-contentType ?>
+<FormTemplates xmlns="http://schemas.microsoft.com/sharepoint/v3/contenttype/forms">
+  <Display>DocumentLibraryForm</Display>
+  <Edit>DocumentLibraryForm</Edit>
+  <New>DocumentLibraryForm</New>
+</FormTemplates>
+</file>
+
+<file path=customXml/item2.xml><?xml version="1.0" encoding="utf-8"?>
 <ct:contentTypeSchema xmlns:ct="http://schemas.microsoft.com/office/2006/metadata/contentType" xmlns:ma="http://schemas.microsoft.com/office/2006/metadata/properties/metaAttributes" ct:_="" ma:_="" ma:contentTypeName="Dokument" ma:contentTypeID="0x0101007C3F629B479E684C98A115D743AE17AD" ma:contentTypeVersion="6" ma:contentTypeDescription="Ein neues Dokument erstellen." ma:contentTypeScope="" ma:versionID="54b9edd7663d60bb18de8a401c8ae558">
   <xsd:schema xmlns:xsd="http://www.w3.org/2001/XMLSchema" xmlns:xs="http://www.w3.org/2001/XMLSchema" xmlns:p="http://schemas.microsoft.com/office/2006/metadata/properties" xmlns:ns2="e8db6923-9182-43c2-a7ce-2531ce75c35a" xmlns:ns3="e38efed2-7168-4933-8783-d4c0cfbbf168" targetNamespace="http://schemas.microsoft.com/office/2006/metadata/properties" ma:root="true" ma:fieldsID="3f01319d051765709a6f928e8430e9e2" ns2:_="" ns3:_="">
     <xsd:import namespace="e8db6923-9182-43c2-a7ce-2531ce75c35a"/>
@@ -31565,15 +38123,6 @@
 </ct:contentTypeSchema>
 </file>
 
-<file path=customXml/item2.xml><?xml version="1.0" encoding="utf-8"?>
-<?mso-contentType ?>
-<FormTemplates xmlns="http://schemas.microsoft.com/sharepoint/v3/contenttype/forms">
-  <Display>DocumentLibraryForm</Display>
-  <Edit>DocumentLibraryForm</Edit>
-  <New>DocumentLibraryForm</New>
-</FormTemplates>
-</file>
-
 <file path=customXml/item3.xml><?xml version="1.0" encoding="utf-8"?>
 <p:properties xmlns:p="http://schemas.microsoft.com/office/2006/metadata/properties" xmlns:xsi="http://www.w3.org/2001/XMLSchema-instance" xmlns:pc="http://schemas.microsoft.com/office/infopath/2007/PartnerControls">
   <documentManagement/>
@@ -31581,6 +38130,14 @@
 </file>
 
 <file path=customXml/itemProps1.xml><?xml version="1.0" encoding="utf-8"?>
+<ds:datastoreItem xmlns:ds="http://schemas.openxmlformats.org/officeDocument/2006/customXml" ds:itemID="{3645C6B0-7992-4F59-918D-EC7DBE52C006}">
+  <ds:schemaRefs>
+    <ds:schemaRef ds:uri="http://schemas.microsoft.com/sharepoint/v3/contenttype/forms"/>
+  </ds:schemaRefs>
+</ds:datastoreItem>
+</file>
+
+<file path=customXml/itemProps2.xml><?xml version="1.0" encoding="utf-8"?>
 <ds:datastoreItem xmlns:ds="http://schemas.openxmlformats.org/officeDocument/2006/customXml" ds:itemID="{96758CFF-ECE1-4BC0-9EC3-9F9F0BA7FB40}">
   <ds:schemaRefs>
     <ds:schemaRef ds:uri="http://schemas.microsoft.com/office/2006/metadata/contentType"/>
@@ -31595,14 +38152,6 @@
     <ds:schemaRef ds:uri="http://purl.org/dc/elements/1.1/"/>
     <ds:schemaRef ds:uri="http://purl.org/dc/terms/"/>
     <ds:schemaRef ds:uri="http://schemas.microsoft.com/internal/obd"/>
-  </ds:schemaRefs>
-</ds:datastoreItem>
-</file>
-
-<file path=customXml/itemProps2.xml><?xml version="1.0" encoding="utf-8"?>
-<ds:datastoreItem xmlns:ds="http://schemas.openxmlformats.org/officeDocument/2006/customXml" ds:itemID="{3645C6B0-7992-4F59-918D-EC7DBE52C006}">
-  <ds:schemaRefs>
-    <ds:schemaRef ds:uri="http://schemas.microsoft.com/sharepoint/v3/contenttype/forms"/>
   </ds:schemaRefs>
 </ds:datastoreItem>
 </file>
